--- a/docs/PERCH_Project_Review.pptx
+++ b/docs/PERCH_Project_Review.pptx
@@ -9496,14 +9496,14 @@
               <a:buChar char="•"/>
             </a:pPr>
             <a:r>
-              <a:rPr lang="en-US" sz="1050" b="1" dirty="0">
+              <a:rPr lang="en-US" sz="900" b="1" dirty="0">
                 <a:latin typeface="Times New Roman" panose="02020603050405020304" pitchFamily="18" charset="0"/>
                 <a:cs typeface="Times New Roman" panose="02020603050405020304" pitchFamily="18" charset="0"/>
               </a:rPr>
               <a:t>Highlight AI</a:t>
             </a:r>
             <a:r>
-              <a:rPr lang="en-US" sz="1050" b="0" dirty="0">
+              <a:rPr lang="en-US" sz="900" b="0" dirty="0">
                 <a:latin typeface="Times New Roman" panose="02020603050405020304" pitchFamily="18" charset="0"/>
                 <a:cs typeface="Times New Roman" panose="02020603050405020304" pitchFamily="18" charset="0"/>
               </a:rPr>
@@ -9516,14 +9516,14 @@
               <a:buChar char="•"/>
             </a:pPr>
             <a:r>
-              <a:rPr lang="en-US" sz="1050" b="1" dirty="0">
+              <a:rPr lang="en-US" sz="900" b="1" dirty="0">
                 <a:latin typeface="Times New Roman" panose="02020603050405020304" pitchFamily="18" charset="0"/>
                 <a:cs typeface="Times New Roman" panose="02020603050405020304" pitchFamily="18" charset="0"/>
               </a:rPr>
               <a:t>Microsoft Windows AI Platform</a:t>
             </a:r>
             <a:r>
-              <a:rPr lang="en-US" sz="1050" b="0" dirty="0">
+              <a:rPr lang="en-US" sz="900" b="0" dirty="0">
                 <a:latin typeface="Times New Roman" panose="02020603050405020304" pitchFamily="18" charset="0"/>
                 <a:cs typeface="Times New Roman" panose="02020603050405020304" pitchFamily="18" charset="0"/>
               </a:rPr>
@@ -9536,18 +9536,18 @@
               <a:buChar char="•"/>
             </a:pPr>
             <a:r>
-              <a:rPr lang="en-US" sz="1050" b="1" dirty="0">
+              <a:rPr lang="en-US" sz="900" b="1" dirty="0">
                 <a:latin typeface="Times New Roman" panose="02020603050405020304" pitchFamily="18" charset="0"/>
                 <a:cs typeface="Times New Roman" panose="02020603050405020304" pitchFamily="18" charset="0"/>
               </a:rPr>
               <a:t>Raycast AI, Apple Intelligence, Dottie, BoltAI</a:t>
             </a:r>
             <a:r>
-              <a:rPr lang="en-US" sz="1050" b="0" dirty="0">
-                <a:latin typeface="Times New Roman" panose="02020603050405020304" pitchFamily="18" charset="0"/>
-                <a:cs typeface="Times New Roman" panose="02020603050405020304" pitchFamily="18" charset="0"/>
-              </a:rPr>
-              <a:t> - the entire "best AI assistant" review category is a Mac category. None of these run on Windows.</a:t>
+              <a:rPr lang="en-US" sz="900" b="0" dirty="0">
+                <a:latin typeface="Times New Roman" panose="02020603050405020304" pitchFamily="18" charset="0"/>
+                <a:cs typeface="Times New Roman" panose="02020603050405020304" pitchFamily="18" charset="0"/>
+              </a:rPr>
+              <a:t> - the whole "best AI assistant" review category is a Mac category. None run on Windows.</a:t>
             </a:r>
           </a:p>
           <a:p>
@@ -9556,18 +9556,18 @@
               <a:buChar char="•"/>
             </a:pPr>
             <a:r>
-              <a:rPr lang="en-US" sz="1050" b="1" dirty="0">
+              <a:rPr lang="en-US" sz="900" b="1" dirty="0">
                 <a:latin typeface="Times New Roman" panose="02020603050405020304" pitchFamily="18" charset="0"/>
                 <a:cs typeface="Times New Roman" panose="02020603050405020304" pitchFamily="18" charset="0"/>
               </a:rPr>
               <a:t>Jan.ai (5.3M downloads), AnythingLLM, Khoj, PyGPT, Chatbox</a:t>
             </a:r>
             <a:r>
-              <a:rPr lang="en-US" sz="1050" b="0" dirty="0">
-                <a:latin typeface="Times New Roman" panose="02020603050405020304" pitchFamily="18" charset="0"/>
-                <a:cs typeface="Times New Roman" panose="02020603050405020304" pitchFamily="18" charset="0"/>
-              </a:rPr>
-              <a:t> - right philosophy, wrong shape. All local-capable and open, and every one is an application window you open.</a:t>
+              <a:rPr lang="en-US" sz="900" b="0" dirty="0">
+                <a:latin typeface="Times New Roman" panose="02020603050405020304" pitchFamily="18" charset="0"/>
+                <a:cs typeface="Times New Roman" panose="02020603050405020304" pitchFamily="18" charset="0"/>
+              </a:rPr>
+              <a:t> - the honest comparison, and better than the closed products on the axes they cover: genuinely local, genuinely open, real model choice. We are not claiming to beat them on any of that.</a:t>
             </a:r>
           </a:p>
           <a:p>
@@ -9576,18 +9576,38 @@
               <a:buChar char="•"/>
             </a:pPr>
             <a:r>
-              <a:rPr lang="en-US" sz="1050" b="1" dirty="0">
+              <a:rPr lang="en-US" sz="900" b="1" dirty="0">
+                <a:latin typeface="Times New Roman" panose="02020603050405020304" pitchFamily="18" charset="0"/>
+                <a:cs typeface="Times New Roman" panose="02020603050405020304" pitchFamily="18" charset="0"/>
+              </a:rPr>
+              <a:t>What they do not have is the context layer.</a:t>
+            </a:r>
+            <a:r>
+              <a:rPr lang="en-US" sz="900" b="0" dirty="0">
+                <a:latin typeface="Times New Roman" panose="02020603050405020304" pitchFamily="18" charset="0"/>
+                <a:cs typeface="Times New Roman" panose="02020603050405020304" pitchFamily="18" charset="0"/>
+              </a:rPr>
+              <a:t> They are destinations - you leave your PDF or IDE and go to their window. They store chat threads, not typed personal memory you author and import. And local-only is private, but it is not a policy: nothing ever asks whether this particular request may leave the machine.</a:t>
+            </a:r>
+          </a:p>
+          <a:p>
+            <a:pPr marL="171450" lvl="1" indent="-171450" algn="l">
+              <a:buFont typeface="Arial" panose="020B0604020202020204" pitchFamily="34" charset="0"/>
+              <a:buChar char="•"/>
+            </a:pPr>
+            <a:r>
+              <a:rPr lang="en-US" sz="900" b="1" dirty="0">
                 <a:latin typeface="Times New Roman" panose="02020603050405020304" pitchFamily="18" charset="0"/>
                 <a:cs typeface="Times New Roman" panose="02020603050405020304" pitchFamily="18" charset="0"/>
               </a:rPr>
               <a:t>The pattern:</a:t>
             </a:r>
             <a:r>
-              <a:rPr lang="en-US" sz="1050" b="0" dirty="0">
-                <a:latin typeface="Times New Roman" panose="02020603050405020304" pitchFamily="18" charset="0"/>
-                <a:cs typeface="Times New Roman" panose="02020603050405020304" pitchFamily="18" charset="0"/>
-              </a:rPr>
-              <a:t> tools that are OS-integrated are closed, cloud-only or hardware-gated. Tools that are local and open are destinations you have to visit.</a:t>
+              <a:rPr lang="en-US" sz="900" b="0" dirty="0">
+                <a:latin typeface="Times New Roman" panose="02020603050405020304" pitchFamily="18" charset="0"/>
+                <a:cs typeface="Times New Roman" panose="02020603050405020304" pitchFamily="18" charset="0"/>
+              </a:rPr>
+              <a:t> the tools that come to you are closed or vendor-locked; the tools that are open and local are windows you have to go to. Neither carries your context between them.</a:t>
             </a:r>
           </a:p>
         </p:txBody>
@@ -9835,7 +9855,7 @@
                 <a:cs typeface="Times New Roman" panose="02020603050405020304" pitchFamily="18" charset="0"/>
                 <a:sym typeface="Arial"/>
               </a:rPr>
-              <a:t>The Positioning Table - The Empty Row</a:t>
+              <a:t>The Positioning Table - Where We Actually Differ</a:t>
             </a:r>
           </a:p>
         </p:txBody>
@@ -10298,8 +10318,8 @@
           <p:nvPr/>
         </p:nvGraphicFramePr>
         <p:xfrm>
-          <a:off x="109728" y="457200"/>
-          <a:ext cx="4389114" cy="1463040"/>
+          <a:off x="109728" y="438912"/>
+          <a:ext cx="4389115" cy="1463040"/>
         </p:xfrm>
         <a:graphic>
           <a:graphicData uri="http://schemas.openxmlformats.org/drawingml/2006/table">
@@ -10308,14 +10328,14 @@
                 <a:tableStyleId>{5940675A-B579-460E-94D1-54222C63F5DA}</a:tableStyleId>
               </a:tblPr>
               <a:tblGrid>
-                <a:gridCol w="969264"/>
-                <a:gridCol w="488550"/>
-                <a:gridCol w="488550"/>
-                <a:gridCol w="488550"/>
-                <a:gridCol w="488550"/>
-                <a:gridCol w="488550"/>
-                <a:gridCol w="488550"/>
-                <a:gridCol w="488550"/>
+                <a:gridCol w="1133856"/>
+                <a:gridCol w="465037"/>
+                <a:gridCol w="465037"/>
+                <a:gridCol w="465037"/>
+                <a:gridCol w="465037"/>
+                <a:gridCol w="465037"/>
+                <a:gridCol w="465037"/>
+                <a:gridCol w="465037"/>
               </a:tblGrid>
               <a:tr h="274320">
                 <a:tc>
@@ -10345,7 +10365,19 @@
                           </a:solidFill>
                           <a:latin typeface="Times New Roman"/>
                         </a:rPr>
-                        <a:t>Windows</a:t>
+                        <a:t>Works inside</a:t>
+                      </a:r>
+                    </a:p>
+                    <a:p>
+                      <a:pPr algn="ctr"/>
+                      <a:r>
+                        <a:rPr sz="750" b="1">
+                          <a:solidFill>
+                            <a:srgbClr val="FFFFFF"/>
+                          </a:solidFill>
+                          <a:latin typeface="Times New Roman"/>
+                        </a:rPr>
+                        <a:t>other apps</a:t>
                       </a:r>
                     </a:p>
                   </a:txBody>
@@ -10368,7 +10400,7 @@
                           </a:solidFill>
                           <a:latin typeface="Times New Roman"/>
                         </a:rPr>
-                        <a:t>No special</a:t>
+                        <a:t>Memory</a:t>
                       </a:r>
                     </a:p>
                     <a:p>
@@ -10380,7 +10412,7 @@
                           </a:solidFill>
                           <a:latin typeface="Times New Roman"/>
                         </a:rPr>
-                        <a:t>hardware</a:t>
+                        <a:t>you own</a:t>
                       </a:r>
                     </a:p>
                   </a:txBody>
@@ -10403,7 +10435,7 @@
                           </a:solidFill>
                           <a:latin typeface="Times New Roman"/>
                         </a:rPr>
-                        <a:t>Local</a:t>
+                        <a:t>Imports your</a:t>
                       </a:r>
                     </a:p>
                     <a:p>
@@ -10415,7 +10447,7 @@
                           </a:solidFill>
                           <a:latin typeface="Times New Roman"/>
                         </a:rPr>
-                        <a:t>option</a:t>
+                        <a:t>AI history</a:t>
                       </a:r>
                     </a:p>
                   </a:txBody>
@@ -10438,7 +10470,7 @@
                           </a:solidFill>
                           <a:latin typeface="Times New Roman"/>
                         </a:rPr>
-                        <a:t>Cloud</a:t>
+                        <a:t>Local + cloud</a:t>
                       </a:r>
                     </a:p>
                     <a:p>
@@ -10473,7 +10505,7 @@
                           </a:solidFill>
                           <a:latin typeface="Times New Roman"/>
                         </a:rPr>
-                        <a:t>Selection</a:t>
+                        <a:t>Declared</a:t>
                       </a:r>
                     </a:p>
                     <a:p>
@@ -10485,42 +10517,7 @@
                           </a:solidFill>
                           <a:latin typeface="Times New Roman"/>
                         </a:rPr>
-                        <a:t>triggered</a:t>
-                      </a:r>
-                    </a:p>
-                  </a:txBody>
-                  <a:tcPr marL="20000" marR="20000" marT="9000" marB="9000">
-                    <a:solidFill>
-                      <a:srgbClr val="1F2A44"/>
-                    </a:solidFill>
-                  </a:tcPr>
-                </a:tc>
-                <a:tc>
-                  <a:txBody>
-                    <a:bodyPr/>
-                    <a:lstStyle/>
-                    <a:p>
-                      <a:pPr algn="ctr"/>
-                      <a:r>
-                        <a:rPr sz="750" b="1">
-                          <a:solidFill>
-                            <a:srgbClr val="FFFFFF"/>
-                          </a:solidFill>
-                          <a:latin typeface="Times New Roman"/>
-                        </a:rPr>
-                        <a:t>Individual</a:t>
-                      </a:r>
-                    </a:p>
-                    <a:p>
-                      <a:pPr algn="ctr"/>
-                      <a:r>
-                        <a:rPr sz="750" b="1">
-                          <a:solidFill>
-                            <a:srgbClr val="FFFFFF"/>
-                          </a:solidFill>
-                          <a:latin typeface="Times New Roman"/>
-                        </a:rPr>
-                        <a:t>user</a:t>
+                        <a:t>private routing</a:t>
                       </a:r>
                     </a:p>
                   </a:txBody>
@@ -10565,6 +10562,41 @@
                     </a:solidFill>
                   </a:tcPr>
                 </a:tc>
+                <a:tc>
+                  <a:txBody>
+                    <a:bodyPr/>
+                    <a:lstStyle/>
+                    <a:p>
+                      <a:pPr algn="ctr"/>
+                      <a:r>
+                        <a:rPr sz="750" b="1">
+                          <a:solidFill>
+                            <a:srgbClr val="FFFFFF"/>
+                          </a:solidFill>
+                          <a:latin typeface="Times New Roman"/>
+                        </a:rPr>
+                        <a:t>Shipping</a:t>
+                      </a:r>
+                    </a:p>
+                    <a:p>
+                      <a:pPr algn="ctr"/>
+                      <a:r>
+                        <a:rPr sz="750" b="1">
+                          <a:solidFill>
+                            <a:srgbClr val="FFFFFF"/>
+                          </a:solidFill>
+                          <a:latin typeface="Times New Roman"/>
+                        </a:rPr>
+                        <a:t>today</a:t>
+                      </a:r>
+                    </a:p>
+                  </a:txBody>
+                  <a:tcPr marL="20000" marR="20000" marT="9000" marB="9000">
+                    <a:solidFill>
+                      <a:srgbClr val="1F2A44"/>
+                    </a:solidFill>
+                  </a:tcPr>
+                </a:tc>
               </a:tr>
               <a:tr h="237744">
                 <a:tc>
@@ -10581,29 +10613,6 @@
                           <a:latin typeface="Times New Roman"/>
                         </a:rPr>
                         <a:t>Highlight AI</a:t>
-                      </a:r>
-                    </a:p>
-                  </a:txBody>
-                  <a:tcPr marL="20000" marR="20000" marT="9000" marB="9000">
-                    <a:solidFill>
-                      <a:srgbClr val="F4F5F7"/>
-                    </a:solidFill>
-                  </a:tcPr>
-                </a:tc>
-                <a:tc>
-                  <a:txBody>
-                    <a:bodyPr/>
-                    <a:lstStyle/>
-                    <a:p>
-                      <a:pPr algn="ctr"/>
-                      <a:r>
-                        <a:rPr sz="850" b="0">
-                          <a:solidFill>
-                            <a:srgbClr val="1B7F3B"/>
-                          </a:solidFill>
-                          <a:latin typeface="Times New Roman"/>
-                        </a:rPr>
-                        <a:t>Y</a:t>
                       </a:r>
                     </a:p>
                   </a:txBody>
@@ -10691,34 +10700,11 @@
                       <a:r>
                         <a:rPr sz="850" b="0">
                           <a:solidFill>
-                            <a:srgbClr val="1B7F3B"/>
-                          </a:solidFill>
-                          <a:latin typeface="Times New Roman"/>
-                        </a:rPr>
-                        <a:t>Y</a:t>
-                      </a:r>
-                    </a:p>
-                  </a:txBody>
-                  <a:tcPr marL="20000" marR="20000" marT="9000" marB="9000">
-                    <a:solidFill>
-                      <a:srgbClr val="F4F5F7"/>
-                    </a:solidFill>
-                  </a:tcPr>
-                </a:tc>
-                <a:tc>
-                  <a:txBody>
-                    <a:bodyPr/>
-                    <a:lstStyle/>
-                    <a:p>
-                      <a:pPr algn="ctr"/>
-                      <a:r>
-                        <a:rPr sz="850" b="0">
-                          <a:solidFill>
                             <a:srgbClr val="B02A2A"/>
                           </a:solidFill>
                           <a:latin typeface="Times New Roman"/>
                         </a:rPr>
-                        <a:t>N  teams</a:t>
+                        <a:t>N</a:t>
                       </a:r>
                     </a:p>
                   </a:txBody>
@@ -10742,6 +10728,52 @@
                           <a:latin typeface="Times New Roman"/>
                         </a:rPr>
                         <a:t>N</a:t>
+                      </a:r>
+                    </a:p>
+                  </a:txBody>
+                  <a:tcPr marL="20000" marR="20000" marT="9000" marB="9000">
+                    <a:solidFill>
+                      <a:srgbClr val="F4F5F7"/>
+                    </a:solidFill>
+                  </a:tcPr>
+                </a:tc>
+                <a:tc>
+                  <a:txBody>
+                    <a:bodyPr/>
+                    <a:lstStyle/>
+                    <a:p>
+                      <a:pPr algn="ctr"/>
+                      <a:r>
+                        <a:rPr sz="850" b="0">
+                          <a:solidFill>
+                            <a:srgbClr val="B02A2A"/>
+                          </a:solidFill>
+                          <a:latin typeface="Times New Roman"/>
+                        </a:rPr>
+                        <a:t>N</a:t>
+                      </a:r>
+                    </a:p>
+                  </a:txBody>
+                  <a:tcPr marL="20000" marR="20000" marT="9000" marB="9000">
+                    <a:solidFill>
+                      <a:srgbClr val="F4F5F7"/>
+                    </a:solidFill>
+                  </a:tcPr>
+                </a:tc>
+                <a:tc>
+                  <a:txBody>
+                    <a:bodyPr/>
+                    <a:lstStyle/>
+                    <a:p>
+                      <a:pPr algn="ctr"/>
+                      <a:r>
+                        <a:rPr sz="850" b="0">
+                          <a:solidFill>
+                            <a:srgbClr val="1B7F3B"/>
+                          </a:solidFill>
+                          <a:latin typeface="Times New Roman"/>
+                        </a:rPr>
+                        <a:t>Y</a:t>
                       </a:r>
                     </a:p>
                   </a:txBody>
@@ -10808,34 +10840,11 @@
                       <a:r>
                         <a:rPr sz="850" b="0">
                           <a:solidFill>
-                            <a:srgbClr val="1B7F3B"/>
+                            <a:srgbClr val="B02A2A"/>
                           </a:solidFill>
                           <a:latin typeface="Times New Roman"/>
                         </a:rPr>
-                        <a:t>Y</a:t>
-                      </a:r>
-                    </a:p>
-                  </a:txBody>
-                  <a:tcPr marL="20000" marR="20000" marT="9000" marB="9000">
-                    <a:solidFill>
-                      <a:srgbClr val="FFFFFF"/>
-                    </a:solidFill>
-                  </a:tcPr>
-                </a:tc>
-                <a:tc>
-                  <a:txBody>
-                    <a:bodyPr/>
-                    <a:lstStyle/>
-                    <a:p>
-                      <a:pPr algn="ctr"/>
-                      <a:r>
-                        <a:rPr sz="850" b="0">
-                          <a:solidFill>
-                            <a:srgbClr val="1B7F3B"/>
-                          </a:solidFill>
-                          <a:latin typeface="Times New Roman"/>
-                        </a:rPr>
-                        <a:t>Y</a:t>
+                        <a:t>N</a:t>
                       </a:r>
                     </a:p>
                   </a:txBody>
@@ -10877,11 +10886,11 @@
                       <a:r>
                         <a:rPr sz="850" b="0">
                           <a:solidFill>
-                            <a:srgbClr val="1B7F3B"/>
+                            <a:srgbClr val="1A1A1A"/>
                           </a:solidFill>
                           <a:latin typeface="Times New Roman"/>
                         </a:rPr>
-                        <a:t>Y</a:t>
+                        <a:t>partial</a:t>
                       </a:r>
                     </a:p>
                   </a:txBody>
@@ -10900,11 +10909,11 @@
                       <a:r>
                         <a:rPr sz="850" b="0">
                           <a:solidFill>
-                            <a:srgbClr val="B02A2A"/>
+                            <a:srgbClr val="1A1A1A"/>
                           </a:solidFill>
                           <a:latin typeface="Times New Roman"/>
                         </a:rPr>
-                        <a:t>N  Pro</a:t>
+                        <a:t>partial</a:t>
                       </a:r>
                     </a:p>
                   </a:txBody>
@@ -10937,6 +10946,29 @@
                     </a:solidFill>
                   </a:tcPr>
                 </a:tc>
+                <a:tc>
+                  <a:txBody>
+                    <a:bodyPr/>
+                    <a:lstStyle/>
+                    <a:p>
+                      <a:pPr algn="ctr"/>
+                      <a:r>
+                        <a:rPr sz="850" b="0">
+                          <a:solidFill>
+                            <a:srgbClr val="1A1A1A"/>
+                          </a:solidFill>
+                          <a:latin typeface="Times New Roman"/>
+                        </a:rPr>
+                        <a:t>not yet</a:t>
+                      </a:r>
+                    </a:p>
+                  </a:txBody>
+                  <a:tcPr marL="20000" marR="20000" marT="9000" marB="9000">
+                    <a:solidFill>
+                      <a:srgbClr val="FFFFFF"/>
+                    </a:solidFill>
+                  </a:tcPr>
+                </a:tc>
               </a:tr>
               <a:tr h="237744">
                 <a:tc>
@@ -10952,122 +10984,7 @@
                           </a:solidFill>
                           <a:latin typeface="Times New Roman"/>
                         </a:rPr>
-                        <a:t>Raycast / Apple</a:t>
-                      </a:r>
-                    </a:p>
-                  </a:txBody>
-                  <a:tcPr marL="20000" marR="20000" marT="9000" marB="9000">
-                    <a:solidFill>
-                      <a:srgbClr val="F4F5F7"/>
-                    </a:solidFill>
-                  </a:tcPr>
-                </a:tc>
-                <a:tc>
-                  <a:txBody>
-                    <a:bodyPr/>
-                    <a:lstStyle/>
-                    <a:p>
-                      <a:pPr algn="ctr"/>
-                      <a:r>
-                        <a:rPr sz="850" b="0">
-                          <a:solidFill>
-                            <a:srgbClr val="B02A2A"/>
-                          </a:solidFill>
-                          <a:latin typeface="Times New Roman"/>
-                        </a:rPr>
-                        <a:t>N</a:t>
-                      </a:r>
-                    </a:p>
-                  </a:txBody>
-                  <a:tcPr marL="20000" marR="20000" marT="9000" marB="9000">
-                    <a:solidFill>
-                      <a:srgbClr val="F4F5F7"/>
-                    </a:solidFill>
-                  </a:tcPr>
-                </a:tc>
-                <a:tc>
-                  <a:txBody>
-                    <a:bodyPr/>
-                    <a:lstStyle/>
-                    <a:p>
-                      <a:pPr algn="ctr"/>
-                      <a:r>
-                        <a:rPr sz="850" b="0">
-                          <a:solidFill>
-                            <a:srgbClr val="1A1A1A"/>
-                          </a:solidFill>
-                          <a:latin typeface="Times New Roman"/>
-                        </a:rPr>
-                        <a:t>-</a:t>
-                      </a:r>
-                    </a:p>
-                  </a:txBody>
-                  <a:tcPr marL="20000" marR="20000" marT="9000" marB="9000">
-                    <a:solidFill>
-                      <a:srgbClr val="F4F5F7"/>
-                    </a:solidFill>
-                  </a:tcPr>
-                </a:tc>
-                <a:tc>
-                  <a:txBody>
-                    <a:bodyPr/>
-                    <a:lstStyle/>
-                    <a:p>
-                      <a:pPr algn="ctr"/>
-                      <a:r>
-                        <a:rPr sz="850" b="0">
-                          <a:solidFill>
-                            <a:srgbClr val="1A1A1A"/>
-                          </a:solidFill>
-                          <a:latin typeface="Times New Roman"/>
-                        </a:rPr>
-                        <a:t>partial</a:t>
-                      </a:r>
-                    </a:p>
-                  </a:txBody>
-                  <a:tcPr marL="20000" marR="20000" marT="9000" marB="9000">
-                    <a:solidFill>
-                      <a:srgbClr val="F4F5F7"/>
-                    </a:solidFill>
-                  </a:tcPr>
-                </a:tc>
-                <a:tc>
-                  <a:txBody>
-                    <a:bodyPr/>
-                    <a:lstStyle/>
-                    <a:p>
-                      <a:pPr algn="ctr"/>
-                      <a:r>
-                        <a:rPr sz="850" b="0">
-                          <a:solidFill>
-                            <a:srgbClr val="1A1A1A"/>
-                          </a:solidFill>
-                          <a:latin typeface="Times New Roman"/>
-                        </a:rPr>
-                        <a:t>partial</a:t>
-                      </a:r>
-                    </a:p>
-                  </a:txBody>
-                  <a:tcPr marL="20000" marR="20000" marT="9000" marB="9000">
-                    <a:solidFill>
-                      <a:srgbClr val="F4F5F7"/>
-                    </a:solidFill>
-                  </a:tcPr>
-                </a:tc>
-                <a:tc>
-                  <a:txBody>
-                    <a:bodyPr/>
-                    <a:lstStyle/>
-                    <a:p>
-                      <a:pPr algn="ctr"/>
-                      <a:r>
-                        <a:rPr sz="850" b="0">
-                          <a:solidFill>
-                            <a:srgbClr val="1B7F3B"/>
-                          </a:solidFill>
-                          <a:latin typeface="Times New Roman"/>
-                        </a:rPr>
-                        <a:t>Y</a:t>
+                        <a:t>Raycast / Apple  (Mac)</a:t>
                       </a:r>
                     </a:p>
                   </a:txBody>
@@ -11123,6 +11040,121 @@
                     </a:solidFill>
                   </a:tcPr>
                 </a:tc>
+                <a:tc>
+                  <a:txBody>
+                    <a:bodyPr/>
+                    <a:lstStyle/>
+                    <a:p>
+                      <a:pPr algn="ctr"/>
+                      <a:r>
+                        <a:rPr sz="850" b="0">
+                          <a:solidFill>
+                            <a:srgbClr val="B02A2A"/>
+                          </a:solidFill>
+                          <a:latin typeface="Times New Roman"/>
+                        </a:rPr>
+                        <a:t>N</a:t>
+                      </a:r>
+                    </a:p>
+                  </a:txBody>
+                  <a:tcPr marL="20000" marR="20000" marT="9000" marB="9000">
+                    <a:solidFill>
+                      <a:srgbClr val="F4F5F7"/>
+                    </a:solidFill>
+                  </a:tcPr>
+                </a:tc>
+                <a:tc>
+                  <a:txBody>
+                    <a:bodyPr/>
+                    <a:lstStyle/>
+                    <a:p>
+                      <a:pPr algn="ctr"/>
+                      <a:r>
+                        <a:rPr sz="850" b="0">
+                          <a:solidFill>
+                            <a:srgbClr val="1A1A1A"/>
+                          </a:solidFill>
+                          <a:latin typeface="Times New Roman"/>
+                        </a:rPr>
+                        <a:t>partial</a:t>
+                      </a:r>
+                    </a:p>
+                  </a:txBody>
+                  <a:tcPr marL="20000" marR="20000" marT="9000" marB="9000">
+                    <a:solidFill>
+                      <a:srgbClr val="F4F5F7"/>
+                    </a:solidFill>
+                  </a:tcPr>
+                </a:tc>
+                <a:tc>
+                  <a:txBody>
+                    <a:bodyPr/>
+                    <a:lstStyle/>
+                    <a:p>
+                      <a:pPr algn="ctr"/>
+                      <a:r>
+                        <a:rPr sz="850" b="0">
+                          <a:solidFill>
+                            <a:srgbClr val="B02A2A"/>
+                          </a:solidFill>
+                          <a:latin typeface="Times New Roman"/>
+                        </a:rPr>
+                        <a:t>N</a:t>
+                      </a:r>
+                    </a:p>
+                  </a:txBody>
+                  <a:tcPr marL="20000" marR="20000" marT="9000" marB="9000">
+                    <a:solidFill>
+                      <a:srgbClr val="F4F5F7"/>
+                    </a:solidFill>
+                  </a:tcPr>
+                </a:tc>
+                <a:tc>
+                  <a:txBody>
+                    <a:bodyPr/>
+                    <a:lstStyle/>
+                    <a:p>
+                      <a:pPr algn="ctr"/>
+                      <a:r>
+                        <a:rPr sz="850" b="0">
+                          <a:solidFill>
+                            <a:srgbClr val="B02A2A"/>
+                          </a:solidFill>
+                          <a:latin typeface="Times New Roman"/>
+                        </a:rPr>
+                        <a:t>N</a:t>
+                      </a:r>
+                    </a:p>
+                  </a:txBody>
+                  <a:tcPr marL="20000" marR="20000" marT="9000" marB="9000">
+                    <a:solidFill>
+                      <a:srgbClr val="F4F5F7"/>
+                    </a:solidFill>
+                  </a:tcPr>
+                </a:tc>
+                <a:tc>
+                  <a:txBody>
+                    <a:bodyPr/>
+                    <a:lstStyle/>
+                    <a:p>
+                      <a:pPr algn="ctr"/>
+                      <a:r>
+                        <a:rPr sz="850" b="0">
+                          <a:solidFill>
+                            <a:srgbClr val="1B7F3B"/>
+                          </a:solidFill>
+                          <a:latin typeface="Times New Roman"/>
+                        </a:rPr>
+                        <a:t>Y</a:t>
+                      </a:r>
+                    </a:p>
+                  </a:txBody>
+                  <a:tcPr marL="20000" marR="20000" marT="9000" marB="9000">
+                    <a:solidFill>
+                      <a:srgbClr val="F4F5F7"/>
+                    </a:solidFill>
+                  </a:tcPr>
+                </a:tc>
               </a:tr>
               <a:tr h="237744">
                 <a:tc>
@@ -11157,11 +11189,11 @@
                       <a:r>
                         <a:rPr sz="850" b="0">
                           <a:solidFill>
-                            <a:srgbClr val="1B7F3B"/>
+                            <a:srgbClr val="B02A2A"/>
                           </a:solidFill>
                           <a:latin typeface="Times New Roman"/>
                         </a:rPr>
-                        <a:t>Y</a:t>
+                        <a:t>N</a:t>
                       </a:r>
                     </a:p>
                   </a:txBody>
@@ -11180,11 +11212,11 @@
                       <a:r>
                         <a:rPr sz="850" b="0">
                           <a:solidFill>
-                            <a:srgbClr val="1B7F3B"/>
+                            <a:srgbClr val="1A1A1A"/>
                           </a:solidFill>
                           <a:latin typeface="Times New Roman"/>
                         </a:rPr>
-                        <a:t>Y</a:t>
+                        <a:t>partial</a:t>
                       </a:r>
                     </a:p>
                   </a:txBody>
@@ -11203,11 +11235,11 @@
                       <a:r>
                         <a:rPr sz="850" b="0">
                           <a:solidFill>
-                            <a:srgbClr val="1B7F3B"/>
+                            <a:srgbClr val="B02A2A"/>
                           </a:solidFill>
                           <a:latin typeface="Times New Roman"/>
                         </a:rPr>
-                        <a:t>Y</a:t>
+                        <a:t>N</a:t>
                       </a:r>
                     </a:p>
                   </a:txBody>
@@ -11481,11 +11513,11 @@
                       <a:r>
                         <a:rPr sz="850" b="1">
                           <a:solidFill>
-                            <a:srgbClr val="1B7F3B"/>
+                            <a:srgbClr val="B02A2A"/>
                           </a:solidFill>
                           <a:latin typeface="Times New Roman"/>
                         </a:rPr>
-                        <a:t>Y</a:t>
+                        <a:t>N  prototype</a:t>
                       </a:r>
                     </a:p>
                   </a:txBody>
@@ -11508,7 +11540,7 @@
         </p:nvSpPr>
         <p:spPr>
           <a:xfrm>
-            <a:off x="109728" y="2240280"/>
+            <a:off x="109728" y="2212848"/>
             <a:ext cx="4389120" cy="914400"/>
           </a:xfrm>
           <a:prstGeom prst="rect">
@@ -11526,13 +11558,13 @@
               <a:rPr b="1" sz="900">
                 <a:latin typeface="Times New Roman"/>
               </a:rPr>
-              <a:t>Read the columns, not the rows.</a:t>
+              <a:t>These are the columns that matter, including one we lose.</a:t>
             </a:r>
             <a:r>
               <a:rPr b="0" sz="900">
                 <a:latin typeface="Times New Roman"/>
               </a:rPr>
-              <a:t> Every competitor fails at least one column that matters to an individual user on an ordinary Windows laptop.</a:t>
+              <a:t> PERCH is a prototype and the others ship today - a table where we won every column would not be worth showing.</a:t>
             </a:r>
           </a:p>
           <a:p>
@@ -11540,13 +11572,13 @@
               <a:rPr b="1" sz="900">
                 <a:latin typeface="Times New Roman"/>
               </a:rPr>
-              <a:t>Highlight is closed and cloud-only and has moved to teams. Microsoft's platform is unshipped, Enterprise/Pro-gated and closed to third parties.</a:t>
+              <a:t>Jan.ai, PyGPT and Khoj are the honest comparison.</a:t>
             </a:r>
             <a:r>
               <a:rPr b="0" sz="900">
                 <a:latin typeface="Times New Roman"/>
               </a:rPr>
-              <a:t> The Mac tools do not run here, and the local open tools are all windows you have to go to.</a:t>
+              <a:t> They are local, open, and give you real model choice - genuinely better than the closed products on those axes. What they do not do is come to you: they are applications you open, so the context stops at their window.</a:t>
             </a:r>
           </a:p>
           <a:p>
@@ -11554,13 +11586,21 @@
               <a:rPr b="1" sz="900">
                 <a:latin typeface="Times New Roman"/>
               </a:rPr>
-              <a:t>The bottom row is the project.</a:t>
+              <a:t>Highlight is closed and cloud-only with no model choice. Microsoft's Semantic Index is the same idea as our Layer 3, but unshipped, Enterprise/Pro-gated and closed to third parties.</a:t>
+            </a:r>
+          </a:p>
+          <a:p>
+            <a:r>
+              <a:rPr b="1" sz="900">
+                <a:latin typeface="Times New Roman"/>
+              </a:rPr>
+              <a:t>The three middle columns are the contribution.</a:t>
             </a:r>
             <a:r>
               <a:rPr b="0" sz="900">
                 <a:latin typeface="Times New Roman"/>
               </a:rPr>
-              <a:t> Nothing in it is individually novel - the combination is the one nobody is shipping.</a:t>
+              <a:t> Memory you own, imported from the assistants you already pay for, routed by a policy you declare. Nothing else in the table has any of them.</a:t>
             </a:r>
           </a:p>
         </p:txBody>

--- a/docs/PERCH_Project_Review.pptx
+++ b/docs/PERCH_Project_Review.pptx
@@ -37,6 +37,10 @@
     <p:sldId id="282" r:id="rId33"/>
     <p:sldId id="283" r:id="rId34"/>
     <p:sldId id="284" r:id="rId35"/>
+    <p:sldId id="285" r:id="rId36"/>
+    <p:sldId id="286" r:id="rId37"/>
+    <p:sldId id="287" r:id="rId38"/>
+    <p:sldId id="288" r:id="rId39"/>
   </p:sldIdLst>
   <p:sldSz cx="4610100" cy="3460750"/>
   <p:notesSz cx="4610100" cy="3460750"/>
@@ -8119,7 +8123,7 @@
                 <a:latin typeface="Times New Roman" panose="02020603050405020304" pitchFamily="18" charset="0"/>
                 <a:cs typeface="Times New Roman" panose="02020603050405020304" pitchFamily="18" charset="0"/>
               </a:rPr>
-              <a:t> / 29</a:t>
+              <a:t> / 33</a:t>
             </a:r>
             <a:endParaRPr dirty="0">
               <a:latin typeface="Times New Roman" panose="02020603050405020304" pitchFamily="18" charset="0"/>
@@ -8383,7 +8387,7 @@
                 <a:cs typeface="Times New Roman" panose="02020603050405020304" pitchFamily="18" charset="0"/>
                 <a:sym typeface="Arial"/>
               </a:rPr>
-              <a:t>Existing Work - Our Real Competition</a:t>
+              <a:t>Scope &amp; Objectives</a:t>
             </a:r>
           </a:p>
         </p:txBody>
@@ -8718,7 +8722,7 @@
                 <a:latin typeface="Times New Roman" panose="02020603050405020304" pitchFamily="18" charset="0"/>
                 <a:cs typeface="Times New Roman" panose="02020603050405020304" pitchFamily="18" charset="0"/>
               </a:rPr>
-              <a:t> / 29</a:t>
+              <a:t> / 33</a:t>
             </a:r>
             <a:endParaRPr dirty="0">
               <a:latin typeface="Times New Roman" panose="02020603050405020304" pitchFamily="18" charset="0"/>
@@ -8757,18 +8761,18 @@
               <a:buChar char="•"/>
             </a:pPr>
             <a:r>
-              <a:rPr lang="en-US" sz="1150" b="1" dirty="0">
-                <a:latin typeface="Times New Roman" panose="02020603050405020304" pitchFamily="18" charset="0"/>
-                <a:cs typeface="Times New Roman" panose="02020603050405020304" pitchFamily="18" charset="0"/>
-              </a:rPr>
-              <a:t>Highlight AI</a:t>
-            </a:r>
-            <a:r>
-              <a:rPr lang="en-US" sz="1150" b="0" dirty="0">
-                <a:latin typeface="Times New Roman" panose="02020603050405020304" pitchFamily="18" charset="0"/>
-                <a:cs typeface="Times New Roman" panose="02020603050405020304" pitchFamily="18" charset="0"/>
-              </a:rPr>
-              <a:t> - $50M, 500,000+ users, Mac and Windows. Selection-triggered, screen-aware, local audio transcription. Cloud-dependent, rate-limited, no model choice, closed source, and pivoted to enterprise in March 2026.</a:t>
+              <a:rPr lang="en-US" sz="1000" b="1" dirty="0">
+                <a:latin typeface="Times New Roman" panose="02020603050405020304" pitchFamily="18" charset="0"/>
+                <a:cs typeface="Times New Roman" panose="02020603050405020304" pitchFamily="18" charset="0"/>
+              </a:rPr>
+              <a:t>Scope:</a:t>
+            </a:r>
+            <a:r>
+              <a:rPr lang="en-US" sz="1000" b="0" dirty="0">
+                <a:latin typeface="Times New Roman" panose="02020603050405020304" pitchFamily="18" charset="0"/>
+                <a:cs typeface="Times New Roman" panose="02020603050405020304" pitchFamily="18" charset="0"/>
+              </a:rPr>
+              <a:t> a desktop-resident personal AI agent for Windows. Dormant in the background, summoned by a selection, screenshot or shortcut in any application, answering in a slim panel beside your work and writing back into the document you were in.</a:t>
             </a:r>
           </a:p>
           <a:p>
@@ -8777,18 +8781,18 @@
               <a:buChar char="•"/>
             </a:pPr>
             <a:r>
-              <a:rPr lang="en-US" sz="1150" b="1" dirty="0">
-                <a:latin typeface="Times New Roman" panose="02020603050405020304" pitchFamily="18" charset="0"/>
-                <a:cs typeface="Times New Roman" panose="02020603050405020304" pitchFamily="18" charset="0"/>
-              </a:rPr>
-              <a:t>Windows 11 Click to Do</a:t>
-            </a:r>
-            <a:r>
-              <a:rPr lang="en-US" sz="1150" b="0" dirty="0">
-                <a:latin typeface="Times New Roman" panose="02020603050405020304" pitchFamily="18" charset="0"/>
-                <a:cs typeface="Times New Roman" panose="02020603050405020304" pitchFamily="18" charset="0"/>
-              </a:rPr>
-              <a:t> - the same primitive, from the OS vendor. Requires a Copilot+ PC NPU, offers a fixed menu of actions, and Microsoft is retreating from the Windows AI push.</a:t>
+              <a:rPr lang="en-US" sz="1000" b="1" dirty="0">
+                <a:latin typeface="Times New Roman" panose="02020603050405020304" pitchFamily="18" charset="0"/>
+                <a:cs typeface="Times New Roman" panose="02020603050405020304" pitchFamily="18" charset="0"/>
+              </a:rPr>
+              <a:t>O1 - Surface.</a:t>
+            </a:r>
+            <a:r>
+              <a:rPr lang="en-US" sz="1000" b="0" dirty="0">
+                <a:latin typeface="Times New Roman" panose="02020603050405020304" pitchFamily="18" charset="0"/>
+                <a:cs typeface="Times New Roman" panose="02020603050405020304" pitchFamily="18" charset="0"/>
+              </a:rPr>
+              <a:t> Three triggers, panel placement beside the host window without stealing focus, and edit-in-place with no per-application plugin.</a:t>
             </a:r>
           </a:p>
           <a:p>
@@ -8797,18 +8801,18 @@
               <a:buChar char="•"/>
             </a:pPr>
             <a:r>
-              <a:rPr lang="en-US" sz="1150" b="1" dirty="0">
-                <a:latin typeface="Times New Roman" panose="02020603050405020304" pitchFamily="18" charset="0"/>
-                <a:cs typeface="Times New Roman" panose="02020603050405020304" pitchFamily="18" charset="0"/>
-              </a:rPr>
-              <a:t>Raycast AI ($8/mo), Apple Intelligence, Dottie, BoltAI</a:t>
-            </a:r>
-            <a:r>
-              <a:rPr lang="en-US" sz="1150" b="0" dirty="0">
-                <a:latin typeface="Times New Roman" panose="02020603050405020304" pitchFamily="18" charset="0"/>
-                <a:cs typeface="Times New Roman" panose="02020603050405020304" pitchFamily="18" charset="0"/>
-              </a:rPr>
-              <a:t> - the entire "best AI assistant" review category is a Mac category. None of these run on Windows.</a:t>
+              <a:rPr lang="en-US" sz="1000" b="1" dirty="0">
+                <a:latin typeface="Times New Roman" panose="02020603050405020304" pitchFamily="18" charset="0"/>
+                <a:cs typeface="Times New Roman" panose="02020603050405020304" pitchFamily="18" charset="0"/>
+              </a:rPr>
+              <a:t>O2 - Context assembly.</a:t>
+            </a:r>
+            <a:r>
+              <a:rPr lang="en-US" sz="1000" b="0" dirty="0">
+                <a:latin typeface="Times New Roman" panose="02020603050405020304" pitchFamily="18" charset="0"/>
+                <a:cs typeface="Times New Roman" panose="02020603050405020304" pitchFamily="18" charset="0"/>
+              </a:rPr>
+              <a:t> Decide what enters the prompt under a hard ceiling set by whichever model is selected, from a 4B local model to a frontier API.</a:t>
             </a:r>
           </a:p>
           <a:p>
@@ -8817,18 +8821,18 @@
               <a:buChar char="•"/>
             </a:pPr>
             <a:r>
-              <a:rPr lang="en-US" sz="1150" b="1" dirty="0">
-                <a:latin typeface="Times New Roman" panose="02020603050405020304" pitchFamily="18" charset="0"/>
-                <a:cs typeface="Times New Roman" panose="02020603050405020304" pitchFamily="18" charset="0"/>
-              </a:rPr>
-              <a:t>Jan.ai (5.3M downloads), AnythingLLM, Khoj, PyGPT, Chatbox</a:t>
-            </a:r>
-            <a:r>
-              <a:rPr lang="en-US" sz="1150" b="0" dirty="0">
-                <a:latin typeface="Times New Roman" panose="02020603050405020304" pitchFamily="18" charset="0"/>
-                <a:cs typeface="Times New Roman" panose="02020603050405020304" pitchFamily="18" charset="0"/>
-              </a:rPr>
-              <a:t> - right philosophy, wrong shape. All local-capable, all open, and every one of them is an application window you open.</a:t>
+              <a:rPr lang="en-US" sz="1000" b="1" dirty="0">
+                <a:latin typeface="Times New Roman" panose="02020603050405020304" pitchFamily="18" charset="0"/>
+                <a:cs typeface="Times New Roman" panose="02020603050405020304" pitchFamily="18" charset="0"/>
+              </a:rPr>
+              <a:t>O3 - Memory.</a:t>
+            </a:r>
+            <a:r>
+              <a:rPr lang="en-US" sz="1000" b="0" dirty="0">
+                <a:latin typeface="Times New Roman" panose="02020603050405020304" pitchFamily="18" charset="0"/>
+                <a:cs typeface="Times New Roman" panose="02020603050405020304" pitchFamily="18" charset="0"/>
+              </a:rPr>
+              <a:t> Six typed classes, user-authored and importable, stored as files the user can open, edit, export or delete - with an admission gate that refuses to inject weak matches.</a:t>
             </a:r>
           </a:p>
           <a:p>
@@ -8837,18 +8841,38 @@
               <a:buChar char="•"/>
             </a:pPr>
             <a:r>
-              <a:rPr lang="en-US" sz="1150" b="1" dirty="0">
-                <a:latin typeface="Times New Roman" panose="02020603050405020304" pitchFamily="18" charset="0"/>
-                <a:cs typeface="Times New Roman" panose="02020603050405020304" pitchFamily="18" charset="0"/>
-              </a:rPr>
-              <a:t>The pattern:</a:t>
-            </a:r>
-            <a:r>
-              <a:rPr lang="en-US" sz="1150" b="0" dirty="0">
-                <a:latin typeface="Times New Roman" panose="02020603050405020304" pitchFamily="18" charset="0"/>
-                <a:cs typeface="Times New Roman" panose="02020603050405020304" pitchFamily="18" charset="0"/>
-              </a:rPr>
-              <a:t> tools that are OS-integrated are closed, cloud-only or hardware-gated. Tools that are local and open are destinations you have to visit.</a:t>
+              <a:rPr lang="en-US" sz="1000" b="1" dirty="0">
+                <a:latin typeface="Times New Roman" panose="02020603050405020304" pitchFamily="18" charset="0"/>
+                <a:cs typeface="Times New Roman" panose="02020603050405020304" pitchFamily="18" charset="0"/>
+              </a:rPr>
+              <a:t>O4 - Execution.</a:t>
+            </a:r>
+            <a:r>
+              <a:rPr lang="en-US" sz="1000" b="0" dirty="0">
+                <a:latin typeface="Times New Roman" panose="02020603050405020304" pitchFamily="18" charset="0"/>
+                <a:cs typeface="Times New Roman" panose="02020603050405020304" pitchFamily="18" charset="0"/>
+              </a:rPr>
+              <a:t> Model-agnostic routing, a full agent tool surface, and a private mode that provably sends nothing.</a:t>
+            </a:r>
+          </a:p>
+          <a:p>
+            <a:pPr marL="171450" lvl="1" indent="-171450" algn="l">
+              <a:buFont typeface="Arial" panose="020B0604020202020204" pitchFamily="34" charset="0"/>
+              <a:buChar char="•"/>
+            </a:pPr>
+            <a:r>
+              <a:rPr lang="en-US" sz="1000" b="1" dirty="0">
+                <a:latin typeface="Times New Roman" panose="02020603050405020304" pitchFamily="18" charset="0"/>
+                <a:cs typeface="Times New Roman" panose="02020603050405020304" pitchFamily="18" charset="0"/>
+              </a:rPr>
+              <a:t>Out of scope, and named as such:</a:t>
+            </a:r>
+            <a:r>
+              <a:rPr lang="en-US" sz="1000" b="0" dirty="0">
+                <a:latin typeface="Times New Roman" panose="02020603050405020304" pitchFamily="18" charset="0"/>
+                <a:cs typeface="Times New Roman" panose="02020603050405020304" pitchFamily="18" charset="0"/>
+              </a:rPr>
+              <a:t> adaptive automatic model routing, multi-device sync, shell execution and app automation are all v2.</a:t>
             </a:r>
           </a:p>
         </p:txBody>
@@ -9096,7 +9120,7 @@
                 <a:cs typeface="Times New Roman" panose="02020603050405020304" pitchFamily="18" charset="0"/>
                 <a:sym typeface="Arial"/>
               </a:rPr>
-              <a:t>The Positioning Table - The Empty Row</a:t>
+              <a:t>Existing Work - Our Real Competition</a:t>
             </a:r>
           </a:p>
         </p:txBody>
@@ -9431,12 +9455,138 @@
                 <a:latin typeface="Times New Roman" panose="02020603050405020304" pitchFamily="18" charset="0"/>
                 <a:cs typeface="Times New Roman" panose="02020603050405020304" pitchFamily="18" charset="0"/>
               </a:rPr>
-              <a:t> / 29</a:t>
+              <a:t> / 33</a:t>
             </a:r>
             <a:endParaRPr dirty="0">
               <a:latin typeface="Times New Roman" panose="02020603050405020304" pitchFamily="18" charset="0"/>
               <a:cs typeface="Times New Roman" panose="02020603050405020304" pitchFamily="18" charset="0"/>
             </a:endParaRPr>
+          </a:p>
+        </p:txBody>
+      </p:sp>
+      <p:sp>
+        <p:nvSpPr>
+          <p:cNvPr id="103" name="Google Shape;103;p9"/>
+          <p:cNvSpPr txBox="1"/>
+          <p:nvPr/>
+        </p:nvSpPr>
+        <p:spPr>
+          <a:xfrm>
+            <a:off x="91440" y="246888"/>
+            <a:ext cx="4425696" cy="3017520"/>
+          </a:xfrm>
+          <a:prstGeom prst="rect">
+            <a:avLst/>
+          </a:prstGeom>
+          <a:noFill/>
+          <a:ln>
+            <a:noFill/>
+          </a:ln>
+        </p:spPr>
+        <p:txBody>
+          <a:bodyPr spcFirstLastPara="1" wrap="square" lIns="91425" tIns="91425" rIns="91425" bIns="91425" anchor="t" anchorCtr="0">
+            <a:noAutofit/>
+          </a:bodyPr>
+          <a:lstStyle/>
+          <a:p>
+            <a:pPr marL="171450" lvl="1" indent="-171450" algn="l">
+              <a:buFont typeface="Arial" panose="020B0604020202020204" pitchFamily="34" charset="0"/>
+              <a:buChar char="•"/>
+            </a:pPr>
+            <a:r>
+              <a:rPr lang="en-US" sz="1050" b="1" dirty="0">
+                <a:latin typeface="Times New Roman" panose="02020603050405020304" pitchFamily="18" charset="0"/>
+                <a:cs typeface="Times New Roman" panose="02020603050405020304" pitchFamily="18" charset="0"/>
+              </a:rPr>
+              <a:t>Highlight AI</a:t>
+            </a:r>
+            <a:r>
+              <a:rPr lang="en-US" sz="1050" b="0" dirty="0">
+                <a:latin typeface="Times New Roman" panose="02020603050405020304" pitchFamily="18" charset="0"/>
+                <a:cs typeface="Times New Roman" panose="02020603050405020304" pitchFamily="18" charset="0"/>
+              </a:rPr>
+              <a:t> - $50M, 500,000+ users, Mac and Windows, selection-triggered and screen-aware. Cloud-dependent, rate-limited, no model choice, closed source, repositioned to teams in March 2026.</a:t>
+            </a:r>
+          </a:p>
+          <a:p>
+            <a:pPr marL="171450" lvl="1" indent="-171450" algn="l">
+              <a:buFont typeface="Arial" panose="020B0604020202020204" pitchFamily="34" charset="0"/>
+              <a:buChar char="•"/>
+            </a:pPr>
+            <a:r>
+              <a:rPr lang="en-US" sz="1050" b="1" dirty="0">
+                <a:latin typeface="Times New Roman" panose="02020603050405020304" pitchFamily="18" charset="0"/>
+                <a:cs typeface="Times New Roman" panose="02020603050405020304" pitchFamily="18" charset="0"/>
+              </a:rPr>
+              <a:t>Microsoft Windows AI Platform</a:t>
+            </a:r>
+            <a:r>
+              <a:rPr lang="en-US" sz="1050" b="0" dirty="0">
+                <a:latin typeface="Times New Roman" panose="02020603050405020304" pitchFamily="18" charset="0"/>
+                <a:cs typeface="Times New Roman" panose="02020603050405020304" pitchFamily="18" charset="0"/>
+              </a:rPr>
+              <a:t> - the same architecture from the OS vendor, but unshipped, Enterprise/Pro-gated, closed to third parties, and locked to their models.</a:t>
+            </a:r>
+          </a:p>
+          <a:p>
+            <a:pPr marL="171450" lvl="1" indent="-171450" algn="l">
+              <a:buFont typeface="Arial" panose="020B0604020202020204" pitchFamily="34" charset="0"/>
+              <a:buChar char="•"/>
+            </a:pPr>
+            <a:r>
+              <a:rPr lang="en-US" sz="1050" b="1" dirty="0">
+                <a:latin typeface="Times New Roman" panose="02020603050405020304" pitchFamily="18" charset="0"/>
+                <a:cs typeface="Times New Roman" panose="02020603050405020304" pitchFamily="18" charset="0"/>
+              </a:rPr>
+              <a:t>Raycast AI, Apple Intelligence, Dottie, BoltAI</a:t>
+            </a:r>
+            <a:r>
+              <a:rPr lang="en-US" sz="1050" b="0" dirty="0">
+                <a:latin typeface="Times New Roman" panose="02020603050405020304" pitchFamily="18" charset="0"/>
+                <a:cs typeface="Times New Roman" panose="02020603050405020304" pitchFamily="18" charset="0"/>
+              </a:rPr>
+              <a:t> - the entire "best AI assistant" review category is a Mac category. None of these run on Windows.</a:t>
+            </a:r>
+          </a:p>
+          <a:p>
+            <a:pPr marL="171450" lvl="1" indent="-171450" algn="l">
+              <a:buFont typeface="Arial" panose="020B0604020202020204" pitchFamily="34" charset="0"/>
+              <a:buChar char="•"/>
+            </a:pPr>
+            <a:r>
+              <a:rPr lang="en-US" sz="1050" b="1" dirty="0">
+                <a:latin typeface="Times New Roman" panose="02020603050405020304" pitchFamily="18" charset="0"/>
+                <a:cs typeface="Times New Roman" panose="02020603050405020304" pitchFamily="18" charset="0"/>
+              </a:rPr>
+              <a:t>Jan.ai (5.3M downloads), AnythingLLM, Khoj, PyGPT, Chatbox</a:t>
+            </a:r>
+            <a:r>
+              <a:rPr lang="en-US" sz="1050" b="0" dirty="0">
+                <a:latin typeface="Times New Roman" panose="02020603050405020304" pitchFamily="18" charset="0"/>
+                <a:cs typeface="Times New Roman" panose="02020603050405020304" pitchFamily="18" charset="0"/>
+              </a:rPr>
+              <a:t> - right philosophy, wrong shape. All local-capable and open, and every one is an application window you open.</a:t>
+            </a:r>
+          </a:p>
+          <a:p>
+            <a:pPr marL="171450" lvl="1" indent="-171450" algn="l">
+              <a:buFont typeface="Arial" panose="020B0604020202020204" pitchFamily="34" charset="0"/>
+              <a:buChar char="•"/>
+            </a:pPr>
+            <a:r>
+              <a:rPr lang="en-US" sz="1050" b="1" dirty="0">
+                <a:latin typeface="Times New Roman" panose="02020603050405020304" pitchFamily="18" charset="0"/>
+                <a:cs typeface="Times New Roman" panose="02020603050405020304" pitchFamily="18" charset="0"/>
+              </a:rPr>
+              <a:t>The pattern:</a:t>
+            </a:r>
+            <a:r>
+              <a:rPr lang="en-US" sz="1050" b="0" dirty="0">
+                <a:latin typeface="Times New Roman" panose="02020603050405020304" pitchFamily="18" charset="0"/>
+                <a:cs typeface="Times New Roman" panose="02020603050405020304" pitchFamily="18" charset="0"/>
+              </a:rPr>
+              <a:t> tools that are OS-integrated are closed, cloud-only or hardware-gated. Tools that are local and open are destinations you have to visit.</a:t>
+            </a:r>
           </a:p>
         </p:txBody>
       </p:sp>
@@ -9550,6 +9700,593 @@
           </a:p>
         </p:txBody>
       </p:sp>
+    </p:spTree>
+  </p:cSld>
+  <p:clrMapOvr>
+    <a:masterClrMapping/>
+  </p:clrMapOvr>
+</p:sld>
+</file>
+
+<file path=ppt/slides/slide12.xml><?xml version="1.0" encoding="utf-8"?>
+<p:sld xmlns:a="http://schemas.openxmlformats.org/drawingml/2006/main" xmlns:p="http://schemas.openxmlformats.org/presentationml/2006/main" xmlns:r="http://schemas.openxmlformats.org/officeDocument/2006/relationships">
+  <p:cSld>
+    <p:spTree>
+      <p:nvGrpSpPr>
+        <p:cNvPr id="1" name=""/>
+        <p:cNvGrpSpPr/>
+        <p:nvPr/>
+      </p:nvGrpSpPr>
+      <p:grpSpPr/>
+      <p:sp>
+        <p:nvSpPr>
+          <p:cNvPr id="93" name="Google Shape;93;p9"/>
+          <p:cNvSpPr/>
+          <p:nvPr/>
+        </p:nvSpPr>
+        <p:spPr>
+          <a:xfrm>
+            <a:off x="1905" y="0"/>
+            <a:ext cx="4608195" cy="321945"/>
+          </a:xfrm>
+          <a:custGeom>
+            <a:avLst/>
+            <a:gdLst/>
+            <a:ahLst/>
+            <a:cxnLst/>
+            <a:rect l="l" t="t" r="r" b="b"/>
+            <a:pathLst>
+              <a:path w="4608195" h="321945" extrusionOk="0">
+                <a:moveTo>
+                  <a:pt x="4608004" y="0"/>
+                </a:moveTo>
+                <a:lnTo>
+                  <a:pt x="0" y="0"/>
+                </a:lnTo>
+                <a:lnTo>
+                  <a:pt x="0" y="321500"/>
+                </a:lnTo>
+                <a:lnTo>
+                  <a:pt x="4608004" y="321500"/>
+                </a:lnTo>
+                <a:lnTo>
+                  <a:pt x="4608004" y="0"/>
+                </a:lnTo>
+                <a:close/>
+              </a:path>
+            </a:pathLst>
+          </a:custGeom>
+          <a:solidFill>
+            <a:srgbClr val="3333B2"/>
+          </a:solidFill>
+          <a:ln>
+            <a:noFill/>
+          </a:ln>
+        </p:spPr>
+        <p:txBody>
+          <a:bodyPr spcFirstLastPara="1" wrap="square" lIns="0" tIns="0" rIns="0" bIns="0" anchor="t" anchorCtr="0">
+            <a:noAutofit/>
+          </a:bodyPr>
+          <a:lstStyle/>
+          <a:p>
+            <a:pPr marL="0" lvl="0" indent="0" algn="l" rtl="0">
+              <a:spcBef>
+                <a:spcPts val="0"/>
+              </a:spcBef>
+              <a:spcAft>
+                <a:spcPts val="0"/>
+              </a:spcAft>
+              <a:buNone/>
+            </a:pPr>
+            <a:endParaRPr sz="1800"/>
+          </a:p>
+        </p:txBody>
+      </p:sp>
+      <p:sp>
+        <p:nvSpPr>
+          <p:cNvPr id="94" name="Google Shape;94;p9"/>
+          <p:cNvSpPr txBox="1"/>
+          <p:nvPr/>
+        </p:nvSpPr>
+        <p:spPr>
+          <a:xfrm>
+            <a:off x="95300" y="45565"/>
+            <a:ext cx="4297680" cy="232736"/>
+          </a:xfrm>
+          <a:prstGeom prst="rect">
+            <a:avLst/>
+          </a:prstGeom>
+          <a:noFill/>
+          <a:ln>
+            <a:noFill/>
+          </a:ln>
+        </p:spPr>
+        <p:txBody>
+          <a:bodyPr spcFirstLastPara="1" wrap="square" lIns="0" tIns="17125" rIns="0" bIns="0" anchor="t" anchorCtr="0">
+            <a:spAutoFit/>
+          </a:bodyPr>
+          <a:lstStyle/>
+          <a:p>
+            <a:pPr marL="12700" lvl="0" indent="0" algn="l" rtl="0">
+              <a:lnSpc>
+                <a:spcPct val="100000"/>
+              </a:lnSpc>
+              <a:spcBef>
+                <a:spcPts val="0"/>
+              </a:spcBef>
+              <a:spcAft>
+                <a:spcPts val="0"/>
+              </a:spcAft>
+              <a:buNone/>
+            </a:pPr>
+            <a:endParaRPr sz="1400" dirty="0">
+              <a:latin typeface="Times New Roman" panose="02020603050405020304" pitchFamily="18" charset="0"/>
+              <a:cs typeface="Times New Roman" panose="02020603050405020304" pitchFamily="18" charset="0"/>
+              <a:sym typeface="Arial"/>
+            </a:endParaRPr>
+            <a:r>
+              <a:rPr lang="en-US" sz="1400" dirty="0" b="0">
+                <a:solidFill>
+                  <a:srgbClr val="FFFFFF"/>
+                </a:solidFill>
+                <a:latin typeface="Times New Roman" panose="02020603050405020304" pitchFamily="18" charset="0"/>
+                <a:cs typeface="Times New Roman" panose="02020603050405020304" pitchFamily="18" charset="0"/>
+                <a:sym typeface="Arial"/>
+              </a:rPr>
+              <a:t>The Positioning Table - The Empty Row</a:t>
+            </a:r>
+          </a:p>
+        </p:txBody>
+      </p:sp>
+      <p:grpSp>
+        <p:nvGrpSpPr>
+          <p:cNvPr id="95" name="Google Shape;95;p9"/>
+          <p:cNvGrpSpPr/>
+          <p:nvPr/>
+        </p:nvGrpSpPr>
+        <p:grpSpPr>
+          <a:xfrm>
+            <a:off x="0" y="3326968"/>
+            <a:ext cx="4608017" cy="129539"/>
+            <a:chOff x="0" y="3326968"/>
+            <a:chExt cx="4608017" cy="129539"/>
+          </a:xfrm>
+        </p:grpSpPr>
+        <p:sp>
+          <p:nvSpPr>
+            <p:cNvPr id="96" name="Google Shape;96;p9"/>
+            <p:cNvSpPr/>
+            <p:nvPr/>
+          </p:nvSpPr>
+          <p:spPr>
+            <a:xfrm>
+              <a:off x="0" y="3326968"/>
+              <a:ext cx="1536065" cy="129539"/>
+            </a:xfrm>
+            <a:custGeom>
+              <a:avLst/>
+              <a:gdLst/>
+              <a:ahLst/>
+              <a:cxnLst/>
+              <a:rect l="l" t="t" r="r" b="b"/>
+              <a:pathLst>
+                <a:path w="1536065" h="129539" extrusionOk="0">
+                  <a:moveTo>
+                    <a:pt x="1535976" y="0"/>
+                  </a:moveTo>
+                  <a:lnTo>
+                    <a:pt x="0" y="0"/>
+                  </a:lnTo>
+                  <a:lnTo>
+                    <a:pt x="0" y="129032"/>
+                  </a:lnTo>
+                  <a:lnTo>
+                    <a:pt x="1535976" y="129032"/>
+                  </a:lnTo>
+                  <a:lnTo>
+                    <a:pt x="1535976" y="0"/>
+                  </a:lnTo>
+                  <a:close/>
+                </a:path>
+              </a:pathLst>
+            </a:custGeom>
+            <a:solidFill>
+              <a:srgbClr val="191959"/>
+            </a:solidFill>
+            <a:ln>
+              <a:noFill/>
+            </a:ln>
+          </p:spPr>
+          <p:txBody>
+            <a:bodyPr spcFirstLastPara="1" wrap="square" lIns="0" tIns="0" rIns="0" bIns="0" anchor="t" anchorCtr="0">
+              <a:noAutofit/>
+            </a:bodyPr>
+            <a:lstStyle/>
+            <a:p>
+              <a:pPr marL="0" lvl="0" indent="0" algn="l" rtl="0">
+                <a:spcBef>
+                  <a:spcPts val="0"/>
+                </a:spcBef>
+                <a:spcAft>
+                  <a:spcPts val="0"/>
+                </a:spcAft>
+                <a:buNone/>
+              </a:pPr>
+              <a:endParaRPr sz="1800"/>
+            </a:p>
+          </p:txBody>
+        </p:sp>
+        <p:sp>
+          <p:nvSpPr>
+            <p:cNvPr id="97" name="Google Shape;97;p9"/>
+            <p:cNvSpPr/>
+            <p:nvPr/>
+          </p:nvSpPr>
+          <p:spPr>
+            <a:xfrm>
+              <a:off x="1535976" y="3326968"/>
+              <a:ext cx="1536065" cy="129539"/>
+            </a:xfrm>
+            <a:custGeom>
+              <a:avLst/>
+              <a:gdLst/>
+              <a:ahLst/>
+              <a:cxnLst/>
+              <a:rect l="l" t="t" r="r" b="b"/>
+              <a:pathLst>
+                <a:path w="1536064" h="129539" extrusionOk="0">
+                  <a:moveTo>
+                    <a:pt x="1535976" y="0"/>
+                  </a:moveTo>
+                  <a:lnTo>
+                    <a:pt x="0" y="0"/>
+                  </a:lnTo>
+                  <a:lnTo>
+                    <a:pt x="0" y="129032"/>
+                  </a:lnTo>
+                  <a:lnTo>
+                    <a:pt x="1535976" y="129032"/>
+                  </a:lnTo>
+                  <a:lnTo>
+                    <a:pt x="1535976" y="0"/>
+                  </a:lnTo>
+                  <a:close/>
+                </a:path>
+              </a:pathLst>
+            </a:custGeom>
+            <a:solidFill>
+              <a:srgbClr val="262685"/>
+            </a:solidFill>
+            <a:ln>
+              <a:noFill/>
+            </a:ln>
+          </p:spPr>
+          <p:txBody>
+            <a:bodyPr spcFirstLastPara="1" wrap="square" lIns="0" tIns="0" rIns="0" bIns="0" anchor="t" anchorCtr="0">
+              <a:noAutofit/>
+            </a:bodyPr>
+            <a:lstStyle/>
+            <a:p>
+              <a:pPr marL="0" lvl="0" indent="0" algn="l" rtl="0">
+                <a:spcBef>
+                  <a:spcPts val="0"/>
+                </a:spcBef>
+                <a:spcAft>
+                  <a:spcPts val="0"/>
+                </a:spcAft>
+                <a:buNone/>
+              </a:pPr>
+              <a:endParaRPr sz="1800"/>
+            </a:p>
+          </p:txBody>
+        </p:sp>
+        <p:sp>
+          <p:nvSpPr>
+            <p:cNvPr id="98" name="Google Shape;98;p9"/>
+            <p:cNvSpPr/>
+            <p:nvPr/>
+          </p:nvSpPr>
+          <p:spPr>
+            <a:xfrm>
+              <a:off x="3071952" y="3326968"/>
+              <a:ext cx="1536065" cy="129539"/>
+            </a:xfrm>
+            <a:custGeom>
+              <a:avLst/>
+              <a:gdLst/>
+              <a:ahLst/>
+              <a:cxnLst/>
+              <a:rect l="l" t="t" r="r" b="b"/>
+              <a:pathLst>
+                <a:path w="1536064" h="129539" extrusionOk="0">
+                  <a:moveTo>
+                    <a:pt x="1535976" y="0"/>
+                  </a:moveTo>
+                  <a:lnTo>
+                    <a:pt x="0" y="0"/>
+                  </a:lnTo>
+                  <a:lnTo>
+                    <a:pt x="0" y="129032"/>
+                  </a:lnTo>
+                  <a:lnTo>
+                    <a:pt x="1535976" y="129032"/>
+                  </a:lnTo>
+                  <a:lnTo>
+                    <a:pt x="1535976" y="0"/>
+                  </a:lnTo>
+                  <a:close/>
+                </a:path>
+              </a:pathLst>
+            </a:custGeom>
+            <a:solidFill>
+              <a:srgbClr val="3333B2"/>
+            </a:solidFill>
+            <a:ln>
+              <a:noFill/>
+            </a:ln>
+          </p:spPr>
+          <p:txBody>
+            <a:bodyPr spcFirstLastPara="1" wrap="square" lIns="0" tIns="0" rIns="0" bIns="0" anchor="t" anchorCtr="0">
+              <a:noAutofit/>
+            </a:bodyPr>
+            <a:lstStyle/>
+            <a:p>
+              <a:pPr marL="0" lvl="0" indent="0" algn="l" rtl="0">
+                <a:spcBef>
+                  <a:spcPts val="0"/>
+                </a:spcBef>
+                <a:spcAft>
+                  <a:spcPts val="0"/>
+                </a:spcAft>
+                <a:buNone/>
+              </a:pPr>
+              <a:endParaRPr sz="1800"/>
+            </a:p>
+          </p:txBody>
+        </p:sp>
+      </p:grpSp>
+      <p:sp>
+        <p:nvSpPr>
+          <p:cNvPr id="99" name="Google Shape;99;p9"/>
+          <p:cNvSpPr txBox="1">
+            <a:spLocks noGrp="1"/>
+          </p:cNvSpPr>
+          <p:nvPr>
+            <p:ph type="ftr" idx="11"/>
+          </p:nvPr>
+        </p:nvSpPr>
+        <p:spPr>
+          <a:xfrm>
+            <a:off x="421944" y="3331252"/>
+            <a:ext cx="692150" cy="285961"/>
+          </a:xfrm>
+          <a:prstGeom prst="rect">
+            <a:avLst/>
+          </a:prstGeom>
+          <a:noFill/>
+          <a:ln>
+            <a:noFill/>
+          </a:ln>
+        </p:spPr>
+        <p:txBody>
+          <a:bodyPr spcFirstLastPara="1" wrap="square" lIns="0" tIns="8875" rIns="0" bIns="0" anchor="t" anchorCtr="0">
+            <a:spAutoFit/>
+          </a:bodyPr>
+          <a:lstStyle/>
+          <a:p>
+            <a:pPr marL="12700"/>
+            <a:r>
+              <a:rPr lang="en-US" dirty="0">
+                <a:latin typeface="Times New Roman" panose="02020603050405020304" pitchFamily="18" charset="0"/>
+                <a:cs typeface="Times New Roman" panose="02020603050405020304" pitchFamily="18" charset="0"/>
+              </a:rPr>
+              <a:t>Dept of Comp </a:t>
+            </a:r>
+            <a:r>
+              <a:rPr lang="en-US" dirty="0" err="1">
+                <a:latin typeface="Times New Roman" panose="02020603050405020304" pitchFamily="18" charset="0"/>
+                <a:cs typeface="Times New Roman" panose="02020603050405020304" pitchFamily="18" charset="0"/>
+              </a:rPr>
+              <a:t>Engg</a:t>
+            </a:r>
+            <a:endParaRPr lang="en-US" dirty="0">
+              <a:latin typeface="Times New Roman" panose="02020603050405020304" pitchFamily="18" charset="0"/>
+              <a:cs typeface="Times New Roman" panose="02020603050405020304" pitchFamily="18" charset="0"/>
+            </a:endParaRPr>
+          </a:p>
+          <a:p>
+            <a:pPr marL="12700" lvl="0"/>
+            <a:endParaRPr lang="en-US" dirty="0"/>
+          </a:p>
+          <a:p>
+            <a:pPr marL="12700" lvl="0" indent="0" algn="l" rtl="0">
+              <a:lnSpc>
+                <a:spcPct val="100000"/>
+              </a:lnSpc>
+              <a:spcBef>
+                <a:spcPts val="0"/>
+              </a:spcBef>
+              <a:spcAft>
+                <a:spcPts val="0"/>
+              </a:spcAft>
+              <a:buNone/>
+            </a:pPr>
+            <a:endParaRPr dirty="0"/>
+          </a:p>
+        </p:txBody>
+      </p:sp>
+      <p:sp>
+        <p:nvSpPr>
+          <p:cNvPr id="102" name="Google Shape;102;p9"/>
+          <p:cNvSpPr txBox="1">
+            <a:spLocks noGrp="1"/>
+          </p:cNvSpPr>
+          <p:nvPr>
+            <p:ph type="sldNum" idx="12"/>
+          </p:nvPr>
+        </p:nvSpPr>
+        <p:spPr>
+          <a:xfrm>
+            <a:off x="4275161" y="3331252"/>
+            <a:ext cx="266700" cy="101295"/>
+          </a:xfrm>
+          <a:prstGeom prst="rect">
+            <a:avLst/>
+          </a:prstGeom>
+          <a:noFill/>
+          <a:ln>
+            <a:noFill/>
+          </a:ln>
+        </p:spPr>
+        <p:txBody>
+          <a:bodyPr spcFirstLastPara="1" wrap="square" lIns="0" tIns="8875" rIns="0" bIns="0" anchor="t" anchorCtr="0">
+            <a:spAutoFit/>
+          </a:bodyPr>
+          <a:lstStyle/>
+          <a:p>
+            <a:pPr marL="38100" lvl="0" indent="0" algn="l" rtl="0">
+              <a:lnSpc>
+                <a:spcPct val="100000"/>
+              </a:lnSpc>
+              <a:spcBef>
+                <a:spcPts val="0"/>
+              </a:spcBef>
+              <a:spcAft>
+                <a:spcPts val="0"/>
+              </a:spcAft>
+              <a:buNone/>
+            </a:pPr>
+            <a:fld id="{00000000-1234-1234-1234-123412341234}" type="slidenum">
+              <a:rPr lang="en-US">
+                <a:latin typeface="Times New Roman" panose="02020603050405020304" pitchFamily="18" charset="0"/>
+                <a:cs typeface="Times New Roman" panose="02020603050405020304" pitchFamily="18" charset="0"/>
+              </a:rPr>
+              <a:t>12</a:t>
+            </a:fld>
+            <a:r>
+              <a:rPr lang="en-US" dirty="0">
+                <a:latin typeface="Times New Roman" panose="02020603050405020304" pitchFamily="18" charset="0"/>
+                <a:cs typeface="Times New Roman" panose="02020603050405020304" pitchFamily="18" charset="0"/>
+              </a:rPr>
+              <a:t> / 33</a:t>
+            </a:r>
+            <a:endParaRPr dirty="0">
+              <a:latin typeface="Times New Roman" panose="02020603050405020304" pitchFamily="18" charset="0"/>
+              <a:cs typeface="Times New Roman" panose="02020603050405020304" pitchFamily="18" charset="0"/>
+            </a:endParaRPr>
+          </a:p>
+        </p:txBody>
+      </p:sp>
+      <p:sp>
+        <p:nvSpPr>
+          <p:cNvPr id="8" name="Google Shape;85;p8">
+            <a:extLst>
+              <a:ext uri="{FF2B5EF4-FFF2-40B4-BE49-F238E27FC236}">
+                <a16:creationId xmlns:a16="http://schemas.microsoft.com/office/drawing/2014/main" id="{B445AC1F-8D42-9224-714E-741A4A81DCCA}"/>
+              </a:ext>
+            </a:extLst>
+          </p:cNvPr>
+          <p:cNvSpPr txBox="1"/>
+          <p:nvPr/>
+        </p:nvSpPr>
+        <p:spPr>
+          <a:xfrm>
+            <a:off x="1773059" y="3331250"/>
+            <a:ext cx="1211100" cy="101295"/>
+          </a:xfrm>
+          <a:prstGeom prst="rect">
+            <a:avLst/>
+          </a:prstGeom>
+          <a:noFill/>
+          <a:ln>
+            <a:noFill/>
+          </a:ln>
+        </p:spPr>
+        <p:txBody>
+          <a:bodyPr spcFirstLastPara="1" wrap="square" lIns="0" tIns="8875" rIns="0" bIns="0" anchor="t" anchorCtr="0">
+            <a:spAutoFit/>
+          </a:bodyPr>
+          <a:lstStyle/>
+          <a:p>
+            <a:pPr marL="12700" lvl="0"/>
+            <a:endParaRPr lang="en-US" sz="600" dirty="0">
+              <a:latin typeface="Times New Roman" panose="02020603050405020304" pitchFamily="18" charset="0"/>
+              <a:cs typeface="Times New Roman" panose="02020603050405020304" pitchFamily="18" charset="0"/>
+            </a:endParaRPr>
+            <a:r>
+              <a:rPr lang="en-US" sz="600" dirty="0" b="0">
+                <a:solidFill>
+                  <a:srgbClr val="FFFFFF"/>
+                </a:solidFill>
+                <a:latin typeface="Times New Roman" panose="02020603050405020304" pitchFamily="18" charset="0"/>
+                <a:cs typeface="Times New Roman" panose="02020603050405020304" pitchFamily="18" charset="0"/>
+              </a:rPr>
+              <a:t>PERCH</a:t>
+            </a:r>
+          </a:p>
+        </p:txBody>
+      </p:sp>
+      <p:sp>
+        <p:nvSpPr>
+          <p:cNvPr id="9" name="Google Shape;72;p7">
+            <a:extLst>
+              <a:ext uri="{FF2B5EF4-FFF2-40B4-BE49-F238E27FC236}">
+                <a16:creationId xmlns:a16="http://schemas.microsoft.com/office/drawing/2014/main" id="{AD0AEF20-4852-6A69-5088-EB2B0F643C44}"/>
+              </a:ext>
+            </a:extLst>
+          </p:cNvPr>
+          <p:cNvSpPr txBox="1">
+            <a:spLocks noGrp="1"/>
+          </p:cNvSpPr>
+          <p:nvPr>
+            <p:ph type="dt" idx="10"/>
+          </p:nvPr>
+        </p:nvSpPr>
+        <p:spPr>
+          <a:xfrm>
+            <a:off x="3442063" y="3331251"/>
+            <a:ext cx="746093" cy="101295"/>
+          </a:xfrm>
+          <a:prstGeom prst="rect">
+            <a:avLst/>
+          </a:prstGeom>
+          <a:noFill/>
+          <a:ln>
+            <a:noFill/>
+          </a:ln>
+        </p:spPr>
+        <p:txBody>
+          <a:bodyPr spcFirstLastPara="1" wrap="square" lIns="0" tIns="8875" rIns="0" bIns="0" anchor="t" anchorCtr="0">
+            <a:spAutoFit/>
+          </a:bodyPr>
+          <a:lstStyle/>
+          <a:p>
+            <a:pPr marL="12700" lvl="0" indent="0" algn="l" rtl="0">
+              <a:lnSpc>
+                <a:spcPct val="100000"/>
+              </a:lnSpc>
+              <a:spcBef>
+                <a:spcPts val="0"/>
+              </a:spcBef>
+              <a:spcAft>
+                <a:spcPts val="0"/>
+              </a:spcAft>
+              <a:buNone/>
+            </a:pPr>
+            <a:r>
+              <a:rPr lang="en-US" dirty="0">
+                <a:latin typeface="Times New Roman" panose="02020603050405020304" pitchFamily="18" charset="0"/>
+                <a:cs typeface="Times New Roman" panose="02020603050405020304" pitchFamily="18" charset="0"/>
+              </a:rPr>
+              <a:t>August-2026</a:t>
+            </a:r>
+            <a:endParaRPr dirty="0">
+              <a:latin typeface="Times New Roman" panose="02020603050405020304" pitchFamily="18" charset="0"/>
+              <a:cs typeface="Times New Roman" panose="02020603050405020304" pitchFamily="18" charset="0"/>
+            </a:endParaRPr>
+          </a:p>
+        </p:txBody>
+      </p:sp>
       <p:graphicFrame>
         <p:nvGraphicFramePr>
           <p:cNvPr id="103" name="Table 102"/>
@@ -9559,8 +10296,8 @@
           <p:nvPr/>
         </p:nvGraphicFramePr>
         <p:xfrm>
-          <a:off x="109728" y="502920"/>
-          <a:ext cx="4387287" cy="1463040"/>
+          <a:off x="109728" y="457200"/>
+          <a:ext cx="4389114" cy="1463040"/>
         </p:xfrm>
         <a:graphic>
           <a:graphicData uri="http://schemas.openxmlformats.org/drawingml/2006/table">
@@ -9570,13 +10307,13 @@
               </a:tblPr>
               <a:tblGrid>
                 <a:gridCol w="969264"/>
-                <a:gridCol w="488289"/>
-                <a:gridCol w="488289"/>
-                <a:gridCol w="488289"/>
-                <a:gridCol w="488289"/>
-                <a:gridCol w="488289"/>
-                <a:gridCol w="488289"/>
-                <a:gridCol w="488289"/>
+                <a:gridCol w="488550"/>
+                <a:gridCol w="488550"/>
+                <a:gridCol w="488550"/>
+                <a:gridCol w="488550"/>
+                <a:gridCol w="488550"/>
+                <a:gridCol w="488550"/>
+                <a:gridCol w="488550"/>
               </a:tblGrid>
               <a:tr h="274320">
                 <a:tc>
@@ -9587,7 +10324,7 @@
                       <a:pPr algn="l"/>
                     </a:p>
                   </a:txBody>
-                  <a:tcPr marL="18000" marR="18000" marT="9000" marB="9000">
+                  <a:tcPr marL="20000" marR="20000" marT="9000" marB="9000">
                     <a:solidFill>
                       <a:srgbClr val="1F2A44"/>
                     </a:solidFill>
@@ -9610,7 +10347,7 @@
                       </a:r>
                     </a:p>
                   </a:txBody>
-                  <a:tcPr marL="18000" marR="18000" marT="9000" marB="9000">
+                  <a:tcPr marL="20000" marR="20000" marT="9000" marB="9000">
                     <a:solidFill>
                       <a:srgbClr val="1F2A44"/>
                     </a:solidFill>
@@ -9645,7 +10382,7 @@
                       </a:r>
                     </a:p>
                   </a:txBody>
-                  <a:tcPr marL="18000" marR="18000" marT="9000" marB="9000">
+                  <a:tcPr marL="20000" marR="20000" marT="9000" marB="9000">
                     <a:solidFill>
                       <a:srgbClr val="1F2A44"/>
                     </a:solidFill>
@@ -9680,7 +10417,7 @@
                       </a:r>
                     </a:p>
                   </a:txBody>
-                  <a:tcPr marL="18000" marR="18000" marT="9000" marB="9000">
+                  <a:tcPr marL="20000" marR="20000" marT="9000" marB="9000">
                     <a:solidFill>
                       <a:srgbClr val="1F2A44"/>
                     </a:solidFill>
@@ -9715,7 +10452,7 @@
                       </a:r>
                     </a:p>
                   </a:txBody>
-                  <a:tcPr marL="18000" marR="18000" marT="9000" marB="9000">
+                  <a:tcPr marL="20000" marR="20000" marT="9000" marB="9000">
                     <a:solidFill>
                       <a:srgbClr val="1F2A44"/>
                     </a:solidFill>
@@ -9750,7 +10487,7 @@
                       </a:r>
                     </a:p>
                   </a:txBody>
-                  <a:tcPr marL="18000" marR="18000" marT="9000" marB="9000">
+                  <a:tcPr marL="20000" marR="20000" marT="9000" marB="9000">
                     <a:solidFill>
                       <a:srgbClr val="1F2A44"/>
                     </a:solidFill>
@@ -9785,7 +10522,7 @@
                       </a:r>
                     </a:p>
                   </a:txBody>
-                  <a:tcPr marL="18000" marR="18000" marT="9000" marB="9000">
+                  <a:tcPr marL="20000" marR="20000" marT="9000" marB="9000">
                     <a:solidFill>
                       <a:srgbClr val="1F2A44"/>
                     </a:solidFill>
@@ -9820,7 +10557,7 @@
                       </a:r>
                     </a:p>
                   </a:txBody>
-                  <a:tcPr marL="18000" marR="18000" marT="9000" marB="9000">
+                  <a:tcPr marL="20000" marR="20000" marT="9000" marB="9000">
                     <a:solidFill>
                       <a:srgbClr val="1F2A44"/>
                     </a:solidFill>
@@ -9845,7 +10582,7 @@
                       </a:r>
                     </a:p>
                   </a:txBody>
-                  <a:tcPr marL="18000" marR="18000" marT="9000" marB="9000">
+                  <a:tcPr marL="20000" marR="20000" marT="9000" marB="9000">
                     <a:solidFill>
                       <a:srgbClr val="F4F5F7"/>
                     </a:solidFill>
@@ -9868,7 +10605,7 @@
                       </a:r>
                     </a:p>
                   </a:txBody>
-                  <a:tcPr marL="18000" marR="18000" marT="9000" marB="9000">
+                  <a:tcPr marL="20000" marR="20000" marT="9000" marB="9000">
                     <a:solidFill>
                       <a:srgbClr val="F4F5F7"/>
                     </a:solidFill>
@@ -9891,7 +10628,7 @@
                       </a:r>
                     </a:p>
                   </a:txBody>
-                  <a:tcPr marL="18000" marR="18000" marT="9000" marB="9000">
+                  <a:tcPr marL="20000" marR="20000" marT="9000" marB="9000">
                     <a:solidFill>
                       <a:srgbClr val="F4F5F7"/>
                     </a:solidFill>
@@ -9914,7 +10651,7 @@
                       </a:r>
                     </a:p>
                   </a:txBody>
-                  <a:tcPr marL="18000" marR="18000" marT="9000" marB="9000">
+                  <a:tcPr marL="20000" marR="20000" marT="9000" marB="9000">
                     <a:solidFill>
                       <a:srgbClr val="F4F5F7"/>
                     </a:solidFill>
@@ -9937,7 +10674,7 @@
                       </a:r>
                     </a:p>
                   </a:txBody>
-                  <a:tcPr marL="18000" marR="18000" marT="9000" marB="9000">
+                  <a:tcPr marL="20000" marR="20000" marT="9000" marB="9000">
                     <a:solidFill>
                       <a:srgbClr val="F4F5F7"/>
                     </a:solidFill>
@@ -9960,7 +10697,7 @@
                       </a:r>
                     </a:p>
                   </a:txBody>
-                  <a:tcPr marL="18000" marR="18000" marT="9000" marB="9000">
+                  <a:tcPr marL="20000" marR="20000" marT="9000" marB="9000">
                     <a:solidFill>
                       <a:srgbClr val="F4F5F7"/>
                     </a:solidFill>
@@ -9979,11 +10716,11 @@
                           </a:solidFill>
                           <a:latin typeface="Times New Roman"/>
                         </a:rPr>
-                        <a:t>N  pivoted</a:t>
+                        <a:t>N  teams</a:t>
                       </a:r>
                     </a:p>
                   </a:txBody>
-                  <a:tcPr marL="18000" marR="18000" marT="9000" marB="9000">
+                  <a:tcPr marL="20000" marR="20000" marT="9000" marB="9000">
                     <a:solidFill>
                       <a:srgbClr val="F4F5F7"/>
                     </a:solidFill>
@@ -10006,7 +10743,7 @@
                       </a:r>
                     </a:p>
                   </a:txBody>
-                  <a:tcPr marL="18000" marR="18000" marT="9000" marB="9000">
+                  <a:tcPr marL="20000" marR="20000" marT="9000" marB="9000">
                     <a:solidFill>
                       <a:srgbClr val="F4F5F7"/>
                     </a:solidFill>
@@ -10027,11 +10764,11 @@
                           </a:solidFill>
                           <a:latin typeface="Times New Roman"/>
                         </a:rPr>
-                        <a:t>Click to Do</a:t>
+                        <a:t>Windows AI Platform</a:t>
                       </a:r>
                     </a:p>
                   </a:txBody>
-                  <a:tcPr marL="18000" marR="18000" marT="9000" marB="9000">
+                  <a:tcPr marL="20000" marR="20000" marT="9000" marB="9000">
                     <a:solidFill>
                       <a:srgbClr val="FFFFFF"/>
                     </a:solidFill>
@@ -10054,30 +10791,7 @@
                       </a:r>
                     </a:p>
                   </a:txBody>
-                  <a:tcPr marL="18000" marR="18000" marT="9000" marB="9000">
-                    <a:solidFill>
-                      <a:srgbClr val="FFFFFF"/>
-                    </a:solidFill>
-                  </a:tcPr>
-                </a:tc>
-                <a:tc>
-                  <a:txBody>
-                    <a:bodyPr/>
-                    <a:lstStyle/>
-                    <a:p>
-                      <a:pPr algn="ctr"/>
-                      <a:r>
-                        <a:rPr sz="850" b="0">
-                          <a:solidFill>
-                            <a:srgbClr val="B02A2A"/>
-                          </a:solidFill>
-                          <a:latin typeface="Times New Roman"/>
-                        </a:rPr>
-                        <a:t>N  NPU</a:t>
-                      </a:r>
-                    </a:p>
-                  </a:txBody>
-                  <a:tcPr marL="18000" marR="18000" marT="9000" marB="9000">
+                  <a:tcPr marL="20000" marR="20000" marT="9000" marB="9000">
                     <a:solidFill>
                       <a:srgbClr val="FFFFFF"/>
                     </a:solidFill>
@@ -10100,7 +10814,30 @@
                       </a:r>
                     </a:p>
                   </a:txBody>
-                  <a:tcPr marL="18000" marR="18000" marT="9000" marB="9000">
+                  <a:tcPr marL="20000" marR="20000" marT="9000" marB="9000">
+                    <a:solidFill>
+                      <a:srgbClr val="FFFFFF"/>
+                    </a:solidFill>
+                  </a:tcPr>
+                </a:tc>
+                <a:tc>
+                  <a:txBody>
+                    <a:bodyPr/>
+                    <a:lstStyle/>
+                    <a:p>
+                      <a:pPr algn="ctr"/>
+                      <a:r>
+                        <a:rPr sz="850" b="0">
+                          <a:solidFill>
+                            <a:srgbClr val="1B7F3B"/>
+                          </a:solidFill>
+                          <a:latin typeface="Times New Roman"/>
+                        </a:rPr>
+                        <a:t>Y</a:t>
+                      </a:r>
+                    </a:p>
+                  </a:txBody>
+                  <a:tcPr marL="20000" marR="20000" marT="9000" marB="9000">
                     <a:solidFill>
                       <a:srgbClr val="FFFFFF"/>
                     </a:solidFill>
@@ -10123,7 +10860,7 @@
                       </a:r>
                     </a:p>
                   </a:txBody>
-                  <a:tcPr marL="18000" marR="18000" marT="9000" marB="9000">
+                  <a:tcPr marL="20000" marR="20000" marT="9000" marB="9000">
                     <a:solidFill>
                       <a:srgbClr val="FFFFFF"/>
                     </a:solidFill>
@@ -10146,7 +10883,7 @@
                       </a:r>
                     </a:p>
                   </a:txBody>
-                  <a:tcPr marL="18000" marR="18000" marT="9000" marB="9000">
+                  <a:tcPr marL="20000" marR="20000" marT="9000" marB="9000">
                     <a:solidFill>
                       <a:srgbClr val="FFFFFF"/>
                     </a:solidFill>
@@ -10161,15 +10898,15 @@
                       <a:r>
                         <a:rPr sz="850" b="0">
                           <a:solidFill>
-                            <a:srgbClr val="1B7F3B"/>
+                            <a:srgbClr val="B02A2A"/>
                           </a:solidFill>
                           <a:latin typeface="Times New Roman"/>
                         </a:rPr>
-                        <a:t>Y</a:t>
+                        <a:t>N  Pro</a:t>
                       </a:r>
                     </a:p>
                   </a:txBody>
-                  <a:tcPr marL="18000" marR="18000" marT="9000" marB="9000">
+                  <a:tcPr marL="20000" marR="20000" marT="9000" marB="9000">
                     <a:solidFill>
                       <a:srgbClr val="FFFFFF"/>
                     </a:solidFill>
@@ -10192,7 +10929,7 @@
                       </a:r>
                     </a:p>
                   </a:txBody>
-                  <a:tcPr marL="18000" marR="18000" marT="9000" marB="9000">
+                  <a:tcPr marL="20000" marR="20000" marT="9000" marB="9000">
                     <a:solidFill>
                       <a:srgbClr val="FFFFFF"/>
                     </a:solidFill>
@@ -10217,7 +10954,7 @@
                       </a:r>
                     </a:p>
                   </a:txBody>
-                  <a:tcPr marL="18000" marR="18000" marT="9000" marB="9000">
+                  <a:tcPr marL="20000" marR="20000" marT="9000" marB="9000">
                     <a:solidFill>
                       <a:srgbClr val="F4F5F7"/>
                     </a:solidFill>
@@ -10240,7 +10977,7 @@
                       </a:r>
                     </a:p>
                   </a:txBody>
-                  <a:tcPr marL="18000" marR="18000" marT="9000" marB="9000">
+                  <a:tcPr marL="20000" marR="20000" marT="9000" marB="9000">
                     <a:solidFill>
                       <a:srgbClr val="F4F5F7"/>
                     </a:solidFill>
@@ -10263,7 +11000,7 @@
                       </a:r>
                     </a:p>
                   </a:txBody>
-                  <a:tcPr marL="18000" marR="18000" marT="9000" marB="9000">
+                  <a:tcPr marL="20000" marR="20000" marT="9000" marB="9000">
                     <a:solidFill>
                       <a:srgbClr val="F4F5F7"/>
                     </a:solidFill>
@@ -10286,7 +11023,7 @@
                       </a:r>
                     </a:p>
                   </a:txBody>
-                  <a:tcPr marL="18000" marR="18000" marT="9000" marB="9000">
+                  <a:tcPr marL="20000" marR="20000" marT="9000" marB="9000">
                     <a:solidFill>
                       <a:srgbClr val="F4F5F7"/>
                     </a:solidFill>
@@ -10309,7 +11046,7 @@
                       </a:r>
                     </a:p>
                   </a:txBody>
-                  <a:tcPr marL="18000" marR="18000" marT="9000" marB="9000">
+                  <a:tcPr marL="20000" marR="20000" marT="9000" marB="9000">
                     <a:solidFill>
                       <a:srgbClr val="F4F5F7"/>
                     </a:solidFill>
@@ -10332,7 +11069,7 @@
                       </a:r>
                     </a:p>
                   </a:txBody>
-                  <a:tcPr marL="18000" marR="18000" marT="9000" marB="9000">
+                  <a:tcPr marL="20000" marR="20000" marT="9000" marB="9000">
                     <a:solidFill>
                       <a:srgbClr val="F4F5F7"/>
                     </a:solidFill>
@@ -10355,7 +11092,7 @@
                       </a:r>
                     </a:p>
                   </a:txBody>
-                  <a:tcPr marL="18000" marR="18000" marT="9000" marB="9000">
+                  <a:tcPr marL="20000" marR="20000" marT="9000" marB="9000">
                     <a:solidFill>
                       <a:srgbClr val="F4F5F7"/>
                     </a:solidFill>
@@ -10378,7 +11115,7 @@
                       </a:r>
                     </a:p>
                   </a:txBody>
-                  <a:tcPr marL="18000" marR="18000" marT="9000" marB="9000">
+                  <a:tcPr marL="20000" marR="20000" marT="9000" marB="9000">
                     <a:solidFill>
                       <a:srgbClr val="F4F5F7"/>
                     </a:solidFill>
@@ -10403,7 +11140,7 @@
                       </a:r>
                     </a:p>
                   </a:txBody>
-                  <a:tcPr marL="18000" marR="18000" marT="9000" marB="9000">
+                  <a:tcPr marL="20000" marR="20000" marT="9000" marB="9000">
                     <a:solidFill>
                       <a:srgbClr val="FFFFFF"/>
                     </a:solidFill>
@@ -10426,7 +11163,7 @@
                       </a:r>
                     </a:p>
                   </a:txBody>
-                  <a:tcPr marL="18000" marR="18000" marT="9000" marB="9000">
+                  <a:tcPr marL="20000" marR="20000" marT="9000" marB="9000">
                     <a:solidFill>
                       <a:srgbClr val="FFFFFF"/>
                     </a:solidFill>
@@ -10449,7 +11186,7 @@
                       </a:r>
                     </a:p>
                   </a:txBody>
-                  <a:tcPr marL="18000" marR="18000" marT="9000" marB="9000">
+                  <a:tcPr marL="20000" marR="20000" marT="9000" marB="9000">
                     <a:solidFill>
                       <a:srgbClr val="FFFFFF"/>
                     </a:solidFill>
@@ -10472,7 +11209,7 @@
                       </a:r>
                     </a:p>
                   </a:txBody>
-                  <a:tcPr marL="18000" marR="18000" marT="9000" marB="9000">
+                  <a:tcPr marL="20000" marR="20000" marT="9000" marB="9000">
                     <a:solidFill>
                       <a:srgbClr val="FFFFFF"/>
                     </a:solidFill>
@@ -10495,7 +11232,7 @@
                       </a:r>
                     </a:p>
                   </a:txBody>
-                  <a:tcPr marL="18000" marR="18000" marT="9000" marB="9000">
+                  <a:tcPr marL="20000" marR="20000" marT="9000" marB="9000">
                     <a:solidFill>
                       <a:srgbClr val="FFFFFF"/>
                     </a:solidFill>
@@ -10518,7 +11255,7 @@
                       </a:r>
                     </a:p>
                   </a:txBody>
-                  <a:tcPr marL="18000" marR="18000" marT="9000" marB="9000">
+                  <a:tcPr marL="20000" marR="20000" marT="9000" marB="9000">
                     <a:solidFill>
                       <a:srgbClr val="FFFFFF"/>
                     </a:solidFill>
@@ -10541,7 +11278,7 @@
                       </a:r>
                     </a:p>
                   </a:txBody>
-                  <a:tcPr marL="18000" marR="18000" marT="9000" marB="9000">
+                  <a:tcPr marL="20000" marR="20000" marT="9000" marB="9000">
                     <a:solidFill>
                       <a:srgbClr val="FFFFFF"/>
                     </a:solidFill>
@@ -10564,7 +11301,7 @@
                       </a:r>
                     </a:p>
                   </a:txBody>
-                  <a:tcPr marL="18000" marR="18000" marT="9000" marB="9000">
+                  <a:tcPr marL="20000" marR="20000" marT="9000" marB="9000">
                     <a:solidFill>
                       <a:srgbClr val="FFFFFF"/>
                     </a:solidFill>
@@ -10589,7 +11326,7 @@
                       </a:r>
                     </a:p>
                   </a:txBody>
-                  <a:tcPr marL="18000" marR="18000" marT="9000" marB="9000">
+                  <a:tcPr marL="20000" marR="20000" marT="9000" marB="9000">
                     <a:solidFill>
                       <a:srgbClr val="E7F3EA"/>
                     </a:solidFill>
@@ -10612,7 +11349,7 @@
                       </a:r>
                     </a:p>
                   </a:txBody>
-                  <a:tcPr marL="18000" marR="18000" marT="9000" marB="9000">
+                  <a:tcPr marL="20000" marR="20000" marT="9000" marB="9000">
                     <a:solidFill>
                       <a:srgbClr val="E7F3EA"/>
                     </a:solidFill>
@@ -10635,7 +11372,7 @@
                       </a:r>
                     </a:p>
                   </a:txBody>
-                  <a:tcPr marL="18000" marR="18000" marT="9000" marB="9000">
+                  <a:tcPr marL="20000" marR="20000" marT="9000" marB="9000">
                     <a:solidFill>
                       <a:srgbClr val="E7F3EA"/>
                     </a:solidFill>
@@ -10658,7 +11395,7 @@
                       </a:r>
                     </a:p>
                   </a:txBody>
-                  <a:tcPr marL="18000" marR="18000" marT="9000" marB="9000">
+                  <a:tcPr marL="20000" marR="20000" marT="9000" marB="9000">
                     <a:solidFill>
                       <a:srgbClr val="E7F3EA"/>
                     </a:solidFill>
@@ -10681,7 +11418,7 @@
                       </a:r>
                     </a:p>
                   </a:txBody>
-                  <a:tcPr marL="18000" marR="18000" marT="9000" marB="9000">
+                  <a:tcPr marL="20000" marR="20000" marT="9000" marB="9000">
                     <a:solidFill>
                       <a:srgbClr val="E7F3EA"/>
                     </a:solidFill>
@@ -10704,7 +11441,7 @@
                       </a:r>
                     </a:p>
                   </a:txBody>
-                  <a:tcPr marL="18000" marR="18000" marT="9000" marB="9000">
+                  <a:tcPr marL="20000" marR="20000" marT="9000" marB="9000">
                     <a:solidFill>
                       <a:srgbClr val="E7F3EA"/>
                     </a:solidFill>
@@ -10727,7 +11464,7 @@
                       </a:r>
                     </a:p>
                   </a:txBody>
-                  <a:tcPr marL="18000" marR="18000" marT="9000" marB="9000">
+                  <a:tcPr marL="20000" marR="20000" marT="9000" marB="9000">
                     <a:solidFill>
                       <a:srgbClr val="E7F3EA"/>
                     </a:solidFill>
@@ -10750,7 +11487,7 @@
                       </a:r>
                     </a:p>
                   </a:txBody>
-                  <a:tcPr marL="18000" marR="18000" marT="9000" marB="9000">
+                  <a:tcPr marL="20000" marR="20000" marT="9000" marB="9000">
                     <a:solidFill>
                       <a:srgbClr val="E7F3EA"/>
                     </a:solidFill>
@@ -10769,8 +11506,8 @@
         </p:nvSpPr>
         <p:spPr>
           <a:xfrm>
-            <a:off x="109728" y="2395728"/>
-            <a:ext cx="4389120" cy="822960"/>
+            <a:off x="109728" y="2240280"/>
+            <a:ext cx="4389120" cy="914400"/>
           </a:xfrm>
           <a:prstGeom prst="rect">
             <a:avLst/>
@@ -10784,13 +11521,13 @@
           <a:lstStyle/>
           <a:p>
             <a:r>
-              <a:rPr b="1" sz="950">
+              <a:rPr b="1" sz="900">
                 <a:latin typeface="Times New Roman"/>
               </a:rPr>
               <a:t>Read the columns, not the rows.</a:t>
             </a:r>
             <a:r>
-              <a:rPr b="0" sz="950">
+              <a:rPr b="0" sz="900">
                 <a:latin typeface="Times New Roman"/>
               </a:rPr>
               <a:t> Every competitor fails at least one column that matters to an individual user on an ordinary Windows laptop.</a:t>
@@ -10798,27 +11535,27 @@
           </a:p>
           <a:p>
             <a:r>
-              <a:rPr b="1" sz="950">
+              <a:rPr b="1" sz="900">
                 <a:latin typeface="Times New Roman"/>
               </a:rPr>
-              <a:t>Highlight is closed, cloud-only and has left this segment.</a:t>
-            </a:r>
-            <a:r>
-              <a:rPr b="0" sz="950">
+              <a:t>Highlight is closed and cloud-only and has moved to teams. Microsoft's platform is unshipped, Enterprise/Pro-gated and closed to third parties.</a:t>
+            </a:r>
+            <a:r>
+              <a:rPr b="0" sz="900">
                 <a:latin typeface="Times New Roman"/>
               </a:rPr>
-              <a:t> Click to Do needs an NPU. The Mac tools do not run here. The local, open tools are all windows you have to go to.</a:t>
-            </a:r>
-          </a:p>
-          <a:p>
-            <a:r>
-              <a:rPr b="1" sz="950">
+              <a:t> The Mac tools do not run here, and the local open tools are all windows you have to go to.</a:t>
+            </a:r>
+          </a:p>
+          <a:p>
+            <a:r>
+              <a:rPr b="1" sz="900">
                 <a:latin typeface="Times New Roman"/>
               </a:rPr>
               <a:t>The bottom row is the project.</a:t>
             </a:r>
             <a:r>
-              <a:rPr b="0" sz="950">
+              <a:rPr b="0" sz="900">
                 <a:latin typeface="Times New Roman"/>
               </a:rPr>
               <a:t> Nothing in it is individually novel - the combination is the one nobody is shipping.</a:t>
@@ -10834,7 +11571,7 @@
 </p:sld>
 </file>
 
-<file path=ppt/slides/slide12.xml><?xml version="1.0" encoding="utf-8"?>
+<file path=ppt/slides/slide13.xml><?xml version="1.0" encoding="utf-8"?>
 <p:sld xmlns:a="http://schemas.openxmlformats.org/drawingml/2006/main" xmlns:p="http://schemas.openxmlformats.org/presentationml/2006/main" xmlns:r="http://schemas.openxmlformats.org/officeDocument/2006/relationships">
   <p:cSld>
     <p:spTree>
@@ -11282,14 +12019,14 @@
                 <a:latin typeface="Times New Roman" panose="02020603050405020304" pitchFamily="18" charset="0"/>
                 <a:cs typeface="Times New Roman" panose="02020603050405020304" pitchFamily="18" charset="0"/>
               </a:rPr>
-              <a:t>12</a:t>
+              <a:t>13</a:t>
             </a:fld>
             <a:r>
               <a:rPr lang="en-US" dirty="0">
                 <a:latin typeface="Times New Roman" panose="02020603050405020304" pitchFamily="18" charset="0"/>
                 <a:cs typeface="Times New Roman" panose="02020603050405020304" pitchFamily="18" charset="0"/>
               </a:rPr>
-              <a:t> / 29</a:t>
+              <a:t> / 33</a:t>
             </a:r>
             <a:endParaRPr dirty="0">
               <a:latin typeface="Times New Roman" panose="02020603050405020304" pitchFamily="18" charset="0"/>
@@ -11791,7 +12528,7 @@
                 </a:solidFill>
                 <a:latin typeface="Times New Roman"/>
               </a:rPr>
-              <a:t>BUDGET   </a:t>
+              <a:t>PRIVACY   </a:t>
             </a:r>
             <a:r>
               <a:rPr sz="750" b="0">
@@ -11800,7 +12537,7 @@
                 </a:solidFill>
                 <a:latin typeface="Times New Roman"/>
               </a:rPr>
-              <a:t>L2   budget = context_window(model) - reserve(response) - reserve(system)</a:t>
+              <a:t>L2   source rules, toggle, global default - decided before any model sees it</a:t>
             </a:r>
           </a:p>
         </p:txBody>
@@ -11902,7 +12639,7 @@
                 </a:solidFill>
                 <a:latin typeface="Times New Roman"/>
               </a:rPr>
-              <a:t>RETRIEVE   </a:t>
+              <a:t>ROUTE   </a:t>
             </a:r>
             <a:r>
               <a:rPr sz="750" b="0">
@@ -11911,7 +12648,7 @@
                 </a:solidFill>
                 <a:latin typeface="Times New Roman"/>
               </a:rPr>
-              <a:t>L3   category filter -&gt; semantic top-k -&gt; recency rerank -&gt; whole items only</a:t>
+              <a:t>L2   intent, then which of the six memory classes are eligible</a:t>
             </a:r>
           </a:p>
         </p:txBody>
@@ -12013,7 +12750,7 @@
                 </a:solidFill>
                 <a:latin typeface="Times New Roman"/>
               </a:rPr>
-              <a:t>ASSEMBLE   </a:t>
+              <a:t>RANK + ADMIT   </a:t>
             </a:r>
             <a:r>
               <a:rPr sz="750" b="0">
@@ -12022,7 +12759,7 @@
                 </a:solidFill>
                 <a:latin typeface="Times New Roman"/>
               </a:rPr>
-              <a:t>L2   system, selection, conversation, memory - strict priority order</a:t>
+              <a:t>L3   per-class floor and margin - or admit nothing and abstain</a:t>
             </a:r>
           </a:p>
         </p:txBody>
@@ -12124,7 +12861,7 @@
                 </a:solidFill>
                 <a:latin typeface="Times New Roman"/>
               </a:rPr>
-              <a:t>ROUTE   </a:t>
+              <a:t>PACK   </a:t>
             </a:r>
             <a:r>
               <a:rPr sz="750" b="0">
@@ -12133,7 +12870,7 @@
                 </a:solidFill>
                 <a:latin typeface="Times New Roman"/>
               </a:rPr>
-              <a:t>L4   local Ollama - free cloud tier - your own key.  Private always means local</a:t>
+              <a:t>L2   budget = context_window(model) - response - system - tool schemas</a:t>
             </a:r>
           </a:p>
         </p:txBody>
@@ -12235,7 +12972,7 @@
                 </a:solidFill>
                 <a:latin typeface="Times New Roman"/>
               </a:rPr>
-              <a:t>PRESENT   </a:t>
+              <a:t>EXECUTE   </a:t>
             </a:r>
             <a:r>
               <a:rPr sz="750" b="0">
@@ -12244,7 +12981,7 @@
                 </a:solidFill>
                 <a:latin typeface="Times New Roman"/>
               </a:rPr>
-              <a:t>L1   the answer streams into a slim panel beside your work, never over it</a:t>
+              <a:t>L4   local Ollama, free tier or your own key + the agent tool loop</a:t>
             </a:r>
           </a:p>
         </p:txBody>
@@ -12355,7 +13092,7 @@
                 </a:solidFill>
                 <a:latin typeface="Times New Roman"/>
               </a:rPr>
-              <a:t>L1   Replace / Insert after / Copy - back into the app you came from</a:t>
+              <a:t>L1   answer beside your work, then back into the app you came from</a:t>
             </a:r>
           </a:p>
         </p:txBody>
@@ -12411,7 +13148,7 @@
                 </a:solidFill>
                 <a:latin typeface="Times New Roman"/>
               </a:rPr>
-              <a:t>L1 is already built and proven - see Phase 0.</a:t>
+              <a:t>L1 is already built and running.</a:t>
             </a:r>
           </a:p>
           <a:p>
@@ -12435,732 +13172,6 @@
               </a:rPr>
               <a:t>L4 is what makes it free.</a:t>
             </a:r>
-          </a:p>
-        </p:txBody>
-      </p:sp>
-    </p:spTree>
-  </p:cSld>
-  <p:clrMapOvr>
-    <a:masterClrMapping/>
-  </p:clrMapOvr>
-</p:sld>
-</file>
-
-<file path=ppt/slides/slide13.xml><?xml version="1.0" encoding="utf-8"?>
-<p:sld xmlns:a="http://schemas.openxmlformats.org/drawingml/2006/main" xmlns:p="http://schemas.openxmlformats.org/presentationml/2006/main" xmlns:r="http://schemas.openxmlformats.org/officeDocument/2006/relationships">
-  <p:cSld>
-    <p:spTree>
-      <p:nvGrpSpPr>
-        <p:cNvPr id="1" name=""/>
-        <p:cNvGrpSpPr/>
-        <p:nvPr/>
-      </p:nvGrpSpPr>
-      <p:grpSpPr/>
-      <p:sp>
-        <p:nvSpPr>
-          <p:cNvPr id="93" name="Google Shape;93;p9"/>
-          <p:cNvSpPr/>
-          <p:nvPr/>
-        </p:nvSpPr>
-        <p:spPr>
-          <a:xfrm>
-            <a:off x="1905" y="0"/>
-            <a:ext cx="4608195" cy="321945"/>
-          </a:xfrm>
-          <a:custGeom>
-            <a:avLst/>
-            <a:gdLst/>
-            <a:ahLst/>
-            <a:cxnLst/>
-            <a:rect l="l" t="t" r="r" b="b"/>
-            <a:pathLst>
-              <a:path w="4608195" h="321945" extrusionOk="0">
-                <a:moveTo>
-                  <a:pt x="4608004" y="0"/>
-                </a:moveTo>
-                <a:lnTo>
-                  <a:pt x="0" y="0"/>
-                </a:lnTo>
-                <a:lnTo>
-                  <a:pt x="0" y="321500"/>
-                </a:lnTo>
-                <a:lnTo>
-                  <a:pt x="4608004" y="321500"/>
-                </a:lnTo>
-                <a:lnTo>
-                  <a:pt x="4608004" y="0"/>
-                </a:lnTo>
-                <a:close/>
-              </a:path>
-            </a:pathLst>
-          </a:custGeom>
-          <a:solidFill>
-            <a:srgbClr val="3333B2"/>
-          </a:solidFill>
-          <a:ln>
-            <a:noFill/>
-          </a:ln>
-        </p:spPr>
-        <p:txBody>
-          <a:bodyPr spcFirstLastPara="1" wrap="square" lIns="0" tIns="0" rIns="0" bIns="0" anchor="t" anchorCtr="0">
-            <a:noAutofit/>
-          </a:bodyPr>
-          <a:lstStyle/>
-          <a:p>
-            <a:pPr marL="0" lvl="0" indent="0" algn="l" rtl="0">
-              <a:spcBef>
-                <a:spcPts val="0"/>
-              </a:spcBef>
-              <a:spcAft>
-                <a:spcPts val="0"/>
-              </a:spcAft>
-              <a:buNone/>
-            </a:pPr>
-            <a:endParaRPr sz="1800"/>
-          </a:p>
-        </p:txBody>
-      </p:sp>
-      <p:sp>
-        <p:nvSpPr>
-          <p:cNvPr id="94" name="Google Shape;94;p9"/>
-          <p:cNvSpPr txBox="1"/>
-          <p:nvPr/>
-        </p:nvSpPr>
-        <p:spPr>
-          <a:xfrm>
-            <a:off x="95300" y="45565"/>
-            <a:ext cx="4297680" cy="232736"/>
-          </a:xfrm>
-          <a:prstGeom prst="rect">
-            <a:avLst/>
-          </a:prstGeom>
-          <a:noFill/>
-          <a:ln>
-            <a:noFill/>
-          </a:ln>
-        </p:spPr>
-        <p:txBody>
-          <a:bodyPr spcFirstLastPara="1" wrap="square" lIns="0" tIns="17125" rIns="0" bIns="0" anchor="t" anchorCtr="0">
-            <a:spAutoFit/>
-          </a:bodyPr>
-          <a:lstStyle/>
-          <a:p>
-            <a:pPr marL="12700" lvl="0" indent="0" algn="l" rtl="0">
-              <a:lnSpc>
-                <a:spcPct val="100000"/>
-              </a:lnSpc>
-              <a:spcBef>
-                <a:spcPts val="0"/>
-              </a:spcBef>
-              <a:spcAft>
-                <a:spcPts val="0"/>
-              </a:spcAft>
-              <a:buNone/>
-            </a:pPr>
-            <a:endParaRPr sz="1400" dirty="0">
-              <a:latin typeface="Times New Roman" panose="02020603050405020304" pitchFamily="18" charset="0"/>
-              <a:cs typeface="Times New Roman" panose="02020603050405020304" pitchFamily="18" charset="0"/>
-              <a:sym typeface="Arial"/>
-            </a:endParaRPr>
-            <a:r>
-              <a:rPr lang="en-US" sz="1400" dirty="0" b="0">
-                <a:solidFill>
-                  <a:srgbClr val="FFFFFF"/>
-                </a:solidFill>
-                <a:latin typeface="Times New Roman" panose="02020603050405020304" pitchFamily="18" charset="0"/>
-                <a:cs typeface="Times New Roman" panose="02020603050405020304" pitchFamily="18" charset="0"/>
-                <a:sym typeface="Arial"/>
-              </a:rPr>
-              <a:t>Layer 1 - Three Triggers, Two Capture Paths</a:t>
-            </a:r>
-          </a:p>
-        </p:txBody>
-      </p:sp>
-      <p:grpSp>
-        <p:nvGrpSpPr>
-          <p:cNvPr id="95" name="Google Shape;95;p9"/>
-          <p:cNvGrpSpPr/>
-          <p:nvPr/>
-        </p:nvGrpSpPr>
-        <p:grpSpPr>
-          <a:xfrm>
-            <a:off x="0" y="3326968"/>
-            <a:ext cx="4608017" cy="129539"/>
-            <a:chOff x="0" y="3326968"/>
-            <a:chExt cx="4608017" cy="129539"/>
-          </a:xfrm>
-        </p:grpSpPr>
-        <p:sp>
-          <p:nvSpPr>
-            <p:cNvPr id="96" name="Google Shape;96;p9"/>
-            <p:cNvSpPr/>
-            <p:nvPr/>
-          </p:nvSpPr>
-          <p:spPr>
-            <a:xfrm>
-              <a:off x="0" y="3326968"/>
-              <a:ext cx="1536065" cy="129539"/>
-            </a:xfrm>
-            <a:custGeom>
-              <a:avLst/>
-              <a:gdLst/>
-              <a:ahLst/>
-              <a:cxnLst/>
-              <a:rect l="l" t="t" r="r" b="b"/>
-              <a:pathLst>
-                <a:path w="1536065" h="129539" extrusionOk="0">
-                  <a:moveTo>
-                    <a:pt x="1535976" y="0"/>
-                  </a:moveTo>
-                  <a:lnTo>
-                    <a:pt x="0" y="0"/>
-                  </a:lnTo>
-                  <a:lnTo>
-                    <a:pt x="0" y="129032"/>
-                  </a:lnTo>
-                  <a:lnTo>
-                    <a:pt x="1535976" y="129032"/>
-                  </a:lnTo>
-                  <a:lnTo>
-                    <a:pt x="1535976" y="0"/>
-                  </a:lnTo>
-                  <a:close/>
-                </a:path>
-              </a:pathLst>
-            </a:custGeom>
-            <a:solidFill>
-              <a:srgbClr val="191959"/>
-            </a:solidFill>
-            <a:ln>
-              <a:noFill/>
-            </a:ln>
-          </p:spPr>
-          <p:txBody>
-            <a:bodyPr spcFirstLastPara="1" wrap="square" lIns="0" tIns="0" rIns="0" bIns="0" anchor="t" anchorCtr="0">
-              <a:noAutofit/>
-            </a:bodyPr>
-            <a:lstStyle/>
-            <a:p>
-              <a:pPr marL="0" lvl="0" indent="0" algn="l" rtl="0">
-                <a:spcBef>
-                  <a:spcPts val="0"/>
-                </a:spcBef>
-                <a:spcAft>
-                  <a:spcPts val="0"/>
-                </a:spcAft>
-                <a:buNone/>
-              </a:pPr>
-              <a:endParaRPr sz="1800"/>
-            </a:p>
-          </p:txBody>
-        </p:sp>
-        <p:sp>
-          <p:nvSpPr>
-            <p:cNvPr id="97" name="Google Shape;97;p9"/>
-            <p:cNvSpPr/>
-            <p:nvPr/>
-          </p:nvSpPr>
-          <p:spPr>
-            <a:xfrm>
-              <a:off x="1535976" y="3326968"/>
-              <a:ext cx="1536065" cy="129539"/>
-            </a:xfrm>
-            <a:custGeom>
-              <a:avLst/>
-              <a:gdLst/>
-              <a:ahLst/>
-              <a:cxnLst/>
-              <a:rect l="l" t="t" r="r" b="b"/>
-              <a:pathLst>
-                <a:path w="1536064" h="129539" extrusionOk="0">
-                  <a:moveTo>
-                    <a:pt x="1535976" y="0"/>
-                  </a:moveTo>
-                  <a:lnTo>
-                    <a:pt x="0" y="0"/>
-                  </a:lnTo>
-                  <a:lnTo>
-                    <a:pt x="0" y="129032"/>
-                  </a:lnTo>
-                  <a:lnTo>
-                    <a:pt x="1535976" y="129032"/>
-                  </a:lnTo>
-                  <a:lnTo>
-                    <a:pt x="1535976" y="0"/>
-                  </a:lnTo>
-                  <a:close/>
-                </a:path>
-              </a:pathLst>
-            </a:custGeom>
-            <a:solidFill>
-              <a:srgbClr val="262685"/>
-            </a:solidFill>
-            <a:ln>
-              <a:noFill/>
-            </a:ln>
-          </p:spPr>
-          <p:txBody>
-            <a:bodyPr spcFirstLastPara="1" wrap="square" lIns="0" tIns="0" rIns="0" bIns="0" anchor="t" anchorCtr="0">
-              <a:noAutofit/>
-            </a:bodyPr>
-            <a:lstStyle/>
-            <a:p>
-              <a:pPr marL="0" lvl="0" indent="0" algn="l" rtl="0">
-                <a:spcBef>
-                  <a:spcPts val="0"/>
-                </a:spcBef>
-                <a:spcAft>
-                  <a:spcPts val="0"/>
-                </a:spcAft>
-                <a:buNone/>
-              </a:pPr>
-              <a:endParaRPr sz="1800"/>
-            </a:p>
-          </p:txBody>
-        </p:sp>
-        <p:sp>
-          <p:nvSpPr>
-            <p:cNvPr id="98" name="Google Shape;98;p9"/>
-            <p:cNvSpPr/>
-            <p:nvPr/>
-          </p:nvSpPr>
-          <p:spPr>
-            <a:xfrm>
-              <a:off x="3071952" y="3326968"/>
-              <a:ext cx="1536065" cy="129539"/>
-            </a:xfrm>
-            <a:custGeom>
-              <a:avLst/>
-              <a:gdLst/>
-              <a:ahLst/>
-              <a:cxnLst/>
-              <a:rect l="l" t="t" r="r" b="b"/>
-              <a:pathLst>
-                <a:path w="1536064" h="129539" extrusionOk="0">
-                  <a:moveTo>
-                    <a:pt x="1535976" y="0"/>
-                  </a:moveTo>
-                  <a:lnTo>
-                    <a:pt x="0" y="0"/>
-                  </a:lnTo>
-                  <a:lnTo>
-                    <a:pt x="0" y="129032"/>
-                  </a:lnTo>
-                  <a:lnTo>
-                    <a:pt x="1535976" y="129032"/>
-                  </a:lnTo>
-                  <a:lnTo>
-                    <a:pt x="1535976" y="0"/>
-                  </a:lnTo>
-                  <a:close/>
-                </a:path>
-              </a:pathLst>
-            </a:custGeom>
-            <a:solidFill>
-              <a:srgbClr val="3333B2"/>
-            </a:solidFill>
-            <a:ln>
-              <a:noFill/>
-            </a:ln>
-          </p:spPr>
-          <p:txBody>
-            <a:bodyPr spcFirstLastPara="1" wrap="square" lIns="0" tIns="0" rIns="0" bIns="0" anchor="t" anchorCtr="0">
-              <a:noAutofit/>
-            </a:bodyPr>
-            <a:lstStyle/>
-            <a:p>
-              <a:pPr marL="0" lvl="0" indent="0" algn="l" rtl="0">
-                <a:spcBef>
-                  <a:spcPts val="0"/>
-                </a:spcBef>
-                <a:spcAft>
-                  <a:spcPts val="0"/>
-                </a:spcAft>
-                <a:buNone/>
-              </a:pPr>
-              <a:endParaRPr sz="1800"/>
-            </a:p>
-          </p:txBody>
-        </p:sp>
-      </p:grpSp>
-      <p:sp>
-        <p:nvSpPr>
-          <p:cNvPr id="99" name="Google Shape;99;p9"/>
-          <p:cNvSpPr txBox="1">
-            <a:spLocks noGrp="1"/>
-          </p:cNvSpPr>
-          <p:nvPr>
-            <p:ph type="ftr" idx="11"/>
-          </p:nvPr>
-        </p:nvSpPr>
-        <p:spPr>
-          <a:xfrm>
-            <a:off x="421944" y="3331252"/>
-            <a:ext cx="692150" cy="285961"/>
-          </a:xfrm>
-          <a:prstGeom prst="rect">
-            <a:avLst/>
-          </a:prstGeom>
-          <a:noFill/>
-          <a:ln>
-            <a:noFill/>
-          </a:ln>
-        </p:spPr>
-        <p:txBody>
-          <a:bodyPr spcFirstLastPara="1" wrap="square" lIns="0" tIns="8875" rIns="0" bIns="0" anchor="t" anchorCtr="0">
-            <a:spAutoFit/>
-          </a:bodyPr>
-          <a:lstStyle/>
-          <a:p>
-            <a:pPr marL="12700"/>
-            <a:r>
-              <a:rPr lang="en-US" dirty="0">
-                <a:latin typeface="Times New Roman" panose="02020603050405020304" pitchFamily="18" charset="0"/>
-                <a:cs typeface="Times New Roman" panose="02020603050405020304" pitchFamily="18" charset="0"/>
-              </a:rPr>
-              <a:t>Dept of Comp </a:t>
-            </a:r>
-            <a:r>
-              <a:rPr lang="en-US" dirty="0" err="1">
-                <a:latin typeface="Times New Roman" panose="02020603050405020304" pitchFamily="18" charset="0"/>
-                <a:cs typeface="Times New Roman" panose="02020603050405020304" pitchFamily="18" charset="0"/>
-              </a:rPr>
-              <a:t>Engg</a:t>
-            </a:r>
-            <a:endParaRPr lang="en-US" dirty="0">
-              <a:latin typeface="Times New Roman" panose="02020603050405020304" pitchFamily="18" charset="0"/>
-              <a:cs typeface="Times New Roman" panose="02020603050405020304" pitchFamily="18" charset="0"/>
-            </a:endParaRPr>
-          </a:p>
-          <a:p>
-            <a:pPr marL="12700" lvl="0"/>
-            <a:endParaRPr lang="en-US" dirty="0"/>
-          </a:p>
-          <a:p>
-            <a:pPr marL="12700" lvl="0" indent="0" algn="l" rtl="0">
-              <a:lnSpc>
-                <a:spcPct val="100000"/>
-              </a:lnSpc>
-              <a:spcBef>
-                <a:spcPts val="0"/>
-              </a:spcBef>
-              <a:spcAft>
-                <a:spcPts val="0"/>
-              </a:spcAft>
-              <a:buNone/>
-            </a:pPr>
-            <a:endParaRPr dirty="0"/>
-          </a:p>
-        </p:txBody>
-      </p:sp>
-      <p:sp>
-        <p:nvSpPr>
-          <p:cNvPr id="102" name="Google Shape;102;p9"/>
-          <p:cNvSpPr txBox="1">
-            <a:spLocks noGrp="1"/>
-          </p:cNvSpPr>
-          <p:nvPr>
-            <p:ph type="sldNum" idx="12"/>
-          </p:nvPr>
-        </p:nvSpPr>
-        <p:spPr>
-          <a:xfrm>
-            <a:off x="4275161" y="3331252"/>
-            <a:ext cx="266700" cy="101295"/>
-          </a:xfrm>
-          <a:prstGeom prst="rect">
-            <a:avLst/>
-          </a:prstGeom>
-          <a:noFill/>
-          <a:ln>
-            <a:noFill/>
-          </a:ln>
-        </p:spPr>
-        <p:txBody>
-          <a:bodyPr spcFirstLastPara="1" wrap="square" lIns="0" tIns="8875" rIns="0" bIns="0" anchor="t" anchorCtr="0">
-            <a:spAutoFit/>
-          </a:bodyPr>
-          <a:lstStyle/>
-          <a:p>
-            <a:pPr marL="38100" lvl="0" indent="0" algn="l" rtl="0">
-              <a:lnSpc>
-                <a:spcPct val="100000"/>
-              </a:lnSpc>
-              <a:spcBef>
-                <a:spcPts val="0"/>
-              </a:spcBef>
-              <a:spcAft>
-                <a:spcPts val="0"/>
-              </a:spcAft>
-              <a:buNone/>
-            </a:pPr>
-            <a:fld id="{00000000-1234-1234-1234-123412341234}" type="slidenum">
-              <a:rPr lang="en-US">
-                <a:latin typeface="Times New Roman" panose="02020603050405020304" pitchFamily="18" charset="0"/>
-                <a:cs typeface="Times New Roman" panose="02020603050405020304" pitchFamily="18" charset="0"/>
-              </a:rPr>
-              <a:t>13</a:t>
-            </a:fld>
-            <a:r>
-              <a:rPr lang="en-US" dirty="0">
-                <a:latin typeface="Times New Roman" panose="02020603050405020304" pitchFamily="18" charset="0"/>
-                <a:cs typeface="Times New Roman" panose="02020603050405020304" pitchFamily="18" charset="0"/>
-              </a:rPr>
-              <a:t> / 29</a:t>
-            </a:r>
-            <a:endParaRPr dirty="0">
-              <a:latin typeface="Times New Roman" panose="02020603050405020304" pitchFamily="18" charset="0"/>
-              <a:cs typeface="Times New Roman" panose="02020603050405020304" pitchFamily="18" charset="0"/>
-            </a:endParaRPr>
-          </a:p>
-        </p:txBody>
-      </p:sp>
-      <p:sp>
-        <p:nvSpPr>
-          <p:cNvPr id="103" name="Google Shape;103;p9"/>
-          <p:cNvSpPr txBox="1"/>
-          <p:nvPr/>
-        </p:nvSpPr>
-        <p:spPr>
-          <a:xfrm>
-            <a:off x="91440" y="246888"/>
-            <a:ext cx="4425696" cy="3017520"/>
-          </a:xfrm>
-          <a:prstGeom prst="rect">
-            <a:avLst/>
-          </a:prstGeom>
-          <a:noFill/>
-          <a:ln>
-            <a:noFill/>
-          </a:ln>
-        </p:spPr>
-        <p:txBody>
-          <a:bodyPr spcFirstLastPara="1" wrap="square" lIns="91425" tIns="91425" rIns="91425" bIns="91425" anchor="t" anchorCtr="0">
-            <a:noAutofit/>
-          </a:bodyPr>
-          <a:lstStyle/>
-          <a:p>
-            <a:pPr marL="171450" lvl="1" indent="-171450" algn="l">
-              <a:buFont typeface="Arial" panose="020B0604020202020204" pitchFamily="34" charset="0"/>
-              <a:buChar char="•"/>
-            </a:pPr>
-            <a:r>
-              <a:rPr lang="en-US" sz="1000" b="1" dirty="0">
-                <a:latin typeface="Times New Roman" panose="02020603050405020304" pitchFamily="18" charset="0"/>
-                <a:cs typeface="Times New Roman" panose="02020603050405020304" pitchFamily="18" charset="0"/>
-              </a:rPr>
-              <a:t>T1 - Global hotkey.</a:t>
-            </a:r>
-            <a:r>
-              <a:rPr lang="en-US" sz="1000" b="0" dirty="0">
-                <a:latin typeface="Times New Roman" panose="02020603050405020304" pitchFamily="18" charset="0"/>
-                <a:cs typeface="Times New Roman" panose="02020603050405020304" pitchFamily="18" charset="0"/>
-              </a:rPr>
-              <a:t> Win32 RegisterHotKey gives a system-wide shortcut that fires regardless of which application has focus. Rust: tauri-plugin-global-shortcut, a first-party Tauri v2 plugin.</a:t>
-            </a:r>
-          </a:p>
-          <a:p>
-            <a:pPr marL="171450" lvl="1" indent="-171450" algn="l">
-              <a:buFont typeface="Arial" panose="020B0604020202020204" pitchFamily="34" charset="0"/>
-              <a:buChar char="•"/>
-            </a:pPr>
-            <a:r>
-              <a:rPr lang="en-US" sz="1000" b="1" dirty="0">
-                <a:latin typeface="Times New Roman" panose="02020603050405020304" pitchFamily="18" charset="0"/>
-                <a:cs typeface="Times New Roman" panose="02020603050405020304" pitchFamily="18" charset="0"/>
-              </a:rPr>
-              <a:t>T2 - Read the current selection. This is the hard one, so it has two paths.</a:t>
-            </a:r>
-          </a:p>
-          <a:p>
-            <a:pPr marL="171450" lvl="1" indent="-171450" algn="l">
-              <a:buFont typeface="Arial" panose="020B0604020202020204" pitchFamily="34" charset="0"/>
-              <a:buChar char="•"/>
-            </a:pPr>
-            <a:r>
-              <a:rPr lang="en-US" sz="1000" b="1" dirty="0">
-                <a:latin typeface="Times New Roman" panose="02020603050405020304" pitchFamily="18" charset="0"/>
-                <a:cs typeface="Times New Roman" panose="02020603050405020304" pitchFamily="18" charset="0"/>
-              </a:rPr>
-              <a:t>Path A - UI Automation.</a:t>
-            </a:r>
-            <a:r>
-              <a:rPr lang="en-US" sz="1000" b="0" dirty="0">
-                <a:latin typeface="Times New Roman" panose="02020603050405020304" pitchFamily="18" charset="0"/>
-                <a:cs typeface="Times New Roman" panose="02020603050405020304" pitchFamily="18" charset="0"/>
-              </a:rPr>
-              <a:t> GetFocusedElement, then TextPattern, then GetSelection, then GetText. This is the documented Windows accessibility framework that exists so screen readers can do exactly this. It is the supported path, not a hack.</a:t>
-            </a:r>
-          </a:p>
-          <a:p>
-            <a:pPr marL="171450" lvl="1" indent="-171450" algn="l">
-              <a:buFont typeface="Arial" panose="020B0604020202020204" pitchFamily="34" charset="0"/>
-              <a:buChar char="•"/>
-            </a:pPr>
-            <a:r>
-              <a:rPr lang="en-US" sz="1000" b="1" dirty="0">
-                <a:latin typeface="Times New Roman" panose="02020603050405020304" pitchFamily="18" charset="0"/>
-                <a:cs typeface="Times New Roman" panose="02020603050405020304" pitchFamily="18" charset="0"/>
-              </a:rPr>
-              <a:t>Path B - clipboard round-trip.</a:t>
-            </a:r>
-            <a:r>
-              <a:rPr lang="en-US" sz="1000" b="0" dirty="0">
-                <a:latin typeface="Times New Roman" panose="02020603050405020304" pitchFamily="18" charset="0"/>
-                <a:cs typeface="Times New Roman" panose="02020603050405020304" pitchFamily="18" charset="0"/>
-              </a:rPr>
-              <a:t> Save the user's clipboard, send Ctrl+C, read the selection, restore the original clipboard. Less elegant, works essentially everywhere.</a:t>
-            </a:r>
-          </a:p>
-          <a:p>
-            <a:pPr marL="171450" lvl="1" indent="-171450" algn="l">
-              <a:buFont typeface="Arial" panose="020B0604020202020204" pitchFamily="34" charset="0"/>
-              <a:buChar char="•"/>
-            </a:pPr>
-            <a:r>
-              <a:rPr lang="en-US" sz="1000" b="1" dirty="0">
-                <a:latin typeface="Times New Roman" panose="02020603050405020304" pitchFamily="18" charset="0"/>
-                <a:cs typeface="Times New Roman" panose="02020603050405020304" pitchFamily="18" charset="0"/>
-              </a:rPr>
-              <a:t>Design rule:</a:t>
-            </a:r>
-            <a:r>
-              <a:rPr lang="en-US" sz="1000" b="0" dirty="0">
-                <a:latin typeface="Times New Roman" panose="02020603050405020304" pitchFamily="18" charset="0"/>
-                <a:cs typeface="Times New Roman" panose="02020603050405020304" pitchFamily="18" charset="0"/>
-              </a:rPr>
-              <a:t> try A, fall back to B, and log which one worked per application. That per-app coverage table is a deliverable - no competitor publishes one.</a:t>
-            </a:r>
-          </a:p>
-          <a:p>
-            <a:pPr marL="171450" lvl="1" indent="-171450" algn="l">
-              <a:buFont typeface="Arial" panose="020B0604020202020204" pitchFamily="34" charset="0"/>
-              <a:buChar char="•"/>
-            </a:pPr>
-            <a:r>
-              <a:rPr lang="en-US" sz="1000" b="1" dirty="0">
-                <a:latin typeface="Times New Roman" panose="02020603050405020304" pitchFamily="18" charset="0"/>
-                <a:cs typeface="Times New Roman" panose="02020603050405020304" pitchFamily="18" charset="0"/>
-              </a:rPr>
-              <a:t>T3 - Screenshot.</a:t>
-            </a:r>
-            <a:r>
-              <a:rPr lang="en-US" sz="1000" b="0" dirty="0">
-                <a:latin typeface="Times New Roman" panose="02020603050405020304" pitchFamily="18" charset="0"/>
-                <a:cs typeface="Times New Roman" panose="02020603050405020304" pitchFamily="18" charset="0"/>
-              </a:rPr>
-              <a:t> Transparent full-screen overlay, drag a region, capture the pixels, optional OCR. The same mechanism every screenshot tool uses.</a:t>
-            </a:r>
-          </a:p>
-        </p:txBody>
-      </p:sp>
-      <p:sp>
-        <p:nvSpPr>
-          <p:cNvPr id="8" name="Google Shape;85;p8">
-            <a:extLst>
-              <a:ext uri="{FF2B5EF4-FFF2-40B4-BE49-F238E27FC236}">
-                <a16:creationId xmlns:a16="http://schemas.microsoft.com/office/drawing/2014/main" id="{B445AC1F-8D42-9224-714E-741A4A81DCCA}"/>
-              </a:ext>
-            </a:extLst>
-          </p:cNvPr>
-          <p:cNvSpPr txBox="1"/>
-          <p:nvPr/>
-        </p:nvSpPr>
-        <p:spPr>
-          <a:xfrm>
-            <a:off x="1773059" y="3331250"/>
-            <a:ext cx="1211100" cy="101295"/>
-          </a:xfrm>
-          <a:prstGeom prst="rect">
-            <a:avLst/>
-          </a:prstGeom>
-          <a:noFill/>
-          <a:ln>
-            <a:noFill/>
-          </a:ln>
-        </p:spPr>
-        <p:txBody>
-          <a:bodyPr spcFirstLastPara="1" wrap="square" lIns="0" tIns="8875" rIns="0" bIns="0" anchor="t" anchorCtr="0">
-            <a:spAutoFit/>
-          </a:bodyPr>
-          <a:lstStyle/>
-          <a:p>
-            <a:pPr marL="12700" lvl="0"/>
-            <a:endParaRPr lang="en-US" sz="600" dirty="0">
-              <a:latin typeface="Times New Roman" panose="02020603050405020304" pitchFamily="18" charset="0"/>
-              <a:cs typeface="Times New Roman" panose="02020603050405020304" pitchFamily="18" charset="0"/>
-            </a:endParaRPr>
-            <a:r>
-              <a:rPr lang="en-US" sz="600" dirty="0" b="0">
-                <a:solidFill>
-                  <a:srgbClr val="FFFFFF"/>
-                </a:solidFill>
-                <a:latin typeface="Times New Roman" panose="02020603050405020304" pitchFamily="18" charset="0"/>
-                <a:cs typeface="Times New Roman" panose="02020603050405020304" pitchFamily="18" charset="0"/>
-              </a:rPr>
-              <a:t>PERCH</a:t>
-            </a:r>
-          </a:p>
-        </p:txBody>
-      </p:sp>
-      <p:sp>
-        <p:nvSpPr>
-          <p:cNvPr id="9" name="Google Shape;72;p7">
-            <a:extLst>
-              <a:ext uri="{FF2B5EF4-FFF2-40B4-BE49-F238E27FC236}">
-                <a16:creationId xmlns:a16="http://schemas.microsoft.com/office/drawing/2014/main" id="{AD0AEF20-4852-6A69-5088-EB2B0F643C44}"/>
-              </a:ext>
-            </a:extLst>
-          </p:cNvPr>
-          <p:cNvSpPr txBox="1">
-            <a:spLocks noGrp="1"/>
-          </p:cNvSpPr>
-          <p:nvPr>
-            <p:ph type="dt" idx="10"/>
-          </p:nvPr>
-        </p:nvSpPr>
-        <p:spPr>
-          <a:xfrm>
-            <a:off x="3442063" y="3331251"/>
-            <a:ext cx="746093" cy="101295"/>
-          </a:xfrm>
-          <a:prstGeom prst="rect">
-            <a:avLst/>
-          </a:prstGeom>
-          <a:noFill/>
-          <a:ln>
-            <a:noFill/>
-          </a:ln>
-        </p:spPr>
-        <p:txBody>
-          <a:bodyPr spcFirstLastPara="1" wrap="square" lIns="0" tIns="8875" rIns="0" bIns="0" anchor="t" anchorCtr="0">
-            <a:spAutoFit/>
-          </a:bodyPr>
-          <a:lstStyle/>
-          <a:p>
-            <a:pPr marL="12700" lvl="0" indent="0" algn="l" rtl="0">
-              <a:lnSpc>
-                <a:spcPct val="100000"/>
-              </a:lnSpc>
-              <a:spcBef>
-                <a:spcPts val="0"/>
-              </a:spcBef>
-              <a:spcAft>
-                <a:spcPts val="0"/>
-              </a:spcAft>
-              <a:buNone/>
-            </a:pPr>
-            <a:r>
-              <a:rPr lang="en-US" dirty="0">
-                <a:latin typeface="Times New Roman" panose="02020603050405020304" pitchFamily="18" charset="0"/>
-                <a:cs typeface="Times New Roman" panose="02020603050405020304" pitchFamily="18" charset="0"/>
-              </a:rPr>
-              <a:t>August-2026</a:t>
-            </a:r>
-            <a:endParaRPr dirty="0">
-              <a:latin typeface="Times New Roman" panose="02020603050405020304" pitchFamily="18" charset="0"/>
-              <a:cs typeface="Times New Roman" panose="02020603050405020304" pitchFamily="18" charset="0"/>
-            </a:endParaRPr>
           </a:p>
         </p:txBody>
       </p:sp>
@@ -13297,7 +13308,7 @@
                 <a:cs typeface="Times New Roman" panose="02020603050405020304" pitchFamily="18" charset="0"/>
                 <a:sym typeface="Arial"/>
               </a:rPr>
-              <a:t>Layer 1 - Edit In Place, and Why There Is No Plugin</a:t>
+              <a:t>Layer 1 - Three Triggers, Two Capture Paths</a:t>
             </a:r>
           </a:p>
         </p:txBody>
@@ -13632,7 +13643,7 @@
                 <a:latin typeface="Times New Roman" panose="02020603050405020304" pitchFamily="18" charset="0"/>
                 <a:cs typeface="Times New Roman" panose="02020603050405020304" pitchFamily="18" charset="0"/>
               </a:rPr>
-              <a:t> / 29</a:t>
+              <a:t> / 33</a:t>
             </a:r>
             <a:endParaRPr dirty="0">
               <a:latin typeface="Times New Roman" panose="02020603050405020304" pitchFamily="18" charset="0"/>
@@ -13671,18 +13682,18 @@
               <a:buChar char="•"/>
             </a:pPr>
             <a:r>
-              <a:rPr lang="en-US" sz="1050" b="1" dirty="0">
-                <a:latin typeface="Times New Roman" panose="02020603050405020304" pitchFamily="18" charset="0"/>
-                <a:cs typeface="Times New Roman" panose="02020603050405020304" pitchFamily="18" charset="0"/>
-              </a:rPr>
-              <a:t>This is the capability that separates PERCH from a chat window.</a:t>
-            </a:r>
-            <a:r>
-              <a:rPr lang="en-US" sz="1050" b="0" dirty="0">
-                <a:latin typeface="Times New Roman" panose="02020603050405020304" pitchFamily="18" charset="0"/>
-                <a:cs typeface="Times New Roman" panose="02020603050405020304" pitchFamily="18" charset="0"/>
-              </a:rPr>
-              <a:t> A chat window can only ever hand you text to copy. PERCH writes the answer back into the application you came from.</a:t>
+              <a:rPr lang="en-US" sz="1000" b="1" dirty="0">
+                <a:latin typeface="Times New Roman" panose="02020603050405020304" pitchFamily="18" charset="0"/>
+                <a:cs typeface="Times New Roman" panose="02020603050405020304" pitchFamily="18" charset="0"/>
+              </a:rPr>
+              <a:t>T1 - Global hotkey.</a:t>
+            </a:r>
+            <a:r>
+              <a:rPr lang="en-US" sz="1000" b="0" dirty="0">
+                <a:latin typeface="Times New Roman" panose="02020603050405020304" pitchFamily="18" charset="0"/>
+                <a:cs typeface="Times New Roman" panose="02020603050405020304" pitchFamily="18" charset="0"/>
+              </a:rPr>
+              <a:t> Win32 RegisterHotKey gives a system-wide shortcut that fires regardless of which application has focus. Rust: tauri-plugin-global-shortcut, a first-party Tauri v2 plugin.</a:t>
             </a:r>
           </a:p>
           <a:p>
@@ -13691,18 +13702,11 @@
               <a:buChar char="•"/>
             </a:pPr>
             <a:r>
-              <a:rPr lang="en-US" sz="1050" b="1" dirty="0">
-                <a:latin typeface="Times New Roman" panose="02020603050405020304" pitchFamily="18" charset="0"/>
-                <a:cs typeface="Times New Roman" panose="02020603050405020304" pitchFamily="18" charset="0"/>
-              </a:rPr>
-              <a:t>The mechanism:</a:t>
-            </a:r>
-            <a:r>
-              <a:rPr lang="en-US" sz="1050" b="0" dirty="0">
-                <a:latin typeface="Times New Roman" panose="02020603050405020304" pitchFamily="18" charset="0"/>
-                <a:cs typeface="Times New Roman" panose="02020603050405020304" pitchFamily="18" charset="0"/>
-              </a:rPr>
-              <a:t> put the answer on the clipboard, restore focus to the original window using the HWND saved at trigger time, send Ctrl+V, then restore the user's previous clipboard.</a:t>
+              <a:rPr lang="en-US" sz="1000" b="1" dirty="0">
+                <a:latin typeface="Times New Roman" panose="02020603050405020304" pitchFamily="18" charset="0"/>
+                <a:cs typeface="Times New Roman" panose="02020603050405020304" pitchFamily="18" charset="0"/>
+              </a:rPr>
+              <a:t>T2 - Read the current selection. The hard one, so it has two paths.</a:t>
             </a:r>
           </a:p>
           <a:p>
@@ -13711,18 +13715,18 @@
               <a:buChar char="•"/>
             </a:pPr>
             <a:r>
-              <a:rPr lang="en-US" sz="1050" b="1" dirty="0">
-                <a:latin typeface="Times New Roman" panose="02020603050405020304" pitchFamily="18" charset="0"/>
-                <a:cs typeface="Times New Roman" panose="02020603050405020304" pitchFamily="18" charset="0"/>
-              </a:rPr>
-              <a:t>Why replacement works with no app-specific integration:</a:t>
-            </a:r>
-            <a:r>
-              <a:rPr lang="en-US" sz="1050" b="0" dirty="0">
-                <a:latin typeface="Times New Roman" panose="02020603050405020304" pitchFamily="18" charset="0"/>
-                <a:cs typeface="Times New Roman" panose="02020603050405020304" pitchFamily="18" charset="0"/>
-              </a:rPr>
-              <a:t> in every text field on Windows, pasting while text is selected replaces that text. We are using behaviour every text field already has.</a:t>
+              <a:rPr lang="en-US" sz="1000" b="1" dirty="0">
+                <a:latin typeface="Times New Roman" panose="02020603050405020304" pitchFamily="18" charset="0"/>
+                <a:cs typeface="Times New Roman" panose="02020603050405020304" pitchFamily="18" charset="0"/>
+              </a:rPr>
+              <a:t>Path A - UI Automation.</a:t>
+            </a:r>
+            <a:r>
+              <a:rPr lang="en-US" sz="1000" b="0" dirty="0">
+                <a:latin typeface="Times New Roman" panose="02020603050405020304" pitchFamily="18" charset="0"/>
+                <a:cs typeface="Times New Roman" panose="02020603050405020304" pitchFamily="18" charset="0"/>
+              </a:rPr>
+              <a:t> GetFocusedElement, TextPattern, GetSelection, GetText. This is the documented Windows accessibility framework that exists so screen readers can do exactly this. A supported path, not a hack.</a:t>
             </a:r>
           </a:p>
           <a:p>
@@ -13731,18 +13735,18 @@
               <a:buChar char="•"/>
             </a:pPr>
             <a:r>
-              <a:rPr lang="en-US" sz="1050" b="1" dirty="0">
-                <a:latin typeface="Times New Roman" panose="02020603050405020304" pitchFamily="18" charset="0"/>
-                <a:cs typeface="Times New Roman" panose="02020603050405020304" pitchFamily="18" charset="0"/>
-              </a:rPr>
-              <a:t>Three actions, the user's choice:</a:t>
-            </a:r>
-            <a:r>
-              <a:rPr lang="en-US" sz="1050" b="0" dirty="0">
-                <a:latin typeface="Times New Roman" panose="02020603050405020304" pitchFamily="18" charset="0"/>
-                <a:cs typeface="Times New Roman" panose="02020603050405020304" pitchFamily="18" charset="0"/>
-              </a:rPr>
-              <a:t> Replace overwrites the selection, Insert after appends below it, Copy only changes nothing.</a:t>
+              <a:rPr lang="en-US" sz="1000" b="1" dirty="0">
+                <a:latin typeface="Times New Roman" panose="02020603050405020304" pitchFamily="18" charset="0"/>
+                <a:cs typeface="Times New Roman" panose="02020603050405020304" pitchFamily="18" charset="0"/>
+              </a:rPr>
+              <a:t>Path B - clipboard round-trip.</a:t>
+            </a:r>
+            <a:r>
+              <a:rPr lang="en-US" sz="1000" b="0" dirty="0">
+                <a:latin typeface="Times New Roman" panose="02020603050405020304" pitchFamily="18" charset="0"/>
+                <a:cs typeface="Times New Roman" panose="02020603050405020304" pitchFamily="18" charset="0"/>
+              </a:rPr>
+              <a:t> Save the clipboard, write a unique sentinel, send Ctrl+C, poll until it changes, restore the original. Less elegant, works essentially everywhere.</a:t>
             </a:r>
           </a:p>
           <a:p>
@@ -13751,18 +13755,38 @@
               <a:buChar char="•"/>
             </a:pPr>
             <a:r>
-              <a:rPr lang="en-US" sz="1050" b="1" dirty="0">
-                <a:latin typeface="Times New Roman" panose="02020603050405020304" pitchFamily="18" charset="0"/>
-                <a:cs typeface="Times New Roman" panose="02020603050405020304" pitchFamily="18" charset="0"/>
-              </a:rPr>
-              <a:t>Rejected alternative - per-application plugins.</a:t>
-            </a:r>
-            <a:r>
-              <a:rPr lang="en-US" sz="1050" b="0" dirty="0">
-                <a:latin typeface="Times New Roman" panose="02020603050405020304" pitchFamily="18" charset="0"/>
-                <a:cs typeface="Times New Roman" panose="02020603050405020304" pitchFamily="18" charset="0"/>
-              </a:rPr>
-              <a:t> An Office add-in, a VS Code extension and a browser extension give better fidelity, but mean N integrations, N review processes, and it only ever works where we shipped. The clipboard path works everywhere on day one.</a:t>
+              <a:rPr lang="en-US" sz="1000" b="1" dirty="0">
+                <a:latin typeface="Times New Roman" panose="02020603050405020304" pitchFamily="18" charset="0"/>
+                <a:cs typeface="Times New Roman" panose="02020603050405020304" pitchFamily="18" charset="0"/>
+              </a:rPr>
+              <a:t>Design rule:</a:t>
+            </a:r>
+            <a:r>
+              <a:rPr lang="en-US" sz="1000" b="0" dirty="0">
+                <a:latin typeface="Times New Roman" panose="02020603050405020304" pitchFamily="18" charset="0"/>
+                <a:cs typeface="Times New Roman" panose="02020603050405020304" pitchFamily="18" charset="0"/>
+              </a:rPr>
+              <a:t> try A, fall back to B, and log which one worked per application. That per-app coverage table is a deliverable - no competitor publishes one.</a:t>
+            </a:r>
+          </a:p>
+          <a:p>
+            <a:pPr marL="171450" lvl="1" indent="-171450" algn="l">
+              <a:buFont typeface="Arial" panose="020B0604020202020204" pitchFamily="34" charset="0"/>
+              <a:buChar char="•"/>
+            </a:pPr>
+            <a:r>
+              <a:rPr lang="en-US" sz="1000" b="1" dirty="0">
+                <a:latin typeface="Times New Roman" panose="02020603050405020304" pitchFamily="18" charset="0"/>
+                <a:cs typeface="Times New Roman" panose="02020603050405020304" pitchFamily="18" charset="0"/>
+              </a:rPr>
+              <a:t>T3 - Screenshot.</a:t>
+            </a:r>
+            <a:r>
+              <a:rPr lang="en-US" sz="1000" b="0" dirty="0">
+                <a:latin typeface="Times New Roman" panose="02020603050405020304" pitchFamily="18" charset="0"/>
+                <a:cs typeface="Times New Roman" panose="02020603050405020304" pitchFamily="18" charset="0"/>
+              </a:rPr>
+              <a:t> Transparent full-screen overlay, drag a region, capture, optional OCR.</a:t>
             </a:r>
           </a:p>
         </p:txBody>
@@ -14010,7 +14034,7 @@
                 <a:cs typeface="Times New Roman" panose="02020603050405020304" pitchFamily="18" charset="0"/>
                 <a:sym typeface="Arial"/>
               </a:rPr>
-              <a:t>Phase 0 - The OS Layer Is Already Built and Working</a:t>
+              <a:t>Layer 1 - Edit In Place, and Why There Is No Plugin</a:t>
             </a:r>
           </a:p>
         </p:txBody>
@@ -14345,7 +14369,7 @@
                 <a:latin typeface="Times New Roman" panose="02020603050405020304" pitchFamily="18" charset="0"/>
                 <a:cs typeface="Times New Roman" panose="02020603050405020304" pitchFamily="18" charset="0"/>
               </a:rPr>
-              <a:t> / 29</a:t>
+              <a:t> / 33</a:t>
             </a:r>
             <a:endParaRPr dirty="0">
               <a:latin typeface="Times New Roman" panose="02020603050405020304" pitchFamily="18" charset="0"/>
@@ -14384,18 +14408,18 @@
               <a:buChar char="•"/>
             </a:pPr>
             <a:r>
-              <a:rPr lang="en-US" sz="1000" b="1" dirty="0">
-                <a:latin typeface="Times New Roman" panose="02020603050405020304" pitchFamily="18" charset="0"/>
-                <a:cs typeface="Times New Roman" panose="02020603050405020304" pitchFamily="18" charset="0"/>
-              </a:rPr>
-              <a:t>We built the risky layer first, before designing the product.</a:t>
-            </a:r>
-            <a:r>
-              <a:rPr lang="en-US" sz="1000" b="0" dirty="0">
-                <a:latin typeface="Times New Roman" panose="02020603050405020304" pitchFamily="18" charset="0"/>
-                <a:cs typeface="Times New Roman" panose="02020603050405020304" pitchFamily="18" charset="0"/>
-              </a:rPr>
-              <a:t> The application and agent layers are familiar work. The open question was whether a desktop app can genuinely reach into other applications. It can, and here is the running code.</a:t>
+              <a:rPr lang="en-US" sz="1050" b="1" dirty="0">
+                <a:latin typeface="Times New Roman" panose="02020603050405020304" pitchFamily="18" charset="0"/>
+                <a:cs typeface="Times New Roman" panose="02020603050405020304" pitchFamily="18" charset="0"/>
+              </a:rPr>
+              <a:t>This is what separates PERCH from a chat window.</a:t>
+            </a:r>
+            <a:r>
+              <a:rPr lang="en-US" sz="1050" b="0" dirty="0">
+                <a:latin typeface="Times New Roman" panose="02020603050405020304" pitchFamily="18" charset="0"/>
+                <a:cs typeface="Times New Roman" panose="02020603050405020304" pitchFamily="18" charset="0"/>
+              </a:rPr>
+              <a:t> A chat window can only hand you text to copy. PERCH writes the answer back into the application you came from.</a:t>
             </a:r>
           </a:p>
           <a:p>
@@ -14404,18 +14428,18 @@
               <a:buChar char="•"/>
             </a:pPr>
             <a:r>
-              <a:rPr lang="en-US" sz="1000" b="1" dirty="0">
-                <a:latin typeface="Times New Roman" panose="02020603050405020304" pitchFamily="18" charset="0"/>
-                <a:cs typeface="Times New Roman" panose="02020603050405020304" pitchFamily="18" charset="0"/>
-              </a:rPr>
-              <a:t>T1 verified:</a:t>
-            </a:r>
-            <a:r>
-              <a:rPr lang="en-US" sz="1000" b="0" dirty="0">
-                <a:latin typeface="Times New Roman" panose="02020603050405020304" pitchFamily="18" charset="0"/>
-                <a:cs typeface="Times New Roman" panose="02020603050405020304" pitchFamily="18" charset="0"/>
-              </a:rPr>
-              <a:t> a system-wide hotkey fires regardless of focus (RegisterHotKey + message loop).</a:t>
+              <a:rPr lang="en-US" sz="1050" b="1" dirty="0">
+                <a:latin typeface="Times New Roman" panose="02020603050405020304" pitchFamily="18" charset="0"/>
+                <a:cs typeface="Times New Roman" panose="02020603050405020304" pitchFamily="18" charset="0"/>
+              </a:rPr>
+              <a:t>The mechanism:</a:t>
+            </a:r>
+            <a:r>
+              <a:rPr lang="en-US" sz="1050" b="0" dirty="0">
+                <a:latin typeface="Times New Roman" panose="02020603050405020304" pitchFamily="18" charset="0"/>
+                <a:cs typeface="Times New Roman" panose="02020603050405020304" pitchFamily="18" charset="0"/>
+              </a:rPr>
+              <a:t> put the answer on the clipboard, restore focus to the original window using the HWND saved at trigger time, send Ctrl+V, then restore the user's previous clipboard.</a:t>
             </a:r>
           </a:p>
           <a:p>
@@ -14424,18 +14448,18 @@
               <a:buChar char="•"/>
             </a:pPr>
             <a:r>
-              <a:rPr lang="en-US" sz="1000" b="1" dirty="0">
-                <a:latin typeface="Times New Roman" panose="02020603050405020304" pitchFamily="18" charset="0"/>
-                <a:cs typeface="Times New Roman" panose="02020603050405020304" pitchFamily="18" charset="0"/>
-              </a:rPr>
-              <a:t>T2 verified:</a:t>
-            </a:r>
-            <a:r>
-              <a:rPr lang="en-US" sz="1000" b="0" dirty="0">
-                <a:latin typeface="Times New Roman" panose="02020603050405020304" pitchFamily="18" charset="0"/>
-                <a:cs typeface="Times New Roman" panose="02020603050405020304" pitchFamily="18" charset="0"/>
-              </a:rPr>
-              <a:t> selection read from other applications - UI Automation available and working, clipboard round-trip as fallback, with the method logged per application.</a:t>
+              <a:rPr lang="en-US" sz="1050" b="1" dirty="0">
+                <a:latin typeface="Times New Roman" panose="02020603050405020304" pitchFamily="18" charset="0"/>
+                <a:cs typeface="Times New Roman" panose="02020603050405020304" pitchFamily="18" charset="0"/>
+              </a:rPr>
+              <a:t>Why replacement needs no app-specific integration:</a:t>
+            </a:r>
+            <a:r>
+              <a:rPr lang="en-US" sz="1050" b="0" dirty="0">
+                <a:latin typeface="Times New Roman" panose="02020603050405020304" pitchFamily="18" charset="0"/>
+                <a:cs typeface="Times New Roman" panose="02020603050405020304" pitchFamily="18" charset="0"/>
+              </a:rPr>
+              <a:t> in every text field on Windows, pasting while text is selected replaces that text. We use behaviour every text field already has.</a:t>
             </a:r>
           </a:p>
           <a:p>
@@ -14444,18 +14468,18 @@
               <a:buChar char="•"/>
             </a:pPr>
             <a:r>
-              <a:rPr lang="en-US" sz="1000" b="1" dirty="0">
-                <a:latin typeface="Times New Roman" panose="02020603050405020304" pitchFamily="18" charset="0"/>
-                <a:cs typeface="Times New Roman" panose="02020603050405020304" pitchFamily="18" charset="0"/>
-              </a:rPr>
-              <a:t>T3 verified:</a:t>
-            </a:r>
-            <a:r>
-              <a:rPr lang="en-US" sz="1000" b="0" dirty="0">
-                <a:latin typeface="Times New Roman" panose="02020603050405020304" pitchFamily="18" charset="0"/>
-                <a:cs typeface="Times New Roman" panose="02020603050405020304" pitchFamily="18" charset="0"/>
-              </a:rPr>
-              <a:t> region screenshot via overlay and capture.</a:t>
+              <a:rPr lang="en-US" sz="1050" b="1" dirty="0">
+                <a:latin typeface="Times New Roman" panose="02020603050405020304" pitchFamily="18" charset="0"/>
+                <a:cs typeface="Times New Roman" panose="02020603050405020304" pitchFamily="18" charset="0"/>
+              </a:rPr>
+              <a:t>Three actions:</a:t>
+            </a:r>
+            <a:r>
+              <a:rPr lang="en-US" sz="1050" b="0" dirty="0">
+                <a:latin typeface="Times New Roman" panose="02020603050405020304" pitchFamily="18" charset="0"/>
+                <a:cs typeface="Times New Roman" panose="02020603050405020304" pitchFamily="18" charset="0"/>
+              </a:rPr>
+              <a:t> Replace overwrites the selection, Insert after appends below it, Copy only changes nothing. If Windows refuses the focus change we do not paste - landing in the wrong window is worse than not pasting.</a:t>
             </a:r>
           </a:p>
           <a:p>
@@ -14464,51 +14488,18 @@
               <a:buChar char="•"/>
             </a:pPr>
             <a:r>
-              <a:rPr lang="en-US" sz="1000" b="1" dirty="0">
-                <a:latin typeface="Times New Roman" panose="02020603050405020304" pitchFamily="18" charset="0"/>
-                <a:cs typeface="Times New Roman" panose="02020603050405020304" pitchFamily="18" charset="0"/>
-              </a:rPr>
-              <a:t>Panel placement verified:</a:t>
-            </a:r>
-            <a:r>
-              <a:rPr lang="en-US" sz="1000" b="0" dirty="0">
-                <a:latin typeface="Times New Roman" panose="02020603050405020304" pitchFamily="18" charset="0"/>
-                <a:cs typeface="Times New Roman" panose="02020603050405020304" pitchFamily="18" charset="0"/>
-              </a:rPr>
-              <a:t> GetForegroundWindow + GetWindowRect correctly returned the host window and its rectangle; the panel docks beside it, falling back left, then to the screen edge.</a:t>
-            </a:r>
-          </a:p>
-          <a:p>
-            <a:pPr marL="171450" lvl="1" indent="-171450" algn="l">
-              <a:buFont typeface="Arial" panose="020B0604020202020204" pitchFamily="34" charset="0"/>
-              <a:buChar char="•"/>
-            </a:pPr>
-            <a:r>
-              <a:rPr lang="en-US" sz="1000" b="1" dirty="0">
-                <a:latin typeface="Times New Roman" panose="02020603050405020304" pitchFamily="18" charset="0"/>
-                <a:cs typeface="Times New Roman" panose="02020603050405020304" pitchFamily="18" charset="0"/>
-              </a:rPr>
-              <a:t>Edit-in-place verified:</a:t>
-            </a:r>
-            <a:r>
-              <a:rPr lang="en-US" sz="1000" b="0" dirty="0">
-                <a:latin typeface="Times New Roman" panose="02020603050405020304" pitchFamily="18" charset="0"/>
-                <a:cs typeface="Times New Roman" panose="02020603050405020304" pitchFamily="18" charset="0"/>
-              </a:rPr>
-              <a:t> focus restore and paste-back, with a deliberate refusal to paste if Windows blocks the focus change - landing in the wrong window is worse than not pasting.</a:t>
-            </a:r>
-          </a:p>
-          <a:p>
-            <a:pPr marL="171450" lvl="1" indent="-171450" algn="l">
-              <a:buFont typeface="Arial" panose="020B0604020202020204" pitchFamily="34" charset="0"/>
-              <a:buChar char="•"/>
-            </a:pPr>
-            <a:r>
-              <a:rPr lang="en-US" sz="1000" b="1" dirty="0">
-                <a:latin typeface="Times New Roman" panose="02020603050405020304" pitchFamily="18" charset="0"/>
-                <a:cs typeface="Times New Roman" panose="02020603050405020304" pitchFamily="18" charset="0"/>
-              </a:rPr>
-              <a:t>Nothing here needs a driver, a kernel hook, an OS modification or a special permission.</a:t>
+              <a:rPr lang="en-US" sz="1050" b="1" dirty="0">
+                <a:latin typeface="Times New Roman" panose="02020603050405020304" pitchFamily="18" charset="0"/>
+                <a:cs typeface="Times New Roman" panose="02020603050405020304" pitchFamily="18" charset="0"/>
+              </a:rPr>
+              <a:t>Rejected alternative - per-application plugins.</a:t>
+            </a:r>
+            <a:r>
+              <a:rPr lang="en-US" sz="1050" b="0" dirty="0">
+                <a:latin typeface="Times New Roman" panose="02020603050405020304" pitchFamily="18" charset="0"/>
+                <a:cs typeface="Times New Roman" panose="02020603050405020304" pitchFamily="18" charset="0"/>
+              </a:rPr>
+              <a:t> An Office add-in, a VS Code extension and a browser extension mean N integrations, N review processes, and it only works where we shipped.</a:t>
             </a:r>
           </a:p>
         </p:txBody>
@@ -14756,7 +14747,7 @@
                 <a:cs typeface="Times New Roman" panose="02020603050405020304" pitchFamily="18" charset="0"/>
                 <a:sym typeface="Arial"/>
               </a:rPr>
-              <a:t>Layer 2 - Context Assembly Under a Token Budget</a:t>
+              <a:t>What Already Runs - The Prototype</a:t>
             </a:r>
           </a:p>
         </p:txBody>
@@ -15091,7 +15082,7 @@
                 <a:latin typeface="Times New Roman" panose="02020603050405020304" pitchFamily="18" charset="0"/>
                 <a:cs typeface="Times New Roman" panose="02020603050405020304" pitchFamily="18" charset="0"/>
               </a:rPr>
-              <a:t> / 29</a:t>
+              <a:t> / 33</a:t>
             </a:r>
             <a:endParaRPr dirty="0">
               <a:latin typeface="Times New Roman" panose="02020603050405020304" pitchFamily="18" charset="0"/>
@@ -15130,18 +15121,18 @@
               <a:buChar char="•"/>
             </a:pPr>
             <a:r>
-              <a:rPr lang="en-US" sz="1050" b="1" dirty="0">
-                <a:latin typeface="Times New Roman" panose="02020603050405020304" pitchFamily="18" charset="0"/>
-                <a:cs typeface="Times New Roman" panose="02020603050405020304" pitchFamily="18" charset="0"/>
-              </a:rPr>
-              <a:t>The job:</a:t>
-            </a:r>
-            <a:r>
-              <a:rPr lang="en-US" sz="1050" b="0" dirty="0">
-                <a:latin typeface="Times New Roman" panose="02020603050405020304" pitchFamily="18" charset="0"/>
-                <a:cs typeface="Times New Roman" panose="02020603050405020304" pitchFamily="18" charset="0"/>
-              </a:rPr>
-              <a:t> given a question, a selection, and everything known about the user, decide what actually enters the prompt, under a hard ceiling set by the chosen model.</a:t>
+              <a:rPr lang="en-US" sz="1000" b="1" dirty="0">
+                <a:latin typeface="Times New Roman" panose="02020603050405020304" pitchFamily="18" charset="0"/>
+                <a:cs typeface="Times New Roman" panose="02020603050405020304" pitchFamily="18" charset="0"/>
+              </a:rPr>
+              <a:t>We built the risky layer first, then the pipeline on top of it.</a:t>
+            </a:r>
+            <a:r>
+              <a:rPr lang="en-US" sz="1000" b="0" dirty="0">
+                <a:latin typeface="Times New Roman" panose="02020603050405020304" pitchFamily="18" charset="0"/>
+                <a:cs typeface="Times New Roman" panose="02020603050405020304" pitchFamily="18" charset="0"/>
+              </a:rPr>
+              <a:t> The application and agent layers are familiar work; whether a desktop app can genuinely reach into other applications was not. It can, and it is running.</a:t>
             </a:r>
           </a:p>
           <a:p>
@@ -15150,11 +15141,18 @@
               <a:buChar char="•"/>
             </a:pPr>
             <a:r>
-              <a:rPr lang="en-US" sz="1050" b="1" dirty="0">
-                <a:latin typeface="Times New Roman" panose="02020603050405020304" pitchFamily="18" charset="0"/>
-                <a:cs typeface="Times New Roman" panose="02020603050405020304" pitchFamily="18" charset="0"/>
-              </a:rPr>
-              <a:t>budget = context_window(model) - reserve(response) - reserve(system)</a:t>
+              <a:rPr lang="en-US" sz="1000" b="1" dirty="0">
+                <a:latin typeface="Times New Roman" panose="02020603050405020304" pitchFamily="18" charset="0"/>
+                <a:cs typeface="Times New Roman" panose="02020603050405020304" pitchFamily="18" charset="0"/>
+              </a:rPr>
+              <a:t>OS layer, verified:</a:t>
+            </a:r>
+            <a:r>
+              <a:rPr lang="en-US" sz="1000" b="0" dirty="0">
+                <a:latin typeface="Times New Roman" panose="02020603050405020304" pitchFamily="18" charset="0"/>
+                <a:cs typeface="Times New Roman" panose="02020603050405020304" pitchFamily="18" charset="0"/>
+              </a:rPr>
+              <a:t> system-wide hotkey; selection read from other applications via UI Automation with clipboard fallback; region screenshot; panel docked beside the host window via GetForegroundWindow and GetWindowRect; focus restore and paste-back.</a:t>
             </a:r>
           </a:p>
           <a:p>
@@ -15163,18 +15161,18 @@
               <a:buChar char="•"/>
             </a:pPr>
             <a:r>
-              <a:rPr lang="en-US" sz="1050" b="1" dirty="0">
-                <a:latin typeface="Times New Roman" panose="02020603050405020304" pitchFamily="18" charset="0"/>
-                <a:cs typeface="Times New Roman" panose="02020603050405020304" pitchFamily="18" charset="0"/>
-              </a:rPr>
-              <a:t>Priority order:</a:t>
-            </a:r>
-            <a:r>
-              <a:rPr lang="en-US" sz="1050" b="0" dirty="0">
-                <a:latin typeface="Times New Roman" panose="02020603050405020304" pitchFamily="18" charset="0"/>
-                <a:cs typeface="Times New Roman" panose="02020603050405020304" pitchFamily="18" charset="0"/>
-              </a:rPr>
-              <a:t> system and persona, always; the selection, always, because it is why the user summoned us; recent conversation, oldest truncated first; then retrieved memory into whatever remains; tool results claimed from that same allowance.</a:t>
+              <a:rPr lang="en-US" sz="1000" b="1" dirty="0">
+                <a:latin typeface="Times New Roman" panose="02020603050405020304" pitchFamily="18" charset="0"/>
+                <a:cs typeface="Times New Roman" panose="02020603050405020304" pitchFamily="18" charset="0"/>
+              </a:rPr>
+              <a:t>Agent layer, running:</a:t>
+            </a:r>
+            <a:r>
+              <a:rPr lang="en-US" sz="1000" b="0" dirty="0">
+                <a:latin typeface="Times New Roman" panose="02020603050405020304" pitchFamily="18" charset="0"/>
+                <a:cs typeface="Times New Roman" panose="02020603050405020304" pitchFamily="18" charset="0"/>
+              </a:rPr>
+              <a:t> six typed memory classes stored as Markdown with a SQLite index; intent and class routing; ranker; admission scorer; budget packer; model registry with local and cloud routes; and a tool surface covering web, files, documents, OCR and Python.</a:t>
             </a:r>
           </a:p>
           <a:p>
@@ -15183,18 +15181,18 @@
               <a:buChar char="•"/>
             </a:pPr>
             <a:r>
-              <a:rPr lang="en-US" sz="1050" b="1" dirty="0">
-                <a:latin typeface="Times New Roman" panose="02020603050405020304" pitchFamily="18" charset="0"/>
-                <a:cs typeface="Times New Roman" panose="02020603050405020304" pitchFamily="18" charset="0"/>
-              </a:rPr>
-              <a:t>Memory items enter whole or not at all.</a:t>
-            </a:r>
-            <a:r>
-              <a:rPr lang="en-US" sz="1050" b="0" dirty="0">
-                <a:latin typeface="Times New Roman" panose="02020603050405020304" pitchFamily="18" charset="0"/>
-                <a:cs typeface="Times New Roman" panose="02020603050405020304" pitchFamily="18" charset="0"/>
-              </a:rPr>
-              <a:t> Half a project description is worse than none.</a:t>
+              <a:rPr lang="en-US" sz="1000" b="1" dirty="0">
+                <a:latin typeface="Times New Roman" panose="02020603050405020304" pitchFamily="18" charset="0"/>
+                <a:cs typeface="Times New Roman" panose="02020603050405020304" pitchFamily="18" charset="0"/>
+              </a:rPr>
+              <a:t>Verification:</a:t>
+            </a:r>
+            <a:r>
+              <a:rPr lang="en-US" sz="1000" b="0" dirty="0">
+                <a:latin typeface="Times New Roman" panose="02020603050405020304" pitchFamily="18" charset="0"/>
+                <a:cs typeface="Times New Roman" panose="02020603050405020304" pitchFamily="18" charset="0"/>
+              </a:rPr>
+              <a:t> 21 tests pass with no model, no GPU and no network. The ablation runs on a seeded memory set and prints every routing, ranking and admission decision.</a:t>
             </a:r>
           </a:p>
           <a:p>
@@ -15203,38 +15201,11 @@
               <a:buChar char="•"/>
             </a:pPr>
             <a:r>
-              <a:rPr lang="en-US" sz="1050" b="1" dirty="0">
-                <a:latin typeface="Times New Roman" panose="02020603050405020304" pitchFamily="18" charset="0"/>
-                <a:cs typeface="Times New Roman" panose="02020603050405020304" pitchFamily="18" charset="0"/>
-              </a:rPr>
-              <a:t>This is what makes model choice possible.</a:t>
-            </a:r>
-            <a:r>
-              <a:rPr lang="en-US" sz="1050" b="0" dirty="0">
-                <a:latin typeface="Times New Roman" panose="02020603050405020304" pitchFamily="18" charset="0"/>
-                <a:cs typeface="Times New Roman" panose="02020603050405020304" pitchFamily="18" charset="0"/>
-              </a:rPr>
-              <a:t> Swap a local Qwen3 4B for a frontier API and the budget recomputes - nothing else changes. The same memory layer serves a 3 GB local model and a 200K-context frontier model.</a:t>
-            </a:r>
-          </a:p>
-          <a:p>
-            <a:pPr marL="171450" lvl="1" indent="-171450" algn="l">
-              <a:buFont typeface="Arial" panose="020B0604020202020204" pitchFamily="34" charset="0"/>
-              <a:buChar char="•"/>
-            </a:pPr>
-            <a:r>
-              <a:rPr lang="en-US" sz="1050" b="1" dirty="0">
-                <a:latin typeface="Times New Roman" panose="02020603050405020304" pitchFamily="18" charset="0"/>
-                <a:cs typeface="Times New Roman" panose="02020603050405020304" pitchFamily="18" charset="0"/>
-              </a:rPr>
-              <a:t>Relevance uses three signals:</a:t>
-            </a:r>
-            <a:r>
-              <a:rPr lang="en-US" sz="1050" b="0" dirty="0">
-                <a:latin typeface="Times New Roman" panose="02020603050405020304" pitchFamily="18" charset="0"/>
-                <a:cs typeface="Times New Roman" panose="02020603050405020304" pitchFamily="18" charset="0"/>
-              </a:rPr>
-              <a:t> semantic similarity to the query and selection, structural match (a project block is relevant to a coding question, not to a leave email), and recency of use.</a:t>
+              <a:rPr lang="en-US" sz="1000" b="1" dirty="0">
+                <a:latin typeface="Times New Roman" panose="02020603050405020304" pitchFamily="18" charset="0"/>
+                <a:cs typeface="Times New Roman" panose="02020603050405020304" pitchFamily="18" charset="0"/>
+              </a:rPr>
+              <a:t>Nothing here needs a driver, a kernel hook, an OS modification or a special permission.</a:t>
             </a:r>
           </a:p>
         </p:txBody>
@@ -15482,7 +15453,7 @@
                 <a:cs typeface="Times New Roman" panose="02020603050405020304" pitchFamily="18" charset="0"/>
                 <a:sym typeface="Arial"/>
               </a:rPr>
-              <a:t>Layer 3 - Memory the User Writes and Owns</a:t>
+              <a:t>Layer 3 - Six Memory Classes, Open Tags</a:t>
             </a:r>
           </a:p>
         </p:txBody>
@@ -15817,7 +15788,7 @@
                 <a:latin typeface="Times New Roman" panose="02020603050405020304" pitchFamily="18" charset="0"/>
                 <a:cs typeface="Times New Roman" panose="02020603050405020304" pitchFamily="18" charset="0"/>
               </a:rPr>
-              <a:t> / 29</a:t>
+              <a:t> / 33</a:t>
             </a:r>
             <a:endParaRPr dirty="0">
               <a:latin typeface="Times New Roman" panose="02020603050405020304" pitchFamily="18" charset="0"/>
@@ -15856,18 +15827,18 @@
               <a:buChar char="•"/>
             </a:pPr>
             <a:r>
-              <a:rPr lang="en-US" sz="1050" b="1" dirty="0">
-                <a:latin typeface="Times New Roman" panose="02020603050405020304" pitchFamily="18" charset="0"/>
-                <a:cs typeface="Times New Roman" panose="02020603050405020304" pitchFamily="18" charset="0"/>
-              </a:rPr>
-              <a:t>Four kinds.</a:t>
-            </a:r>
-            <a:r>
-              <a:rPr lang="en-US" sz="1050" b="0" dirty="0">
-                <a:latin typeface="Times New Roman" panose="02020603050405020304" pitchFamily="18" charset="0"/>
-                <a:cs typeface="Times New Roman" panose="02020603050405020304" pitchFamily="18" charset="0"/>
-              </a:rPr>
-              <a:t> Identity - who you are and how you want answers written. Domain - projects, courses, ongoing work. Episodic - past conversations and outcomes. Working - this session.</a:t>
+              <a:rPr lang="en-US" sz="950" b="1" dirty="0">
+                <a:latin typeface="Times New Roman" panose="02020603050405020304" pitchFamily="18" charset="0"/>
+                <a:cs typeface="Times New Roman" panose="02020603050405020304" pitchFamily="18" charset="0"/>
+              </a:rPr>
+              <a:t>The design rule: few classes, many tags.</a:t>
+            </a:r>
+            <a:r>
+              <a:rPr lang="en-US" sz="950" b="0" dirty="0">
+                <a:latin typeface="Times New Roman" panose="02020603050405020304" pitchFamily="18" charset="0"/>
+                <a:cs typeface="Times New Roman" panose="02020603050405020304" pitchFamily="18" charset="0"/>
+              </a:rPr>
+              <a:t> A class is a routing decision, and every class we add is another chance for the router to be wrong. Fine distinctions go in tags, which only refine ranking inside an already-chosen class and cannot cause a routing miss.</a:t>
             </a:r>
           </a:p>
           <a:p>
@@ -15876,18 +15847,18 @@
               <a:buChar char="•"/>
             </a:pPr>
             <a:r>
-              <a:rPr lang="en-US" sz="1050" b="1" dirty="0">
-                <a:latin typeface="Times New Roman" panose="02020603050405020304" pitchFamily="18" charset="0"/>
-                <a:cs typeface="Times New Roman" panose="02020603050405020304" pitchFamily="18" charset="0"/>
-              </a:rPr>
-              <a:t>Identity and Domain are written by you.</a:t>
-            </a:r>
-            <a:r>
-              <a:rPr lang="en-US" sz="1050" b="0" dirty="0">
-                <a:latin typeface="Times New Roman" panose="02020603050405020304" pitchFamily="18" charset="0"/>
-                <a:cs typeface="Times New Roman" panose="02020603050405020304" pitchFamily="18" charset="0"/>
-              </a:rPr>
-              <a:t> That is the deliberate inversion: personal context is authored and owned, not silently inferred from conversation.</a:t>
+              <a:rPr lang="en-US" sz="950" b="1" dirty="0">
+                <a:latin typeface="Times New Roman" panose="02020603050405020304" pitchFamily="18" charset="0"/>
+                <a:cs typeface="Times New Roman" panose="02020603050405020304" pitchFamily="18" charset="0"/>
+              </a:rPr>
+              <a:t>Identity</a:t>
+            </a:r>
+            <a:r>
+              <a:rPr lang="en-US" sz="950" b="0" dirty="0">
+                <a:latin typeface="Times New Roman" panose="02020603050405020304" pitchFamily="18" charset="0"/>
+                <a:cs typeface="Times New Roman" panose="02020603050405020304" pitchFamily="18" charset="0"/>
+              </a:rPr>
+              <a:t> - who you are, how you want answers written, standing instructions. Small, cheap, and relevant to almost everything.</a:t>
             </a:r>
           </a:p>
           <a:p>
@@ -15896,18 +15867,18 @@
               <a:buChar char="•"/>
             </a:pPr>
             <a:r>
-              <a:rPr lang="en-US" sz="1050" b="1" dirty="0">
-                <a:latin typeface="Times New Roman" panose="02020603050405020304" pitchFamily="18" charset="0"/>
-                <a:cs typeface="Times New Roman" panose="02020603050405020304" pitchFamily="18" charset="0"/>
-              </a:rPr>
-              <a:t>The pipeline:</a:t>
-            </a:r>
-            <a:r>
-              <a:rPr lang="en-US" sz="1050" b="0" dirty="0">
-                <a:latin typeface="Times New Roman" panose="02020603050405020304" pitchFamily="18" charset="0"/>
-                <a:cs typeface="Times New Roman" panose="02020603050405020304" pitchFamily="18" charset="0"/>
-              </a:rPr>
-              <a:t> store text with category, embedding, timestamps and use count; index in a local vector index; retrieve by category filter, then semantic top-k, then recency and use rerank, then budget-aware selection. SQLite and plain files. No server.</a:t>
+              <a:rPr lang="en-US" sz="950" b="1" dirty="0">
+                <a:latin typeface="Times New Roman" panose="02020603050405020304" pitchFamily="18" charset="0"/>
+                <a:cs typeface="Times New Roman" panose="02020603050405020304" pitchFamily="18" charset="0"/>
+              </a:rPr>
+              <a:t>Project</a:t>
+            </a:r>
+            <a:r>
+              <a:rPr lang="en-US" sz="950" b="0" dirty="0">
+                <a:latin typeface="Times New Roman" panose="02020603050405020304" pitchFamily="18" charset="0"/>
+                <a:cs typeface="Times New Roman" panose="02020603050405020304" pitchFamily="18" charset="0"/>
+              </a:rPr>
+              <a:t> - purpose, stack, architecture decisions and why, problems and how each was fixed, timeline, results, open items.</a:t>
             </a:r>
           </a:p>
           <a:p>
@@ -15916,18 +15887,18 @@
               <a:buChar char="•"/>
             </a:pPr>
             <a:r>
-              <a:rPr lang="en-US" sz="1050" b="1" dirty="0">
-                <a:latin typeface="Times New Roman" panose="02020603050405020304" pitchFamily="18" charset="0"/>
-                <a:cs typeface="Times New Roman" panose="02020603050405020304" pitchFamily="18" charset="0"/>
-              </a:rPr>
-              <a:t>Every memory item is a file you can open, edit or delete.</a:t>
-            </a:r>
-            <a:r>
-              <a:rPr lang="en-US" sz="1050" b="0" dirty="0">
-                <a:latin typeface="Times New Roman" panose="02020603050405020304" pitchFamily="18" charset="0"/>
-                <a:cs typeface="Times New Roman" panose="02020603050405020304" pitchFamily="18" charset="0"/>
-              </a:rPr>
-              <a:t> Memory you cannot read is memory you cannot trust - and after Recall, that is not a slogan.</a:t>
+              <a:rPr lang="en-US" sz="950" b="1" dirty="0">
+                <a:latin typeface="Times New Roman" panose="02020603050405020304" pitchFamily="18" charset="0"/>
+                <a:cs typeface="Times New Roman" panose="02020603050405020304" pitchFamily="18" charset="0"/>
+              </a:rPr>
+              <a:t>Academic</a:t>
+            </a:r>
+            <a:r>
+              <a:rPr lang="en-US" sz="950" b="0" dirty="0">
+                <a:latin typeface="Times New Roman" panose="02020603050405020304" pitchFamily="18" charset="0"/>
+                <a:cs typeface="Times New Roman" panose="02020603050405020304" pitchFamily="18" charset="0"/>
+              </a:rPr>
+              <a:t> - institution, semester, subjects, assessment format, conventions, deadlines.</a:t>
             </a:r>
           </a:p>
           <a:p>
@@ -15936,18 +15907,58 @@
               <a:buChar char="•"/>
             </a:pPr>
             <a:r>
-              <a:rPr lang="en-US" sz="1050" b="1" dirty="0">
-                <a:latin typeface="Times New Roman" panose="02020603050405020304" pitchFamily="18" charset="0"/>
-                <a:cs typeface="Times New Roman" panose="02020603050405020304" pitchFamily="18" charset="0"/>
-              </a:rPr>
-              <a:t>Categories are extensible:</a:t>
-            </a:r>
-            <a:r>
-              <a:rPr lang="en-US" sz="1050" b="0" dirty="0">
-                <a:latin typeface="Times New Roman" panose="02020603050405020304" pitchFamily="18" charset="0"/>
-                <a:cs typeface="Times New Roman" panose="02020603050405020304" pitchFamily="18" charset="0"/>
-              </a:rPr>
-              <a:t> academic conventions, writing style, professional context, accessibility constraints, and user-defined categories with user-defined schemas.</a:t>
+              <a:rPr lang="en-US" sz="950" b="1" dirty="0">
+                <a:latin typeface="Times New Roman" panose="02020603050405020304" pitchFamily="18" charset="0"/>
+                <a:cs typeface="Times New Roman" panose="02020603050405020304" pitchFamily="18" charset="0"/>
+              </a:rPr>
+              <a:t>Career</a:t>
+            </a:r>
+            <a:r>
+              <a:rPr lang="en-US" sz="950" b="0" dirty="0">
+                <a:latin typeface="Times New Roman" panose="02020603050405020304" pitchFamily="18" charset="0"/>
+                <a:cs typeface="Times New Roman" panose="02020603050405020304" pitchFamily="18" charset="0"/>
+              </a:rPr>
+              <a:t> - roles, skills, applications, interviews, targets.</a:t>
+            </a:r>
+          </a:p>
+          <a:p>
+            <a:pPr marL="171450" lvl="1" indent="-171450" algn="l">
+              <a:buFont typeface="Arial" panose="020B0604020202020204" pitchFamily="34" charset="0"/>
+              <a:buChar char="•"/>
+            </a:pPr>
+            <a:r>
+              <a:rPr lang="en-US" sz="950" b="1" dirty="0">
+                <a:latin typeface="Times New Roman" panose="02020603050405020304" pitchFamily="18" charset="0"/>
+                <a:cs typeface="Times New Roman" panose="02020603050405020304" pitchFamily="18" charset="0"/>
+              </a:rPr>
+              <a:t>Health and Personal</a:t>
+            </a:r>
+            <a:r>
+              <a:rPr lang="en-US" sz="950" b="0" dirty="0">
+                <a:latin typeface="Times New Roman" panose="02020603050405020304" pitchFamily="18" charset="0"/>
+                <a:cs typeface="Times New Roman" panose="02020603050405020304" pitchFamily="18" charset="0"/>
+              </a:rPr>
+              <a:t> - conditions, medications, allergies; relationships, preferences, commitments. Both are private by default, so the type system doubles as the privacy primitive.</a:t>
+            </a:r>
+          </a:p>
+          <a:p>
+            <a:pPr marL="171450" lvl="1" indent="-171450" algn="l">
+              <a:buFont typeface="Arial" panose="020B0604020202020204" pitchFamily="34" charset="0"/>
+              <a:buChar char="•"/>
+            </a:pPr>
+            <a:r>
+              <a:rPr lang="en-US" sz="950" b="1" dirty="0">
+                <a:latin typeface="Times New Roman" panose="02020603050405020304" pitchFamily="18" charset="0"/>
+                <a:cs typeface="Times New Roman" panose="02020603050405020304" pitchFamily="18" charset="0"/>
+              </a:rPr>
+              <a:t>Storage:</a:t>
+            </a:r>
+            <a:r>
+              <a:rPr lang="en-US" sz="950" b="0" dirty="0">
+                <a:latin typeface="Times New Roman" panose="02020603050405020304" pitchFamily="18" charset="0"/>
+                <a:cs typeface="Times New Roman" panose="02020603050405020304" pitchFamily="18" charset="0"/>
+              </a:rPr>
+              <a:t> one Markdown file per item with YAML frontmatter. The files are the truth; the SQLite vector index is derived and rebuildable. Memory you cannot read is memory you cannot trust.</a:t>
             </a:r>
           </a:p>
         </p:txBody>
@@ -16530,7 +16541,7 @@
                 <a:latin typeface="Times New Roman" panose="02020603050405020304" pitchFamily="18" charset="0"/>
                 <a:cs typeface="Times New Roman" panose="02020603050405020304" pitchFamily="18" charset="0"/>
               </a:rPr>
-              <a:t> / 29</a:t>
+              <a:t> / 33</a:t>
             </a:r>
             <a:endParaRPr dirty="0">
               <a:latin typeface="Times New Roman" panose="02020603050405020304" pitchFamily="18" charset="0"/>
@@ -16569,11 +16580,11 @@
               <a:buChar char="•"/>
             </a:pPr>
             <a:r>
-              <a:rPr lang="en-US" sz="1000" b="1" dirty="0">
-                <a:latin typeface="Times New Roman" panose="02020603050405020304" pitchFamily="18" charset="0"/>
-                <a:cs typeface="Times New Roman" panose="02020603050405020304" pitchFamily="18" charset="0"/>
-              </a:rPr>
-              <a:t>This is the mechanism that solves the problem statement, and the feature that makes people install it.</a:t>
+              <a:rPr lang="en-US" sz="950" b="1" dirty="0">
+                <a:latin typeface="Times New Roman" panose="02020603050405020304" pitchFamily="18" charset="0"/>
+                <a:cs typeface="Times New Roman" panose="02020603050405020304" pitchFamily="18" charset="0"/>
+              </a:rPr>
+              <a:t>Three import paths, in order of value.</a:t>
             </a:r>
           </a:p>
           <a:p>
@@ -16582,18 +16593,18 @@
               <a:buChar char="•"/>
             </a:pPr>
             <a:r>
-              <a:rPr lang="en-US" sz="1000" b="1" dirty="0">
-                <a:latin typeface="Times New Roman" panose="02020603050405020304" pitchFamily="18" charset="0"/>
-                <a:cs typeface="Times New Roman" panose="02020603050405020304" pitchFamily="18" charset="0"/>
-              </a:rPr>
-              <a:t>PERCH ships extraction prompts.</a:t>
-            </a:r>
-            <a:r>
-              <a:rPr lang="en-US" sz="1000" b="0" dirty="0">
-                <a:latin typeface="Times New Roman" panose="02020603050405020304" pitchFamily="18" charset="0"/>
-                <a:cs typeface="Times New Roman" panose="02020603050405020304" pitchFamily="18" charset="0"/>
-              </a:rPr>
-              <a:t> You paste one into any assistant session that already contains knowledge about you, and it returns a structured block you import in one click.</a:t>
+              <a:rPr lang="en-US" sz="950" b="1" dirty="0">
+                <a:latin typeface="Times New Roman" panose="02020603050405020304" pitchFamily="18" charset="0"/>
+                <a:cs typeface="Times New Roman" panose="02020603050405020304" pitchFamily="18" charset="0"/>
+              </a:rPr>
+              <a:t>1. Platform export - the primary one.</a:t>
+            </a:r>
+            <a:r>
+              <a:rPr lang="en-US" sz="950" b="0" dirty="0">
+                <a:latin typeface="Times New Roman" panose="02020603050405020304" pitchFamily="18" charset="0"/>
+                <a:cs typeface="Times New Roman" panose="02020603050405020304" pitchFamily="18" charset="0"/>
+              </a:rPr>
+              <a:t> Drop the emailed archive in. PERCH parses it locally, segments sessions, runs class-typed extraction, and presents proposed items for review. Nothing is stored until you accept it.</a:t>
             </a:r>
           </a:p>
           <a:p>
@@ -16602,18 +16613,18 @@
               <a:buChar char="•"/>
             </a:pPr>
             <a:r>
-              <a:rPr lang="en-US" sz="1000" b="1" dirty="0">
-                <a:latin typeface="Times New Roman" panose="02020603050405020304" pitchFamily="18" charset="0"/>
-                <a:cs typeface="Times New Roman" panose="02020603050405020304" pitchFamily="18" charset="0"/>
-              </a:rPr>
-              <a:t>The Project block captures:</a:t>
-            </a:r>
-            <a:r>
-              <a:rPr lang="en-US" sz="1000" b="0" dirty="0">
-                <a:latin typeface="Times New Roman" panose="02020603050405020304" pitchFamily="18" charset="0"/>
-                <a:cs typeface="Times New Roman" panose="02020603050405020304" pitchFamily="18" charset="0"/>
-              </a:rPr>
-              <a:t> name and one-line purpose; stack, tools and versions; architecture decisions and why each was chosen; problems hit and how each was resolved; timeline; results and benchmarks; what remains and known limitations.</a:t>
+              <a:rPr lang="en-US" sz="950" b="1" dirty="0">
+                <a:latin typeface="Times New Roman" panose="02020603050405020304" pitchFamily="18" charset="0"/>
+                <a:cs typeface="Times New Roman" panose="02020603050405020304" pitchFamily="18" charset="0"/>
+              </a:rPr>
+              <a:t>2. Live</a:t>
+            </a:r>
+            <a:r>
+              <a:rPr lang="en-US" sz="950" b="0" dirty="0">
+                <a:latin typeface="Times New Roman" panose="02020603050405020304" pitchFamily="18" charset="0"/>
+                <a:cs typeface="Times New Roman" panose="02020603050405020304" pitchFamily="18" charset="0"/>
+              </a:rPr>
+              <a:t> - you tell PERCH something and mark it worth keeping.</a:t>
             </a:r>
           </a:p>
           <a:p>
@@ -16622,11 +16633,18 @@
               <a:buChar char="•"/>
             </a:pPr>
             <a:r>
-              <a:rPr lang="en-US" sz="1000" b="1" dirty="0">
-                <a:latin typeface="Times New Roman" panose="02020603050405020304" pitchFamily="18" charset="0"/>
-                <a:cs typeface="Times New Roman" panose="02020603050405020304" pitchFamily="18" charset="0"/>
-              </a:rPr>
-              <a:t>Run it once at the end of a project inside a coding assistant, and every one of those facts is permanently yours, outside that tool.</a:t>
+              <a:rPr lang="en-US" sz="950" b="1" dirty="0">
+                <a:latin typeface="Times New Roman" panose="02020603050405020304" pitchFamily="18" charset="0"/>
+                <a:cs typeface="Times New Roman" panose="02020603050405020304" pitchFamily="18" charset="0"/>
+              </a:rPr>
+              <a:t>3. Extraction prompt</a:t>
+            </a:r>
+            <a:r>
+              <a:rPr lang="en-US" sz="950" b="0" dirty="0">
+                <a:latin typeface="Times New Roman" panose="02020603050405020304" pitchFamily="18" charset="0"/>
+                <a:cs typeface="Times New Roman" panose="02020603050405020304" pitchFamily="18" charset="0"/>
+              </a:rPr>
+              <a:t> - for one specific session, or a platform with no export. Paste the class prompt in, paste the structured block back.</a:t>
             </a:r>
           </a:p>
           <a:p>
@@ -16635,18 +16653,18 @@
               <a:buChar char="•"/>
             </a:pPr>
             <a:r>
-              <a:rPr lang="en-US" sz="1000" b="1" dirty="0">
-                <a:latin typeface="Times New Roman" panose="02020603050405020304" pitchFamily="18" charset="0"/>
-                <a:cs typeface="Times New Roman" panose="02020603050405020304" pitchFamily="18" charset="0"/>
-              </a:rPr>
-              <a:t>The adoption move:</a:t>
-            </a:r>
-            <a:r>
-              <a:rPr lang="en-US" sz="1000" b="0" dirty="0">
-                <a:latin typeface="Times New Roman" panose="02020603050405020304" pitchFamily="18" charset="0"/>
-                <a:cs typeface="Times New Roman" panose="02020603050405020304" pitchFamily="18" charset="0"/>
-              </a:rPr>
-              <a:t> every competitor says switch to us. PERCH says keep everything you are paying for - and we will make all of it know who you are. PERCH can emit a context block you paste into ChatGPT, Claude or Cursor, so that assistant knows your project and constraints.</a:t>
+              <a:rPr lang="en-US" sz="950" b="1" dirty="0">
+                <a:latin typeface="Times New Roman" panose="02020603050405020304" pitchFamily="18" charset="0"/>
+                <a:cs typeface="Times New Roman" panose="02020603050405020304" pitchFamily="18" charset="0"/>
+              </a:rPr>
+              <a:t>One contract, six schemas.</a:t>
+            </a:r>
+            <a:r>
+              <a:rPr lang="en-US" sz="950" b="0" dirty="0">
+                <a:latin typeface="Times New Roman" panose="02020603050405020304" pitchFamily="18" charset="0"/>
+                <a:cs typeface="Times New Roman" panose="02020603050405020304" pitchFamily="18" charset="0"/>
+              </a:rPr>
+              <a:t> The output format is fixed and identical for every class so the importer can parse it; the schema - what the body must cover - is chosen by the user before extraction. One vague prompt returns prose that cannot be typed or gated; six unrelated prompts produce six incompatible formats.</a:t>
             </a:r>
           </a:p>
           <a:p>
@@ -16655,11 +16673,38 @@
               <a:buChar char="•"/>
             </a:pPr>
             <a:r>
-              <a:rPr lang="en-US" sz="1000" b="1" dirty="0">
-                <a:latin typeface="Times New Roman" panose="02020603050405020304" pitchFamily="18" charset="0"/>
-                <a:cs typeface="Times New Roman" panose="02020603050405020304" pitchFamily="18" charset="0"/>
-              </a:rPr>
-              <a:t>The more AI tools you use, the more useful PERCH becomes.</a:t>
+              <a:rPr lang="en-US" sz="950" b="1" dirty="0">
+                <a:latin typeface="Times New Roman" panose="02020603050405020304" pitchFamily="18" charset="0"/>
+                <a:cs typeface="Times New Roman" panose="02020603050405020304" pitchFamily="18" charset="0"/>
+              </a:rPr>
+              <a:t>The user picking the class is what makes the item typed at the source</a:t>
+            </a:r>
+            <a:r>
+              <a:rPr lang="en-US" sz="950" b="0" dirty="0">
+                <a:latin typeface="Times New Roman" panose="02020603050405020304" pitchFamily="18" charset="0"/>
+                <a:cs typeface="Times New Roman" panose="02020603050405020304" pitchFamily="18" charset="0"/>
+              </a:rPr>
+              <a:t>, and typing at the source is what makes the admission gate auditable instead of learned.</a:t>
+            </a:r>
+          </a:p>
+          <a:p>
+            <a:pPr marL="171450" lvl="1" indent="-171450" algn="l">
+              <a:buFont typeface="Arial" panose="020B0604020202020204" pitchFamily="34" charset="0"/>
+              <a:buChar char="•"/>
+            </a:pPr>
+            <a:r>
+              <a:rPr lang="en-US" sz="950" b="1" dirty="0">
+                <a:latin typeface="Times New Roman" panose="02020603050405020304" pitchFamily="18" charset="0"/>
+                <a:cs typeface="Times New Roman" panose="02020603050405020304" pitchFamily="18" charset="0"/>
+              </a:rPr>
+              <a:t>Scale is bounded by design:</a:t>
+            </a:r>
+            <a:r>
+              <a:rPr lang="en-US" sz="950" b="0" dirty="0">
+                <a:latin typeface="Times New Roman" panose="02020603050405020304" pitchFamily="18" charset="0"/>
+                <a:cs typeface="Times New Roman" panose="02020603050405020304" pitchFamily="18" charset="0"/>
+              </a:rPr>
+              <a:t> near-duplicates merge above cosine 0.92 rather than accumulating, each class has an item ceiling, and nothing is stored silently.</a:t>
             </a:r>
           </a:p>
         </p:txBody>
@@ -16907,7 +16952,7 @@
                 <a:cs typeface="Times New Roman" panose="02020603050405020304" pitchFamily="18" charset="0"/>
                 <a:sym typeface="Arial"/>
               </a:rPr>
-              <a:t>Where It Pays Off - Worked Examples</a:t>
+              <a:t>Where It Pays Off - One Example Per Class</a:t>
             </a:r>
           </a:p>
         </p:txBody>
@@ -17242,7 +17287,7 @@
                 <a:latin typeface="Times New Roman" panose="02020603050405020304" pitchFamily="18" charset="0"/>
                 <a:cs typeface="Times New Roman" panose="02020603050405020304" pitchFamily="18" charset="0"/>
               </a:rPr>
-              <a:t> / 29</a:t>
+              <a:t> / 33</a:t>
             </a:r>
             <a:endParaRPr dirty="0">
               <a:latin typeface="Times New Roman" panose="02020603050405020304" pitchFamily="18" charset="0"/>
@@ -17281,18 +17326,18 @@
               <a:buChar char="•"/>
             </a:pPr>
             <a:r>
-              <a:rPr lang="en-US" sz="1050" b="1" dirty="0">
-                <a:latin typeface="Times New Roman" panose="02020603050405020304" pitchFamily="18" charset="0"/>
-                <a:cs typeface="Times New Roman" panose="02020603050405020304" pitchFamily="18" charset="0"/>
-              </a:rPr>
-              <a:t>Filling an application form</a:t>
-            </a:r>
-            <a:r>
-              <a:rPr lang="en-US" sz="1050" b="0" dirty="0">
-                <a:latin typeface="Times New Roman" panose="02020603050405020304" pitchFamily="18" charset="0"/>
-                <a:cs typeface="Times New Roman" panose="02020603050405020304" pitchFamily="18" charset="0"/>
-              </a:rPr>
-              <a:t> - "describe a technical challenge you overcame in 200 words". Select the field and ask. The project block already holds the challenge, the fix and the result, and it writes to the word limit in your tone.</a:t>
+              <a:rPr lang="en-US" sz="950" b="1" dirty="0">
+                <a:latin typeface="Times New Roman" panose="02020603050405020304" pitchFamily="18" charset="0"/>
+                <a:cs typeface="Times New Roman" panose="02020603050405020304" pitchFamily="18" charset="0"/>
+              </a:rPr>
+              <a:t>Identity</a:t>
+            </a:r>
+            <a:r>
+              <a:rPr lang="en-US" sz="950" b="0" dirty="0">
+                <a:latin typeface="Times New Roman" panose="02020603050405020304" pitchFamily="18" charset="0"/>
+                <a:cs typeface="Times New Roman" panose="02020603050405020304" pitchFamily="18" charset="0"/>
+              </a:rPr>
+              <a:t> - every assistant must be told, every session, how you write. Stored once, applied in every application, including offline.</a:t>
             </a:r>
           </a:p>
           <a:p>
@@ -17301,18 +17346,18 @@
               <a:buChar char="•"/>
             </a:pPr>
             <a:r>
-              <a:rPr lang="en-US" sz="1050" b="1" dirty="0">
-                <a:latin typeface="Times New Roman" panose="02020603050405020304" pitchFamily="18" charset="0"/>
-                <a:cs typeface="Times New Roman" panose="02020603050405020304" pitchFamily="18" charset="0"/>
-              </a:rPr>
-              <a:t>Updating a resume</a:t>
-            </a:r>
-            <a:r>
-              <a:rPr lang="en-US" sz="1050" b="0" dirty="0">
-                <a:latin typeface="Times New Roman" panose="02020603050405020304" pitchFamily="18" charset="0"/>
-                <a:cs typeface="Times New Roman" panose="02020603050405020304" pitchFamily="18" charset="0"/>
-              </a:rPr>
-              <a:t> - the results and numbers are already stored, so it produces bullets and you pick one, instead of hunting for where you recorded the metric.</a:t>
+              <a:rPr lang="en-US" sz="950" b="1" dirty="0">
+                <a:latin typeface="Times New Roman" panose="02020603050405020304" pitchFamily="18" charset="0"/>
+                <a:cs typeface="Times New Roman" panose="02020603050405020304" pitchFamily="18" charset="0"/>
+              </a:rPr>
+              <a:t>Academic</a:t>
+            </a:r>
+            <a:r>
+              <a:rPr lang="en-US" sz="950" b="0" dirty="0">
+                <a:latin typeface="Times New Roman" panose="02020603050405020304" pitchFamily="18" charset="0"/>
+                <a:cs typeface="Times New Roman" panose="02020603050405020304" pitchFamily="18" charset="0"/>
+              </a:rPr>
+              <a:t> - select a dense paragraph in a course PDF and ask how it connects to the optimisation unit. PERCH knows your syllabus, semester and department. ChatGPT does not, and you would describe it again next week.</a:t>
             </a:r>
           </a:p>
           <a:p>
@@ -17321,18 +17366,18 @@
               <a:buChar char="•"/>
             </a:pPr>
             <a:r>
-              <a:rPr lang="en-US" sz="1050" b="1" dirty="0">
-                <a:latin typeface="Times New Roman" panose="02020603050405020304" pitchFamily="18" charset="0"/>
-                <a:cs typeface="Times New Roman" panose="02020603050405020304" pitchFamily="18" charset="0"/>
-              </a:rPr>
-              <a:t>Interview preparation</a:t>
-            </a:r>
-            <a:r>
-              <a:rPr lang="en-US" sz="1050" b="0" dirty="0">
-                <a:latin typeface="Times New Roman" panose="02020603050405020304" pitchFamily="18" charset="0"/>
-                <a:cs typeface="Times New Roman" panose="02020603050405020304" pitchFamily="18" charset="0"/>
-              </a:rPr>
-              <a:t> - ask for the three hardest problems across all your projects. It has them, because you imported them, rather than scrolling months of chat history across two tools.</a:t>
+              <a:rPr lang="en-US" sz="950" b="1" dirty="0">
+                <a:latin typeface="Times New Roman" panose="02020603050405020304" pitchFamily="18" charset="0"/>
+                <a:cs typeface="Times New Roman" panose="02020603050405020304" pitchFamily="18" charset="0"/>
+              </a:rPr>
+              <a:t>Project</a:t>
+            </a:r>
+            <a:r>
+              <a:rPr lang="en-US" sz="950" b="0" dirty="0">
+                <a:latin typeface="Times New Roman" panose="02020603050405020304" pitchFamily="18" charset="0"/>
+                <a:cs typeface="Times New Roman" panose="02020603050405020304" pitchFamily="18" charset="0"/>
+              </a:rPr>
+              <a:t> - select a stack trace in your IDE. PERCH knows the stack, the architecture decision that caused it, and that you fixed the same async-context problem in March.</a:t>
             </a:r>
           </a:p>
           <a:p>
@@ -17341,18 +17386,18 @@
               <a:buChar char="•"/>
             </a:pPr>
             <a:r>
-              <a:rPr lang="en-US" sz="1050" b="1" dirty="0">
-                <a:latin typeface="Times New Roman" panose="02020603050405020304" pitchFamily="18" charset="0"/>
-                <a:cs typeface="Times New Roman" panose="02020603050405020304" pitchFamily="18" charset="0"/>
-              </a:rPr>
-              <a:t>Emailing a professor about your project</a:t>
-            </a:r>
-            <a:r>
-              <a:rPr lang="en-US" sz="1050" b="0" dirty="0">
-                <a:latin typeface="Times New Roman" panose="02020603050405020304" pitchFamily="18" charset="0"/>
-                <a:cs typeface="Times New Roman" panose="02020603050405020304" pitchFamily="18" charset="0"/>
-              </a:rPr>
-              <a:t> - trigger inside the compose window. Project from domain memory, tone and college from identity memory. The draft is correct first time.</a:t>
+              <a:rPr lang="en-US" sz="950" b="1" dirty="0">
+                <a:latin typeface="Times New Roman" panose="02020603050405020304" pitchFamily="18" charset="0"/>
+                <a:cs typeface="Times New Roman" panose="02020603050405020304" pitchFamily="18" charset="0"/>
+              </a:rPr>
+              <a:t>Career</a:t>
+            </a:r>
+            <a:r>
+              <a:rPr lang="en-US" sz="950" b="0" dirty="0">
+                <a:latin typeface="Times New Roman" panose="02020603050405020304" pitchFamily="18" charset="0"/>
+                <a:cs typeface="Times New Roman" panose="02020603050405020304" pitchFamily="18" charset="0"/>
+              </a:rPr>
+              <a:t> - a recruiter emails. Trigger in the reply window: Career supplies target roles, Project supplies what you actually built, Identity supplies the tone.</a:t>
             </a:r>
           </a:p>
           <a:p>
@@ -17361,18 +17406,18 @@
               <a:buChar char="•"/>
             </a:pPr>
             <a:r>
-              <a:rPr lang="en-US" sz="1050" b="1" dirty="0">
-                <a:latin typeface="Times New Roman" panose="02020603050405020304" pitchFamily="18" charset="0"/>
-                <a:cs typeface="Times New Roman" panose="02020603050405020304" pitchFamily="18" charset="0"/>
-              </a:rPr>
-              <a:t>Starting a project that resembles an old one</a:t>
-            </a:r>
-            <a:r>
-              <a:rPr lang="en-US" sz="1050" b="0" dirty="0">
-                <a:latin typeface="Times New Roman" panose="02020603050405020304" pitchFamily="18" charset="0"/>
-                <a:cs typeface="Times New Roman" panose="02020603050405020304" pitchFamily="18" charset="0"/>
-              </a:rPr>
-              <a:t> - it surfaces the earlier decision and the reason you made it.</a:t>
+              <a:rPr lang="en-US" sz="950" b="1" dirty="0">
+                <a:latin typeface="Times New Roman" panose="02020603050405020304" pitchFamily="18" charset="0"/>
+                <a:cs typeface="Times New Roman" panose="02020603050405020304" pitchFamily="18" charset="0"/>
+              </a:rPr>
+              <a:t>Health</a:t>
+            </a:r>
+            <a:r>
+              <a:rPr lang="en-US" sz="950" b="0" dirty="0">
+                <a:latin typeface="Times New Roman" panose="02020603050405020304" pitchFamily="18" charset="0"/>
+                <a:cs typeface="Times New Roman" panose="02020603050405020304" pitchFamily="18" charset="0"/>
+              </a:rPr>
+              <a:t> - a prescription changes and you want to prepare questions. This is answered by the local model with zero bytes leaving the machine. It is not a better-answer argument, it is the only version of this that is acceptable to run at all.</a:t>
             </a:r>
           </a:p>
           <a:p>
@@ -17381,18 +17426,18 @@
               <a:buChar char="•"/>
             </a:pPr>
             <a:r>
-              <a:rPr lang="en-US" sz="1050" b="1" dirty="0">
-                <a:latin typeface="Times New Roman" panose="02020603050405020304" pitchFamily="18" charset="0"/>
-                <a:cs typeface="Times New Roman" panose="02020603050405020304" pitchFamily="18" charset="0"/>
-              </a:rPr>
-              <a:t>The pattern in all five:</a:t>
-            </a:r>
-            <a:r>
-              <a:rPr lang="en-US" sz="1050" b="0" dirty="0">
-                <a:latin typeface="Times New Roman" panose="02020603050405020304" pitchFamily="18" charset="0"/>
-                <a:cs typeface="Times New Roman" panose="02020603050405020304" pitchFamily="18" charset="0"/>
-              </a:rPr>
-              <a:t> the knowledge already existed - it was locked in a session inside a product that will never share it.</a:t>
+              <a:rPr lang="en-US" sz="950" b="1" dirty="0">
+                <a:latin typeface="Times New Roman" panose="02020603050405020304" pitchFamily="18" charset="0"/>
+                <a:cs typeface="Times New Roman" panose="02020603050405020304" pitchFamily="18" charset="0"/>
+              </a:rPr>
+              <a:t>The cross-class case no other AI can do:</a:t>
+            </a:r>
+            <a:r>
+              <a:rPr lang="en-US" sz="950" b="0" dirty="0">
+                <a:latin typeface="Times New Roman" panose="02020603050405020304" pitchFamily="18" charset="0"/>
+                <a:cs typeface="Times New Roman" panose="02020603050405020304" pitchFamily="18" charset="0"/>
+              </a:rPr>
+              <a:t> a statement of purpose needs Identity, Academic, Project and Career at once. No other assistant has all four, because no other assistant is allowed to.</a:t>
             </a:r>
           </a:p>
         </p:txBody>
@@ -17975,7 +18020,7 @@
                 <a:latin typeface="Times New Roman" panose="02020603050405020304" pitchFamily="18" charset="0"/>
                 <a:cs typeface="Times New Roman" panose="02020603050405020304" pitchFamily="18" charset="0"/>
               </a:rPr>
-              <a:t> / 29</a:t>
+              <a:t> / 33</a:t>
             </a:r>
             <a:endParaRPr dirty="0">
               <a:latin typeface="Times New Roman" panose="02020603050405020304" pitchFamily="18" charset="0"/>
@@ -18065,7 +18110,7 @@
                 <a:latin typeface="Times New Roman" panose="02020603050405020304" pitchFamily="18" charset="0"/>
                 <a:cs typeface="Times New Roman" panose="02020603050405020304" pitchFamily="18" charset="0"/>
               </a:rPr>
-              <a:t> - Measured Failure, Market Data, Expensive Precedents</a:t>
+              <a:t> - A Measured Failure, and Two Expensive Precedents</a:t>
             </a:r>
           </a:p>
           <a:p>
@@ -18078,7 +18123,7 @@
                 <a:latin typeface="Times New Roman" panose="02020603050405020304" pitchFamily="18" charset="0"/>
                 <a:cs typeface="Times New Roman" panose="02020603050405020304" pitchFamily="18" charset="0"/>
               </a:rPr>
-              <a:t>Scope &amp; Objectives</a:t>
+              <a:t>Scope, Objectives and Existing Work</a:t>
             </a:r>
           </a:p>
           <a:p>
@@ -18091,14 +18136,14 @@
                 <a:latin typeface="Times New Roman" panose="02020603050405020304" pitchFamily="18" charset="0"/>
                 <a:cs typeface="Times New Roman" panose="02020603050405020304" pitchFamily="18" charset="0"/>
               </a:rPr>
-              <a:t>Existing Work</a:t>
+              <a:t>System Architecture</a:t>
             </a:r>
             <a:r>
               <a:rPr lang="en-US" sz="1150" b="0" dirty="0">
                 <a:latin typeface="Times New Roman" panose="02020603050405020304" pitchFamily="18" charset="0"/>
                 <a:cs typeface="Times New Roman" panose="02020603050405020304" pitchFamily="18" charset="0"/>
               </a:rPr>
-              <a:t> - Highlight AI, Click to Do, and the Mac-Only Wall</a:t>
+              <a:t> - Four Layers, One Request Path</a:t>
             </a:r>
           </a:p>
           <a:p>
@@ -18111,14 +18156,14 @@
                 <a:latin typeface="Times New Roman" panose="02020603050405020304" pitchFamily="18" charset="0"/>
                 <a:cs typeface="Times New Roman" panose="02020603050405020304" pitchFamily="18" charset="0"/>
               </a:rPr>
-              <a:t>System Architecture</a:t>
+              <a:t>Layer 1</a:t>
             </a:r>
             <a:r>
               <a:rPr lang="en-US" sz="1150" b="0" dirty="0">
                 <a:latin typeface="Times New Roman" panose="02020603050405020304" pitchFamily="18" charset="0"/>
                 <a:cs typeface="Times New Roman" panose="02020603050405020304" pitchFamily="18" charset="0"/>
               </a:rPr>
-              <a:t> - Four Layers, One Request Path</a:t>
+              <a:t> - The OS Surface, and What Already Runs</a:t>
             </a:r>
           </a:p>
           <a:p>
@@ -18131,14 +18176,14 @@
                 <a:latin typeface="Times New Roman" panose="02020603050405020304" pitchFamily="18" charset="0"/>
                 <a:cs typeface="Times New Roman" panose="02020603050405020304" pitchFamily="18" charset="0"/>
               </a:rPr>
-              <a:t>Layer 1</a:t>
+              <a:t>Layer 3</a:t>
             </a:r>
             <a:r>
               <a:rPr lang="en-US" sz="1150" b="0" dirty="0">
                 <a:latin typeface="Times New Roman" panose="02020603050405020304" pitchFamily="18" charset="0"/>
                 <a:cs typeface="Times New Roman" panose="02020603050405020304" pitchFamily="18" charset="0"/>
               </a:rPr>
-              <a:t> - The OS Surface, and Why It Is Already Proven</a:t>
+              <a:t> - Six Memory Classes, and Importing What Is Stranded</a:t>
             </a:r>
           </a:p>
           <a:p>
@@ -18151,14 +18196,14 @@
                 <a:latin typeface="Times New Roman" panose="02020603050405020304" pitchFamily="18" charset="0"/>
                 <a:cs typeface="Times New Roman" panose="02020603050405020304" pitchFamily="18" charset="0"/>
               </a:rPr>
-              <a:t>Layer 2</a:t>
+              <a:t>Contribution 2</a:t>
             </a:r>
             <a:r>
               <a:rPr lang="en-US" sz="1150" b="0" dirty="0">
                 <a:latin typeface="Times New Roman" panose="02020603050405020304" pitchFamily="18" charset="0"/>
                 <a:cs typeface="Times New Roman" panose="02020603050405020304" pitchFamily="18" charset="0"/>
               </a:rPr>
-              <a:t> - Context Assembly Under a Token Budget</a:t>
+              <a:t> - The Ranker and the Admission Scorer</a:t>
             </a:r>
           </a:p>
           <a:p>
@@ -18171,14 +18216,14 @@
                 <a:latin typeface="Times New Roman" panose="02020603050405020304" pitchFamily="18" charset="0"/>
                 <a:cs typeface="Times New Roman" panose="02020603050405020304" pitchFamily="18" charset="0"/>
               </a:rPr>
-              <a:t>Layer 3</a:t>
+              <a:t>Contribution 1</a:t>
             </a:r>
             <a:r>
               <a:rPr lang="en-US" sz="1150" b="0" dirty="0">
                 <a:latin typeface="Times New Roman" panose="02020603050405020304" pitchFamily="18" charset="0"/>
                 <a:cs typeface="Times New Roman" panose="02020603050405020304" pitchFamily="18" charset="0"/>
               </a:rPr>
-              <a:t> - Memory the User Writes, Owns and Can Export</a:t>
+              <a:t> - Budget Assembly Across Heterogeneous Models</a:t>
             </a:r>
           </a:p>
           <a:p>
@@ -18191,34 +18236,7 @@
                 <a:latin typeface="Times New Roman" panose="02020603050405020304" pitchFamily="18" charset="0"/>
                 <a:cs typeface="Times New Roman" panose="02020603050405020304" pitchFamily="18" charset="0"/>
               </a:rPr>
-              <a:t>Layer 4</a:t>
-            </a:r>
-            <a:r>
-              <a:rPr lang="en-US" sz="1150" b="0" dirty="0">
-                <a:latin typeface="Times New Roman" panose="02020603050405020304" pitchFamily="18" charset="0"/>
-                <a:cs typeface="Times New Roman" panose="02020603050405020304" pitchFamily="18" charset="0"/>
-              </a:rPr>
-              <a:t> - Execution, Model Choice and the Cost Floor</a:t>
-            </a:r>
-          </a:p>
-          <a:p>
-            <a:pPr marL="171450" lvl="1" indent="-171450" algn="l">
-              <a:buFont typeface="Arial" panose="020B0604020202020204" pitchFamily="34" charset="0"/>
-              <a:buChar char="•"/>
-            </a:pPr>
-            <a:r>
-              <a:rPr lang="en-US" sz="1150" b="1" dirty="0">
-                <a:latin typeface="Times New Roman" panose="02020603050405020304" pitchFamily="18" charset="0"/>
-                <a:cs typeface="Times New Roman" panose="02020603050405020304" pitchFamily="18" charset="0"/>
-              </a:rPr>
-              <a:t>Private Mode</a:t>
-            </a:r>
-            <a:r>
-              <a:rPr lang="en-US" sz="1150" b="0" dirty="0">
-                <a:latin typeface="Times New Roman" panose="02020603050405020304" pitchFamily="18" charset="0"/>
-                <a:cs typeface="Times New Roman" panose="02020603050405020304" pitchFamily="18" charset="0"/>
-              </a:rPr>
-              <a:t> - Declared, Never Inferred</a:t>
+              <a:t>Private Mode, Tools and Execution</a:t>
             </a:r>
           </a:p>
           <a:p>
@@ -18505,7 +18523,7 @@
                 <a:cs typeface="Times New Roman" panose="02020603050405020304" pitchFamily="18" charset="0"/>
                 <a:sym typeface="Arial"/>
               </a:rPr>
-              <a:t>Private Mode - Declared, Never Inferred</a:t>
+              <a:t>The Failure Every Memory System Ships</a:t>
             </a:r>
           </a:p>
         </p:txBody>
@@ -18840,7 +18858,7 @@
                 <a:latin typeface="Times New Roman" panose="02020603050405020304" pitchFamily="18" charset="0"/>
                 <a:cs typeface="Times New Roman" panose="02020603050405020304" pitchFamily="18" charset="0"/>
               </a:rPr>
-              <a:t> / 29</a:t>
+              <a:t> / 33</a:t>
             </a:r>
             <a:endParaRPr dirty="0">
               <a:latin typeface="Times New Roman" panose="02020603050405020304" pitchFamily="18" charset="0"/>
@@ -18883,14 +18901,14 @@
                 <a:latin typeface="Times New Roman" panose="02020603050405020304" pitchFamily="18" charset="0"/>
                 <a:cs typeface="Times New Roman" panose="02020603050405020304" pitchFamily="18" charset="0"/>
               </a:rPr>
-              <a:t>Classification is the wrong answer here, and we will not pretend otherwise.</a:t>
+              <a:t>The scenario.</a:t>
             </a:r>
             <a:r>
               <a:rPr lang="en-US" sz="1000" b="0" dirty="0">
                 <a:latin typeface="Times New Roman" panose="02020603050405020304" pitchFamily="18" charset="0"/>
                 <a:cs typeface="Times New Roman" panose="02020603050405020304" pitchFamily="18" charset="0"/>
               </a:rPr>
-              <a:t> Deciding what is private from the content itself means a classifier whose false-negative cost is leaking a company secret to a cloud API. No accuracy figure makes that acceptable.</a:t>
+              <a:t> You ask a question about your medication. Your memory holds no health items at all - the only place the word medical appears is an academic note saying your engineering campus shares a road with the group's medical college.</a:t>
             </a:r>
           </a:p>
           <a:p>
@@ -18903,7 +18921,14 @@
                 <a:latin typeface="Times New Roman" panose="02020603050405020304" pitchFamily="18" charset="0"/>
                 <a:cs typeface="Times New Roman" panose="02020603050405020304" pitchFamily="18" charset="0"/>
               </a:rPr>
-              <a:t>PERCH does not guess. Privacy is a user-declared policy, in three forms.</a:t>
+              <a:t>What a naive system does.</a:t>
+            </a:r>
+            <a:r>
+              <a:rPr lang="en-US" sz="1000" b="0" dirty="0">
+                <a:latin typeface="Times New Roman" panose="02020603050405020304" pitchFamily="18" charset="0"/>
+                <a:cs typeface="Times New Roman" panose="02020603050405020304" pitchFamily="18" charset="0"/>
+              </a:rPr>
+              <a:t> Semantic search returns the college item, the ranker makes it rank one because it is the best of what exists, and the assistant answers a medical question with your college details.</a:t>
             </a:r>
           </a:p>
           <a:p>
@@ -18916,14 +18941,14 @@
                 <a:latin typeface="Times New Roman" panose="02020603050405020304" pitchFamily="18" charset="0"/>
                 <a:cs typeface="Times New Roman" panose="02020603050405020304" pitchFamily="18" charset="0"/>
               </a:rPr>
-              <a:t>1. Per-request toggle.</a:t>
+              <a:t>This is named and measured in the 2026 literature.</a:t>
             </a:r>
             <a:r>
               <a:rPr lang="en-US" sz="1000" b="0" dirty="0">
                 <a:latin typeface="Times New Roman" panose="02020603050405020304" pitchFamily="18" charset="0"/>
                 <a:cs typeface="Times New Roman" panose="02020603050405020304" pitchFamily="18" charset="0"/>
               </a:rPr>
-              <a:t> A Private switch on the panel. Flip it and the request goes to the local model. Visible before you send, on every request.</a:t>
+              <a:t> MemGate calls it cross-domain leakage - a memory unit that satisfies the semantic ranking criteria but violates contextual admissibility - and reports it at 27.0% before mitigation.</a:t>
             </a:r>
           </a:p>
           <a:p>
@@ -18936,14 +18961,14 @@
                 <a:latin typeface="Times New Roman" panose="02020603050405020304" pitchFamily="18" charset="0"/>
                 <a:cs typeface="Times New Roman" panose="02020603050405020304" pitchFamily="18" charset="0"/>
               </a:rPr>
-              <a:t>2. Source rules - the useful one.</a:t>
+              <a:t>OP-Bench measures the damage.</a:t>
             </a:r>
             <a:r>
               <a:rPr lang="en-US" sz="1000" b="0" dirty="0">
                 <a:latin typeface="Times New Roman" panose="02020603050405020304" pitchFamily="18" charset="0"/>
                 <a:cs typeface="Times New Roman" panose="02020603050405020304" pitchFamily="18" charset="0"/>
               </a:rPr>
-              <a:t> Declare a source private once: this application, this folder, or this window-title pattern. PERCH knows the source at capture time, so it never needs to understand the text, only where it came from. Deterministic, auditable, no model involved.</a:t>
+              <a:t> Systems retrieve at ~80% similarity even in deliberately baited cases, attend to memory tokens twice as much as to the user's own query, and score 26.2% to 61.1% worse than memory-free baselines.</a:t>
             </a:r>
           </a:p>
           <a:p>
@@ -18956,34 +18981,14 @@
                 <a:latin typeface="Times New Roman" panose="02020603050405020304" pitchFamily="18" charset="0"/>
                 <a:cs typeface="Times New Roman" panose="02020603050405020304" pitchFamily="18" charset="0"/>
               </a:rPr>
-              <a:t>3. Global default.</a:t>
+              <a:t>The consequence for this project:</a:t>
             </a:r>
             <a:r>
               <a:rPr lang="en-US" sz="1000" b="0" dirty="0">
                 <a:latin typeface="Times New Roman" panose="02020603050405020304" pitchFamily="18" charset="0"/>
                 <a:cs typeface="Times New Roman" panose="02020603050405020304" pitchFamily="18" charset="0"/>
               </a:rPr>
-              <a:t> Set local as the default and escalate to cloud explicitly. For anyone handling regulated data this is the only sane setting.</a:t>
-            </a:r>
-          </a:p>
-          <a:p>
-            <a:pPr marL="171450" lvl="1" indent="-171450" algn="l">
-              <a:buFont typeface="Arial" panose="020B0604020202020204" pitchFamily="34" charset="0"/>
-              <a:buChar char="•"/>
-            </a:pPr>
-            <a:r>
-              <a:rPr lang="en-US" sz="1000" b="1" dirty="0">
-                <a:latin typeface="Times New Roman" panose="02020603050405020304" pitchFamily="18" charset="0"/>
-                <a:cs typeface="Times New Roman" panose="02020603050405020304" pitchFamily="18" charset="0"/>
-              </a:rPr>
-              <a:t>The demonstrable claim:</a:t>
-            </a:r>
-            <a:r>
-              <a:rPr lang="en-US" sz="1000" b="0" dirty="0">
-                <a:latin typeface="Times New Roman" panose="02020603050405020304" pitchFamily="18" charset="0"/>
-                <a:cs typeface="Times New Roman" panose="02020603050405020304" pitchFamily="18" charset="0"/>
-              </a:rPr>
-              <a:t> in private mode, zero bytes leave the machine - provable with a packet capture, which is a better privacy demonstration than any policy page.</a:t>
+              <a:t> retrieval that does not know when to stay quiet is a liability, not a feature. An admission gate is not a refinement - it is what makes memory a net positive at all.</a:t>
             </a:r>
           </a:p>
         </p:txBody>
@@ -19231,7 +19236,7 @@
                 <a:cs typeface="Times New Roman" panose="02020603050405020304" pitchFamily="18" charset="0"/>
                 <a:sym typeface="Arial"/>
               </a:rPr>
-              <a:t>Layer 4 - Execution, Model Choice and the Cost Floor</a:t>
+              <a:t>Contribution 2 - The Ranker and the Admission Scorer</a:t>
             </a:r>
           </a:p>
         </p:txBody>
@@ -19566,7 +19571,7 @@
                 <a:latin typeface="Times New Roman" panose="02020603050405020304" pitchFamily="18" charset="0"/>
                 <a:cs typeface="Times New Roman" panose="02020603050405020304" pitchFamily="18" charset="0"/>
               </a:rPr>
-              <a:t> / 29</a:t>
+              <a:t> / 33</a:t>
             </a:r>
             <a:endParaRPr dirty="0">
               <a:latin typeface="Times New Roman" panose="02020603050405020304" pitchFamily="18" charset="0"/>
@@ -19605,18 +19610,11 @@
               <a:buChar char="•"/>
             </a:pPr>
             <a:r>
-              <a:rPr lang="en-US" sz="1000" b="1" dirty="0">
-                <a:latin typeface="Times New Roman" panose="02020603050405020304" pitchFamily="18" charset="0"/>
-                <a:cs typeface="Times New Roman" panose="02020603050405020304" pitchFamily="18" charset="0"/>
-              </a:rPr>
-              <a:t>Model registry.</a:t>
-            </a:r>
-            <a:r>
-              <a:rPr lang="en-US" sz="1000" b="0" dirty="0">
-                <a:latin typeface="Times New Roman" panose="02020603050405020304" pitchFamily="18" charset="0"/>
-                <a:cs typeface="Times New Roman" panose="02020603050405020304" pitchFamily="18" charset="0"/>
-              </a:rPr>
-              <a:t> Each entry holds provider, endpoint, model id, context window, tool support and whether it is local. Everything upstream reads context_window from here, which is what makes Layer 2 model-agnostic.</a:t>
+              <a:rPr lang="en-US" sz="900" b="1" dirty="0">
+                <a:latin typeface="Times New Roman" panose="02020603050405020304" pitchFamily="18" charset="0"/>
+                <a:cs typeface="Times New Roman" panose="02020603050405020304" pitchFamily="18" charset="0"/>
+              </a:rPr>
+              <a:t>Ranking is relative. Injection must be absolute.</a:t>
             </a:r>
           </a:p>
           <a:p>
@@ -19625,18 +19623,18 @@
               <a:buChar char="•"/>
             </a:pPr>
             <a:r>
-              <a:rPr lang="en-US" sz="1000" b="1" dirty="0">
-                <a:latin typeface="Times New Roman" panose="02020603050405020304" pitchFamily="18" charset="0"/>
-                <a:cs typeface="Times New Roman" panose="02020603050405020304" pitchFamily="18" charset="0"/>
-              </a:rPr>
-              <a:t>Ollama, local</a:t>
-            </a:r>
-            <a:r>
-              <a:rPr lang="en-US" sz="1000" b="0" dirty="0">
-                <a:latin typeface="Times New Roman" panose="02020603050405020304" pitchFamily="18" charset="0"/>
-                <a:cs typeface="Times New Roman" panose="02020603050405020304" pitchFamily="18" charset="0"/>
-              </a:rPr>
-              <a:t> - free, open source, no rate limit on localhost:11434. Qwen3 4B in ~3 GB.</a:t>
+              <a:rPr lang="en-US" sz="900" b="1" dirty="0">
+                <a:latin typeface="Times New Roman" panose="02020603050405020304" pitchFamily="18" charset="0"/>
+                <a:cs typeface="Times New Roman" panose="02020603050405020304" pitchFamily="18" charset="0"/>
+              </a:rPr>
+              <a:t>The ranker</a:t>
+            </a:r>
+            <a:r>
+              <a:rPr lang="en-US" sz="900" b="0" dirty="0">
+                <a:latin typeface="Times New Roman" panose="02020603050405020304" pitchFamily="18" charset="0"/>
+                <a:cs typeface="Times New Roman" panose="02020603050405020304" pitchFamily="18" charset="0"/>
+              </a:rPr>
+              <a:t> orders candidates by similarity to the question and selection, tag overlap, entity match, recency and use, and a per-class prior. Its output is an ORDER - and an order says nothing about whether the best item is any good.</a:t>
             </a:r>
           </a:p>
           <a:p>
@@ -19645,18 +19643,18 @@
               <a:buChar char="•"/>
             </a:pPr>
             <a:r>
-              <a:rPr lang="en-US" sz="1000" b="1" dirty="0">
-                <a:latin typeface="Times New Roman" panose="02020603050405020304" pitchFamily="18" charset="0"/>
-                <a:cs typeface="Times New Roman" panose="02020603050405020304" pitchFamily="18" charset="0"/>
-              </a:rPr>
-              <a:t>NVIDIA NIM</a:t>
-            </a:r>
-            <a:r>
-              <a:rPr lang="en-US" sz="1000" b="0" dirty="0">
-                <a:latin typeface="Times New Roman" panose="02020603050405020304" pitchFamily="18" charset="0"/>
-                <a:cs typeface="Times New Roman" panose="02020603050405020304" pitchFamily="18" charset="0"/>
-              </a:rPr>
-              <a:t> - free API key with the Developer Program, no credit card, 100+ models, a practical community baseline of ~40 requests per minute.</a:t>
+              <a:rPr lang="en-US" sz="900" b="1" dirty="0">
+                <a:latin typeface="Times New Roman" panose="02020603050405020304" pitchFamily="18" charset="0"/>
+                <a:cs typeface="Times New Roman" panose="02020603050405020304" pitchFamily="18" charset="0"/>
+              </a:rPr>
+              <a:t>The admission scorer</a:t>
+            </a:r>
+            <a:r>
+              <a:rPr lang="en-US" sz="900" b="0" dirty="0">
+                <a:latin typeface="Times New Roman" panose="02020603050405020304" pitchFamily="18" charset="0"/>
+                <a:cs typeface="Times New Roman" panose="02020603050405020304" pitchFamily="18" charset="0"/>
+              </a:rPr>
+              <a:t> then applies two different tests. An absolute floor per class: if a class's best candidate scores below its floor, that class contributes NOTHING, rather than the best of a bad lot. And a margin test inside an admitted class, because an item far below that class's best is filler, and filler is what burns budget.</a:t>
             </a:r>
           </a:p>
           <a:p>
@@ -19665,18 +19663,18 @@
               <a:buChar char="•"/>
             </a:pPr>
             <a:r>
-              <a:rPr lang="en-US" sz="1000" b="1" dirty="0">
-                <a:latin typeface="Times New Roman" panose="02020603050405020304" pitchFamily="18" charset="0"/>
-                <a:cs typeface="Times New Roman" panose="02020603050405020304" pitchFamily="18" charset="0"/>
-              </a:rPr>
-              <a:t>Your own key, or OpenRouter BYOK</a:t>
-            </a:r>
-            <a:r>
-              <a:rPr lang="en-US" sz="1000" b="0" dirty="0">
-                <a:latin typeface="Times New Roman" panose="02020603050405020304" pitchFamily="18" charset="0"/>
-                <a:cs typeface="Times New Roman" panose="02020603050405020304" pitchFamily="18" charset="0"/>
-              </a:rPr>
-              <a:t> - whatever you already pay for.</a:t>
+              <a:rPr lang="en-US" sz="900" b="1" dirty="0">
+                <a:latin typeface="Times New Roman" panose="02020603050405020304" pitchFamily="18" charset="0"/>
+                <a:cs typeface="Times New Roman" panose="02020603050405020304" pitchFamily="18" charset="0"/>
+              </a:rPr>
+              <a:t>If no class is admitted, PERCH abstains</a:t>
+            </a:r>
+            <a:r>
+              <a:rPr lang="en-US" sz="900" b="0" dirty="0">
+                <a:latin typeface="Times New Roman" panose="02020603050405020304" pitchFamily="18" charset="0"/>
+                <a:cs typeface="Times New Roman" panose="02020603050405020304" pitchFamily="18" charset="0"/>
+              </a:rPr>
+              <a:t> - it answers from general knowledge and says it has nothing stored. LongMemEval scores abstention as an ability, so this is measurable.</a:t>
             </a:r>
           </a:p>
           <a:p>
@@ -19685,18 +19683,18 @@
               <a:buChar char="•"/>
             </a:pPr>
             <a:r>
-              <a:rPr lang="en-US" sz="1000" b="1" dirty="0">
-                <a:latin typeface="Times New Roman" panose="02020603050405020304" pitchFamily="18" charset="0"/>
-                <a:cs typeface="Times New Roman" panose="02020603050405020304" pitchFamily="18" charset="0"/>
-              </a:rPr>
-              <a:t>A student can run PERCH for zero rupees.</a:t>
-            </a:r>
-            <a:r>
-              <a:rPr lang="en-US" sz="1000" b="0" dirty="0">
-                <a:latin typeface="Times New Roman" panose="02020603050405020304" pitchFamily="18" charset="0"/>
-                <a:cs typeface="Times New Roman" panose="02020603050405020304" pitchFamily="18" charset="0"/>
-              </a:rPr>
-              <a:t> Fully local, or on a free tier, or with their own key. That is the one thing a $50M-funded competitor structurally cannot match.</a:t>
+              <a:rPr lang="en-US" sz="900" b="1" dirty="0">
+                <a:latin typeface="Times New Roman" panose="02020603050405020304" pitchFamily="18" charset="0"/>
+                <a:cs typeface="Times New Roman" panose="02020603050405020304" pitchFamily="18" charset="0"/>
+              </a:rPr>
+              <a:t>Prior art, cited by us first.</a:t>
+            </a:r>
+            <a:r>
+              <a:rPr lang="en-US" sz="900" b="0" dirty="0">
+                <a:latin typeface="Times New Roman" panose="02020603050405020304" pitchFamily="18" charset="0"/>
+                <a:cs typeface="Times New Roman" panose="02020603050405020304" pitchFamily="18" charset="0"/>
+              </a:rPr>
+              <a:t> MemGate does this with a learned neural gate; CRAG with a retrieval evaluator and threshold; Self-RAG with trained reflection tokens. We did not invent gating.</a:t>
             </a:r>
           </a:p>
           <a:p>
@@ -19705,38 +19703,18 @@
               <a:buChar char="•"/>
             </a:pPr>
             <a:r>
-              <a:rPr lang="en-US" sz="1000" b="1" dirty="0">
-                <a:latin typeface="Times New Roman" panose="02020603050405020304" pitchFamily="18" charset="0"/>
-                <a:cs typeface="Times New Roman" panose="02020603050405020304" pitchFamily="18" charset="0"/>
-              </a:rPr>
-              <a:t>Tools:</a:t>
-            </a:r>
-            <a:r>
-              <a:rPr lang="en-US" sz="1000" b="0" dirty="0">
-                <a:latin typeface="Times New Roman" panose="02020603050405020304" pitchFamily="18" charset="0"/>
-                <a:cs typeface="Times New Roman" panose="02020603050405020304" pitchFamily="18" charset="0"/>
-              </a:rPr>
-              <a:t> web search and fetch, local file read, OCR and clipboard write - declared only when the selected model supports tool calling, and charged against the same token budget.</a:t>
-            </a:r>
-          </a:p>
-          <a:p>
-            <a:pPr marL="171450" lvl="1" indent="-171450" algn="l">
-              <a:buFont typeface="Arial" panose="020B0604020202020204" pitchFamily="34" charset="0"/>
-              <a:buChar char="•"/>
-            </a:pPr>
-            <a:r>
-              <a:rPr lang="en-US" sz="1000" b="1" dirty="0">
-                <a:latin typeface="Times New Roman" panose="02020603050405020304" pitchFamily="18" charset="0"/>
-                <a:cs typeface="Times New Roman" panose="02020603050405020304" pitchFamily="18" charset="0"/>
-              </a:rPr>
-              <a:t>Automatic adaptive routing is explicitly v2.</a:t>
-            </a:r>
-            <a:r>
-              <a:rPr lang="en-US" sz="1000" b="0" dirty="0">
-                <a:latin typeface="Times New Roman" panose="02020603050405020304" pitchFamily="18" charset="0"/>
-                <a:cs typeface="Times New Roman" panose="02020603050405020304" pitchFamily="18" charset="0"/>
-              </a:rPr>
-              <a:t> The user chooses; switching is one click.</a:t>
+              <a:rPr lang="en-US" sz="900" b="1" dirty="0">
+                <a:latin typeface="Times New Roman" panose="02020603050405020304" pitchFamily="18" charset="0"/>
+                <a:cs typeface="Times New Roman" panose="02020603050405020304" pitchFamily="18" charset="0"/>
+              </a:rPr>
+              <a:t>What is ours:</a:t>
+            </a:r>
+            <a:r>
+              <a:rPr lang="en-US" sz="900" b="0" dirty="0">
+                <a:latin typeface="Times New Roman" panose="02020603050405020304" pitchFamily="18" charset="0"/>
+                <a:cs typeface="Times New Roman" panose="02020603050405020304" pitchFamily="18" charset="0"/>
+              </a:rPr>
+              <a:t> the gate is declarative, not learned. The class is assigned at import time, the floor is per class, and every drop carries a reason. A learned gate cannot tell you why it dropped your memory; a personal agent has to be able to.</a:t>
             </a:r>
           </a:p>
         </p:txBody>
@@ -19984,7 +19962,7 @@
                 <a:cs typeface="Times New Roman" panose="02020603050405020304" pitchFamily="18" charset="0"/>
                 <a:sym typeface="Arial"/>
               </a:rPr>
-              <a:t>Technologies Used</a:t>
+              <a:t>The Ablation - What We Measured</a:t>
             </a:r>
           </a:p>
         </p:txBody>
@@ -20319,158 +20297,12 @@
                 <a:latin typeface="Times New Roman" panose="02020603050405020304" pitchFamily="18" charset="0"/>
                 <a:cs typeface="Times New Roman" panose="02020603050405020304" pitchFamily="18" charset="0"/>
               </a:rPr>
-              <a:t> / 29</a:t>
+              <a:t> / 33</a:t>
             </a:r>
             <a:endParaRPr dirty="0">
               <a:latin typeface="Times New Roman" panose="02020603050405020304" pitchFamily="18" charset="0"/>
               <a:cs typeface="Times New Roman" panose="02020603050405020304" pitchFamily="18" charset="0"/>
             </a:endParaRPr>
-          </a:p>
-        </p:txBody>
-      </p:sp>
-      <p:sp>
-        <p:nvSpPr>
-          <p:cNvPr id="103" name="Google Shape;103;p9"/>
-          <p:cNvSpPr txBox="1"/>
-          <p:nvPr/>
-        </p:nvSpPr>
-        <p:spPr>
-          <a:xfrm>
-            <a:off x="91440" y="246888"/>
-            <a:ext cx="4425696" cy="3017520"/>
-          </a:xfrm>
-          <a:prstGeom prst="rect">
-            <a:avLst/>
-          </a:prstGeom>
-          <a:noFill/>
-          <a:ln>
-            <a:noFill/>
-          </a:ln>
-        </p:spPr>
-        <p:txBody>
-          <a:bodyPr spcFirstLastPara="1" wrap="square" lIns="91425" tIns="91425" rIns="91425" bIns="91425" anchor="t" anchorCtr="0">
-            <a:noAutofit/>
-          </a:bodyPr>
-          <a:lstStyle/>
-          <a:p>
-            <a:pPr marL="171450" lvl="1" indent="-171450" algn="l">
-              <a:buFont typeface="Arial" panose="020B0604020202020204" pitchFamily="34" charset="0"/>
-              <a:buChar char="•"/>
-            </a:pPr>
-            <a:r>
-              <a:rPr lang="en-US" sz="1050" b="1" dirty="0">
-                <a:latin typeface="Times New Roman" panose="02020603050405020304" pitchFamily="18" charset="0"/>
-                <a:cs typeface="Times New Roman" panose="02020603050405020304" pitchFamily="18" charset="0"/>
-              </a:rPr>
-              <a:t>Shell - Tauri v2.</a:t>
-            </a:r>
-            <a:r>
-              <a:rPr lang="en-US" sz="1050" b="0" dirty="0">
-                <a:latin typeface="Times New Roman" panose="02020603050405020304" pitchFamily="18" charset="0"/>
-                <a:cs typeface="Times New Roman" panose="02020603050405020304" pitchFamily="18" charset="0"/>
-              </a:rPr>
-              <a:t> 30-50 MB idle against Electron's 150-300 MB, and a sub-10 MB installer against 100 MB+. PERCH is always running, so a background assistant that idles at 250 MB is one users uninstall. Hoppscotch's migration went 165 MB to 8 MB with a 70% memory reduction.</a:t>
-            </a:r>
-          </a:p>
-          <a:p>
-            <a:pPr marL="171450" lvl="1" indent="-171450" algn="l">
-              <a:buFont typeface="Arial" panose="020B0604020202020204" pitchFamily="34" charset="0"/>
-              <a:buChar char="•"/>
-            </a:pPr>
-            <a:r>
-              <a:rPr lang="en-US" sz="1050" b="1" dirty="0">
-                <a:latin typeface="Times New Roman" panose="02020603050405020304" pitchFamily="18" charset="0"/>
-                <a:cs typeface="Times New Roman" panose="02020603050405020304" pitchFamily="18" charset="0"/>
-              </a:rPr>
-              <a:t>Core - Rust.</a:t>
-            </a:r>
-            <a:r>
-              <a:rPr lang="en-US" sz="1050" b="0" dirty="0">
-                <a:latin typeface="Times New Roman" panose="02020603050405020304" pitchFamily="18" charset="0"/>
-                <a:cs typeface="Times New Roman" panose="02020603050405020304" pitchFamily="18" charset="0"/>
-              </a:rPr>
-              <a:t> Hotkeys, UI Automation, clipboard, window management and tray. Verified bindings: tauri-plugin-global-shortcut, the uiautomation crate, arboard, and the official windows crate.</a:t>
-            </a:r>
-          </a:p>
-          <a:p>
-            <a:pPr marL="171450" lvl="1" indent="-171450" algn="l">
-              <a:buFont typeface="Arial" panose="020B0604020202020204" pitchFamily="34" charset="0"/>
-              <a:buChar char="•"/>
-            </a:pPr>
-            <a:r>
-              <a:rPr lang="en-US" sz="1050" b="1" dirty="0">
-                <a:latin typeface="Times New Roman" panose="02020603050405020304" pitchFamily="18" charset="0"/>
-                <a:cs typeface="Times New Roman" panose="02020603050405020304" pitchFamily="18" charset="0"/>
-              </a:rPr>
-              <a:t>Interface - React and TypeScript.</a:t>
-            </a:r>
-            <a:r>
-              <a:rPr lang="en-US" sz="1050" b="0" dirty="0">
-                <a:latin typeface="Times New Roman" panose="02020603050405020304" pitchFamily="18" charset="0"/>
-                <a:cs typeface="Times New Roman" panose="02020603050405020304" pitchFamily="18" charset="0"/>
-              </a:rPr>
-              <a:t> Fast iteration on the surface, which is what gets judged.</a:t>
-            </a:r>
-          </a:p>
-          <a:p>
-            <a:pPr marL="171450" lvl="1" indent="-171450" algn="l">
-              <a:buFont typeface="Arial" panose="020B0604020202020204" pitchFamily="34" charset="0"/>
-              <a:buChar char="•"/>
-            </a:pPr>
-            <a:r>
-              <a:rPr lang="en-US" sz="1050" b="1" dirty="0">
-                <a:latin typeface="Times New Roman" panose="02020603050405020304" pitchFamily="18" charset="0"/>
-                <a:cs typeface="Times New Roman" panose="02020603050405020304" pitchFamily="18" charset="0"/>
-              </a:rPr>
-              <a:t>AI/ML - Python sidecar.</a:t>
-            </a:r>
-            <a:r>
-              <a:rPr lang="en-US" sz="1050" b="0" dirty="0">
-                <a:latin typeface="Times New Roman" panose="02020603050405020304" pitchFamily="18" charset="0"/>
-                <a:cs typeface="Times New Roman" panose="02020603050405020304" pitchFamily="18" charset="0"/>
-              </a:rPr>
-              <a:t> Embeddings, retrieval and budget assembly - the ML work, in the language the team already knows.</a:t>
-            </a:r>
-          </a:p>
-          <a:p>
-            <a:pPr marL="171450" lvl="1" indent="-171450" algn="l">
-              <a:buFont typeface="Arial" panose="020B0604020202020204" pitchFamily="34" charset="0"/>
-              <a:buChar char="•"/>
-            </a:pPr>
-            <a:r>
-              <a:rPr lang="en-US" sz="1050" b="1" dirty="0">
-                <a:latin typeface="Times New Roman" panose="02020603050405020304" pitchFamily="18" charset="0"/>
-                <a:cs typeface="Times New Roman" panose="02020603050405020304" pitchFamily="18" charset="0"/>
-              </a:rPr>
-              <a:t>Storage - SQLite and plain files.</a:t>
-            </a:r>
-            <a:r>
-              <a:rPr lang="en-US" sz="1050" b="0" dirty="0">
-                <a:latin typeface="Times New Roman" panose="02020603050405020304" pitchFamily="18" charset="0"/>
-                <a:cs typeface="Times New Roman" panose="02020603050405020304" pitchFamily="18" charset="0"/>
-              </a:rPr>
-              <a:t> No server, inspectable, portable.</a:t>
-            </a:r>
-          </a:p>
-          <a:p>
-            <a:pPr marL="171450" lvl="1" indent="-171450" algn="l">
-              <a:buFont typeface="Arial" panose="020B0604020202020204" pitchFamily="34" charset="0"/>
-              <a:buChar char="•"/>
-            </a:pPr>
-            <a:r>
-              <a:rPr lang="en-US" sz="1050" b="1" dirty="0">
-                <a:latin typeface="Times New Roman" panose="02020603050405020304" pitchFamily="18" charset="0"/>
-                <a:cs typeface="Times New Roman" panose="02020603050405020304" pitchFamily="18" charset="0"/>
-              </a:rPr>
-              <a:t>Local inference - Ollama.</a:t>
-            </a:r>
-            <a:r>
-              <a:rPr lang="en-US" sz="1050" b="0" dirty="0">
-                <a:latin typeface="Times New Roman" panose="02020603050405020304" pitchFamily="18" charset="0"/>
-                <a:cs typeface="Times New Roman" panose="02020603050405020304" pitchFamily="18" charset="0"/>
-              </a:rPr>
-              <a:t> Free, no rate limit.</a:t>
-            </a:r>
           </a:p>
         </p:txBody>
       </p:sp>
@@ -20581,6 +20413,396 @@
               <a:latin typeface="Times New Roman" panose="02020603050405020304" pitchFamily="18" charset="0"/>
               <a:cs typeface="Times New Roman" panose="02020603050405020304" pitchFamily="18" charset="0"/>
             </a:endParaRPr>
+          </a:p>
+        </p:txBody>
+      </p:sp>
+      <p:graphicFrame>
+        <p:nvGraphicFramePr>
+          <p:cNvPr id="103" name="Table 102"/>
+          <p:cNvGraphicFramePr>
+            <a:graphicFrameLocks noGrp="1"/>
+          </p:cNvGraphicFramePr>
+          <p:nvPr/>
+        </p:nvGraphicFramePr>
+        <p:xfrm>
+          <a:off x="109728" y="457200"/>
+          <a:ext cx="4389120" cy="987552"/>
+        </p:xfrm>
+        <a:graphic>
+          <a:graphicData uri="http://schemas.openxmlformats.org/drawingml/2006/table">
+            <a:tbl>
+              <a:tblPr firstRow="1" bandRow="0">
+                <a:tableStyleId>{5940675A-B579-460E-94D1-54222C63F5DA}</a:tableStyleId>
+              </a:tblPr>
+              <a:tblGrid>
+                <a:gridCol w="2103120"/>
+                <a:gridCol w="1143000"/>
+                <a:gridCol w="1143000"/>
+              </a:tblGrid>
+              <a:tr h="274320">
+                <a:tc>
+                  <a:txBody>
+                    <a:bodyPr/>
+                    <a:lstStyle/>
+                    <a:p>
+                      <a:pPr algn="l"/>
+                      <a:r>
+                        <a:rPr sz="750" b="1">
+                          <a:solidFill>
+                            <a:srgbClr val="FFFFFF"/>
+                          </a:solidFill>
+                          <a:latin typeface="Times New Roman"/>
+                        </a:rPr>
+                        <a:t>Configuration</a:t>
+                      </a:r>
+                    </a:p>
+                  </a:txBody>
+                  <a:tcPr marL="20000" marR="20000" marT="9000" marB="9000">
+                    <a:solidFill>
+                      <a:srgbClr val="1F2A44"/>
+                    </a:solidFill>
+                  </a:tcPr>
+                </a:tc>
+                <a:tc>
+                  <a:txBody>
+                    <a:bodyPr/>
+                    <a:lstStyle/>
+                    <a:p>
+                      <a:pPr algn="ctr"/>
+                      <a:r>
+                        <a:rPr sz="750" b="1">
+                          <a:solidFill>
+                            <a:srgbClr val="FFFFFF"/>
+                          </a:solidFill>
+                          <a:latin typeface="Times New Roman"/>
+                        </a:rPr>
+                        <a:t>Leaked items</a:t>
+                      </a:r>
+                    </a:p>
+                  </a:txBody>
+                  <a:tcPr marL="20000" marR="20000" marT="9000" marB="9000">
+                    <a:solidFill>
+                      <a:srgbClr val="1F2A44"/>
+                    </a:solidFill>
+                  </a:tcPr>
+                </a:tc>
+                <a:tc>
+                  <a:txBody>
+                    <a:bodyPr/>
+                    <a:lstStyle/>
+                    <a:p>
+                      <a:pPr algn="ctr"/>
+                      <a:r>
+                        <a:rPr sz="750" b="1">
+                          <a:solidFill>
+                            <a:srgbClr val="FFFFFF"/>
+                          </a:solidFill>
+                          <a:latin typeface="Times New Roman"/>
+                        </a:rPr>
+                        <a:t>Useful context kept</a:t>
+                      </a:r>
+                    </a:p>
+                  </a:txBody>
+                  <a:tcPr marL="20000" marR="20000" marT="9000" marB="9000">
+                    <a:solidFill>
+                      <a:srgbClr val="1F2A44"/>
+                    </a:solidFill>
+                  </a:tcPr>
+                </a:tc>
+              </a:tr>
+              <a:tr h="237744">
+                <a:tc>
+                  <a:txBody>
+                    <a:bodyPr/>
+                    <a:lstStyle/>
+                    <a:p>
+                      <a:pPr algn="l"/>
+                      <a:r>
+                        <a:rPr sz="850" b="1">
+                          <a:solidFill>
+                            <a:srgbClr val="1A1A1A"/>
+                          </a:solidFill>
+                          <a:latin typeface="Times New Roman"/>
+                        </a:rPr>
+                        <a:t>A   naive global top-k, no gate</a:t>
+                      </a:r>
+                    </a:p>
+                  </a:txBody>
+                  <a:tcPr marL="20000" marR="20000" marT="9000" marB="9000">
+                    <a:solidFill>
+                      <a:srgbClr val="F4F5F7"/>
+                    </a:solidFill>
+                  </a:tcPr>
+                </a:tc>
+                <a:tc>
+                  <a:txBody>
+                    <a:bodyPr/>
+                    <a:lstStyle/>
+                    <a:p>
+                      <a:pPr algn="ctr"/>
+                      <a:r>
+                        <a:rPr sz="850" b="0">
+                          <a:solidFill>
+                            <a:srgbClr val="1A1A1A"/>
+                          </a:solidFill>
+                          <a:latin typeface="Times New Roman"/>
+                        </a:rPr>
+                        <a:t>8</a:t>
+                      </a:r>
+                    </a:p>
+                  </a:txBody>
+                  <a:tcPr marL="20000" marR="20000" marT="9000" marB="9000">
+                    <a:solidFill>
+                      <a:srgbClr val="F4F5F7"/>
+                    </a:solidFill>
+                  </a:tcPr>
+                </a:tc>
+                <a:tc>
+                  <a:txBody>
+                    <a:bodyPr/>
+                    <a:lstStyle/>
+                    <a:p>
+                      <a:pPr algn="ctr"/>
+                      <a:r>
+                        <a:rPr sz="850" b="0">
+                          <a:solidFill>
+                            <a:srgbClr val="1A1A1A"/>
+                          </a:solidFill>
+                          <a:latin typeface="Times New Roman"/>
+                        </a:rPr>
+                        <a:t>3 / 3</a:t>
+                      </a:r>
+                    </a:p>
+                  </a:txBody>
+                  <a:tcPr marL="20000" marR="20000" marT="9000" marB="9000">
+                    <a:solidFill>
+                      <a:srgbClr val="F4F5F7"/>
+                    </a:solidFill>
+                  </a:tcPr>
+                </a:tc>
+              </a:tr>
+              <a:tr h="237744">
+                <a:tc>
+                  <a:txBody>
+                    <a:bodyPr/>
+                    <a:lstStyle/>
+                    <a:p>
+                      <a:pPr algn="l"/>
+                      <a:r>
+                        <a:rPr sz="850" b="1">
+                          <a:solidFill>
+                            <a:srgbClr val="1A1A1A"/>
+                          </a:solidFill>
+                          <a:latin typeface="Times New Roman"/>
+                        </a:rPr>
+                        <a:t>B   one global threshold</a:t>
+                      </a:r>
+                    </a:p>
+                  </a:txBody>
+                  <a:tcPr marL="20000" marR="20000" marT="9000" marB="9000">
+                    <a:solidFill>
+                      <a:srgbClr val="FFFFFF"/>
+                    </a:solidFill>
+                  </a:tcPr>
+                </a:tc>
+                <a:tc>
+                  <a:txBody>
+                    <a:bodyPr/>
+                    <a:lstStyle/>
+                    <a:p>
+                      <a:pPr algn="ctr"/>
+                      <a:r>
+                        <a:rPr sz="850" b="0">
+                          <a:solidFill>
+                            <a:srgbClr val="1A1A1A"/>
+                          </a:solidFill>
+                          <a:latin typeface="Times New Roman"/>
+                        </a:rPr>
+                        <a:t>0</a:t>
+                      </a:r>
+                    </a:p>
+                  </a:txBody>
+                  <a:tcPr marL="20000" marR="20000" marT="9000" marB="9000">
+                    <a:solidFill>
+                      <a:srgbClr val="FFFFFF"/>
+                    </a:solidFill>
+                  </a:tcPr>
+                </a:tc>
+                <a:tc>
+                  <a:txBody>
+                    <a:bodyPr/>
+                    <a:lstStyle/>
+                    <a:p>
+                      <a:pPr algn="ctr"/>
+                      <a:r>
+                        <a:rPr sz="850" b="0">
+                          <a:solidFill>
+                            <a:srgbClr val="1A1A1A"/>
+                          </a:solidFill>
+                          <a:latin typeface="Times New Roman"/>
+                        </a:rPr>
+                        <a:t>2 / 3</a:t>
+                      </a:r>
+                    </a:p>
+                  </a:txBody>
+                  <a:tcPr marL="20000" marR="20000" marT="9000" marB="9000">
+                    <a:solidFill>
+                      <a:srgbClr val="FFFFFF"/>
+                    </a:solidFill>
+                  </a:tcPr>
+                </a:tc>
+              </a:tr>
+              <a:tr h="237744">
+                <a:tc>
+                  <a:txBody>
+                    <a:bodyPr/>
+                    <a:lstStyle/>
+                    <a:p>
+                      <a:pPr algn="l"/>
+                      <a:r>
+                        <a:rPr sz="850" b="1">
+                          <a:solidFill>
+                            <a:srgbClr val="1A1A1A"/>
+                          </a:solidFill>
+                          <a:latin typeface="Times New Roman"/>
+                        </a:rPr>
+                        <a:t>C   ours: class routing + per-class floors</a:t>
+                      </a:r>
+                    </a:p>
+                  </a:txBody>
+                  <a:tcPr marL="20000" marR="20000" marT="9000" marB="9000">
+                    <a:solidFill>
+                      <a:srgbClr val="E7F3EA"/>
+                    </a:solidFill>
+                  </a:tcPr>
+                </a:tc>
+                <a:tc>
+                  <a:txBody>
+                    <a:bodyPr/>
+                    <a:lstStyle/>
+                    <a:p>
+                      <a:pPr algn="ctr"/>
+                      <a:r>
+                        <a:rPr sz="850" b="1">
+                          <a:solidFill>
+                            <a:srgbClr val="1A1A1A"/>
+                          </a:solidFill>
+                          <a:latin typeface="Times New Roman"/>
+                        </a:rPr>
+                        <a:t>0</a:t>
+                      </a:r>
+                    </a:p>
+                  </a:txBody>
+                  <a:tcPr marL="20000" marR="20000" marT="9000" marB="9000">
+                    <a:solidFill>
+                      <a:srgbClr val="E7F3EA"/>
+                    </a:solidFill>
+                  </a:tcPr>
+                </a:tc>
+                <a:tc>
+                  <a:txBody>
+                    <a:bodyPr/>
+                    <a:lstStyle/>
+                    <a:p>
+                      <a:pPr algn="ctr"/>
+                      <a:r>
+                        <a:rPr sz="850" b="1">
+                          <a:solidFill>
+                            <a:srgbClr val="1A1A1A"/>
+                          </a:solidFill>
+                          <a:latin typeface="Times New Roman"/>
+                        </a:rPr>
+                        <a:t>3 / 3</a:t>
+                      </a:r>
+                    </a:p>
+                  </a:txBody>
+                  <a:tcPr marL="20000" marR="20000" marT="9000" marB="9000">
+                    <a:solidFill>
+                      <a:srgbClr val="E7F3EA"/>
+                    </a:solidFill>
+                  </a:tcPr>
+                </a:tc>
+              </a:tr>
+            </a:tbl>
+          </a:graphicData>
+        </a:graphic>
+      </p:graphicFrame>
+      <p:sp>
+        <p:nvSpPr>
+          <p:cNvPr id="104" name="TextBox 103"/>
+          <p:cNvSpPr txBox="1"/>
+          <p:nvPr/>
+        </p:nvSpPr>
+        <p:spPr>
+          <a:xfrm>
+            <a:off x="109728" y="1554480"/>
+            <a:ext cx="4389120" cy="914400"/>
+          </a:xfrm>
+          <a:prstGeom prst="rect">
+            <a:avLst/>
+          </a:prstGeom>
+          <a:noFill/>
+        </p:spPr>
+        <p:txBody>
+          <a:bodyPr wrap="square">
+            <a:spAutoFit/>
+          </a:bodyPr>
+          <a:lstStyle/>
+          <a:p>
+            <a:r>
+              <a:rPr b="1" sz="900">
+                <a:latin typeface="Times New Roman"/>
+              </a:rPr>
+              <a:t>Run it yourself: python -m app ablate.</a:t>
+            </a:r>
+            <a:r>
+              <a:rPr b="0" sz="900">
+                <a:latin typeface="Times New Roman"/>
+              </a:rPr>
+              <a:t> Five queries against a seeded memory that contains no health items at all - the only mention of "medical" is an academic note about the campus.</a:t>
+            </a:r>
+          </a:p>
+          <a:p>
+            <a:r>
+              <a:rPr b="1" sz="900">
+                <a:latin typeface="Times New Roman"/>
+              </a:rPr>
+              <a:t>A is what most memory systems do.</a:t>
+            </a:r>
+            <a:r>
+              <a:rPr b="0" sz="900">
+                <a:latin typeface="Times New Roman"/>
+              </a:rPr>
+              <a:t> It answers a question about your medication with your college details - eight irrelevant items injected.</a:t>
+            </a:r>
+          </a:p>
+          <a:p>
+            <a:r>
+              <a:rPr b="1" sz="900">
+                <a:latin typeface="Times New Roman"/>
+              </a:rPr>
+              <a:t>B is the interesting one.</a:t>
+            </a:r>
+            <a:r>
+              <a:rPr b="0" sz="900">
+                <a:latin typeface="Times New Roman"/>
+              </a:rPr>
+              <a:t> One global threshold stops the leak, but a threshold high enough to keep health memory out is also high enough to throw identity away, so "rewrite this more formally" stops sounding like you.</a:t>
+            </a:r>
+          </a:p>
+          <a:p>
+            <a:r>
+              <a:rPr b="1" sz="900">
+                <a:latin typeface="Times New Roman"/>
+              </a:rPr>
+              <a:t>C keeps both.</a:t>
+            </a:r>
+            <a:r>
+              <a:rPr b="0" sz="900">
+                <a:latin typeface="Times New Roman"/>
+              </a:rPr>
+              <a:t> Per-class floors are the reason - and every drop prints its own reason, which a learned gate cannot do.</a:t>
+            </a:r>
           </a:p>
         </p:txBody>
       </p:sp>
@@ -20717,7 +20939,7 @@
                 <a:cs typeface="Times New Roman" panose="02020603050405020304" pitchFamily="18" charset="0"/>
                 <a:sym typeface="Arial"/>
               </a:rPr>
-              <a:t>Datasets and Benchmarks</a:t>
+              <a:t>Contribution 1 - Budget Assembly Across Models</a:t>
             </a:r>
           </a:p>
         </p:txBody>
@@ -21052,7 +21274,7 @@
                 <a:latin typeface="Times New Roman" panose="02020603050405020304" pitchFamily="18" charset="0"/>
                 <a:cs typeface="Times New Roman" panose="02020603050405020304" pitchFamily="18" charset="0"/>
               </a:rPr>
-              <a:t> / 29</a:t>
+              <a:t> / 33</a:t>
             </a:r>
             <a:endParaRPr dirty="0">
               <a:latin typeface="Times New Roman" panose="02020603050405020304" pitchFamily="18" charset="0"/>
@@ -21091,18 +21313,18 @@
               <a:buChar char="•"/>
             </a:pPr>
             <a:r>
-              <a:rPr lang="en-US" sz="1050" b="1" dirty="0">
-                <a:latin typeface="Times New Roman" panose="02020603050405020304" pitchFamily="18" charset="0"/>
-                <a:cs typeface="Times New Roman" panose="02020603050405020304" pitchFamily="18" charset="0"/>
-              </a:rPr>
-              <a:t>LongMemEval</a:t>
-            </a:r>
-            <a:r>
-              <a:rPr lang="en-US" sz="1050" b="0" dirty="0">
-                <a:latin typeface="Times New Roman" panose="02020603050405020304" pitchFamily="18" charset="0"/>
-                <a:cs typeface="Times New Roman" panose="02020603050405020304" pitchFamily="18" charset="0"/>
-              </a:rPr>
-              <a:t> - 500 questions across 6 categories: single-session user recall, assistant recall, preference recall, knowledge update, temporal reasoning and multi-session recall. Tests extraction, multi-session reasoning, temporal reasoning, knowledge updates and abstention.</a:t>
+              <a:rPr lang="en-US" sz="1000" b="1" dirty="0">
+                <a:latin typeface="Times New Roman" panose="02020603050405020304" pitchFamily="18" charset="0"/>
+                <a:cs typeface="Times New Roman" panose="02020603050405020304" pitchFamily="18" charset="0"/>
+              </a:rPr>
+              <a:t>The formula:</a:t>
+            </a:r>
+            <a:r>
+              <a:rPr lang="en-US" sz="1000" b="0" dirty="0">
+                <a:latin typeface="Times New Roman" panose="02020603050405020304" pitchFamily="18" charset="0"/>
+                <a:cs typeface="Times New Roman" panose="02020603050405020304" pitchFamily="18" charset="0"/>
+              </a:rPr>
+              <a:t> budget = context_window(model) minus reserves for the response, the system prompt and the tool schemas.</a:t>
             </a:r>
           </a:p>
           <a:p>
@@ -21111,18 +21333,18 @@
               <a:buChar char="•"/>
             </a:pPr>
             <a:r>
-              <a:rPr lang="en-US" sz="1050" b="1" dirty="0">
-                <a:latin typeface="Times New Roman" panose="02020603050405020304" pitchFamily="18" charset="0"/>
-                <a:cs typeface="Times New Roman" panose="02020603050405020304" pitchFamily="18" charset="0"/>
-              </a:rPr>
-              <a:t>LoCoMo</a:t>
-            </a:r>
-            <a:r>
-              <a:rPr lang="en-US" sz="1050" b="0" dirty="0">
-                <a:latin typeface="Times New Roman" panose="02020603050405020304" pitchFamily="18" charset="0"/>
-                <a:cs typeface="Times New Roman" panose="02020603050405020304" pitchFamily="18" charset="0"/>
-              </a:rPr>
-              <a:t> - 1,540 questions across 4 categories (single-hop, multi-hop, open-domain, temporal), roughly 300 turns and up to 35 sessions per conversation.</a:t>
+              <a:rPr lang="en-US" sz="1000" b="1" dirty="0">
+                <a:latin typeface="Times New Roman" panose="02020603050405020304" pitchFamily="18" charset="0"/>
+                <a:cs typeface="Times New Roman" panose="02020603050405020304" pitchFamily="18" charset="0"/>
+              </a:rPr>
+              <a:t>Fill order is a strict priority</a:t>
+            </a:r>
+            <a:r>
+              <a:rPr lang="en-US" sz="1000" b="0" dirty="0">
+                <a:latin typeface="Times New Roman" panose="02020603050405020304" pitchFamily="18" charset="0"/>
+                <a:cs typeface="Times New Roman" panose="02020603050405020304" pitchFamily="18" charset="0"/>
+              </a:rPr>
+              <a:t> - system and identity always; the selection always, because it is why the user summoned us; recent conversation with oldest truncated first; then admitted memory into whatever remains; then tool results claimed from the same allowance.</a:t>
             </a:r>
           </a:p>
           <a:p>
@@ -21131,18 +21353,18 @@
               <a:buChar char="•"/>
             </a:pPr>
             <a:r>
-              <a:rPr lang="en-US" sz="1050" b="1" dirty="0">
-                <a:latin typeface="Times New Roman" panose="02020603050405020304" pitchFamily="18" charset="0"/>
-                <a:cs typeface="Times New Roman" panose="02020603050405020304" pitchFamily="18" charset="0"/>
-              </a:rPr>
-              <a:t>PersonaMem, PerLTQA, DialSim, BEAM</a:t>
-            </a:r>
-            <a:r>
-              <a:rPr lang="en-US" sz="1050" b="0" dirty="0">
-                <a:latin typeface="Times New Roman" panose="02020603050405020304" pitchFamily="18" charset="0"/>
-                <a:cs typeface="Times New Roman" panose="02020603050405020304" pitchFamily="18" charset="0"/>
-              </a:rPr>
-              <a:t> - personalised memory, covering explicit facts and implicit preferences.</a:t>
+              <a:rPr lang="en-US" sz="1000" b="1" dirty="0">
+                <a:latin typeface="Times New Roman" panose="02020603050405020304" pitchFamily="18" charset="0"/>
+                <a:cs typeface="Times New Roman" panose="02020603050405020304" pitchFamily="18" charset="0"/>
+              </a:rPr>
+              <a:t>Items enter whole or not at all.</a:t>
+            </a:r>
+            <a:r>
+              <a:rPr lang="en-US" sz="1000" b="0" dirty="0">
+                <a:latin typeface="Times New Roman" panose="02020603050405020304" pitchFamily="18" charset="0"/>
+                <a:cs typeface="Times New Roman" panose="02020603050405020304" pitchFamily="18" charset="0"/>
+              </a:rPr>
+              <a:t> Half a project decision is worse than none - it reads as a confident, incomplete fact.</a:t>
             </a:r>
           </a:p>
           <a:p>
@@ -21151,18 +21373,18 @@
               <a:buChar char="•"/>
             </a:pPr>
             <a:r>
-              <a:rPr lang="en-US" sz="1050" b="1" dirty="0">
-                <a:latin typeface="Times New Roman" panose="02020603050405020304" pitchFamily="18" charset="0"/>
-                <a:cs typeface="Times New Roman" panose="02020603050405020304" pitchFamily="18" charset="0"/>
-              </a:rPr>
-              <a:t>Honest framing, stated up front:</a:t>
-            </a:r>
-            <a:r>
-              <a:rPr lang="en-US" sz="1050" b="0" dirty="0">
-                <a:latin typeface="Times New Roman" panose="02020603050405020304" pitchFamily="18" charset="0"/>
-                <a:cs typeface="Times New Roman" panose="02020603050405020304" pitchFamily="18" charset="0"/>
-              </a:rPr>
-              <a:t> 2026 reference scores are LoCoMo 92.5% and LongMemEval 94.4%. These are near-saturated. We do not pitch beating them - we use them to validate that our memory layer is competent, and we report honestly.</a:t>
+              <a:rPr lang="en-US" sz="1000" b="1" dirty="0">
+                <a:latin typeface="Times New Roman" panose="02020603050405020304" pitchFamily="18" charset="0"/>
+                <a:cs typeface="Times New Roman" panose="02020603050405020304" pitchFamily="18" charset="0"/>
+              </a:rPr>
+              <a:t>This is what makes model choice real.</a:t>
+            </a:r>
+            <a:r>
+              <a:rPr lang="en-US" sz="1000" b="0" dirty="0">
+                <a:latin typeface="Times New Roman" panose="02020603050405020304" pitchFamily="18" charset="0"/>
+                <a:cs typeface="Times New Roman" panose="02020603050405020304" pitchFamily="18" charset="0"/>
+              </a:rPr>
+              <a:t> Swap a local Qwen3 4B for a frontier API and the budget recomputes. Nothing else changes. One memory layer serves a 3 GB local model and a 200,000-token frontier model.</a:t>
             </a:r>
           </a:p>
           <a:p>
@@ -21171,18 +21393,18 @@
               <a:buChar char="•"/>
             </a:pPr>
             <a:r>
-              <a:rPr lang="en-US" sz="1050" b="1" dirty="0">
-                <a:latin typeface="Times New Roman" panose="02020603050405020304" pitchFamily="18" charset="0"/>
-                <a:cs typeface="Times New Roman" panose="02020603050405020304" pitchFamily="18" charset="0"/>
-              </a:rPr>
-              <a:t>BEAM-1M at 62% is the honest headroom</a:t>
-            </a:r>
-            <a:r>
-              <a:rPr lang="en-US" sz="1050" b="0" dirty="0">
-                <a:latin typeface="Times New Roman" panose="02020603050405020304" pitchFamily="18" charset="0"/>
-                <a:cs typeface="Times New Roman" panose="02020603050405020304" pitchFamily="18" charset="0"/>
-              </a:rPr>
-              <a:t>, and the practitioner consensus is that no single evaluation fully characterises production memory performance.</a:t>
+              <a:rPr lang="en-US" sz="1000" b="1" dirty="0">
+                <a:latin typeface="Times New Roman" panose="02020603050405020304" pitchFamily="18" charset="0"/>
+                <a:cs typeface="Times New Roman" panose="02020603050405020304" pitchFamily="18" charset="0"/>
+              </a:rPr>
+              <a:t>Why this is research and not engineering.</a:t>
+            </a:r>
+            <a:r>
+              <a:rPr lang="en-US" sz="1000" b="0" dirty="0">
+                <a:latin typeface="Times New Roman" panose="02020603050405020304" pitchFamily="18" charset="0"/>
+                <a:cs typeface="Times New Roman" panose="02020603050405020304" pitchFamily="18" charset="0"/>
+              </a:rPr>
+              <a:t> The 2026 externalization survey states that the context window remains the scarcest shared resource, with memory, skills, tool schemas and reasoning traces all competing for one finite budget - and calls it a harness-level coordination problem. It names the problem and leaves it open for this span.</a:t>
             </a:r>
           </a:p>
         </p:txBody>
@@ -21430,7 +21652,7 @@
                 <a:cs typeface="Times New Roman" panose="02020603050405020304" pitchFamily="18" charset="0"/>
                 <a:sym typeface="Arial"/>
               </a:rPr>
-              <a:t>Evaluation Plan</a:t>
+              <a:t>Private Mode - Declared, Never Inferred</a:t>
             </a:r>
           </a:p>
         </p:txBody>
@@ -21765,7 +21987,7 @@
                 <a:latin typeface="Times New Roman" panose="02020603050405020304" pitchFamily="18" charset="0"/>
                 <a:cs typeface="Times New Roman" panose="02020603050405020304" pitchFamily="18" charset="0"/>
               </a:rPr>
-              <a:t> / 29</a:t>
+              <a:t> / 33</a:t>
             </a:r>
             <a:endParaRPr dirty="0">
               <a:latin typeface="Times New Roman" panose="02020603050405020304" pitchFamily="18" charset="0"/>
@@ -21804,18 +22026,18 @@
               <a:buChar char="•"/>
             </a:pPr>
             <a:r>
-              <a:rPr lang="en-US" sz="1050" b="1" dirty="0">
-                <a:latin typeface="Times New Roman" panose="02020603050405020304" pitchFamily="18" charset="0"/>
-                <a:cs typeface="Times New Roman" panose="02020603050405020304" pitchFamily="18" charset="0"/>
-              </a:rPr>
-              <a:t>E1 - Memory retrieval quality.</a:t>
-            </a:r>
-            <a:r>
-              <a:rPr lang="en-US" sz="1050" b="0" dirty="0">
-                <a:latin typeface="Times New Roman" panose="02020603050405020304" pitchFamily="18" charset="0"/>
-                <a:cs typeface="Times New Roman" panose="02020603050405020304" pitchFamily="18" charset="0"/>
-              </a:rPr>
-              <a:t> LongMemEval and LoCoMo, reported honestly against published 2026 baselines. Demonstrates competence, claims no record.</a:t>
+              <a:rPr lang="en-US" sz="950" b="1" dirty="0">
+                <a:latin typeface="Times New Roman" panose="02020603050405020304" pitchFamily="18" charset="0"/>
+                <a:cs typeface="Times New Roman" panose="02020603050405020304" pitchFamily="18" charset="0"/>
+              </a:rPr>
+              <a:t>Classification is the wrong answer here.</a:t>
+            </a:r>
+            <a:r>
+              <a:rPr lang="en-US" sz="950" b="0" dirty="0">
+                <a:latin typeface="Times New Roman" panose="02020603050405020304" pitchFamily="18" charset="0"/>
+                <a:cs typeface="Times New Roman" panose="02020603050405020304" pitchFamily="18" charset="0"/>
+              </a:rPr>
+              <a:t> Deciding what is private from the content itself means a classifier whose false-negative cost is leaking a company secret to a cloud API. No accuracy figure makes that acceptable.</a:t>
             </a:r>
           </a:p>
           <a:p>
@@ -21824,18 +22046,18 @@
               <a:buChar char="•"/>
             </a:pPr>
             <a:r>
-              <a:rPr lang="en-US" sz="1050" b="1" dirty="0">
-                <a:latin typeface="Times New Roman" panose="02020603050405020304" pitchFamily="18" charset="0"/>
-                <a:cs typeface="Times New Roman" panose="02020603050405020304" pitchFamily="18" charset="0"/>
-              </a:rPr>
-              <a:t>E2 - Context assembly ablation. This is the one nobody else publishes.</a:t>
-            </a:r>
-            <a:r>
-              <a:rPr lang="en-US" sz="1050" b="0" dirty="0">
-                <a:latin typeface="Times New Roman" panose="02020603050405020304" pitchFamily="18" charset="0"/>
-                <a:cs typeface="Times New Roman" panose="02020603050405020304" pitchFamily="18" charset="0"/>
-              </a:rPr>
-              <a:t> Three conditions - no memory, full profile always injected, and budget-aware selection - measured at three model sizes. Nobody else has to serve a 4B local model and a frontier API from one memory layer, so nobody else has a reason to run this experiment.</a:t>
+              <a:rPr lang="en-US" sz="950" b="1" dirty="0">
+                <a:latin typeface="Times New Roman" panose="02020603050405020304" pitchFamily="18" charset="0"/>
+                <a:cs typeface="Times New Roman" panose="02020603050405020304" pitchFamily="18" charset="0"/>
+              </a:rPr>
+              <a:t>1. Per-request toggle.</a:t>
+            </a:r>
+            <a:r>
+              <a:rPr lang="en-US" sz="950" b="0" dirty="0">
+                <a:latin typeface="Times New Roman" panose="02020603050405020304" pitchFamily="18" charset="0"/>
+                <a:cs typeface="Times New Roman" panose="02020603050405020304" pitchFamily="18" charset="0"/>
+              </a:rPr>
+              <a:t> A Private switch on the panel, visible before you send.</a:t>
             </a:r>
           </a:p>
           <a:p>
@@ -21844,18 +22066,18 @@
               <a:buChar char="•"/>
             </a:pPr>
             <a:r>
-              <a:rPr lang="en-US" sz="1050" b="1" dirty="0">
-                <a:latin typeface="Times New Roman" panose="02020603050405020304" pitchFamily="18" charset="0"/>
-                <a:cs typeface="Times New Roman" panose="02020603050405020304" pitchFamily="18" charset="0"/>
-              </a:rPr>
-              <a:t>E3 - Latency.</a:t>
-            </a:r>
-            <a:r>
-              <a:rPr lang="en-US" sz="1050" b="0" dirty="0">
-                <a:latin typeface="Times New Roman" panose="02020603050405020304" pitchFamily="18" charset="0"/>
-                <a:cs typeface="Times New Roman" panose="02020603050405020304" pitchFamily="18" charset="0"/>
-              </a:rPr>
-              <a:t> Trigger to first token, local versus cloud, measured.</a:t>
+              <a:rPr lang="en-US" sz="950" b="1" dirty="0">
+                <a:latin typeface="Times New Roman" panose="02020603050405020304" pitchFamily="18" charset="0"/>
+                <a:cs typeface="Times New Roman" panose="02020603050405020304" pitchFamily="18" charset="0"/>
+              </a:rPr>
+              <a:t>2. Source rules - the useful one.</a:t>
+            </a:r>
+            <a:r>
+              <a:rPr lang="en-US" sz="950" b="0" dirty="0">
+                <a:latin typeface="Times New Roman" panose="02020603050405020304" pitchFamily="18" charset="0"/>
+                <a:cs typeface="Times New Roman" panose="02020603050405020304" pitchFamily="18" charset="0"/>
+              </a:rPr>
+              <a:t> Declare a source private once: this application, this folder, or this window-title pattern. PERCH knows the source at capture time, so it never needs to understand the text, only where it came from. Deterministic, auditable, no model involved.</a:t>
             </a:r>
           </a:p>
           <a:p>
@@ -21864,18 +22086,18 @@
               <a:buChar char="•"/>
             </a:pPr>
             <a:r>
-              <a:rPr lang="en-US" sz="1050" b="1" dirty="0">
-                <a:latin typeface="Times New Roman" panose="02020603050405020304" pitchFamily="18" charset="0"/>
-                <a:cs typeface="Times New Roman" panose="02020603050405020304" pitchFamily="18" charset="0"/>
-              </a:rPr>
-              <a:t>E4 - Private mode.</a:t>
-            </a:r>
-            <a:r>
-              <a:rPr lang="en-US" sz="1050" b="0" dirty="0">
-                <a:latin typeface="Times New Roman" panose="02020603050405020304" pitchFamily="18" charset="0"/>
-                <a:cs typeface="Times New Roman" panose="02020603050405020304" pitchFamily="18" charset="0"/>
-              </a:rPr>
-              <a:t> Bytes leaving the machine must be zero, proved by packet capture.</a:t>
+              <a:rPr lang="en-US" sz="950" b="1" dirty="0">
+                <a:latin typeface="Times New Roman" panose="02020603050405020304" pitchFamily="18" charset="0"/>
+                <a:cs typeface="Times New Roman" panose="02020603050405020304" pitchFamily="18" charset="0"/>
+              </a:rPr>
+              <a:t>3. Global default.</a:t>
+            </a:r>
+            <a:r>
+              <a:rPr lang="en-US" sz="950" b="0" dirty="0">
+                <a:latin typeface="Times New Roman" panose="02020603050405020304" pitchFamily="18" charset="0"/>
+                <a:cs typeface="Times New Roman" panose="02020603050405020304" pitchFamily="18" charset="0"/>
+              </a:rPr>
+              <a:t> Local by default, escalate to cloud explicitly.</a:t>
             </a:r>
           </a:p>
           <a:p>
@@ -21884,18 +22106,58 @@
               <a:buChar char="•"/>
             </a:pPr>
             <a:r>
-              <a:rPr lang="en-US" sz="1050" b="1" dirty="0">
-                <a:latin typeface="Times New Roman" panose="02020603050405020304" pitchFamily="18" charset="0"/>
-                <a:cs typeface="Times New Roman" panose="02020603050405020304" pitchFamily="18" charset="0"/>
-              </a:rPr>
-              <a:t>E5 - UI Automation coverage per application.</a:t>
-            </a:r>
-            <a:r>
-              <a:rPr lang="en-US" sz="1050" b="0" dirty="0">
-                <a:latin typeface="Times New Roman" panose="02020603050405020304" pitchFamily="18" charset="0"/>
-                <a:cs typeface="Times New Roman" panose="02020603050405020304" pitchFamily="18" charset="0"/>
-              </a:rPr>
-              <a:t> A measured table across common Windows applications, documenting where Path A works and where the clipboard fallback carries it. No competitor publishes one.</a:t>
+              <a:rPr lang="en-US" sz="950" b="1" dirty="0">
+                <a:latin typeface="Times New Roman" panose="02020603050405020304" pitchFamily="18" charset="0"/>
+                <a:cs typeface="Times New Roman" panose="02020603050405020304" pitchFamily="18" charset="0"/>
+              </a:rPr>
+              <a:t>4. Class-driven, free from the type system.</a:t>
+            </a:r>
+            <a:r>
+              <a:rPr lang="en-US" sz="950" b="0" dirty="0">
+                <a:latin typeface="Times New Roman" panose="02020603050405020304" pitchFamily="18" charset="0"/>
+                <a:cs typeface="Times New Roman" panose="02020603050405020304" pitchFamily="18" charset="0"/>
+              </a:rPr>
+              <a:t> Health and Personal are private classes, so any request that admits one is forced local automatically, with the panel saying why.</a:t>
+            </a:r>
+          </a:p>
+          <a:p>
+            <a:pPr marL="171450" lvl="1" indent="-171450" algn="l">
+              <a:buFont typeface="Arial" panose="020B0604020202020204" pitchFamily="34" charset="0"/>
+              <a:buChar char="•"/>
+            </a:pPr>
+            <a:r>
+              <a:rPr lang="en-US" sz="950" b="1" dirty="0">
+                <a:latin typeface="Times New Roman" panose="02020603050405020304" pitchFamily="18" charset="0"/>
+                <a:cs typeface="Times New Roman" panose="02020603050405020304" pitchFamily="18" charset="0"/>
+              </a:rPr>
+              <a:t>And private mode does not merely refuse the network tools - it never declares them.</a:t>
+            </a:r>
+            <a:r>
+              <a:rPr lang="en-US" sz="950" b="0" dirty="0">
+                <a:latin typeface="Times New Roman" panose="02020603050405020304" pitchFamily="18" charset="0"/>
+                <a:cs typeface="Times New Roman" panose="02020603050405020304" pitchFamily="18" charset="0"/>
+              </a:rPr>
+              <a:t> A privacy guarantee that leaks through a search query is not a guarantee.</a:t>
+            </a:r>
+          </a:p>
+          <a:p>
+            <a:pPr marL="171450" lvl="1" indent="-171450" algn="l">
+              <a:buFont typeface="Arial" panose="020B0604020202020204" pitchFamily="34" charset="0"/>
+              <a:buChar char="•"/>
+            </a:pPr>
+            <a:r>
+              <a:rPr lang="en-US" sz="950" b="1" dirty="0">
+                <a:latin typeface="Times New Roman" panose="02020603050405020304" pitchFamily="18" charset="0"/>
+                <a:cs typeface="Times New Roman" panose="02020603050405020304" pitchFamily="18" charset="0"/>
+              </a:rPr>
+              <a:t>The demonstrable claim:</a:t>
+            </a:r>
+            <a:r>
+              <a:rPr lang="en-US" sz="950" b="0" dirty="0">
+                <a:latin typeface="Times New Roman" panose="02020603050405020304" pitchFamily="18" charset="0"/>
+                <a:cs typeface="Times New Roman" panose="02020603050405020304" pitchFamily="18" charset="0"/>
+              </a:rPr>
+              <a:t> zero bytes leave the machine, provable with a packet capture.</a:t>
             </a:r>
           </a:p>
         </p:txBody>
@@ -22143,7 +22405,7 @@
                 <a:cs typeface="Times New Roman" panose="02020603050405020304" pitchFamily="18" charset="0"/>
                 <a:sym typeface="Arial"/>
               </a:rPr>
-              <a:t>Base Paper - PAUSE, ACM SIGKDD 2026</a:t>
+              <a:t>Layer 4 - Execution, Tools and the Cost Floor</a:t>
             </a:r>
           </a:p>
         </p:txBody>
@@ -22478,7 +22740,7 @@
                 <a:latin typeface="Times New Roman" panose="02020603050405020304" pitchFamily="18" charset="0"/>
                 <a:cs typeface="Times New Roman" panose="02020603050405020304" pitchFamily="18" charset="0"/>
               </a:rPr>
-              <a:t> / 29</a:t>
+              <a:t> / 33</a:t>
             </a:r>
             <a:endParaRPr dirty="0">
               <a:latin typeface="Times New Roman" panose="02020603050405020304" pitchFamily="18" charset="0"/>
@@ -22521,14 +22783,14 @@
                 <a:latin typeface="Times New Roman" panose="02020603050405020304" pitchFamily="18" charset="0"/>
                 <a:cs typeface="Times New Roman" panose="02020603050405020304" pitchFamily="18" charset="0"/>
               </a:rPr>
-              <a:t>PAUSE: A User-Centric Benchmark for Personal AI Assistants in Unified Service Environments.</a:t>
+              <a:t>Model registry.</a:t>
             </a:r>
             <a:r>
               <a:rPr lang="en-US" sz="1000" b="0" dirty="0">
                 <a:latin typeface="Times New Roman" panose="02020603050405020304" pitchFamily="18" charset="0"/>
                 <a:cs typeface="Times New Roman" panose="02020603050405020304" pitchFamily="18" charset="0"/>
               </a:rPr>
-              <a:t> ACM SIGKDD 2026, 9-13 August 2026, Jeju Island.</a:t>
+              <a:t> Each entry holds provider, endpoint, model id, context window, tool support and whether it is local. Everything upstream reads context_window from here.</a:t>
             </a:r>
           </a:p>
           <a:p>
@@ -22541,14 +22803,14 @@
                 <a:latin typeface="Times New Roman" panose="02020603050405020304" pitchFamily="18" charset="0"/>
                 <a:cs typeface="Times New Roman" panose="02020603050405020304" pitchFamily="18" charset="0"/>
               </a:rPr>
-              <a:t>Why this is the base paper:</a:t>
+              <a:t>The full agent tool surface:</a:t>
             </a:r>
             <a:r>
               <a:rPr lang="en-US" sz="1000" b="0" dirty="0">
                 <a:latin typeface="Times New Roman" panose="02020603050405020304" pitchFamily="18" charset="0"/>
                 <a:cs typeface="Times New Roman" panose="02020603050405020304" pitchFamily="18" charset="0"/>
               </a:rPr>
-              <a:t> it is ACM and 2026, its subject is literally personal AI assistants, and its definition is our specification - an assistant must reason over persistent user state, respect user-specific configurations and permissions, and sustain long-horizon, constraint-aware interactions.</a:t>
+              <a:t> web search and fetch; memory search, write, update and forget; file read, write, list and search within declared roots; PDF, DOCX and PPTX parsing; OCR; region capture, selection read, clipboard and paste-back; open path, URL and window; and sandboxed Python for arithmetic and data work.</a:t>
             </a:r>
           </a:p>
           <a:p>
@@ -22561,14 +22823,14 @@
                 <a:latin typeface="Times New Roman" panose="02020603050405020304" pitchFamily="18" charset="0"/>
                 <a:cs typeface="Times New Roman" panose="02020603050405020304" pitchFamily="18" charset="0"/>
               </a:rPr>
-              <a:t>It evaluates three dimensions</a:t>
+              <a:t>Tool policy:</a:t>
             </a:r>
             <a:r>
               <a:rPr lang="en-US" sz="1000" b="0" dirty="0">
                 <a:latin typeface="Times New Roman" panose="02020603050405020304" pitchFamily="18" charset="0"/>
                 <a:cs typeface="Times New Roman" panose="02020603050405020304" pitchFamily="18" charset="0"/>
               </a:rPr>
-              <a:t> - stateful reasoning, multi-service coordination, and user-coupled interaction. The first and third are exactly what PERCH is built around.</a:t>
+              <a:t> read is free, write asks and shows what it will do, every call is logged in the panel, and private mode removes the network tools entirely.</a:t>
             </a:r>
           </a:p>
           <a:p>
@@ -22581,14 +22843,14 @@
                 <a:latin typeface="Times New Roman" panose="02020603050405020304" pitchFamily="18" charset="0"/>
                 <a:cs typeface="Times New Roman" panose="02020603050405020304" pitchFamily="18" charset="0"/>
               </a:rPr>
-              <a:t>And it hands us the gap, quantified:</a:t>
+              <a:t>Routes.</a:t>
             </a:r>
             <a:r>
               <a:rPr lang="en-US" sz="1000" b="0" dirty="0">
                 <a:latin typeface="Times New Roman" panose="02020603050405020304" pitchFamily="18" charset="0"/>
                 <a:cs typeface="Times New Roman" panose="02020603050405020304" pitchFamily="18" charset="0"/>
               </a:rPr>
-              <a:t> state-of-the-art proprietary models fail to reach 70% task completion on scenarios requiring stateful reasoning and configuration awareness.</a:t>
+              <a:t> Ollama on localhost - free, no rate limit, Qwen3 4B in about 3 GB. NVIDIA NIM - free key, no credit card, 100+ models. Or your own key.</a:t>
             </a:r>
           </a:p>
           <a:p>
@@ -22601,14 +22863,14 @@
                 <a:latin typeface="Times New Roman" panose="02020603050405020304" pitchFamily="18" charset="0"/>
                 <a:cs typeface="Times New Roman" panose="02020603050405020304" pitchFamily="18" charset="0"/>
               </a:rPr>
-              <a:t>Conceptual anchor:</a:t>
+              <a:t>A student can run PERCH for zero rupees.</a:t>
             </a:r>
             <a:r>
               <a:rPr lang="en-US" sz="1000" b="0" dirty="0">
                 <a:latin typeface="Times New Roman" panose="02020603050405020304" pitchFamily="18" charset="0"/>
                 <a:cs typeface="Times New Roman" panose="02020603050405020304" pitchFamily="18" charset="0"/>
               </a:rPr>
-              <a:t> Personal LLM Agents (Tsinghua AIR) supplies the taxonomy - fundamental capabilities including context sensing and memorization, efficiency, and security - which maps onto our four layers almost one-to-one.</a:t>
+              <a:t> That is the one thing a $50M-funded competitor structurally cannot match. Automatic adaptive routing is explicitly v2.</a:t>
             </a:r>
           </a:p>
         </p:txBody>
@@ -22856,7 +23118,7 @@
                 <a:cs typeface="Times New Roman" panose="02020603050405020304" pitchFamily="18" charset="0"/>
                 <a:sym typeface="Arial"/>
               </a:rPr>
-              <a:t>The Gap - Where PAUSE Stops and We Begin</a:t>
+              <a:t>Technologies Used</a:t>
             </a:r>
           </a:p>
         </p:txBody>
@@ -23191,7 +23453,7 @@
                 <a:latin typeface="Times New Roman" panose="02020603050405020304" pitchFamily="18" charset="0"/>
                 <a:cs typeface="Times New Roman" panose="02020603050405020304" pitchFamily="18" charset="0"/>
               </a:rPr>
-              <a:t> / 29</a:t>
+              <a:t> / 33</a:t>
             </a:r>
             <a:endParaRPr dirty="0">
               <a:latin typeface="Times New Roman" panose="02020603050405020304" pitchFamily="18" charset="0"/>
@@ -23234,14 +23496,14 @@
                 <a:latin typeface="Times New Roman" panose="02020603050405020304" pitchFamily="18" charset="0"/>
                 <a:cs typeface="Times New Roman" panose="02020603050405020304" pitchFamily="18" charset="0"/>
               </a:rPr>
-              <a:t>PAUSE is a benchmark, not a system.</a:t>
+              <a:t>Shell - Tauri v2.</a:t>
             </a:r>
             <a:r>
               <a:rPr lang="en-US" sz="1050" b="0" dirty="0">
                 <a:latin typeface="Times New Roman" panose="02020603050405020304" pitchFamily="18" charset="0"/>
                 <a:cs typeface="Times New Roman" panose="02020603050405020304" pitchFamily="18" charset="0"/>
               </a:rPr>
-              <a:t> It measures assistants inside unified service environments that are assumed to already have access and configuration.</a:t>
+              <a:t> 30-50 MB idle against Electron's 150-300 MB, sub-10 MB installer against 100 MB+. PERCH is always running, so a background assistant idling at 250 MB is one users uninstall. Hoppscotch's migration went 165 MB to 8 MB with a 70% memory reduction.</a:t>
             </a:r>
           </a:p>
           <a:p>
@@ -23254,14 +23516,14 @@
                 <a:latin typeface="Times New Roman" panose="02020603050405020304" pitchFamily="18" charset="0"/>
                 <a:cs typeface="Times New Roman" panose="02020603050405020304" pitchFamily="18" charset="0"/>
               </a:rPr>
-              <a:t>It does not address how a user supplies their own state.</a:t>
+              <a:t>Core - Rust.</a:t>
             </a:r>
             <a:r>
               <a:rPr lang="en-US" sz="1050" b="0" dirty="0">
                 <a:latin typeface="Times New Roman" panose="02020603050405020304" pitchFamily="18" charset="0"/>
                 <a:cs typeface="Times New Roman" panose="02020603050405020304" pitchFamily="18" charset="0"/>
               </a:rPr>
-              <a:t> We do - user-authored memory plus extraction prompts that recover what is stranded in other assistants.</a:t>
+              <a:t> Hotkeys, UI Automation, clipboard, window management, tray. Verified bindings: tauri-plugin-global-shortcut, the uiautomation crate, arboard, the official windows crate.</a:t>
             </a:r>
           </a:p>
           <a:p>
@@ -23274,14 +23536,7 @@
                 <a:latin typeface="Times New Roman" panose="02020603050405020304" pitchFamily="18" charset="0"/>
                 <a:cs typeface="Times New Roman" panose="02020603050405020304" pitchFamily="18" charset="0"/>
               </a:rPr>
-              <a:t>It does not address OS-level capture.</a:t>
-            </a:r>
-            <a:r>
-              <a:rPr lang="en-US" sz="1050" b="0" dirty="0">
-                <a:latin typeface="Times New Roman" panose="02020603050405020304" pitchFamily="18" charset="0"/>
-                <a:cs typeface="Times New Roman" panose="02020603050405020304" pitchFamily="18" charset="0"/>
-              </a:rPr>
-              <a:t> We do - three triggers, two capture paths, and edit-in-place with no per-application plugin.</a:t>
+              <a:t>Interface - React and TypeScript.</a:t>
             </a:r>
           </a:p>
           <a:p>
@@ -23294,14 +23549,14 @@
                 <a:latin typeface="Times New Roman" panose="02020603050405020304" pitchFamily="18" charset="0"/>
                 <a:cs typeface="Times New Roman" panose="02020603050405020304" pitchFamily="18" charset="0"/>
               </a:rPr>
-              <a:t>It does not address operating within a fixed token budget across heterogeneous models.</a:t>
+              <a:t>AI/ML - Python sidecar.</a:t>
             </a:r>
             <a:r>
               <a:rPr lang="en-US" sz="1050" b="0" dirty="0">
                 <a:latin typeface="Times New Roman" panose="02020603050405020304" pitchFamily="18" charset="0"/>
                 <a:cs typeface="Times New Roman" panose="02020603050405020304" pitchFamily="18" charset="0"/>
               </a:rPr>
-              <a:t> We do - that is Layer 2, and it is what lets one memory layer serve a 3 GB local model and a frontier API.</a:t>
+              <a:t> Embeddings, ranker, admission scorer and packer, in the language the team already knows.</a:t>
             </a:r>
           </a:p>
           <a:p>
@@ -23314,14 +23569,34 @@
                 <a:latin typeface="Times New Roman" panose="02020603050405020304" pitchFamily="18" charset="0"/>
                 <a:cs typeface="Times New Roman" panose="02020603050405020304" pitchFamily="18" charset="0"/>
               </a:rPr>
-              <a:t>Stated in one line for the panel:</a:t>
+              <a:t>Storage - SQLite and Markdown files</a:t>
             </a:r>
             <a:r>
               <a:rPr lang="en-US" sz="1050" b="0" dirty="0">
                 <a:latin typeface="Times New Roman" panose="02020603050405020304" pitchFamily="18" charset="0"/>
                 <a:cs typeface="Times New Roman" panose="02020603050405020304" pitchFamily="18" charset="0"/>
               </a:rPr>
-              <a:t> our base paper is a KDD 2026 benchmark for personal AI assistants which found that even frontier models fall below 70% when a task requires knowing the user's state. We build the assistant that fixes that, on the desktop.</a:t>
+              <a:t>, with sqlite-vec for the vector index. No server.</a:t>
+            </a:r>
+          </a:p>
+          <a:p>
+            <a:pPr marL="171450" lvl="1" indent="-171450" algn="l">
+              <a:buFont typeface="Arial" panose="020B0604020202020204" pitchFamily="34" charset="0"/>
+              <a:buChar char="•"/>
+            </a:pPr>
+            <a:r>
+              <a:rPr lang="en-US" sz="1050" b="1" dirty="0">
+                <a:latin typeface="Times New Roman" panose="02020603050405020304" pitchFamily="18" charset="0"/>
+                <a:cs typeface="Times New Roman" panose="02020603050405020304" pitchFamily="18" charset="0"/>
+              </a:rPr>
+              <a:t>Local inference - Ollama.</a:t>
+            </a:r>
+            <a:r>
+              <a:rPr lang="en-US" sz="1050" b="0" dirty="0">
+                <a:latin typeface="Times New Roman" panose="02020603050405020304" pitchFamily="18" charset="0"/>
+                <a:cs typeface="Times New Roman" panose="02020603050405020304" pitchFamily="18" charset="0"/>
+              </a:rPr>
+              <a:t> Free, no rate limit.</a:t>
             </a:r>
           </a:p>
         </p:txBody>
@@ -23569,7 +23844,7 @@
                 <a:cs typeface="Times New Roman" panose="02020603050405020304" pitchFamily="18" charset="0"/>
                 <a:sym typeface="Arial"/>
               </a:rPr>
-              <a:t>Expected Results and Honest Limitations</a:t>
+              <a:t>Datasets and Benchmarks</a:t>
             </a:r>
           </a:p>
         </p:txBody>
@@ -23904,7 +24179,7 @@
                 <a:latin typeface="Times New Roman" panose="02020603050405020304" pitchFamily="18" charset="0"/>
                 <a:cs typeface="Times New Roman" panose="02020603050405020304" pitchFamily="18" charset="0"/>
               </a:rPr>
-              <a:t> / 29</a:t>
+              <a:t> / 33</a:t>
             </a:r>
             <a:endParaRPr dirty="0">
               <a:latin typeface="Times New Roman" panose="02020603050405020304" pitchFamily="18" charset="0"/>
@@ -23947,14 +24222,14 @@
                 <a:latin typeface="Times New Roman" panose="02020603050405020304" pitchFamily="18" charset="0"/>
                 <a:cs typeface="Times New Roman" panose="02020603050405020304" pitchFamily="18" charset="0"/>
               </a:rPr>
-              <a:t>What we expect to show.</a:t>
+              <a:t>OP-Bench - our primary target.</a:t>
             </a:r>
             <a:r>
               <a:rPr lang="en-US" sz="1000" b="0" dirty="0">
                 <a:latin typeface="Times New Roman" panose="02020603050405020304" pitchFamily="18" charset="0"/>
                 <a:cs typeface="Times New Roman" panose="02020603050405020304" pitchFamily="18" charset="0"/>
               </a:rPr>
-              <a:t> Budget-aware assembly beating both naive conditions at every model size, with the largest margin on the smallest model - because that is where the budget actually binds. Sub-second trigger-to-first-token locally. Zero bytes in private mode.</a:t>
+              <a:t> 1,700 verified instances across 20 users, in three categories: irrelevance, repetition and sycophancy. It measures precisely the failure our admission gate prevents, and its baselines are bad on purpose.</a:t>
             </a:r>
           </a:p>
           <a:p>
@@ -23967,14 +24242,14 @@
                 <a:latin typeface="Times New Roman" panose="02020603050405020304" pitchFamily="18" charset="0"/>
                 <a:cs typeface="Times New Roman" panose="02020603050405020304" pitchFamily="18" charset="0"/>
               </a:rPr>
-              <a:t>What we do not claim.</a:t>
+              <a:t>LongMemEval</a:t>
             </a:r>
             <a:r>
               <a:rPr lang="en-US" sz="1000" b="0" dirty="0">
                 <a:latin typeface="Times New Roman" panose="02020603050405020304" pitchFamily="18" charset="0"/>
                 <a:cs typeface="Times New Roman" panose="02020603050405020304" pitchFamily="18" charset="0"/>
               </a:rPr>
-              <a:t> We did not invent selection-triggered AI - Highlight and Click to Do exist. We did not invent agent memory - Mem0, Zep and Letta are mature. We will not beat LoCoMo or LongMemEval, which are near-saturated. We are not proposing a novel retrieval algorithm.</a:t>
+              <a:t> - 500 questions across 6 categories, testing extraction, multi-session reasoning, temporal reasoning, knowledge updates and abstention. The abstention category validates the gate directly.</a:t>
             </a:r>
           </a:p>
           <a:p>
@@ -23987,14 +24262,14 @@
                 <a:latin typeface="Times New Roman" panose="02020603050405020304" pitchFamily="18" charset="0"/>
                 <a:cs typeface="Times New Roman" panose="02020603050405020304" pitchFamily="18" charset="0"/>
               </a:rPr>
-              <a:t>What we do claim.</a:t>
+              <a:t>LoCoMo</a:t>
             </a:r>
             <a:r>
               <a:rPr lang="en-US" sz="1000" b="0" dirty="0">
                 <a:latin typeface="Times New Roman" panose="02020603050405020304" pitchFamily="18" charset="0"/>
                 <a:cs typeface="Times New Roman" panose="02020603050405020304" pitchFamily="18" charset="0"/>
               </a:rPr>
-              <a:t> The first open-source, model-agnostic, OS-integrated personal assistant that runs fully local on ordinary hardware; user-authored portable memory; token-budget-aware context assembly across heterogeneous models; and an honest component evaluation with latency and privacy measurements nobody publishes for a real assistant workload.</a:t>
+              <a:t> - 1,540 questions across 4 categories, ~300 turns, up to 35 sessions. Used for comparability with Mem0 and MemGate.</a:t>
             </a:r>
           </a:p>
           <a:p>
@@ -24007,14 +24282,34 @@
                 <a:latin typeface="Times New Roman" panose="02020603050405020304" pitchFamily="18" charset="0"/>
                 <a:cs typeface="Times New Roman" panose="02020603050405020304" pitchFamily="18" charset="0"/>
               </a:rPr>
-              <a:t>Known limitations.</a:t>
+              <a:t>PerMemBench</a:t>
             </a:r>
             <a:r>
               <a:rPr lang="en-US" sz="1000" b="0" dirty="0">
                 <a:latin typeface="Times New Roman" panose="02020603050405020304" pitchFamily="18" charset="0"/>
                 <a:cs typeface="Times New Roman" panose="02020603050405020304" pitchFamily="18" charset="0"/>
               </a:rPr>
-              <a:t> UI Automation coverage varies by application, which is why the clipboard fallback exists and why coverage is a documented deliverable. Screen-reading behaviour can trip antivirus heuristics, so the installer must be signed and all capture must stay user-initiated.</a:t>
+              <a:t> - multi-year multi-domain personalized memory, for the write-side gating policy.</a:t>
+            </a:r>
+          </a:p>
+          <a:p>
+            <a:pPr marL="171450" lvl="1" indent="-171450" algn="l">
+              <a:buFont typeface="Arial" panose="020B0604020202020204" pitchFamily="34" charset="0"/>
+              <a:buChar char="•"/>
+            </a:pPr>
+            <a:r>
+              <a:rPr lang="en-US" sz="1000" b="1" dirty="0">
+                <a:latin typeface="Times New Roman" panose="02020603050405020304" pitchFamily="18" charset="0"/>
+                <a:cs typeface="Times New Roman" panose="02020603050405020304" pitchFamily="18" charset="0"/>
+              </a:rPr>
+              <a:t>Honest framing, stated up front:</a:t>
+            </a:r>
+            <a:r>
+              <a:rPr lang="en-US" sz="1000" b="0" dirty="0">
+                <a:latin typeface="Times New Roman" panose="02020603050405020304" pitchFamily="18" charset="0"/>
+                <a:cs typeface="Times New Roman" panose="02020603050405020304" pitchFamily="18" charset="0"/>
+              </a:rPr>
+              <a:t> 2026 reference scores are LoCoMo 92.5% and LongMemEval 94.4%. These are near-saturated and we do not pitch beating them. OP-Bench is where a number can genuinely move, because memory systems there score 26-61% worse than no memory at all.</a:t>
             </a:r>
           </a:p>
         </p:txBody>
@@ -24262,7 +24557,7 @@
                 <a:cs typeface="Times New Roman" panose="02020603050405020304" pitchFamily="18" charset="0"/>
                 <a:sym typeface="Arial"/>
               </a:rPr>
-              <a:t>Conclusion</a:t>
+              <a:t>Evaluation Plan</a:t>
             </a:r>
           </a:p>
         </p:txBody>
@@ -24597,7 +24892,7 @@
                 <a:latin typeface="Times New Roman" panose="02020603050405020304" pitchFamily="18" charset="0"/>
                 <a:cs typeface="Times New Roman" panose="02020603050405020304" pitchFamily="18" charset="0"/>
               </a:rPr>
-              <a:t> / 29</a:t>
+              <a:t> / 33</a:t>
             </a:r>
             <a:endParaRPr dirty="0">
               <a:latin typeface="Times New Roman" panose="02020603050405020304" pitchFamily="18" charset="0"/>
@@ -24640,14 +24935,14 @@
                 <a:latin typeface="Times New Roman" panose="02020603050405020304" pitchFamily="18" charset="0"/>
                 <a:cs typeface="Times New Roman" panose="02020603050405020304" pitchFamily="18" charset="0"/>
               </a:rPr>
-              <a:t>The problem is not which AI you use.</a:t>
+              <a:t>E1 - Over-personalisation, the headline.</a:t>
             </a:r>
             <a:r>
               <a:rPr lang="en-US" sz="1000" b="0" dirty="0">
                 <a:latin typeface="Times New Roman" panose="02020603050405020304" pitchFamily="18" charset="0"/>
                 <a:cs typeface="Times New Roman" panose="02020603050405020304" pitchFamily="18" charset="0"/>
               </a:rPr>
-              <a:t> It is that your context is trapped inside whichever one you happened to type it into, and that the assistant which would use it is trapped inside an application window.</a:t>
+              <a:t> OP-Bench, against three baselines: no memory, naive top-k, and ours. We must beat both.</a:t>
             </a:r>
           </a:p>
           <a:p>
@@ -24660,14 +24955,14 @@
                 <a:latin typeface="Times New Roman" panose="02020603050405020304" pitchFamily="18" charset="0"/>
                 <a:cs typeface="Times New Roman" panose="02020603050405020304" pitchFamily="18" charset="0"/>
               </a:rPr>
-              <a:t>The measurement backs it.</a:t>
+              <a:t>E2 - Budget assembly ablation (C1).</a:t>
             </a:r>
             <a:r>
               <a:rPr lang="en-US" sz="1000" b="0" dirty="0">
                 <a:latin typeface="Times New Roman" panose="02020603050405020304" pitchFamily="18" charset="0"/>
                 <a:cs typeface="Times New Roman" panose="02020603050405020304" pitchFamily="18" charset="0"/>
               </a:rPr>
-              <a:t> ACM SIGKDD 2026 found frontier models below 70% when a task needs persistent knowledge of the user.</a:t>
+              <a:t> No memory, full profile always injected, and budget-aware selection, measured at three model sizes. The margin should be largest on the smallest model, because that is where the budget actually binds.</a:t>
             </a:r>
           </a:p>
           <a:p>
@@ -24680,14 +24975,14 @@
                 <a:latin typeface="Times New Roman" panose="02020603050405020304" pitchFamily="18" charset="0"/>
                 <a:cs typeface="Times New Roman" panose="02020603050405020304" pitchFamily="18" charset="0"/>
               </a:rPr>
-              <a:t>PERCH is the layer above the applications.</a:t>
+              <a:t>E3 - Retrieval quality.</a:t>
             </a:r>
             <a:r>
               <a:rPr lang="en-US" sz="1000" b="0" dirty="0">
                 <a:latin typeface="Times New Roman" panose="02020603050405020304" pitchFamily="18" charset="0"/>
                 <a:cs typeface="Times New Roman" panose="02020603050405020304" pitchFamily="18" charset="0"/>
               </a:rPr>
-              <a:t> Summoned anywhere in Windows, answers beside your work, writes back into the document you were in, remembers what you told it once, and runs on whichever model you choose - including one that never leaves your machine.</a:t>
+              <a:t> LongMemEval and LoCoMo, reported honestly against published 2026 baselines.</a:t>
             </a:r>
           </a:p>
           <a:p>
@@ -24700,14 +24995,14 @@
                 <a:latin typeface="Times New Roman" panose="02020603050405020304" pitchFamily="18" charset="0"/>
                 <a:cs typeface="Times New Roman" panose="02020603050405020304" pitchFamily="18" charset="0"/>
               </a:rPr>
-              <a:t>The risky part is already done.</a:t>
+              <a:t>E4 - Admission gate ablation (C2).</a:t>
             </a:r>
             <a:r>
               <a:rPr lang="en-US" sz="1000" b="0" dirty="0">
                 <a:latin typeface="Times New Roman" panose="02020603050405020304" pitchFamily="18" charset="0"/>
                 <a:cs typeface="Times New Roman" panose="02020603050405020304" pitchFamily="18" charset="0"/>
               </a:rPr>
-              <a:t> Phase 0 proves the OS layer with running code: three triggers, panel placement, and edit-in-place, using only documented user-mode APIs.</a:t>
+              <a:t> Cross-domain leakage with the gate off, with a single global threshold, and with per-class floors. MemGate's 27.0% to 3.5% is the reference point.</a:t>
             </a:r>
           </a:p>
           <a:p>
@@ -24720,14 +25015,14 @@
                 <a:latin typeface="Times New Roman" panose="02020603050405020304" pitchFamily="18" charset="0"/>
                 <a:cs typeface="Times New Roman" panose="02020603050405020304" pitchFamily="18" charset="0"/>
               </a:rPr>
-              <a:t>The technical core is Layers 2 and 3</a:t>
+              <a:t>E5 - Privacy.</a:t>
             </a:r>
             <a:r>
               <a:rPr lang="en-US" sz="1000" b="0" dirty="0">
                 <a:latin typeface="Times New Roman" panose="02020603050405020304" pitchFamily="18" charset="0"/>
                 <a:cs typeface="Times New Roman" panose="02020603050405020304" pitchFamily="18" charset="0"/>
               </a:rPr>
-              <a:t> - embeddings, retrieval, ranking and budget optimisation, evaluated on public benchmarks with an ablation nobody else has a reason to run.</a:t>
+              <a:t> Bytes leaving the machine in private mode must be zero, by packet capture.</a:t>
             </a:r>
           </a:p>
           <a:p>
@@ -24740,7 +25035,34 @@
                 <a:latin typeface="Times New Roman" panose="02020603050405020304" pitchFamily="18" charset="0"/>
                 <a:cs typeface="Times New Roman" panose="02020603050405020304" pitchFamily="18" charset="0"/>
               </a:rPr>
-              <a:t>You pay for four AI assistants. None of them know you. PERCH is the one that does - and it works inside all of them.</a:t>
+              <a:t>E6 - Latency.</a:t>
+            </a:r>
+            <a:r>
+              <a:rPr lang="en-US" sz="1000" b="0" dirty="0">
+                <a:latin typeface="Times New Roman" panose="02020603050405020304" pitchFamily="18" charset="0"/>
+                <a:cs typeface="Times New Roman" panose="02020603050405020304" pitchFamily="18" charset="0"/>
+              </a:rPr>
+              <a:t> Trigger to first token, local versus cloud.</a:t>
+            </a:r>
+          </a:p>
+          <a:p>
+            <a:pPr marL="171450" lvl="1" indent="-171450" algn="l">
+              <a:buFont typeface="Arial" panose="020B0604020202020204" pitchFamily="34" charset="0"/>
+              <a:buChar char="•"/>
+            </a:pPr>
+            <a:r>
+              <a:rPr lang="en-US" sz="1000" b="1" dirty="0">
+                <a:latin typeface="Times New Roman" panose="02020603050405020304" pitchFamily="18" charset="0"/>
+                <a:cs typeface="Times New Roman" panose="02020603050405020304" pitchFamily="18" charset="0"/>
+              </a:rPr>
+              <a:t>E7 - UI Automation coverage per application.</a:t>
+            </a:r>
+            <a:r>
+              <a:rPr lang="en-US" sz="1000" b="0" dirty="0">
+                <a:latin typeface="Times New Roman" panose="02020603050405020304" pitchFamily="18" charset="0"/>
+                <a:cs typeface="Times New Roman" panose="02020603050405020304" pitchFamily="18" charset="0"/>
+              </a:rPr>
+              <a:t> A measured table across common Windows apps. No competitor publishes one.</a:t>
             </a:r>
           </a:p>
         </p:txBody>
@@ -24988,7 +25310,7 @@
                 <a:cs typeface="Times New Roman" panose="02020603050405020304" pitchFamily="18" charset="0"/>
                 <a:sym typeface="Arial"/>
               </a:rPr>
-              <a:t>References</a:t>
+              <a:t>Base Paper - PAUSE, ACM SIGKDD 2026</a:t>
             </a:r>
           </a:p>
         </p:txBody>
@@ -25323,7 +25645,7 @@
                 <a:latin typeface="Times New Roman" panose="02020603050405020304" pitchFamily="18" charset="0"/>
                 <a:cs typeface="Times New Roman" panose="02020603050405020304" pitchFamily="18" charset="0"/>
               </a:rPr>
-              <a:t> / 29</a:t>
+              <a:t> / 33</a:t>
             </a:r>
             <a:endParaRPr dirty="0">
               <a:latin typeface="Times New Roman" panose="02020603050405020304" pitchFamily="18" charset="0"/>
@@ -25362,18 +25684,18 @@
               <a:buChar char="•"/>
             </a:pPr>
             <a:r>
-              <a:rPr lang="en-US" sz="900" b="1" dirty="0">
-                <a:latin typeface="Times New Roman" panose="02020603050405020304" pitchFamily="18" charset="0"/>
-                <a:cs typeface="Times New Roman" panose="02020603050405020304" pitchFamily="18" charset="0"/>
-              </a:rPr>
-              <a:t>[1] PAUSE: A User-Centric Benchmark for Personal AI Assistants in Unified Service Environments.</a:t>
-            </a:r>
-            <a:r>
-              <a:rPr lang="en-US" sz="900" b="0" dirty="0">
-                <a:latin typeface="Times New Roman" panose="02020603050405020304" pitchFamily="18" charset="0"/>
-                <a:cs typeface="Times New Roman" panose="02020603050405020304" pitchFamily="18" charset="0"/>
-              </a:rPr>
-              <a:t> ACM SIGKDD 2026 (KDD '26), Jeju Island. - BASE PAPER</a:t>
+              <a:rPr lang="en-US" sz="1000" b="1" dirty="0">
+                <a:latin typeface="Times New Roman" panose="02020603050405020304" pitchFamily="18" charset="0"/>
+                <a:cs typeface="Times New Roman" panose="02020603050405020304" pitchFamily="18" charset="0"/>
+              </a:rPr>
+              <a:t>PAUSE: A User-Centric Benchmark for Personal AI Assistants in Unified Service Environments.</a:t>
+            </a:r>
+            <a:r>
+              <a:rPr lang="en-US" sz="1000" b="0" dirty="0">
+                <a:latin typeface="Times New Roman" panose="02020603050405020304" pitchFamily="18" charset="0"/>
+                <a:cs typeface="Times New Roman" panose="02020603050405020304" pitchFamily="18" charset="0"/>
+              </a:rPr>
+              <a:t> ACM SIGKDD 2026, 9-13 August 2026, Jeju Island. Chen, Shi, Wang, Chen and Niu.</a:t>
             </a:r>
           </a:p>
           <a:p>
@@ -25382,18 +25704,18 @@
               <a:buChar char="•"/>
             </a:pPr>
             <a:r>
-              <a:rPr lang="en-US" sz="900" b="1" dirty="0">
-                <a:latin typeface="Times New Roman" panose="02020603050405020304" pitchFamily="18" charset="0"/>
-                <a:cs typeface="Times New Roman" panose="02020603050405020304" pitchFamily="18" charset="0"/>
-              </a:rPr>
-              <a:t>[2] Li et al.</a:t>
-            </a:r>
-            <a:r>
-              <a:rPr lang="en-US" sz="900" b="0" dirty="0">
-                <a:latin typeface="Times New Roman" panose="02020603050405020304" pitchFamily="18" charset="0"/>
-                <a:cs typeface="Times New Roman" panose="02020603050405020304" pitchFamily="18" charset="0"/>
-              </a:rPr>
-              <a:t> Personal LLM Agents: Insights and Survey about the Capability, Efficiency and Security. Institute for AI Industry Research, Tsinghua University.</a:t>
+              <a:rPr lang="en-US" sz="1000" b="1" dirty="0">
+                <a:latin typeface="Times New Roman" panose="02020603050405020304" pitchFamily="18" charset="0"/>
+                <a:cs typeface="Times New Roman" panose="02020603050405020304" pitchFamily="18" charset="0"/>
+              </a:rPr>
+              <a:t>Why this is the base paper:</a:t>
+            </a:r>
+            <a:r>
+              <a:rPr lang="en-US" sz="1000" b="0" dirty="0">
+                <a:latin typeface="Times New Roman" panose="02020603050405020304" pitchFamily="18" charset="0"/>
+                <a:cs typeface="Times New Roman" panose="02020603050405020304" pitchFamily="18" charset="0"/>
+              </a:rPr>
+              <a:t> ACM and 2026, and its subject is literally personal AI assistants - so it cannot be misread as a memory-architecture project.</a:t>
             </a:r>
           </a:p>
           <a:p>
@@ -25402,18 +25724,18 @@
               <a:buChar char="•"/>
             </a:pPr>
             <a:r>
-              <a:rPr lang="en-US" sz="900" b="1" dirty="0">
-                <a:latin typeface="Times New Roman" panose="02020603050405020304" pitchFamily="18" charset="0"/>
-                <a:cs typeface="Times New Roman" panose="02020603050405020304" pitchFamily="18" charset="0"/>
-              </a:rPr>
-              <a:t>[3] A Survey on the Memory Mechanism of LLM-based Agents.</a:t>
-            </a:r>
-            <a:r>
-              <a:rPr lang="en-US" sz="900" b="0" dirty="0">
-                <a:latin typeface="Times New Roman" panose="02020603050405020304" pitchFamily="18" charset="0"/>
-                <a:cs typeface="Times New Roman" panose="02020603050405020304" pitchFamily="18" charset="0"/>
-              </a:rPr>
-              <a:t> ACM TOIS Vol 43(6), 2025, DOI 10.1145/3748302. - cited for Layer 3 only</a:t>
+              <a:rPr lang="en-US" sz="1000" b="1" dirty="0">
+                <a:latin typeface="Times New Roman" panose="02020603050405020304" pitchFamily="18" charset="0"/>
+                <a:cs typeface="Times New Roman" panose="02020603050405020304" pitchFamily="18" charset="0"/>
+              </a:rPr>
+              <a:t>Its definition is our specification.</a:t>
+            </a:r>
+            <a:r>
+              <a:rPr lang="en-US" sz="1000" b="0" dirty="0">
+                <a:latin typeface="Times New Roman" panose="02020603050405020304" pitchFamily="18" charset="0"/>
+                <a:cs typeface="Times New Roman" panose="02020603050405020304" pitchFamily="18" charset="0"/>
+              </a:rPr>
+              <a:t> An assistant must reason over persistent user state, respect user-specific configurations and permissions, and sustain long-horizon, constraint-aware interactions across multiple services.</a:t>
             </a:r>
           </a:p>
           <a:p>
@@ -25422,18 +25744,18 @@
               <a:buChar char="•"/>
             </a:pPr>
             <a:r>
-              <a:rPr lang="en-US" sz="900" b="1" dirty="0">
-                <a:latin typeface="Times New Roman" panose="02020603050405020304" pitchFamily="18" charset="0"/>
-                <a:cs typeface="Times New Roman" panose="02020603050405020304" pitchFamily="18" charset="0"/>
-              </a:rPr>
-              <a:t>[4] Bridging Intuitive Associations and Deliberate Recall: Empowering LLM Personal Assistant with Graph-Structured Long-term Memory.</a:t>
-            </a:r>
-            <a:r>
-              <a:rPr lang="en-US" sz="900" b="0" dirty="0">
-                <a:latin typeface="Times New Roman" panose="02020603050405020304" pitchFamily="18" charset="0"/>
-                <a:cs typeface="Times New Roman" panose="02020603050405020304" pitchFamily="18" charset="0"/>
-              </a:rPr>
-              <a:t> Findings of ACL 2025.</a:t>
+              <a:rPr lang="en-US" sz="1000" b="1" dirty="0">
+                <a:latin typeface="Times New Roman" panose="02020603050405020304" pitchFamily="18" charset="0"/>
+                <a:cs typeface="Times New Roman" panose="02020603050405020304" pitchFamily="18" charset="0"/>
+              </a:rPr>
+              <a:t>It hands us the gap, quantified:</a:t>
+            </a:r>
+            <a:r>
+              <a:rPr lang="en-US" sz="1000" b="0" dirty="0">
+                <a:latin typeface="Times New Roman" panose="02020603050405020304" pitchFamily="18" charset="0"/>
+                <a:cs typeface="Times New Roman" panose="02020603050405020304" pitchFamily="18" charset="0"/>
+              </a:rPr>
+              <a:t> state-of-the-art proprietary models fail to reach 70% task completion on scenarios requiring stateful reasoning and configuration awareness.</a:t>
             </a:r>
           </a:p>
           <a:p>
@@ -25442,118 +25764,18 @@
               <a:buChar char="•"/>
             </a:pPr>
             <a:r>
-              <a:rPr lang="en-US" sz="900" b="1" dirty="0">
-                <a:latin typeface="Times New Roman" panose="02020603050405020304" pitchFamily="18" charset="0"/>
-                <a:cs typeface="Times New Roman" panose="02020603050405020304" pitchFamily="18" charset="0"/>
-              </a:rPr>
-              <a:t>[5] Memory in the LLM Era: Modular Architectures and Strategies in a Unified Framework.</a:t>
-            </a:r>
-            <a:r>
-              <a:rPr lang="en-US" sz="900" b="0" dirty="0">
-                <a:latin typeface="Times New Roman" panose="02020603050405020304" pitchFamily="18" charset="0"/>
-                <a:cs typeface="Times New Roman" panose="02020603050405020304" pitchFamily="18" charset="0"/>
-              </a:rPr>
-              <a:t> VLDB 2026.</a:t>
-            </a:r>
-          </a:p>
-          <a:p>
-            <a:pPr marL="171450" lvl="1" indent="-171450" algn="l">
-              <a:buFont typeface="Arial" panose="020B0604020202020204" pitchFamily="34" charset="0"/>
-              <a:buChar char="•"/>
-            </a:pPr>
-            <a:r>
-              <a:rPr lang="en-US" sz="900" b="1" dirty="0">
-                <a:latin typeface="Times New Roman" panose="02020603050405020304" pitchFamily="18" charset="0"/>
-                <a:cs typeface="Times New Roman" panose="02020603050405020304" pitchFamily="18" charset="0"/>
-              </a:rPr>
-              <a:t>[6] From Generic Intelligence to Personalized AI: Foundations of LLM Personalization.</a:t>
-            </a:r>
-            <a:r>
-              <a:rPr lang="en-US" sz="900" b="0" dirty="0">
-                <a:latin typeface="Times New Roman" panose="02020603050405020304" pitchFamily="18" charset="0"/>
-                <a:cs typeface="Times New Roman" panose="02020603050405020304" pitchFamily="18" charset="0"/>
-              </a:rPr>
-              <a:t> Tutorial, ACM SIGKDD 2026.</a:t>
-            </a:r>
-          </a:p>
-          <a:p>
-            <a:pPr marL="171450" lvl="1" indent="-171450" algn="l">
-              <a:buFont typeface="Arial" panose="020B0604020202020204" pitchFamily="34" charset="0"/>
-              <a:buChar char="•"/>
-            </a:pPr>
-            <a:r>
-              <a:rPr lang="en-US" sz="900" b="1" dirty="0">
-                <a:latin typeface="Times New Roman" panose="02020603050405020304" pitchFamily="18" charset="0"/>
-                <a:cs typeface="Times New Roman" panose="02020603050405020304" pitchFamily="18" charset="0"/>
-              </a:rPr>
-              <a:t>[7] LongMemEval</a:t>
-            </a:r>
-            <a:r>
-              <a:rPr lang="en-US" sz="900" b="0" dirty="0">
-                <a:latin typeface="Times New Roman" panose="02020603050405020304" pitchFamily="18" charset="0"/>
-                <a:cs typeface="Times New Roman" panose="02020603050405020304" pitchFamily="18" charset="0"/>
-              </a:rPr>
-              <a:t> - long-term memory benchmark, 500 questions, 6 categories.</a:t>
-            </a:r>
-          </a:p>
-          <a:p>
-            <a:pPr marL="171450" lvl="1" indent="-171450" algn="l">
-              <a:buFont typeface="Arial" panose="020B0604020202020204" pitchFamily="34" charset="0"/>
-              <a:buChar char="•"/>
-            </a:pPr>
-            <a:r>
-              <a:rPr lang="en-US" sz="900" b="1" dirty="0">
-                <a:latin typeface="Times New Roman" panose="02020603050405020304" pitchFamily="18" charset="0"/>
-                <a:cs typeface="Times New Roman" panose="02020603050405020304" pitchFamily="18" charset="0"/>
-              </a:rPr>
-              <a:t>[8] LoCoMo</a:t>
-            </a:r>
-            <a:r>
-              <a:rPr lang="en-US" sz="900" b="0" dirty="0">
-                <a:latin typeface="Times New Roman" panose="02020603050405020304" pitchFamily="18" charset="0"/>
-                <a:cs typeface="Times New Roman" panose="02020603050405020304" pitchFamily="18" charset="0"/>
-              </a:rPr>
-              <a:t> - long conversational memory benchmark, 1,540 questions, up to 35 sessions.</a:t>
-            </a:r>
-          </a:p>
-          <a:p>
-            <a:pPr marL="171450" lvl="1" indent="-171450" algn="l">
-              <a:buFont typeface="Arial" panose="020B0604020202020204" pitchFamily="34" charset="0"/>
-              <a:buChar char="•"/>
-            </a:pPr>
-            <a:r>
-              <a:rPr lang="en-US" sz="900" b="1" dirty="0">
-                <a:latin typeface="Times New Roman" panose="02020603050405020304" pitchFamily="18" charset="0"/>
-                <a:cs typeface="Times New Roman" panose="02020603050405020304" pitchFamily="18" charset="0"/>
-              </a:rPr>
-              <a:t>[9] Microsoft.</a:t>
-            </a:r>
-            <a:r>
-              <a:rPr lang="en-US" sz="900" b="0" dirty="0">
-                <a:latin typeface="Times New Roman" panose="02020603050405020304" pitchFamily="18" charset="0"/>
-                <a:cs typeface="Times New Roman" panose="02020603050405020304" pitchFamily="18" charset="0"/>
-              </a:rPr>
-              <a:t> UI Automation Overview and IUIAutomationElement, Windows Accessibility documentation.</a:t>
-            </a:r>
-          </a:p>
-          <a:p>
-            <a:pPr marL="171450" lvl="1" indent="-171450" algn="l">
-              <a:buFont typeface="Arial" panose="020B0604020202020204" pitchFamily="34" charset="0"/>
-              <a:buChar char="•"/>
-            </a:pPr>
-            <a:r>
-              <a:rPr lang="en-US" sz="900" b="1" dirty="0">
-                <a:latin typeface="Times New Roman" panose="02020603050405020304" pitchFamily="18" charset="0"/>
-                <a:cs typeface="Times New Roman" panose="02020603050405020304" pitchFamily="18" charset="0"/>
-              </a:rPr>
-              <a:t>[10] Tauri v2</a:t>
-            </a:r>
-            <a:r>
-              <a:rPr lang="en-US" sz="900" b="0" dirty="0">
-                <a:latin typeface="Times New Roman" panose="02020603050405020304" pitchFamily="18" charset="0"/>
-                <a:cs typeface="Times New Roman" panose="02020603050405020304" pitchFamily="18" charset="0"/>
-              </a:rPr>
-              <a:t> documentation - window management, global shortcut plugin, transparency.</a:t>
+              <a:rPr lang="en-US" sz="1000" b="1" dirty="0">
+                <a:latin typeface="Times New Roman" panose="02020603050405020304" pitchFamily="18" charset="0"/>
+                <a:cs typeface="Times New Roman" panose="02020603050405020304" pitchFamily="18" charset="0"/>
+              </a:rPr>
+              <a:t>Where it stops.</a:t>
+            </a:r>
+            <a:r>
+              <a:rPr lang="en-US" sz="1000" b="0" dirty="0">
+                <a:latin typeface="Times New Roman" panose="02020603050405020304" pitchFamily="18" charset="0"/>
+                <a:cs typeface="Times New Roman" panose="02020603050405020304" pitchFamily="18" charset="0"/>
+              </a:rPr>
+              <a:t> PAUSE is a benchmark, evaluating assistants inside unified service environments that already have access and configuration. It does not build a system, does not address how a user supplies their own state, does not address OS-level capture, and does not address operating within a fixed token budget across heterogeneous models.</a:t>
             </a:r>
           </a:p>
         </p:txBody>
@@ -26136,7 +26358,7 @@
                 <a:latin typeface="Times New Roman" panose="02020603050405020304" pitchFamily="18" charset="0"/>
                 <a:cs typeface="Times New Roman" panose="02020603050405020304" pitchFamily="18" charset="0"/>
               </a:rPr>
-              <a:t> / 29</a:t>
+              <a:t> / 33</a:t>
             </a:r>
             <a:endParaRPr dirty="0">
               <a:latin typeface="Times New Roman" panose="02020603050405020304" pitchFamily="18" charset="0"/>
@@ -26186,7 +26408,7 @@
                 <a:latin typeface="Times New Roman" panose="02020603050405020304" pitchFamily="18" charset="0"/>
                 <a:cs typeface="Times New Roman" panose="02020603050405020304" pitchFamily="18" charset="0"/>
               </a:rPr>
-              <a:t> A typical user now runs ChatGPT for general questions, Claude Code or Copilot for programming, Perplexity for research, and Gemini inside Docs.</a:t>
+              <a:t> a typical user runs ChatGPT for general questions, Claude Code or Copilot for programming, Perplexity for research, and Gemini inside Docs.</a:t>
             </a:r>
           </a:p>
           <a:p>
@@ -26206,7 +26428,7 @@
                 <a:latin typeface="Times New Roman" panose="02020603050405020304" pitchFamily="18" charset="0"/>
                 <a:cs typeface="Times New Roman" panose="02020603050405020304" pitchFamily="18" charset="0"/>
               </a:rPr>
-              <a:t> Each one holds a separate, private memory of you. None of them can see the others. Your context is fragmented across the vendors you pay.</a:t>
+              <a:t> each one holds a separate, private memory of you. None of them can see the others. Your context is fragmented across the vendors you pay.</a:t>
             </a:r>
           </a:p>
           <a:p>
@@ -26226,7 +26448,7 @@
                 <a:latin typeface="Times New Roman" panose="02020603050405020304" pitchFamily="18" charset="0"/>
                 <a:cs typeface="Times New Roman" panose="02020603050405020304" pitchFamily="18" charset="0"/>
               </a:rPr>
-              <a:t> a power user pays $70-110/month across four subscriptions, and still loses 15-30 minutes of context on every platform switch.</a:t>
+              <a:t> $70-110 a month across four subscriptions, and 15-30 minutes of context lost on every platform switch.</a:t>
             </a:r>
           </a:p>
           <a:p>
@@ -26246,7 +26468,7 @@
                 <a:latin typeface="Times New Roman" panose="02020603050405020304" pitchFamily="18" charset="0"/>
                 <a:cs typeface="Times New Roman" panose="02020603050405020304" pitchFamily="18" charset="0"/>
               </a:rPr>
-              <a:t> ChatGPT's assistant market share fell from ~60% in early 2025 to under 45% by Q1 2026. People are moving constantly, and the context does not move with them.</a:t>
+              <a:t> ChatGPT's assistant market share fell from ~60% in early 2025 to under 45% by Q1 2026. People move constantly, and the context does not move with them.</a:t>
             </a:r>
           </a:p>
           <a:p>
@@ -26267,6 +26489,3031 @@
                 <a:cs typeface="Times New Roman" panose="02020603050405020304" pitchFamily="18" charset="0"/>
               </a:rPr>
               <a:t> the 2026 switching analysis found users prioritising governance and data portability over interface quality. Ownership is the deciding factor.</a:t>
+            </a:r>
+          </a:p>
+        </p:txBody>
+      </p:sp>
+      <p:sp>
+        <p:nvSpPr>
+          <p:cNvPr id="8" name="Google Shape;85;p8">
+            <a:extLst>
+              <a:ext uri="{FF2B5EF4-FFF2-40B4-BE49-F238E27FC236}">
+                <a16:creationId xmlns:a16="http://schemas.microsoft.com/office/drawing/2014/main" id="{B445AC1F-8D42-9224-714E-741A4A81DCCA}"/>
+              </a:ext>
+            </a:extLst>
+          </p:cNvPr>
+          <p:cNvSpPr txBox="1"/>
+          <p:nvPr/>
+        </p:nvSpPr>
+        <p:spPr>
+          <a:xfrm>
+            <a:off x="1773059" y="3331250"/>
+            <a:ext cx="1211100" cy="101295"/>
+          </a:xfrm>
+          <a:prstGeom prst="rect">
+            <a:avLst/>
+          </a:prstGeom>
+          <a:noFill/>
+          <a:ln>
+            <a:noFill/>
+          </a:ln>
+        </p:spPr>
+        <p:txBody>
+          <a:bodyPr spcFirstLastPara="1" wrap="square" lIns="0" tIns="8875" rIns="0" bIns="0" anchor="t" anchorCtr="0">
+            <a:spAutoFit/>
+          </a:bodyPr>
+          <a:lstStyle/>
+          <a:p>
+            <a:pPr marL="12700" lvl="0"/>
+            <a:endParaRPr lang="en-US" sz="600" dirty="0">
+              <a:latin typeface="Times New Roman" panose="02020603050405020304" pitchFamily="18" charset="0"/>
+              <a:cs typeface="Times New Roman" panose="02020603050405020304" pitchFamily="18" charset="0"/>
+            </a:endParaRPr>
+            <a:r>
+              <a:rPr lang="en-US" sz="600" dirty="0" b="0">
+                <a:solidFill>
+                  <a:srgbClr val="FFFFFF"/>
+                </a:solidFill>
+                <a:latin typeface="Times New Roman" panose="02020603050405020304" pitchFamily="18" charset="0"/>
+                <a:cs typeface="Times New Roman" panose="02020603050405020304" pitchFamily="18" charset="0"/>
+              </a:rPr>
+              <a:t>PERCH</a:t>
+            </a:r>
+          </a:p>
+        </p:txBody>
+      </p:sp>
+      <p:sp>
+        <p:nvSpPr>
+          <p:cNvPr id="9" name="Google Shape;72;p7">
+            <a:extLst>
+              <a:ext uri="{FF2B5EF4-FFF2-40B4-BE49-F238E27FC236}">
+                <a16:creationId xmlns:a16="http://schemas.microsoft.com/office/drawing/2014/main" id="{AD0AEF20-4852-6A69-5088-EB2B0F643C44}"/>
+              </a:ext>
+            </a:extLst>
+          </p:cNvPr>
+          <p:cNvSpPr txBox="1">
+            <a:spLocks noGrp="1"/>
+          </p:cNvSpPr>
+          <p:nvPr>
+            <p:ph type="dt" idx="10"/>
+          </p:nvPr>
+        </p:nvSpPr>
+        <p:spPr>
+          <a:xfrm>
+            <a:off x="3442063" y="3331251"/>
+            <a:ext cx="746093" cy="101295"/>
+          </a:xfrm>
+          <a:prstGeom prst="rect">
+            <a:avLst/>
+          </a:prstGeom>
+          <a:noFill/>
+          <a:ln>
+            <a:noFill/>
+          </a:ln>
+        </p:spPr>
+        <p:txBody>
+          <a:bodyPr spcFirstLastPara="1" wrap="square" lIns="0" tIns="8875" rIns="0" bIns="0" anchor="t" anchorCtr="0">
+            <a:spAutoFit/>
+          </a:bodyPr>
+          <a:lstStyle/>
+          <a:p>
+            <a:pPr marL="12700" lvl="0" indent="0" algn="l" rtl="0">
+              <a:lnSpc>
+                <a:spcPct val="100000"/>
+              </a:lnSpc>
+              <a:spcBef>
+                <a:spcPts val="0"/>
+              </a:spcBef>
+              <a:spcAft>
+                <a:spcPts val="0"/>
+              </a:spcAft>
+              <a:buNone/>
+            </a:pPr>
+            <a:r>
+              <a:rPr lang="en-US" dirty="0">
+                <a:latin typeface="Times New Roman" panose="02020603050405020304" pitchFamily="18" charset="0"/>
+                <a:cs typeface="Times New Roman" panose="02020603050405020304" pitchFamily="18" charset="0"/>
+              </a:rPr>
+              <a:t>August-2026</a:t>
+            </a:r>
+            <a:endParaRPr dirty="0">
+              <a:latin typeface="Times New Roman" panose="02020603050405020304" pitchFamily="18" charset="0"/>
+              <a:cs typeface="Times New Roman" panose="02020603050405020304" pitchFamily="18" charset="0"/>
+            </a:endParaRPr>
+          </a:p>
+        </p:txBody>
+      </p:sp>
+    </p:spTree>
+  </p:cSld>
+  <p:clrMapOvr>
+    <a:masterClrMapping/>
+  </p:clrMapOvr>
+</p:sld>
+</file>
+
+<file path=ppt/slides/slide30.xml><?xml version="1.0" encoding="utf-8"?>
+<p:sld xmlns:a="http://schemas.openxmlformats.org/drawingml/2006/main" xmlns:p="http://schemas.openxmlformats.org/presentationml/2006/main" xmlns:r="http://schemas.openxmlformats.org/officeDocument/2006/relationships">
+  <p:cSld>
+    <p:spTree>
+      <p:nvGrpSpPr>
+        <p:cNvPr id="1" name=""/>
+        <p:cNvGrpSpPr/>
+        <p:nvPr/>
+      </p:nvGrpSpPr>
+      <p:grpSpPr/>
+      <p:sp>
+        <p:nvSpPr>
+          <p:cNvPr id="93" name="Google Shape;93;p9"/>
+          <p:cNvSpPr/>
+          <p:nvPr/>
+        </p:nvSpPr>
+        <p:spPr>
+          <a:xfrm>
+            <a:off x="1905" y="0"/>
+            <a:ext cx="4608195" cy="321945"/>
+          </a:xfrm>
+          <a:custGeom>
+            <a:avLst/>
+            <a:gdLst/>
+            <a:ahLst/>
+            <a:cxnLst/>
+            <a:rect l="l" t="t" r="r" b="b"/>
+            <a:pathLst>
+              <a:path w="4608195" h="321945" extrusionOk="0">
+                <a:moveTo>
+                  <a:pt x="4608004" y="0"/>
+                </a:moveTo>
+                <a:lnTo>
+                  <a:pt x="0" y="0"/>
+                </a:lnTo>
+                <a:lnTo>
+                  <a:pt x="0" y="321500"/>
+                </a:lnTo>
+                <a:lnTo>
+                  <a:pt x="4608004" y="321500"/>
+                </a:lnTo>
+                <a:lnTo>
+                  <a:pt x="4608004" y="0"/>
+                </a:lnTo>
+                <a:close/>
+              </a:path>
+            </a:pathLst>
+          </a:custGeom>
+          <a:solidFill>
+            <a:srgbClr val="3333B2"/>
+          </a:solidFill>
+          <a:ln>
+            <a:noFill/>
+          </a:ln>
+        </p:spPr>
+        <p:txBody>
+          <a:bodyPr spcFirstLastPara="1" wrap="square" lIns="0" tIns="0" rIns="0" bIns="0" anchor="t" anchorCtr="0">
+            <a:noAutofit/>
+          </a:bodyPr>
+          <a:lstStyle/>
+          <a:p>
+            <a:pPr marL="0" lvl="0" indent="0" algn="l" rtl="0">
+              <a:spcBef>
+                <a:spcPts val="0"/>
+              </a:spcBef>
+              <a:spcAft>
+                <a:spcPts val="0"/>
+              </a:spcAft>
+              <a:buNone/>
+            </a:pPr>
+            <a:endParaRPr sz="1800"/>
+          </a:p>
+        </p:txBody>
+      </p:sp>
+      <p:sp>
+        <p:nvSpPr>
+          <p:cNvPr id="94" name="Google Shape;94;p9"/>
+          <p:cNvSpPr txBox="1"/>
+          <p:nvPr/>
+        </p:nvSpPr>
+        <p:spPr>
+          <a:xfrm>
+            <a:off x="95300" y="45565"/>
+            <a:ext cx="4297680" cy="232736"/>
+          </a:xfrm>
+          <a:prstGeom prst="rect">
+            <a:avLst/>
+          </a:prstGeom>
+          <a:noFill/>
+          <a:ln>
+            <a:noFill/>
+          </a:ln>
+        </p:spPr>
+        <p:txBody>
+          <a:bodyPr spcFirstLastPara="1" wrap="square" lIns="0" tIns="17125" rIns="0" bIns="0" anchor="t" anchorCtr="0">
+            <a:spAutoFit/>
+          </a:bodyPr>
+          <a:lstStyle/>
+          <a:p>
+            <a:pPr marL="12700" lvl="0" indent="0" algn="l" rtl="0">
+              <a:lnSpc>
+                <a:spcPct val="100000"/>
+              </a:lnSpc>
+              <a:spcBef>
+                <a:spcPts val="0"/>
+              </a:spcBef>
+              <a:spcAft>
+                <a:spcPts val="0"/>
+              </a:spcAft>
+              <a:buNone/>
+            </a:pPr>
+            <a:endParaRPr sz="1400" dirty="0">
+              <a:latin typeface="Times New Roman" panose="02020603050405020304" pitchFamily="18" charset="0"/>
+              <a:cs typeface="Times New Roman" panose="02020603050405020304" pitchFamily="18" charset="0"/>
+              <a:sym typeface="Arial"/>
+            </a:endParaRPr>
+            <a:r>
+              <a:rPr lang="en-US" sz="1400" dirty="0" b="0">
+                <a:solidFill>
+                  <a:srgbClr val="FFFFFF"/>
+                </a:solidFill>
+                <a:latin typeface="Times New Roman" panose="02020603050405020304" pitchFamily="18" charset="0"/>
+                <a:cs typeface="Times New Roman" panose="02020603050405020304" pitchFamily="18" charset="0"/>
+                <a:sym typeface="Arial"/>
+              </a:rPr>
+              <a:t>The Gap - What We Claim and What We Do Not</a:t>
+            </a:r>
+          </a:p>
+        </p:txBody>
+      </p:sp>
+      <p:grpSp>
+        <p:nvGrpSpPr>
+          <p:cNvPr id="95" name="Google Shape;95;p9"/>
+          <p:cNvGrpSpPr/>
+          <p:nvPr/>
+        </p:nvGrpSpPr>
+        <p:grpSpPr>
+          <a:xfrm>
+            <a:off x="0" y="3326968"/>
+            <a:ext cx="4608017" cy="129539"/>
+            <a:chOff x="0" y="3326968"/>
+            <a:chExt cx="4608017" cy="129539"/>
+          </a:xfrm>
+        </p:grpSpPr>
+        <p:sp>
+          <p:nvSpPr>
+            <p:cNvPr id="96" name="Google Shape;96;p9"/>
+            <p:cNvSpPr/>
+            <p:nvPr/>
+          </p:nvSpPr>
+          <p:spPr>
+            <a:xfrm>
+              <a:off x="0" y="3326968"/>
+              <a:ext cx="1536065" cy="129539"/>
+            </a:xfrm>
+            <a:custGeom>
+              <a:avLst/>
+              <a:gdLst/>
+              <a:ahLst/>
+              <a:cxnLst/>
+              <a:rect l="l" t="t" r="r" b="b"/>
+              <a:pathLst>
+                <a:path w="1536065" h="129539" extrusionOk="0">
+                  <a:moveTo>
+                    <a:pt x="1535976" y="0"/>
+                  </a:moveTo>
+                  <a:lnTo>
+                    <a:pt x="0" y="0"/>
+                  </a:lnTo>
+                  <a:lnTo>
+                    <a:pt x="0" y="129032"/>
+                  </a:lnTo>
+                  <a:lnTo>
+                    <a:pt x="1535976" y="129032"/>
+                  </a:lnTo>
+                  <a:lnTo>
+                    <a:pt x="1535976" y="0"/>
+                  </a:lnTo>
+                  <a:close/>
+                </a:path>
+              </a:pathLst>
+            </a:custGeom>
+            <a:solidFill>
+              <a:srgbClr val="191959"/>
+            </a:solidFill>
+            <a:ln>
+              <a:noFill/>
+            </a:ln>
+          </p:spPr>
+          <p:txBody>
+            <a:bodyPr spcFirstLastPara="1" wrap="square" lIns="0" tIns="0" rIns="0" bIns="0" anchor="t" anchorCtr="0">
+              <a:noAutofit/>
+            </a:bodyPr>
+            <a:lstStyle/>
+            <a:p>
+              <a:pPr marL="0" lvl="0" indent="0" algn="l" rtl="0">
+                <a:spcBef>
+                  <a:spcPts val="0"/>
+                </a:spcBef>
+                <a:spcAft>
+                  <a:spcPts val="0"/>
+                </a:spcAft>
+                <a:buNone/>
+              </a:pPr>
+              <a:endParaRPr sz="1800"/>
+            </a:p>
+          </p:txBody>
+        </p:sp>
+        <p:sp>
+          <p:nvSpPr>
+            <p:cNvPr id="97" name="Google Shape;97;p9"/>
+            <p:cNvSpPr/>
+            <p:nvPr/>
+          </p:nvSpPr>
+          <p:spPr>
+            <a:xfrm>
+              <a:off x="1535976" y="3326968"/>
+              <a:ext cx="1536065" cy="129539"/>
+            </a:xfrm>
+            <a:custGeom>
+              <a:avLst/>
+              <a:gdLst/>
+              <a:ahLst/>
+              <a:cxnLst/>
+              <a:rect l="l" t="t" r="r" b="b"/>
+              <a:pathLst>
+                <a:path w="1536064" h="129539" extrusionOk="0">
+                  <a:moveTo>
+                    <a:pt x="1535976" y="0"/>
+                  </a:moveTo>
+                  <a:lnTo>
+                    <a:pt x="0" y="0"/>
+                  </a:lnTo>
+                  <a:lnTo>
+                    <a:pt x="0" y="129032"/>
+                  </a:lnTo>
+                  <a:lnTo>
+                    <a:pt x="1535976" y="129032"/>
+                  </a:lnTo>
+                  <a:lnTo>
+                    <a:pt x="1535976" y="0"/>
+                  </a:lnTo>
+                  <a:close/>
+                </a:path>
+              </a:pathLst>
+            </a:custGeom>
+            <a:solidFill>
+              <a:srgbClr val="262685"/>
+            </a:solidFill>
+            <a:ln>
+              <a:noFill/>
+            </a:ln>
+          </p:spPr>
+          <p:txBody>
+            <a:bodyPr spcFirstLastPara="1" wrap="square" lIns="0" tIns="0" rIns="0" bIns="0" anchor="t" anchorCtr="0">
+              <a:noAutofit/>
+            </a:bodyPr>
+            <a:lstStyle/>
+            <a:p>
+              <a:pPr marL="0" lvl="0" indent="0" algn="l" rtl="0">
+                <a:spcBef>
+                  <a:spcPts val="0"/>
+                </a:spcBef>
+                <a:spcAft>
+                  <a:spcPts val="0"/>
+                </a:spcAft>
+                <a:buNone/>
+              </a:pPr>
+              <a:endParaRPr sz="1800"/>
+            </a:p>
+          </p:txBody>
+        </p:sp>
+        <p:sp>
+          <p:nvSpPr>
+            <p:cNvPr id="98" name="Google Shape;98;p9"/>
+            <p:cNvSpPr/>
+            <p:nvPr/>
+          </p:nvSpPr>
+          <p:spPr>
+            <a:xfrm>
+              <a:off x="3071952" y="3326968"/>
+              <a:ext cx="1536065" cy="129539"/>
+            </a:xfrm>
+            <a:custGeom>
+              <a:avLst/>
+              <a:gdLst/>
+              <a:ahLst/>
+              <a:cxnLst/>
+              <a:rect l="l" t="t" r="r" b="b"/>
+              <a:pathLst>
+                <a:path w="1536064" h="129539" extrusionOk="0">
+                  <a:moveTo>
+                    <a:pt x="1535976" y="0"/>
+                  </a:moveTo>
+                  <a:lnTo>
+                    <a:pt x="0" y="0"/>
+                  </a:lnTo>
+                  <a:lnTo>
+                    <a:pt x="0" y="129032"/>
+                  </a:lnTo>
+                  <a:lnTo>
+                    <a:pt x="1535976" y="129032"/>
+                  </a:lnTo>
+                  <a:lnTo>
+                    <a:pt x="1535976" y="0"/>
+                  </a:lnTo>
+                  <a:close/>
+                </a:path>
+              </a:pathLst>
+            </a:custGeom>
+            <a:solidFill>
+              <a:srgbClr val="3333B2"/>
+            </a:solidFill>
+            <a:ln>
+              <a:noFill/>
+            </a:ln>
+          </p:spPr>
+          <p:txBody>
+            <a:bodyPr spcFirstLastPara="1" wrap="square" lIns="0" tIns="0" rIns="0" bIns="0" anchor="t" anchorCtr="0">
+              <a:noAutofit/>
+            </a:bodyPr>
+            <a:lstStyle/>
+            <a:p>
+              <a:pPr marL="0" lvl="0" indent="0" algn="l" rtl="0">
+                <a:spcBef>
+                  <a:spcPts val="0"/>
+                </a:spcBef>
+                <a:spcAft>
+                  <a:spcPts val="0"/>
+                </a:spcAft>
+                <a:buNone/>
+              </a:pPr>
+              <a:endParaRPr sz="1800"/>
+            </a:p>
+          </p:txBody>
+        </p:sp>
+      </p:grpSp>
+      <p:sp>
+        <p:nvSpPr>
+          <p:cNvPr id="99" name="Google Shape;99;p9"/>
+          <p:cNvSpPr txBox="1">
+            <a:spLocks noGrp="1"/>
+          </p:cNvSpPr>
+          <p:nvPr>
+            <p:ph type="ftr" idx="11"/>
+          </p:nvPr>
+        </p:nvSpPr>
+        <p:spPr>
+          <a:xfrm>
+            <a:off x="421944" y="3331252"/>
+            <a:ext cx="692150" cy="285961"/>
+          </a:xfrm>
+          <a:prstGeom prst="rect">
+            <a:avLst/>
+          </a:prstGeom>
+          <a:noFill/>
+          <a:ln>
+            <a:noFill/>
+          </a:ln>
+        </p:spPr>
+        <p:txBody>
+          <a:bodyPr spcFirstLastPara="1" wrap="square" lIns="0" tIns="8875" rIns="0" bIns="0" anchor="t" anchorCtr="0">
+            <a:spAutoFit/>
+          </a:bodyPr>
+          <a:lstStyle/>
+          <a:p>
+            <a:pPr marL="12700"/>
+            <a:r>
+              <a:rPr lang="en-US" dirty="0">
+                <a:latin typeface="Times New Roman" panose="02020603050405020304" pitchFamily="18" charset="0"/>
+                <a:cs typeface="Times New Roman" panose="02020603050405020304" pitchFamily="18" charset="0"/>
+              </a:rPr>
+              <a:t>Dept of Comp </a:t>
+            </a:r>
+            <a:r>
+              <a:rPr lang="en-US" dirty="0" err="1">
+                <a:latin typeface="Times New Roman" panose="02020603050405020304" pitchFamily="18" charset="0"/>
+                <a:cs typeface="Times New Roman" panose="02020603050405020304" pitchFamily="18" charset="0"/>
+              </a:rPr>
+              <a:t>Engg</a:t>
+            </a:r>
+            <a:endParaRPr lang="en-US" dirty="0">
+              <a:latin typeface="Times New Roman" panose="02020603050405020304" pitchFamily="18" charset="0"/>
+              <a:cs typeface="Times New Roman" panose="02020603050405020304" pitchFamily="18" charset="0"/>
+            </a:endParaRPr>
+          </a:p>
+          <a:p>
+            <a:pPr marL="12700" lvl="0"/>
+            <a:endParaRPr lang="en-US" dirty="0"/>
+          </a:p>
+          <a:p>
+            <a:pPr marL="12700" lvl="0" indent="0" algn="l" rtl="0">
+              <a:lnSpc>
+                <a:spcPct val="100000"/>
+              </a:lnSpc>
+              <a:spcBef>
+                <a:spcPts val="0"/>
+              </a:spcBef>
+              <a:spcAft>
+                <a:spcPts val="0"/>
+              </a:spcAft>
+              <a:buNone/>
+            </a:pPr>
+            <a:endParaRPr dirty="0"/>
+          </a:p>
+        </p:txBody>
+      </p:sp>
+      <p:sp>
+        <p:nvSpPr>
+          <p:cNvPr id="102" name="Google Shape;102;p9"/>
+          <p:cNvSpPr txBox="1">
+            <a:spLocks noGrp="1"/>
+          </p:cNvSpPr>
+          <p:nvPr>
+            <p:ph type="sldNum" idx="12"/>
+          </p:nvPr>
+        </p:nvSpPr>
+        <p:spPr>
+          <a:xfrm>
+            <a:off x="4275161" y="3331252"/>
+            <a:ext cx="266700" cy="101295"/>
+          </a:xfrm>
+          <a:prstGeom prst="rect">
+            <a:avLst/>
+          </a:prstGeom>
+          <a:noFill/>
+          <a:ln>
+            <a:noFill/>
+          </a:ln>
+        </p:spPr>
+        <p:txBody>
+          <a:bodyPr spcFirstLastPara="1" wrap="square" lIns="0" tIns="8875" rIns="0" bIns="0" anchor="t" anchorCtr="0">
+            <a:spAutoFit/>
+          </a:bodyPr>
+          <a:lstStyle/>
+          <a:p>
+            <a:pPr marL="38100" lvl="0" indent="0" algn="l" rtl="0">
+              <a:lnSpc>
+                <a:spcPct val="100000"/>
+              </a:lnSpc>
+              <a:spcBef>
+                <a:spcPts val="0"/>
+              </a:spcBef>
+              <a:spcAft>
+                <a:spcPts val="0"/>
+              </a:spcAft>
+              <a:buNone/>
+            </a:pPr>
+            <a:fld id="{00000000-1234-1234-1234-123412341234}" type="slidenum">
+              <a:rPr lang="en-US">
+                <a:latin typeface="Times New Roman" panose="02020603050405020304" pitchFamily="18" charset="0"/>
+                <a:cs typeface="Times New Roman" panose="02020603050405020304" pitchFamily="18" charset="0"/>
+              </a:rPr>
+              <a:t>30</a:t>
+            </a:fld>
+            <a:r>
+              <a:rPr lang="en-US" dirty="0">
+                <a:latin typeface="Times New Roman" panose="02020603050405020304" pitchFamily="18" charset="0"/>
+                <a:cs typeface="Times New Roman" panose="02020603050405020304" pitchFamily="18" charset="0"/>
+              </a:rPr>
+              <a:t> / 33</a:t>
+            </a:r>
+            <a:endParaRPr dirty="0">
+              <a:latin typeface="Times New Roman" panose="02020603050405020304" pitchFamily="18" charset="0"/>
+              <a:cs typeface="Times New Roman" panose="02020603050405020304" pitchFamily="18" charset="0"/>
+            </a:endParaRPr>
+          </a:p>
+        </p:txBody>
+      </p:sp>
+      <p:sp>
+        <p:nvSpPr>
+          <p:cNvPr id="103" name="Google Shape;103;p9"/>
+          <p:cNvSpPr txBox="1"/>
+          <p:nvPr/>
+        </p:nvSpPr>
+        <p:spPr>
+          <a:xfrm>
+            <a:off x="91440" y="246888"/>
+            <a:ext cx="4425696" cy="3017520"/>
+          </a:xfrm>
+          <a:prstGeom prst="rect">
+            <a:avLst/>
+          </a:prstGeom>
+          <a:noFill/>
+          <a:ln>
+            <a:noFill/>
+          </a:ln>
+        </p:spPr>
+        <p:txBody>
+          <a:bodyPr spcFirstLastPara="1" wrap="square" lIns="91425" tIns="91425" rIns="91425" bIns="91425" anchor="t" anchorCtr="0">
+            <a:noAutofit/>
+          </a:bodyPr>
+          <a:lstStyle/>
+          <a:p>
+            <a:pPr marL="171450" lvl="1" indent="-171450" algn="l">
+              <a:buFont typeface="Arial" panose="020B0604020202020204" pitchFamily="34" charset="0"/>
+              <a:buChar char="•"/>
+            </a:pPr>
+            <a:r>
+              <a:rPr lang="en-US" sz="950" b="1" dirty="0">
+                <a:latin typeface="Times New Roman" panose="02020603050405020304" pitchFamily="18" charset="0"/>
+                <a:cs typeface="Times New Roman" panose="02020603050405020304" pitchFamily="18" charset="0"/>
+              </a:rPr>
+              <a:t>We do NOT claim inventing selection-triggered AI</a:t>
+            </a:r>
+            <a:r>
+              <a:rPr lang="en-US" sz="950" b="0" dirty="0">
+                <a:latin typeface="Times New Roman" panose="02020603050405020304" pitchFamily="18" charset="0"/>
+                <a:cs typeface="Times New Roman" panose="02020603050405020304" pitchFamily="18" charset="0"/>
+              </a:rPr>
+              <a:t> - Highlight and Click to Do exist.</a:t>
+            </a:r>
+          </a:p>
+          <a:p>
+            <a:pPr marL="171450" lvl="1" indent="-171450" algn="l">
+              <a:buFont typeface="Arial" panose="020B0604020202020204" pitchFamily="34" charset="0"/>
+              <a:buChar char="•"/>
+            </a:pPr>
+            <a:r>
+              <a:rPr lang="en-US" sz="950" b="1" dirty="0">
+                <a:latin typeface="Times New Roman" panose="02020603050405020304" pitchFamily="18" charset="0"/>
+                <a:cs typeface="Times New Roman" panose="02020603050405020304" pitchFamily="18" charset="0"/>
+              </a:rPr>
+              <a:t>We do NOT claim inventing agent memory</a:t>
+            </a:r>
+            <a:r>
+              <a:rPr lang="en-US" sz="950" b="0" dirty="0">
+                <a:latin typeface="Times New Roman" panose="02020603050405020304" pitchFamily="18" charset="0"/>
+                <a:cs typeface="Times New Roman" panose="02020603050405020304" pitchFamily="18" charset="0"/>
+              </a:rPr>
+              <a:t> - Mem0, Zep and Letta are mature.</a:t>
+            </a:r>
+          </a:p>
+          <a:p>
+            <a:pPr marL="171450" lvl="1" indent="-171450" algn="l">
+              <a:buFont typeface="Arial" panose="020B0604020202020204" pitchFamily="34" charset="0"/>
+              <a:buChar char="•"/>
+            </a:pPr>
+            <a:r>
+              <a:rPr lang="en-US" sz="950" b="1" dirty="0">
+                <a:latin typeface="Times New Roman" panose="02020603050405020304" pitchFamily="18" charset="0"/>
+                <a:cs typeface="Times New Roman" panose="02020603050405020304" pitchFamily="18" charset="0"/>
+              </a:rPr>
+              <a:t>We do NOT claim inventing memory gating</a:t>
+            </a:r>
+            <a:r>
+              <a:rPr lang="en-US" sz="950" b="0" dirty="0">
+                <a:latin typeface="Times New Roman" panose="02020603050405020304" pitchFamily="18" charset="0"/>
+                <a:cs typeface="Times New Roman" panose="02020603050405020304" pitchFamily="18" charset="0"/>
+              </a:rPr>
+              <a:t> - MemGate does exactly this, with a learned gate.</a:t>
+            </a:r>
+          </a:p>
+          <a:p>
+            <a:pPr marL="171450" lvl="1" indent="-171450" algn="l">
+              <a:buFont typeface="Arial" panose="020B0604020202020204" pitchFamily="34" charset="0"/>
+              <a:buChar char="•"/>
+            </a:pPr>
+            <a:r>
+              <a:rPr lang="en-US" sz="950" b="1" dirty="0">
+                <a:latin typeface="Times New Roman" panose="02020603050405020304" pitchFamily="18" charset="0"/>
+                <a:cs typeface="Times New Roman" panose="02020603050405020304" pitchFamily="18" charset="0"/>
+              </a:rPr>
+              <a:t>We do NOT claim inventing an OS-level personal index</a:t>
+            </a:r>
+            <a:r>
+              <a:rPr lang="en-US" sz="950" b="0" dirty="0">
+                <a:latin typeface="Times New Roman" panose="02020603050405020304" pitchFamily="18" charset="0"/>
+                <a:cs typeface="Times New Roman" panose="02020603050405020304" pitchFamily="18" charset="0"/>
+              </a:rPr>
+              <a:t> - Microsoft's Windows Semantic Index.</a:t>
+            </a:r>
+          </a:p>
+          <a:p>
+            <a:pPr marL="171450" lvl="1" indent="-171450" algn="l">
+              <a:buFont typeface="Arial" panose="020B0604020202020204" pitchFamily="34" charset="0"/>
+              <a:buChar char="•"/>
+            </a:pPr>
+            <a:r>
+              <a:rPr lang="en-US" sz="950" b="1" dirty="0">
+                <a:latin typeface="Times New Roman" panose="02020603050405020304" pitchFamily="18" charset="0"/>
+                <a:cs typeface="Times New Roman" panose="02020603050405020304" pitchFamily="18" charset="0"/>
+              </a:rPr>
+              <a:t>C1 - budget-aware assembly across heterogeneous models.</a:t>
+            </a:r>
+            <a:r>
+              <a:rPr lang="en-US" sz="950" b="0" dirty="0">
+                <a:latin typeface="Times New Roman" panose="02020603050405020304" pitchFamily="18" charset="0"/>
+                <a:cs typeface="Times New Roman" panose="02020603050405020304" pitchFamily="18" charset="0"/>
+              </a:rPr>
+              <a:t> One memory layer serving a 4B local model and a frontier API, with an ablation at three model sizes. Named as an open coordination problem by the 2026 externalization survey.</a:t>
+            </a:r>
+          </a:p>
+          <a:p>
+            <a:pPr marL="171450" lvl="1" indent="-171450" algn="l">
+              <a:buFont typeface="Arial" panose="020B0604020202020204" pitchFamily="34" charset="0"/>
+              <a:buChar char="•"/>
+            </a:pPr>
+            <a:r>
+              <a:rPr lang="en-US" sz="950" b="1" dirty="0">
+                <a:latin typeface="Times New Roman" panose="02020603050405020304" pitchFamily="18" charset="0"/>
+                <a:cs typeface="Times New Roman" panose="02020603050405020304" pitchFamily="18" charset="0"/>
+              </a:rPr>
+              <a:t>C2 - declarative, auditable admission on a user-owned type system</a:t>
+            </a:r>
+            <a:r>
+              <a:rPr lang="en-US" sz="950" b="0" dirty="0">
+                <a:latin typeface="Times New Roman" panose="02020603050405020304" pitchFamily="18" charset="0"/>
+                <a:cs typeface="Times New Roman" panose="02020603050405020304" pitchFamily="18" charset="0"/>
+              </a:rPr>
+              <a:t> that also drives privacy routing. One primitive doing two jobs.</a:t>
+            </a:r>
+          </a:p>
+          <a:p>
+            <a:pPr marL="171450" lvl="1" indent="-171450" algn="l">
+              <a:buFont typeface="Arial" panose="020B0604020202020204" pitchFamily="34" charset="0"/>
+              <a:buChar char="•"/>
+            </a:pPr>
+            <a:r>
+              <a:rPr lang="en-US" sz="950" b="1" dirty="0">
+                <a:latin typeface="Times New Roman" panose="02020603050405020304" pitchFamily="18" charset="0"/>
+                <a:cs typeface="Times New Roman" panose="02020603050405020304" pitchFamily="18" charset="0"/>
+              </a:rPr>
+              <a:t>C3 - import from official platform exports</a:t>
+            </a:r>
+            <a:r>
+              <a:rPr lang="en-US" sz="950" b="0" dirty="0">
+                <a:latin typeface="Times New Roman" panose="02020603050405020304" pitchFamily="18" charset="0"/>
+                <a:cs typeface="Times New Roman" panose="02020603050405020304" pitchFamily="18" charset="0"/>
+              </a:rPr>
+              <a:t> - the only ToS-legitimate cross-vendor bridge.</a:t>
+            </a:r>
+          </a:p>
+          <a:p>
+            <a:pPr marL="171450" lvl="1" indent="-171450" algn="l">
+              <a:buFont typeface="Arial" panose="020B0604020202020204" pitchFamily="34" charset="0"/>
+              <a:buChar char="•"/>
+            </a:pPr>
+            <a:r>
+              <a:rPr lang="en-US" sz="950" b="1" dirty="0">
+                <a:latin typeface="Times New Roman" panose="02020603050405020304" pitchFamily="18" charset="0"/>
+                <a:cs typeface="Times New Roman" panose="02020603050405020304" pitchFamily="18" charset="0"/>
+              </a:rPr>
+              <a:t>C4 - the first open-source, model-agnostic, OS-integrated personal assistant</a:t>
+            </a:r>
+            <a:r>
+              <a:rPr lang="en-US" sz="950" b="0" dirty="0">
+                <a:latin typeface="Times New Roman" panose="02020603050405020304" pitchFamily="18" charset="0"/>
+                <a:cs typeface="Times New Roman" panose="02020603050405020304" pitchFamily="18" charset="0"/>
+              </a:rPr>
+              <a:t> that runs fully local on ordinary Windows Home hardware.</a:t>
+            </a:r>
+          </a:p>
+        </p:txBody>
+      </p:sp>
+      <p:sp>
+        <p:nvSpPr>
+          <p:cNvPr id="8" name="Google Shape;85;p8">
+            <a:extLst>
+              <a:ext uri="{FF2B5EF4-FFF2-40B4-BE49-F238E27FC236}">
+                <a16:creationId xmlns:a16="http://schemas.microsoft.com/office/drawing/2014/main" id="{B445AC1F-8D42-9224-714E-741A4A81DCCA}"/>
+              </a:ext>
+            </a:extLst>
+          </p:cNvPr>
+          <p:cNvSpPr txBox="1"/>
+          <p:nvPr/>
+        </p:nvSpPr>
+        <p:spPr>
+          <a:xfrm>
+            <a:off x="1773059" y="3331250"/>
+            <a:ext cx="1211100" cy="101295"/>
+          </a:xfrm>
+          <a:prstGeom prst="rect">
+            <a:avLst/>
+          </a:prstGeom>
+          <a:noFill/>
+          <a:ln>
+            <a:noFill/>
+          </a:ln>
+        </p:spPr>
+        <p:txBody>
+          <a:bodyPr spcFirstLastPara="1" wrap="square" lIns="0" tIns="8875" rIns="0" bIns="0" anchor="t" anchorCtr="0">
+            <a:spAutoFit/>
+          </a:bodyPr>
+          <a:lstStyle/>
+          <a:p>
+            <a:pPr marL="12700" lvl="0"/>
+            <a:endParaRPr lang="en-US" sz="600" dirty="0">
+              <a:latin typeface="Times New Roman" panose="02020603050405020304" pitchFamily="18" charset="0"/>
+              <a:cs typeface="Times New Roman" panose="02020603050405020304" pitchFamily="18" charset="0"/>
+            </a:endParaRPr>
+            <a:r>
+              <a:rPr lang="en-US" sz="600" dirty="0" b="0">
+                <a:solidFill>
+                  <a:srgbClr val="FFFFFF"/>
+                </a:solidFill>
+                <a:latin typeface="Times New Roman" panose="02020603050405020304" pitchFamily="18" charset="0"/>
+                <a:cs typeface="Times New Roman" panose="02020603050405020304" pitchFamily="18" charset="0"/>
+              </a:rPr>
+              <a:t>PERCH</a:t>
+            </a:r>
+          </a:p>
+        </p:txBody>
+      </p:sp>
+      <p:sp>
+        <p:nvSpPr>
+          <p:cNvPr id="9" name="Google Shape;72;p7">
+            <a:extLst>
+              <a:ext uri="{FF2B5EF4-FFF2-40B4-BE49-F238E27FC236}">
+                <a16:creationId xmlns:a16="http://schemas.microsoft.com/office/drawing/2014/main" id="{AD0AEF20-4852-6A69-5088-EB2B0F643C44}"/>
+              </a:ext>
+            </a:extLst>
+          </p:cNvPr>
+          <p:cNvSpPr txBox="1">
+            <a:spLocks noGrp="1"/>
+          </p:cNvSpPr>
+          <p:nvPr>
+            <p:ph type="dt" idx="10"/>
+          </p:nvPr>
+        </p:nvSpPr>
+        <p:spPr>
+          <a:xfrm>
+            <a:off x="3442063" y="3331251"/>
+            <a:ext cx="746093" cy="101295"/>
+          </a:xfrm>
+          <a:prstGeom prst="rect">
+            <a:avLst/>
+          </a:prstGeom>
+          <a:noFill/>
+          <a:ln>
+            <a:noFill/>
+          </a:ln>
+        </p:spPr>
+        <p:txBody>
+          <a:bodyPr spcFirstLastPara="1" wrap="square" lIns="0" tIns="8875" rIns="0" bIns="0" anchor="t" anchorCtr="0">
+            <a:spAutoFit/>
+          </a:bodyPr>
+          <a:lstStyle/>
+          <a:p>
+            <a:pPr marL="12700" lvl="0" indent="0" algn="l" rtl="0">
+              <a:lnSpc>
+                <a:spcPct val="100000"/>
+              </a:lnSpc>
+              <a:spcBef>
+                <a:spcPts val="0"/>
+              </a:spcBef>
+              <a:spcAft>
+                <a:spcPts val="0"/>
+              </a:spcAft>
+              <a:buNone/>
+            </a:pPr>
+            <a:r>
+              <a:rPr lang="en-US" dirty="0">
+                <a:latin typeface="Times New Roman" panose="02020603050405020304" pitchFamily="18" charset="0"/>
+                <a:cs typeface="Times New Roman" panose="02020603050405020304" pitchFamily="18" charset="0"/>
+              </a:rPr>
+              <a:t>August-2026</a:t>
+            </a:r>
+            <a:endParaRPr dirty="0">
+              <a:latin typeface="Times New Roman" panose="02020603050405020304" pitchFamily="18" charset="0"/>
+              <a:cs typeface="Times New Roman" panose="02020603050405020304" pitchFamily="18" charset="0"/>
+            </a:endParaRPr>
+          </a:p>
+        </p:txBody>
+      </p:sp>
+    </p:spTree>
+  </p:cSld>
+  <p:clrMapOvr>
+    <a:masterClrMapping/>
+  </p:clrMapOvr>
+</p:sld>
+</file>
+
+<file path=ppt/slides/slide31.xml><?xml version="1.0" encoding="utf-8"?>
+<p:sld xmlns:a="http://schemas.openxmlformats.org/drawingml/2006/main" xmlns:p="http://schemas.openxmlformats.org/presentationml/2006/main" xmlns:r="http://schemas.openxmlformats.org/officeDocument/2006/relationships">
+  <p:cSld>
+    <p:spTree>
+      <p:nvGrpSpPr>
+        <p:cNvPr id="1" name=""/>
+        <p:cNvGrpSpPr/>
+        <p:nvPr/>
+      </p:nvGrpSpPr>
+      <p:grpSpPr/>
+      <p:sp>
+        <p:nvSpPr>
+          <p:cNvPr id="93" name="Google Shape;93;p9"/>
+          <p:cNvSpPr/>
+          <p:nvPr/>
+        </p:nvSpPr>
+        <p:spPr>
+          <a:xfrm>
+            <a:off x="1905" y="0"/>
+            <a:ext cx="4608195" cy="321945"/>
+          </a:xfrm>
+          <a:custGeom>
+            <a:avLst/>
+            <a:gdLst/>
+            <a:ahLst/>
+            <a:cxnLst/>
+            <a:rect l="l" t="t" r="r" b="b"/>
+            <a:pathLst>
+              <a:path w="4608195" h="321945" extrusionOk="0">
+                <a:moveTo>
+                  <a:pt x="4608004" y="0"/>
+                </a:moveTo>
+                <a:lnTo>
+                  <a:pt x="0" y="0"/>
+                </a:lnTo>
+                <a:lnTo>
+                  <a:pt x="0" y="321500"/>
+                </a:lnTo>
+                <a:lnTo>
+                  <a:pt x="4608004" y="321500"/>
+                </a:lnTo>
+                <a:lnTo>
+                  <a:pt x="4608004" y="0"/>
+                </a:lnTo>
+                <a:close/>
+              </a:path>
+            </a:pathLst>
+          </a:custGeom>
+          <a:solidFill>
+            <a:srgbClr val="3333B2"/>
+          </a:solidFill>
+          <a:ln>
+            <a:noFill/>
+          </a:ln>
+        </p:spPr>
+        <p:txBody>
+          <a:bodyPr spcFirstLastPara="1" wrap="square" lIns="0" tIns="0" rIns="0" bIns="0" anchor="t" anchorCtr="0">
+            <a:noAutofit/>
+          </a:bodyPr>
+          <a:lstStyle/>
+          <a:p>
+            <a:pPr marL="0" lvl="0" indent="0" algn="l" rtl="0">
+              <a:spcBef>
+                <a:spcPts val="0"/>
+              </a:spcBef>
+              <a:spcAft>
+                <a:spcPts val="0"/>
+              </a:spcAft>
+              <a:buNone/>
+            </a:pPr>
+            <a:endParaRPr sz="1800"/>
+          </a:p>
+        </p:txBody>
+      </p:sp>
+      <p:sp>
+        <p:nvSpPr>
+          <p:cNvPr id="94" name="Google Shape;94;p9"/>
+          <p:cNvSpPr txBox="1"/>
+          <p:nvPr/>
+        </p:nvSpPr>
+        <p:spPr>
+          <a:xfrm>
+            <a:off x="95300" y="45565"/>
+            <a:ext cx="4297680" cy="232736"/>
+          </a:xfrm>
+          <a:prstGeom prst="rect">
+            <a:avLst/>
+          </a:prstGeom>
+          <a:noFill/>
+          <a:ln>
+            <a:noFill/>
+          </a:ln>
+        </p:spPr>
+        <p:txBody>
+          <a:bodyPr spcFirstLastPara="1" wrap="square" lIns="0" tIns="17125" rIns="0" bIns="0" anchor="t" anchorCtr="0">
+            <a:spAutoFit/>
+          </a:bodyPr>
+          <a:lstStyle/>
+          <a:p>
+            <a:pPr marL="12700" lvl="0" indent="0" algn="l" rtl="0">
+              <a:lnSpc>
+                <a:spcPct val="100000"/>
+              </a:lnSpc>
+              <a:spcBef>
+                <a:spcPts val="0"/>
+              </a:spcBef>
+              <a:spcAft>
+                <a:spcPts val="0"/>
+              </a:spcAft>
+              <a:buNone/>
+            </a:pPr>
+            <a:endParaRPr sz="1400" dirty="0">
+              <a:latin typeface="Times New Roman" panose="02020603050405020304" pitchFamily="18" charset="0"/>
+              <a:cs typeface="Times New Roman" panose="02020603050405020304" pitchFamily="18" charset="0"/>
+              <a:sym typeface="Arial"/>
+            </a:endParaRPr>
+            <a:r>
+              <a:rPr lang="en-US" sz="1400" dirty="0" b="0">
+                <a:solidFill>
+                  <a:srgbClr val="FFFFFF"/>
+                </a:solidFill>
+                <a:latin typeface="Times New Roman" panose="02020603050405020304" pitchFamily="18" charset="0"/>
+                <a:cs typeface="Times New Roman" panose="02020603050405020304" pitchFamily="18" charset="0"/>
+                <a:sym typeface="Arial"/>
+              </a:rPr>
+              <a:t>Expected Results and Honest Limitations</a:t>
+            </a:r>
+          </a:p>
+        </p:txBody>
+      </p:sp>
+      <p:grpSp>
+        <p:nvGrpSpPr>
+          <p:cNvPr id="95" name="Google Shape;95;p9"/>
+          <p:cNvGrpSpPr/>
+          <p:nvPr/>
+        </p:nvGrpSpPr>
+        <p:grpSpPr>
+          <a:xfrm>
+            <a:off x="0" y="3326968"/>
+            <a:ext cx="4608017" cy="129539"/>
+            <a:chOff x="0" y="3326968"/>
+            <a:chExt cx="4608017" cy="129539"/>
+          </a:xfrm>
+        </p:grpSpPr>
+        <p:sp>
+          <p:nvSpPr>
+            <p:cNvPr id="96" name="Google Shape;96;p9"/>
+            <p:cNvSpPr/>
+            <p:nvPr/>
+          </p:nvSpPr>
+          <p:spPr>
+            <a:xfrm>
+              <a:off x="0" y="3326968"/>
+              <a:ext cx="1536065" cy="129539"/>
+            </a:xfrm>
+            <a:custGeom>
+              <a:avLst/>
+              <a:gdLst/>
+              <a:ahLst/>
+              <a:cxnLst/>
+              <a:rect l="l" t="t" r="r" b="b"/>
+              <a:pathLst>
+                <a:path w="1536065" h="129539" extrusionOk="0">
+                  <a:moveTo>
+                    <a:pt x="1535976" y="0"/>
+                  </a:moveTo>
+                  <a:lnTo>
+                    <a:pt x="0" y="0"/>
+                  </a:lnTo>
+                  <a:lnTo>
+                    <a:pt x="0" y="129032"/>
+                  </a:lnTo>
+                  <a:lnTo>
+                    <a:pt x="1535976" y="129032"/>
+                  </a:lnTo>
+                  <a:lnTo>
+                    <a:pt x="1535976" y="0"/>
+                  </a:lnTo>
+                  <a:close/>
+                </a:path>
+              </a:pathLst>
+            </a:custGeom>
+            <a:solidFill>
+              <a:srgbClr val="191959"/>
+            </a:solidFill>
+            <a:ln>
+              <a:noFill/>
+            </a:ln>
+          </p:spPr>
+          <p:txBody>
+            <a:bodyPr spcFirstLastPara="1" wrap="square" lIns="0" tIns="0" rIns="0" bIns="0" anchor="t" anchorCtr="0">
+              <a:noAutofit/>
+            </a:bodyPr>
+            <a:lstStyle/>
+            <a:p>
+              <a:pPr marL="0" lvl="0" indent="0" algn="l" rtl="0">
+                <a:spcBef>
+                  <a:spcPts val="0"/>
+                </a:spcBef>
+                <a:spcAft>
+                  <a:spcPts val="0"/>
+                </a:spcAft>
+                <a:buNone/>
+              </a:pPr>
+              <a:endParaRPr sz="1800"/>
+            </a:p>
+          </p:txBody>
+        </p:sp>
+        <p:sp>
+          <p:nvSpPr>
+            <p:cNvPr id="97" name="Google Shape;97;p9"/>
+            <p:cNvSpPr/>
+            <p:nvPr/>
+          </p:nvSpPr>
+          <p:spPr>
+            <a:xfrm>
+              <a:off x="1535976" y="3326968"/>
+              <a:ext cx="1536065" cy="129539"/>
+            </a:xfrm>
+            <a:custGeom>
+              <a:avLst/>
+              <a:gdLst/>
+              <a:ahLst/>
+              <a:cxnLst/>
+              <a:rect l="l" t="t" r="r" b="b"/>
+              <a:pathLst>
+                <a:path w="1536064" h="129539" extrusionOk="0">
+                  <a:moveTo>
+                    <a:pt x="1535976" y="0"/>
+                  </a:moveTo>
+                  <a:lnTo>
+                    <a:pt x="0" y="0"/>
+                  </a:lnTo>
+                  <a:lnTo>
+                    <a:pt x="0" y="129032"/>
+                  </a:lnTo>
+                  <a:lnTo>
+                    <a:pt x="1535976" y="129032"/>
+                  </a:lnTo>
+                  <a:lnTo>
+                    <a:pt x="1535976" y="0"/>
+                  </a:lnTo>
+                  <a:close/>
+                </a:path>
+              </a:pathLst>
+            </a:custGeom>
+            <a:solidFill>
+              <a:srgbClr val="262685"/>
+            </a:solidFill>
+            <a:ln>
+              <a:noFill/>
+            </a:ln>
+          </p:spPr>
+          <p:txBody>
+            <a:bodyPr spcFirstLastPara="1" wrap="square" lIns="0" tIns="0" rIns="0" bIns="0" anchor="t" anchorCtr="0">
+              <a:noAutofit/>
+            </a:bodyPr>
+            <a:lstStyle/>
+            <a:p>
+              <a:pPr marL="0" lvl="0" indent="0" algn="l" rtl="0">
+                <a:spcBef>
+                  <a:spcPts val="0"/>
+                </a:spcBef>
+                <a:spcAft>
+                  <a:spcPts val="0"/>
+                </a:spcAft>
+                <a:buNone/>
+              </a:pPr>
+              <a:endParaRPr sz="1800"/>
+            </a:p>
+          </p:txBody>
+        </p:sp>
+        <p:sp>
+          <p:nvSpPr>
+            <p:cNvPr id="98" name="Google Shape;98;p9"/>
+            <p:cNvSpPr/>
+            <p:nvPr/>
+          </p:nvSpPr>
+          <p:spPr>
+            <a:xfrm>
+              <a:off x="3071952" y="3326968"/>
+              <a:ext cx="1536065" cy="129539"/>
+            </a:xfrm>
+            <a:custGeom>
+              <a:avLst/>
+              <a:gdLst/>
+              <a:ahLst/>
+              <a:cxnLst/>
+              <a:rect l="l" t="t" r="r" b="b"/>
+              <a:pathLst>
+                <a:path w="1536064" h="129539" extrusionOk="0">
+                  <a:moveTo>
+                    <a:pt x="1535976" y="0"/>
+                  </a:moveTo>
+                  <a:lnTo>
+                    <a:pt x="0" y="0"/>
+                  </a:lnTo>
+                  <a:lnTo>
+                    <a:pt x="0" y="129032"/>
+                  </a:lnTo>
+                  <a:lnTo>
+                    <a:pt x="1535976" y="129032"/>
+                  </a:lnTo>
+                  <a:lnTo>
+                    <a:pt x="1535976" y="0"/>
+                  </a:lnTo>
+                  <a:close/>
+                </a:path>
+              </a:pathLst>
+            </a:custGeom>
+            <a:solidFill>
+              <a:srgbClr val="3333B2"/>
+            </a:solidFill>
+            <a:ln>
+              <a:noFill/>
+            </a:ln>
+          </p:spPr>
+          <p:txBody>
+            <a:bodyPr spcFirstLastPara="1" wrap="square" lIns="0" tIns="0" rIns="0" bIns="0" anchor="t" anchorCtr="0">
+              <a:noAutofit/>
+            </a:bodyPr>
+            <a:lstStyle/>
+            <a:p>
+              <a:pPr marL="0" lvl="0" indent="0" algn="l" rtl="0">
+                <a:spcBef>
+                  <a:spcPts val="0"/>
+                </a:spcBef>
+                <a:spcAft>
+                  <a:spcPts val="0"/>
+                </a:spcAft>
+                <a:buNone/>
+              </a:pPr>
+              <a:endParaRPr sz="1800"/>
+            </a:p>
+          </p:txBody>
+        </p:sp>
+      </p:grpSp>
+      <p:sp>
+        <p:nvSpPr>
+          <p:cNvPr id="99" name="Google Shape;99;p9"/>
+          <p:cNvSpPr txBox="1">
+            <a:spLocks noGrp="1"/>
+          </p:cNvSpPr>
+          <p:nvPr>
+            <p:ph type="ftr" idx="11"/>
+          </p:nvPr>
+        </p:nvSpPr>
+        <p:spPr>
+          <a:xfrm>
+            <a:off x="421944" y="3331252"/>
+            <a:ext cx="692150" cy="285961"/>
+          </a:xfrm>
+          <a:prstGeom prst="rect">
+            <a:avLst/>
+          </a:prstGeom>
+          <a:noFill/>
+          <a:ln>
+            <a:noFill/>
+          </a:ln>
+        </p:spPr>
+        <p:txBody>
+          <a:bodyPr spcFirstLastPara="1" wrap="square" lIns="0" tIns="8875" rIns="0" bIns="0" anchor="t" anchorCtr="0">
+            <a:spAutoFit/>
+          </a:bodyPr>
+          <a:lstStyle/>
+          <a:p>
+            <a:pPr marL="12700"/>
+            <a:r>
+              <a:rPr lang="en-US" dirty="0">
+                <a:latin typeface="Times New Roman" panose="02020603050405020304" pitchFamily="18" charset="0"/>
+                <a:cs typeface="Times New Roman" panose="02020603050405020304" pitchFamily="18" charset="0"/>
+              </a:rPr>
+              <a:t>Dept of Comp </a:t>
+            </a:r>
+            <a:r>
+              <a:rPr lang="en-US" dirty="0" err="1">
+                <a:latin typeface="Times New Roman" panose="02020603050405020304" pitchFamily="18" charset="0"/>
+                <a:cs typeface="Times New Roman" panose="02020603050405020304" pitchFamily="18" charset="0"/>
+              </a:rPr>
+              <a:t>Engg</a:t>
+            </a:r>
+            <a:endParaRPr lang="en-US" dirty="0">
+              <a:latin typeface="Times New Roman" panose="02020603050405020304" pitchFamily="18" charset="0"/>
+              <a:cs typeface="Times New Roman" panose="02020603050405020304" pitchFamily="18" charset="0"/>
+            </a:endParaRPr>
+          </a:p>
+          <a:p>
+            <a:pPr marL="12700" lvl="0"/>
+            <a:endParaRPr lang="en-US" dirty="0"/>
+          </a:p>
+          <a:p>
+            <a:pPr marL="12700" lvl="0" indent="0" algn="l" rtl="0">
+              <a:lnSpc>
+                <a:spcPct val="100000"/>
+              </a:lnSpc>
+              <a:spcBef>
+                <a:spcPts val="0"/>
+              </a:spcBef>
+              <a:spcAft>
+                <a:spcPts val="0"/>
+              </a:spcAft>
+              <a:buNone/>
+            </a:pPr>
+            <a:endParaRPr dirty="0"/>
+          </a:p>
+        </p:txBody>
+      </p:sp>
+      <p:sp>
+        <p:nvSpPr>
+          <p:cNvPr id="102" name="Google Shape;102;p9"/>
+          <p:cNvSpPr txBox="1">
+            <a:spLocks noGrp="1"/>
+          </p:cNvSpPr>
+          <p:nvPr>
+            <p:ph type="sldNum" idx="12"/>
+          </p:nvPr>
+        </p:nvSpPr>
+        <p:spPr>
+          <a:xfrm>
+            <a:off x="4275161" y="3331252"/>
+            <a:ext cx="266700" cy="101295"/>
+          </a:xfrm>
+          <a:prstGeom prst="rect">
+            <a:avLst/>
+          </a:prstGeom>
+          <a:noFill/>
+          <a:ln>
+            <a:noFill/>
+          </a:ln>
+        </p:spPr>
+        <p:txBody>
+          <a:bodyPr spcFirstLastPara="1" wrap="square" lIns="0" tIns="8875" rIns="0" bIns="0" anchor="t" anchorCtr="0">
+            <a:spAutoFit/>
+          </a:bodyPr>
+          <a:lstStyle/>
+          <a:p>
+            <a:pPr marL="38100" lvl="0" indent="0" algn="l" rtl="0">
+              <a:lnSpc>
+                <a:spcPct val="100000"/>
+              </a:lnSpc>
+              <a:spcBef>
+                <a:spcPts val="0"/>
+              </a:spcBef>
+              <a:spcAft>
+                <a:spcPts val="0"/>
+              </a:spcAft>
+              <a:buNone/>
+            </a:pPr>
+            <a:fld id="{00000000-1234-1234-1234-123412341234}" type="slidenum">
+              <a:rPr lang="en-US">
+                <a:latin typeface="Times New Roman" panose="02020603050405020304" pitchFamily="18" charset="0"/>
+                <a:cs typeface="Times New Roman" panose="02020603050405020304" pitchFamily="18" charset="0"/>
+              </a:rPr>
+              <a:t>31</a:t>
+            </a:fld>
+            <a:r>
+              <a:rPr lang="en-US" dirty="0">
+                <a:latin typeface="Times New Roman" panose="02020603050405020304" pitchFamily="18" charset="0"/>
+                <a:cs typeface="Times New Roman" panose="02020603050405020304" pitchFamily="18" charset="0"/>
+              </a:rPr>
+              <a:t> / 33</a:t>
+            </a:r>
+            <a:endParaRPr dirty="0">
+              <a:latin typeface="Times New Roman" panose="02020603050405020304" pitchFamily="18" charset="0"/>
+              <a:cs typeface="Times New Roman" panose="02020603050405020304" pitchFamily="18" charset="0"/>
+            </a:endParaRPr>
+          </a:p>
+        </p:txBody>
+      </p:sp>
+      <p:sp>
+        <p:nvSpPr>
+          <p:cNvPr id="103" name="Google Shape;103;p9"/>
+          <p:cNvSpPr txBox="1"/>
+          <p:nvPr/>
+        </p:nvSpPr>
+        <p:spPr>
+          <a:xfrm>
+            <a:off x="91440" y="246888"/>
+            <a:ext cx="4425696" cy="3017520"/>
+          </a:xfrm>
+          <a:prstGeom prst="rect">
+            <a:avLst/>
+          </a:prstGeom>
+          <a:noFill/>
+          <a:ln>
+            <a:noFill/>
+          </a:ln>
+        </p:spPr>
+        <p:txBody>
+          <a:bodyPr spcFirstLastPara="1" wrap="square" lIns="91425" tIns="91425" rIns="91425" bIns="91425" anchor="t" anchorCtr="0">
+            <a:noAutofit/>
+          </a:bodyPr>
+          <a:lstStyle/>
+          <a:p>
+            <a:pPr marL="171450" lvl="1" indent="-171450" algn="l">
+              <a:buFont typeface="Arial" panose="020B0604020202020204" pitchFamily="34" charset="0"/>
+              <a:buChar char="•"/>
+            </a:pPr>
+            <a:r>
+              <a:rPr lang="en-US" sz="950" b="1" dirty="0">
+                <a:latin typeface="Times New Roman" panose="02020603050405020304" pitchFamily="18" charset="0"/>
+                <a:cs typeface="Times New Roman" panose="02020603050405020304" pitchFamily="18" charset="0"/>
+              </a:rPr>
+              <a:t>What we expect to show.</a:t>
+            </a:r>
+            <a:r>
+              <a:rPr lang="en-US" sz="950" b="0" dirty="0">
+                <a:latin typeface="Times New Roman" panose="02020603050405020304" pitchFamily="18" charset="0"/>
+                <a:cs typeface="Times New Roman" panose="02020603050405020304" pitchFamily="18" charset="0"/>
+              </a:rPr>
+              <a:t> Budget-aware assembly beating both naive conditions at every model size, with the largest margin on the smallest model. Zero leakage on OP-Bench irrelevance without losing identity context. Sub-second trigger-to-first-token locally. Zero bytes in private mode.</a:t>
+            </a:r>
+          </a:p>
+          <a:p>
+            <a:pPr marL="171450" lvl="1" indent="-171450" algn="l">
+              <a:buFont typeface="Arial" panose="020B0604020202020204" pitchFamily="34" charset="0"/>
+              <a:buChar char="•"/>
+            </a:pPr>
+            <a:r>
+              <a:rPr lang="en-US" sz="950" b="1" dirty="0">
+                <a:latin typeface="Times New Roman" panose="02020603050405020304" pitchFamily="18" charset="0"/>
+                <a:cs typeface="Times New Roman" panose="02020603050405020304" pitchFamily="18" charset="0"/>
+              </a:rPr>
+              <a:t>Known limitation - six classes is a design choice, not a derivation.</a:t>
+            </a:r>
+            <a:r>
+              <a:rPr lang="en-US" sz="950" b="0" dirty="0">
+                <a:latin typeface="Times New Roman" panose="02020603050405020304" pitchFamily="18" charset="0"/>
+                <a:cs typeface="Times New Roman" panose="02020603050405020304" pitchFamily="18" charset="0"/>
+              </a:rPr>
+              <a:t> The defence is that classes are a routing device and each one is a new failure mode, so the burden is on adding a seventh. And it is testable: E1 measures whether routing helps or hurts.</a:t>
+            </a:r>
+          </a:p>
+          <a:p>
+            <a:pPr marL="171450" lvl="1" indent="-171450" algn="l">
+              <a:buFont typeface="Arial" panose="020B0604020202020204" pitchFamily="34" charset="0"/>
+              <a:buChar char="•"/>
+            </a:pPr>
+            <a:r>
+              <a:rPr lang="en-US" sz="950" b="1" dirty="0">
+                <a:latin typeface="Times New Roman" panose="02020603050405020304" pitchFamily="18" charset="0"/>
+                <a:cs typeface="Times New Roman" panose="02020603050405020304" pitchFamily="18" charset="0"/>
+              </a:rPr>
+              <a:t>Known limitation - import depends on export formats we do not control.</a:t>
+            </a:r>
+            <a:r>
+              <a:rPr lang="en-US" sz="950" b="0" dirty="0">
+                <a:latin typeface="Times New Roman" panose="02020603050405020304" pitchFamily="18" charset="0"/>
+                <a:cs typeface="Times New Roman" panose="02020603050405020304" pitchFamily="18" charset="0"/>
+              </a:rPr>
+              <a:t> They are undocumented JSON that can change without notice. Parsers are isolated per platform and fail loudly, the extraction-prompt path works with no export at all, and the review screen means a broken parser produces nothing rather than garbage.</a:t>
+            </a:r>
+          </a:p>
+          <a:p>
+            <a:pPr marL="171450" lvl="1" indent="-171450" algn="l">
+              <a:buFont typeface="Arial" panose="020B0604020202020204" pitchFamily="34" charset="0"/>
+              <a:buChar char="•"/>
+            </a:pPr>
+            <a:r>
+              <a:rPr lang="en-US" sz="950" b="1" dirty="0">
+                <a:latin typeface="Times New Roman" panose="02020603050405020304" pitchFamily="18" charset="0"/>
+                <a:cs typeface="Times New Roman" panose="02020603050405020304" pitchFamily="18" charset="0"/>
+              </a:rPr>
+              <a:t>Known limitation - UI Automation coverage varies by application.</a:t>
+            </a:r>
+            <a:r>
+              <a:rPr lang="en-US" sz="950" b="0" dirty="0">
+                <a:latin typeface="Times New Roman" panose="02020603050405020304" pitchFamily="18" charset="0"/>
+                <a:cs typeface="Times New Roman" panose="02020603050405020304" pitchFamily="18" charset="0"/>
+              </a:rPr>
+              <a:t> That is why the clipboard fallback exists and why the coverage table is a documented deliverable.</a:t>
+            </a:r>
+          </a:p>
+          <a:p>
+            <a:pPr marL="171450" lvl="1" indent="-171450" algn="l">
+              <a:buFont typeface="Arial" panose="020B0604020202020204" pitchFamily="34" charset="0"/>
+              <a:buChar char="•"/>
+            </a:pPr>
+            <a:r>
+              <a:rPr lang="en-US" sz="950" b="1" dirty="0">
+                <a:latin typeface="Times New Roman" panose="02020603050405020304" pitchFamily="18" charset="0"/>
+                <a:cs typeface="Times New Roman" panose="02020603050405020304" pitchFamily="18" charset="0"/>
+              </a:rPr>
+              <a:t>Practical risk:</a:t>
+            </a:r>
+            <a:r>
+              <a:rPr lang="en-US" sz="950" b="0" dirty="0">
+                <a:latin typeface="Times New Roman" panose="02020603050405020304" pitchFamily="18" charset="0"/>
+                <a:cs typeface="Times New Roman" panose="02020603050405020304" pitchFamily="18" charset="0"/>
+              </a:rPr>
+              <a:t> screen-reading behaviour can trip antivirus heuristics, so the installer must be signed and all capture must stay user-initiated.</a:t>
+            </a:r>
+          </a:p>
+        </p:txBody>
+      </p:sp>
+      <p:sp>
+        <p:nvSpPr>
+          <p:cNvPr id="8" name="Google Shape;85;p8">
+            <a:extLst>
+              <a:ext uri="{FF2B5EF4-FFF2-40B4-BE49-F238E27FC236}">
+                <a16:creationId xmlns:a16="http://schemas.microsoft.com/office/drawing/2014/main" id="{B445AC1F-8D42-9224-714E-741A4A81DCCA}"/>
+              </a:ext>
+            </a:extLst>
+          </p:cNvPr>
+          <p:cNvSpPr txBox="1"/>
+          <p:nvPr/>
+        </p:nvSpPr>
+        <p:spPr>
+          <a:xfrm>
+            <a:off x="1773059" y="3331250"/>
+            <a:ext cx="1211100" cy="101295"/>
+          </a:xfrm>
+          <a:prstGeom prst="rect">
+            <a:avLst/>
+          </a:prstGeom>
+          <a:noFill/>
+          <a:ln>
+            <a:noFill/>
+          </a:ln>
+        </p:spPr>
+        <p:txBody>
+          <a:bodyPr spcFirstLastPara="1" wrap="square" lIns="0" tIns="8875" rIns="0" bIns="0" anchor="t" anchorCtr="0">
+            <a:spAutoFit/>
+          </a:bodyPr>
+          <a:lstStyle/>
+          <a:p>
+            <a:pPr marL="12700" lvl="0"/>
+            <a:endParaRPr lang="en-US" sz="600" dirty="0">
+              <a:latin typeface="Times New Roman" panose="02020603050405020304" pitchFamily="18" charset="0"/>
+              <a:cs typeface="Times New Roman" panose="02020603050405020304" pitchFamily="18" charset="0"/>
+            </a:endParaRPr>
+            <a:r>
+              <a:rPr lang="en-US" sz="600" dirty="0" b="0">
+                <a:solidFill>
+                  <a:srgbClr val="FFFFFF"/>
+                </a:solidFill>
+                <a:latin typeface="Times New Roman" panose="02020603050405020304" pitchFamily="18" charset="0"/>
+                <a:cs typeface="Times New Roman" panose="02020603050405020304" pitchFamily="18" charset="0"/>
+              </a:rPr>
+              <a:t>PERCH</a:t>
+            </a:r>
+          </a:p>
+        </p:txBody>
+      </p:sp>
+      <p:sp>
+        <p:nvSpPr>
+          <p:cNvPr id="9" name="Google Shape;72;p7">
+            <a:extLst>
+              <a:ext uri="{FF2B5EF4-FFF2-40B4-BE49-F238E27FC236}">
+                <a16:creationId xmlns:a16="http://schemas.microsoft.com/office/drawing/2014/main" id="{AD0AEF20-4852-6A69-5088-EB2B0F643C44}"/>
+              </a:ext>
+            </a:extLst>
+          </p:cNvPr>
+          <p:cNvSpPr txBox="1">
+            <a:spLocks noGrp="1"/>
+          </p:cNvSpPr>
+          <p:nvPr>
+            <p:ph type="dt" idx="10"/>
+          </p:nvPr>
+        </p:nvSpPr>
+        <p:spPr>
+          <a:xfrm>
+            <a:off x="3442063" y="3331251"/>
+            <a:ext cx="746093" cy="101295"/>
+          </a:xfrm>
+          <a:prstGeom prst="rect">
+            <a:avLst/>
+          </a:prstGeom>
+          <a:noFill/>
+          <a:ln>
+            <a:noFill/>
+          </a:ln>
+        </p:spPr>
+        <p:txBody>
+          <a:bodyPr spcFirstLastPara="1" wrap="square" lIns="0" tIns="8875" rIns="0" bIns="0" anchor="t" anchorCtr="0">
+            <a:spAutoFit/>
+          </a:bodyPr>
+          <a:lstStyle/>
+          <a:p>
+            <a:pPr marL="12700" lvl="0" indent="0" algn="l" rtl="0">
+              <a:lnSpc>
+                <a:spcPct val="100000"/>
+              </a:lnSpc>
+              <a:spcBef>
+                <a:spcPts val="0"/>
+              </a:spcBef>
+              <a:spcAft>
+                <a:spcPts val="0"/>
+              </a:spcAft>
+              <a:buNone/>
+            </a:pPr>
+            <a:r>
+              <a:rPr lang="en-US" dirty="0">
+                <a:latin typeface="Times New Roman" panose="02020603050405020304" pitchFamily="18" charset="0"/>
+                <a:cs typeface="Times New Roman" panose="02020603050405020304" pitchFamily="18" charset="0"/>
+              </a:rPr>
+              <a:t>August-2026</a:t>
+            </a:r>
+            <a:endParaRPr dirty="0">
+              <a:latin typeface="Times New Roman" panose="02020603050405020304" pitchFamily="18" charset="0"/>
+              <a:cs typeface="Times New Roman" panose="02020603050405020304" pitchFamily="18" charset="0"/>
+            </a:endParaRPr>
+          </a:p>
+        </p:txBody>
+      </p:sp>
+    </p:spTree>
+  </p:cSld>
+  <p:clrMapOvr>
+    <a:masterClrMapping/>
+  </p:clrMapOvr>
+</p:sld>
+</file>
+
+<file path=ppt/slides/slide32.xml><?xml version="1.0" encoding="utf-8"?>
+<p:sld xmlns:a="http://schemas.openxmlformats.org/drawingml/2006/main" xmlns:p="http://schemas.openxmlformats.org/presentationml/2006/main" xmlns:r="http://schemas.openxmlformats.org/officeDocument/2006/relationships">
+  <p:cSld>
+    <p:spTree>
+      <p:nvGrpSpPr>
+        <p:cNvPr id="1" name=""/>
+        <p:cNvGrpSpPr/>
+        <p:nvPr/>
+      </p:nvGrpSpPr>
+      <p:grpSpPr/>
+      <p:sp>
+        <p:nvSpPr>
+          <p:cNvPr id="93" name="Google Shape;93;p9"/>
+          <p:cNvSpPr/>
+          <p:nvPr/>
+        </p:nvSpPr>
+        <p:spPr>
+          <a:xfrm>
+            <a:off x="1905" y="0"/>
+            <a:ext cx="4608195" cy="321945"/>
+          </a:xfrm>
+          <a:custGeom>
+            <a:avLst/>
+            <a:gdLst/>
+            <a:ahLst/>
+            <a:cxnLst/>
+            <a:rect l="l" t="t" r="r" b="b"/>
+            <a:pathLst>
+              <a:path w="4608195" h="321945" extrusionOk="0">
+                <a:moveTo>
+                  <a:pt x="4608004" y="0"/>
+                </a:moveTo>
+                <a:lnTo>
+                  <a:pt x="0" y="0"/>
+                </a:lnTo>
+                <a:lnTo>
+                  <a:pt x="0" y="321500"/>
+                </a:lnTo>
+                <a:lnTo>
+                  <a:pt x="4608004" y="321500"/>
+                </a:lnTo>
+                <a:lnTo>
+                  <a:pt x="4608004" y="0"/>
+                </a:lnTo>
+                <a:close/>
+              </a:path>
+            </a:pathLst>
+          </a:custGeom>
+          <a:solidFill>
+            <a:srgbClr val="3333B2"/>
+          </a:solidFill>
+          <a:ln>
+            <a:noFill/>
+          </a:ln>
+        </p:spPr>
+        <p:txBody>
+          <a:bodyPr spcFirstLastPara="1" wrap="square" lIns="0" tIns="0" rIns="0" bIns="0" anchor="t" anchorCtr="0">
+            <a:noAutofit/>
+          </a:bodyPr>
+          <a:lstStyle/>
+          <a:p>
+            <a:pPr marL="0" lvl="0" indent="0" algn="l" rtl="0">
+              <a:spcBef>
+                <a:spcPts val="0"/>
+              </a:spcBef>
+              <a:spcAft>
+                <a:spcPts val="0"/>
+              </a:spcAft>
+              <a:buNone/>
+            </a:pPr>
+            <a:endParaRPr sz="1800"/>
+          </a:p>
+        </p:txBody>
+      </p:sp>
+      <p:sp>
+        <p:nvSpPr>
+          <p:cNvPr id="94" name="Google Shape;94;p9"/>
+          <p:cNvSpPr txBox="1"/>
+          <p:nvPr/>
+        </p:nvSpPr>
+        <p:spPr>
+          <a:xfrm>
+            <a:off x="95300" y="45565"/>
+            <a:ext cx="4297680" cy="232736"/>
+          </a:xfrm>
+          <a:prstGeom prst="rect">
+            <a:avLst/>
+          </a:prstGeom>
+          <a:noFill/>
+          <a:ln>
+            <a:noFill/>
+          </a:ln>
+        </p:spPr>
+        <p:txBody>
+          <a:bodyPr spcFirstLastPara="1" wrap="square" lIns="0" tIns="17125" rIns="0" bIns="0" anchor="t" anchorCtr="0">
+            <a:spAutoFit/>
+          </a:bodyPr>
+          <a:lstStyle/>
+          <a:p>
+            <a:pPr marL="12700" lvl="0" indent="0" algn="l" rtl="0">
+              <a:lnSpc>
+                <a:spcPct val="100000"/>
+              </a:lnSpc>
+              <a:spcBef>
+                <a:spcPts val="0"/>
+              </a:spcBef>
+              <a:spcAft>
+                <a:spcPts val="0"/>
+              </a:spcAft>
+              <a:buNone/>
+            </a:pPr>
+            <a:endParaRPr sz="1400" dirty="0">
+              <a:latin typeface="Times New Roman" panose="02020603050405020304" pitchFamily="18" charset="0"/>
+              <a:cs typeface="Times New Roman" panose="02020603050405020304" pitchFamily="18" charset="0"/>
+              <a:sym typeface="Arial"/>
+            </a:endParaRPr>
+            <a:r>
+              <a:rPr lang="en-US" sz="1400" dirty="0" b="0">
+                <a:solidFill>
+                  <a:srgbClr val="FFFFFF"/>
+                </a:solidFill>
+                <a:latin typeface="Times New Roman" panose="02020603050405020304" pitchFamily="18" charset="0"/>
+                <a:cs typeface="Times New Roman" panose="02020603050405020304" pitchFamily="18" charset="0"/>
+                <a:sym typeface="Arial"/>
+              </a:rPr>
+              <a:t>Conclusion</a:t>
+            </a:r>
+          </a:p>
+        </p:txBody>
+      </p:sp>
+      <p:grpSp>
+        <p:nvGrpSpPr>
+          <p:cNvPr id="95" name="Google Shape;95;p9"/>
+          <p:cNvGrpSpPr/>
+          <p:nvPr/>
+        </p:nvGrpSpPr>
+        <p:grpSpPr>
+          <a:xfrm>
+            <a:off x="0" y="3326968"/>
+            <a:ext cx="4608017" cy="129539"/>
+            <a:chOff x="0" y="3326968"/>
+            <a:chExt cx="4608017" cy="129539"/>
+          </a:xfrm>
+        </p:grpSpPr>
+        <p:sp>
+          <p:nvSpPr>
+            <p:cNvPr id="96" name="Google Shape;96;p9"/>
+            <p:cNvSpPr/>
+            <p:nvPr/>
+          </p:nvSpPr>
+          <p:spPr>
+            <a:xfrm>
+              <a:off x="0" y="3326968"/>
+              <a:ext cx="1536065" cy="129539"/>
+            </a:xfrm>
+            <a:custGeom>
+              <a:avLst/>
+              <a:gdLst/>
+              <a:ahLst/>
+              <a:cxnLst/>
+              <a:rect l="l" t="t" r="r" b="b"/>
+              <a:pathLst>
+                <a:path w="1536065" h="129539" extrusionOk="0">
+                  <a:moveTo>
+                    <a:pt x="1535976" y="0"/>
+                  </a:moveTo>
+                  <a:lnTo>
+                    <a:pt x="0" y="0"/>
+                  </a:lnTo>
+                  <a:lnTo>
+                    <a:pt x="0" y="129032"/>
+                  </a:lnTo>
+                  <a:lnTo>
+                    <a:pt x="1535976" y="129032"/>
+                  </a:lnTo>
+                  <a:lnTo>
+                    <a:pt x="1535976" y="0"/>
+                  </a:lnTo>
+                  <a:close/>
+                </a:path>
+              </a:pathLst>
+            </a:custGeom>
+            <a:solidFill>
+              <a:srgbClr val="191959"/>
+            </a:solidFill>
+            <a:ln>
+              <a:noFill/>
+            </a:ln>
+          </p:spPr>
+          <p:txBody>
+            <a:bodyPr spcFirstLastPara="1" wrap="square" lIns="0" tIns="0" rIns="0" bIns="0" anchor="t" anchorCtr="0">
+              <a:noAutofit/>
+            </a:bodyPr>
+            <a:lstStyle/>
+            <a:p>
+              <a:pPr marL="0" lvl="0" indent="0" algn="l" rtl="0">
+                <a:spcBef>
+                  <a:spcPts val="0"/>
+                </a:spcBef>
+                <a:spcAft>
+                  <a:spcPts val="0"/>
+                </a:spcAft>
+                <a:buNone/>
+              </a:pPr>
+              <a:endParaRPr sz="1800"/>
+            </a:p>
+          </p:txBody>
+        </p:sp>
+        <p:sp>
+          <p:nvSpPr>
+            <p:cNvPr id="97" name="Google Shape;97;p9"/>
+            <p:cNvSpPr/>
+            <p:nvPr/>
+          </p:nvSpPr>
+          <p:spPr>
+            <a:xfrm>
+              <a:off x="1535976" y="3326968"/>
+              <a:ext cx="1536065" cy="129539"/>
+            </a:xfrm>
+            <a:custGeom>
+              <a:avLst/>
+              <a:gdLst/>
+              <a:ahLst/>
+              <a:cxnLst/>
+              <a:rect l="l" t="t" r="r" b="b"/>
+              <a:pathLst>
+                <a:path w="1536064" h="129539" extrusionOk="0">
+                  <a:moveTo>
+                    <a:pt x="1535976" y="0"/>
+                  </a:moveTo>
+                  <a:lnTo>
+                    <a:pt x="0" y="0"/>
+                  </a:lnTo>
+                  <a:lnTo>
+                    <a:pt x="0" y="129032"/>
+                  </a:lnTo>
+                  <a:lnTo>
+                    <a:pt x="1535976" y="129032"/>
+                  </a:lnTo>
+                  <a:lnTo>
+                    <a:pt x="1535976" y="0"/>
+                  </a:lnTo>
+                  <a:close/>
+                </a:path>
+              </a:pathLst>
+            </a:custGeom>
+            <a:solidFill>
+              <a:srgbClr val="262685"/>
+            </a:solidFill>
+            <a:ln>
+              <a:noFill/>
+            </a:ln>
+          </p:spPr>
+          <p:txBody>
+            <a:bodyPr spcFirstLastPara="1" wrap="square" lIns="0" tIns="0" rIns="0" bIns="0" anchor="t" anchorCtr="0">
+              <a:noAutofit/>
+            </a:bodyPr>
+            <a:lstStyle/>
+            <a:p>
+              <a:pPr marL="0" lvl="0" indent="0" algn="l" rtl="0">
+                <a:spcBef>
+                  <a:spcPts val="0"/>
+                </a:spcBef>
+                <a:spcAft>
+                  <a:spcPts val="0"/>
+                </a:spcAft>
+                <a:buNone/>
+              </a:pPr>
+              <a:endParaRPr sz="1800"/>
+            </a:p>
+          </p:txBody>
+        </p:sp>
+        <p:sp>
+          <p:nvSpPr>
+            <p:cNvPr id="98" name="Google Shape;98;p9"/>
+            <p:cNvSpPr/>
+            <p:nvPr/>
+          </p:nvSpPr>
+          <p:spPr>
+            <a:xfrm>
+              <a:off x="3071952" y="3326968"/>
+              <a:ext cx="1536065" cy="129539"/>
+            </a:xfrm>
+            <a:custGeom>
+              <a:avLst/>
+              <a:gdLst/>
+              <a:ahLst/>
+              <a:cxnLst/>
+              <a:rect l="l" t="t" r="r" b="b"/>
+              <a:pathLst>
+                <a:path w="1536064" h="129539" extrusionOk="0">
+                  <a:moveTo>
+                    <a:pt x="1535976" y="0"/>
+                  </a:moveTo>
+                  <a:lnTo>
+                    <a:pt x="0" y="0"/>
+                  </a:lnTo>
+                  <a:lnTo>
+                    <a:pt x="0" y="129032"/>
+                  </a:lnTo>
+                  <a:lnTo>
+                    <a:pt x="1535976" y="129032"/>
+                  </a:lnTo>
+                  <a:lnTo>
+                    <a:pt x="1535976" y="0"/>
+                  </a:lnTo>
+                  <a:close/>
+                </a:path>
+              </a:pathLst>
+            </a:custGeom>
+            <a:solidFill>
+              <a:srgbClr val="3333B2"/>
+            </a:solidFill>
+            <a:ln>
+              <a:noFill/>
+            </a:ln>
+          </p:spPr>
+          <p:txBody>
+            <a:bodyPr spcFirstLastPara="1" wrap="square" lIns="0" tIns="0" rIns="0" bIns="0" anchor="t" anchorCtr="0">
+              <a:noAutofit/>
+            </a:bodyPr>
+            <a:lstStyle/>
+            <a:p>
+              <a:pPr marL="0" lvl="0" indent="0" algn="l" rtl="0">
+                <a:spcBef>
+                  <a:spcPts val="0"/>
+                </a:spcBef>
+                <a:spcAft>
+                  <a:spcPts val="0"/>
+                </a:spcAft>
+                <a:buNone/>
+              </a:pPr>
+              <a:endParaRPr sz="1800"/>
+            </a:p>
+          </p:txBody>
+        </p:sp>
+      </p:grpSp>
+      <p:sp>
+        <p:nvSpPr>
+          <p:cNvPr id="99" name="Google Shape;99;p9"/>
+          <p:cNvSpPr txBox="1">
+            <a:spLocks noGrp="1"/>
+          </p:cNvSpPr>
+          <p:nvPr>
+            <p:ph type="ftr" idx="11"/>
+          </p:nvPr>
+        </p:nvSpPr>
+        <p:spPr>
+          <a:xfrm>
+            <a:off x="421944" y="3331252"/>
+            <a:ext cx="692150" cy="285961"/>
+          </a:xfrm>
+          <a:prstGeom prst="rect">
+            <a:avLst/>
+          </a:prstGeom>
+          <a:noFill/>
+          <a:ln>
+            <a:noFill/>
+          </a:ln>
+        </p:spPr>
+        <p:txBody>
+          <a:bodyPr spcFirstLastPara="1" wrap="square" lIns="0" tIns="8875" rIns="0" bIns="0" anchor="t" anchorCtr="0">
+            <a:spAutoFit/>
+          </a:bodyPr>
+          <a:lstStyle/>
+          <a:p>
+            <a:pPr marL="12700"/>
+            <a:r>
+              <a:rPr lang="en-US" dirty="0">
+                <a:latin typeface="Times New Roman" panose="02020603050405020304" pitchFamily="18" charset="0"/>
+                <a:cs typeface="Times New Roman" panose="02020603050405020304" pitchFamily="18" charset="0"/>
+              </a:rPr>
+              <a:t>Dept of Comp </a:t>
+            </a:r>
+            <a:r>
+              <a:rPr lang="en-US" dirty="0" err="1">
+                <a:latin typeface="Times New Roman" panose="02020603050405020304" pitchFamily="18" charset="0"/>
+                <a:cs typeface="Times New Roman" panose="02020603050405020304" pitchFamily="18" charset="0"/>
+              </a:rPr>
+              <a:t>Engg</a:t>
+            </a:r>
+            <a:endParaRPr lang="en-US" dirty="0">
+              <a:latin typeface="Times New Roman" panose="02020603050405020304" pitchFamily="18" charset="0"/>
+              <a:cs typeface="Times New Roman" panose="02020603050405020304" pitchFamily="18" charset="0"/>
+            </a:endParaRPr>
+          </a:p>
+          <a:p>
+            <a:pPr marL="12700" lvl="0"/>
+            <a:endParaRPr lang="en-US" dirty="0"/>
+          </a:p>
+          <a:p>
+            <a:pPr marL="12700" lvl="0" indent="0" algn="l" rtl="0">
+              <a:lnSpc>
+                <a:spcPct val="100000"/>
+              </a:lnSpc>
+              <a:spcBef>
+                <a:spcPts val="0"/>
+              </a:spcBef>
+              <a:spcAft>
+                <a:spcPts val="0"/>
+              </a:spcAft>
+              <a:buNone/>
+            </a:pPr>
+            <a:endParaRPr dirty="0"/>
+          </a:p>
+        </p:txBody>
+      </p:sp>
+      <p:sp>
+        <p:nvSpPr>
+          <p:cNvPr id="102" name="Google Shape;102;p9"/>
+          <p:cNvSpPr txBox="1">
+            <a:spLocks noGrp="1"/>
+          </p:cNvSpPr>
+          <p:nvPr>
+            <p:ph type="sldNum" idx="12"/>
+          </p:nvPr>
+        </p:nvSpPr>
+        <p:spPr>
+          <a:xfrm>
+            <a:off x="4275161" y="3331252"/>
+            <a:ext cx="266700" cy="101295"/>
+          </a:xfrm>
+          <a:prstGeom prst="rect">
+            <a:avLst/>
+          </a:prstGeom>
+          <a:noFill/>
+          <a:ln>
+            <a:noFill/>
+          </a:ln>
+        </p:spPr>
+        <p:txBody>
+          <a:bodyPr spcFirstLastPara="1" wrap="square" lIns="0" tIns="8875" rIns="0" bIns="0" anchor="t" anchorCtr="0">
+            <a:spAutoFit/>
+          </a:bodyPr>
+          <a:lstStyle/>
+          <a:p>
+            <a:pPr marL="38100" lvl="0" indent="0" algn="l" rtl="0">
+              <a:lnSpc>
+                <a:spcPct val="100000"/>
+              </a:lnSpc>
+              <a:spcBef>
+                <a:spcPts val="0"/>
+              </a:spcBef>
+              <a:spcAft>
+                <a:spcPts val="0"/>
+              </a:spcAft>
+              <a:buNone/>
+            </a:pPr>
+            <a:fld id="{00000000-1234-1234-1234-123412341234}" type="slidenum">
+              <a:rPr lang="en-US">
+                <a:latin typeface="Times New Roman" panose="02020603050405020304" pitchFamily="18" charset="0"/>
+                <a:cs typeface="Times New Roman" panose="02020603050405020304" pitchFamily="18" charset="0"/>
+              </a:rPr>
+              <a:t>32</a:t>
+            </a:fld>
+            <a:r>
+              <a:rPr lang="en-US" dirty="0">
+                <a:latin typeface="Times New Roman" panose="02020603050405020304" pitchFamily="18" charset="0"/>
+                <a:cs typeface="Times New Roman" panose="02020603050405020304" pitchFamily="18" charset="0"/>
+              </a:rPr>
+              <a:t> / 33</a:t>
+            </a:r>
+            <a:endParaRPr dirty="0">
+              <a:latin typeface="Times New Roman" panose="02020603050405020304" pitchFamily="18" charset="0"/>
+              <a:cs typeface="Times New Roman" panose="02020603050405020304" pitchFamily="18" charset="0"/>
+            </a:endParaRPr>
+          </a:p>
+        </p:txBody>
+      </p:sp>
+      <p:sp>
+        <p:nvSpPr>
+          <p:cNvPr id="103" name="Google Shape;103;p9"/>
+          <p:cNvSpPr txBox="1"/>
+          <p:nvPr/>
+        </p:nvSpPr>
+        <p:spPr>
+          <a:xfrm>
+            <a:off x="91440" y="246888"/>
+            <a:ext cx="4425696" cy="3017520"/>
+          </a:xfrm>
+          <a:prstGeom prst="rect">
+            <a:avLst/>
+          </a:prstGeom>
+          <a:noFill/>
+          <a:ln>
+            <a:noFill/>
+          </a:ln>
+        </p:spPr>
+        <p:txBody>
+          <a:bodyPr spcFirstLastPara="1" wrap="square" lIns="91425" tIns="91425" rIns="91425" bIns="91425" anchor="t" anchorCtr="0">
+            <a:noAutofit/>
+          </a:bodyPr>
+          <a:lstStyle/>
+          <a:p>
+            <a:pPr marL="171450" lvl="1" indent="-171450" algn="l">
+              <a:buFont typeface="Arial" panose="020B0604020202020204" pitchFamily="34" charset="0"/>
+              <a:buChar char="•"/>
+            </a:pPr>
+            <a:r>
+              <a:rPr lang="en-US" sz="1000" b="1" dirty="0">
+                <a:latin typeface="Times New Roman" panose="02020603050405020304" pitchFamily="18" charset="0"/>
+                <a:cs typeface="Times New Roman" panose="02020603050405020304" pitchFamily="18" charset="0"/>
+              </a:rPr>
+              <a:t>The problem is not which AI you use.</a:t>
+            </a:r>
+            <a:r>
+              <a:rPr lang="en-US" sz="1000" b="0" dirty="0">
+                <a:latin typeface="Times New Roman" panose="02020603050405020304" pitchFamily="18" charset="0"/>
+                <a:cs typeface="Times New Roman" panose="02020603050405020304" pitchFamily="18" charset="0"/>
+              </a:rPr>
+              <a:t> It is that your context is trapped inside whichever one you typed it into, and the assistant that would use it is trapped inside an application window.</a:t>
+            </a:r>
+          </a:p>
+          <a:p>
+            <a:pPr marL="171450" lvl="1" indent="-171450" algn="l">
+              <a:buFont typeface="Arial" panose="020B0604020202020204" pitchFamily="34" charset="0"/>
+              <a:buChar char="•"/>
+            </a:pPr>
+            <a:r>
+              <a:rPr lang="en-US" sz="1000" b="1" dirty="0">
+                <a:latin typeface="Times New Roman" panose="02020603050405020304" pitchFamily="18" charset="0"/>
+                <a:cs typeface="Times New Roman" panose="02020603050405020304" pitchFamily="18" charset="0"/>
+              </a:rPr>
+              <a:t>The measurement backs it.</a:t>
+            </a:r>
+            <a:r>
+              <a:rPr lang="en-US" sz="1000" b="0" dirty="0">
+                <a:latin typeface="Times New Roman" panose="02020603050405020304" pitchFamily="18" charset="0"/>
+                <a:cs typeface="Times New Roman" panose="02020603050405020304" pitchFamily="18" charset="0"/>
+              </a:rPr>
+              <a:t> ACM SIGKDD 2026 found frontier models below 70% when a task needs persistent knowledge of the user. OP-Bench found that adding memory naively makes things worse.</a:t>
+            </a:r>
+          </a:p>
+          <a:p>
+            <a:pPr marL="171450" lvl="1" indent="-171450" algn="l">
+              <a:buFont typeface="Arial" panose="020B0604020202020204" pitchFamily="34" charset="0"/>
+              <a:buChar char="•"/>
+            </a:pPr>
+            <a:r>
+              <a:rPr lang="en-US" sz="1000" b="1" dirty="0">
+                <a:latin typeface="Times New Roman" panose="02020603050405020304" pitchFamily="18" charset="0"/>
+                <a:cs typeface="Times New Roman" panose="02020603050405020304" pitchFamily="18" charset="0"/>
+              </a:rPr>
+              <a:t>PERCH is the layer above the applications.</a:t>
+            </a:r>
+            <a:r>
+              <a:rPr lang="en-US" sz="1000" b="0" dirty="0">
+                <a:latin typeface="Times New Roman" panose="02020603050405020304" pitchFamily="18" charset="0"/>
+                <a:cs typeface="Times New Roman" panose="02020603050405020304" pitchFamily="18" charset="0"/>
+              </a:rPr>
+              <a:t> Summoned anywhere in Windows, answering beside your work, writing back into the document you were in, remembering what you told it once, and running on whichever model you choose - including one that never leaves your machine.</a:t>
+            </a:r>
+          </a:p>
+          <a:p>
+            <a:pPr marL="171450" lvl="1" indent="-171450" algn="l">
+              <a:buFont typeface="Arial" panose="020B0604020202020204" pitchFamily="34" charset="0"/>
+              <a:buChar char="•"/>
+            </a:pPr>
+            <a:r>
+              <a:rPr lang="en-US" sz="1000" b="1" dirty="0">
+                <a:latin typeface="Times New Roman" panose="02020603050405020304" pitchFamily="18" charset="0"/>
+                <a:cs typeface="Times New Roman" panose="02020603050405020304" pitchFamily="18" charset="0"/>
+              </a:rPr>
+              <a:t>The risky part is already built.</a:t>
+            </a:r>
+            <a:r>
+              <a:rPr lang="en-US" sz="1000" b="0" dirty="0">
+                <a:latin typeface="Times New Roman" panose="02020603050405020304" pitchFamily="18" charset="0"/>
+                <a:cs typeface="Times New Roman" panose="02020603050405020304" pitchFamily="18" charset="0"/>
+              </a:rPr>
+              <a:t> The OS layer runs. So does the pipeline: routing, ranking, admission, packing, tools, and 21 passing tests.</a:t>
+            </a:r>
+          </a:p>
+          <a:p>
+            <a:pPr marL="171450" lvl="1" indent="-171450" algn="l">
+              <a:buFont typeface="Arial" panose="020B0604020202020204" pitchFamily="34" charset="0"/>
+              <a:buChar char="•"/>
+            </a:pPr>
+            <a:r>
+              <a:rPr lang="en-US" sz="1000" b="1" dirty="0">
+                <a:latin typeface="Times New Roman" panose="02020603050405020304" pitchFamily="18" charset="0"/>
+                <a:cs typeface="Times New Roman" panose="02020603050405020304" pitchFamily="18" charset="0"/>
+              </a:rPr>
+              <a:t>The technical core is the retrieval gate and the budget packer</a:t>
+            </a:r>
+            <a:r>
+              <a:rPr lang="en-US" sz="1000" b="0" dirty="0">
+                <a:latin typeface="Times New Roman" panose="02020603050405020304" pitchFamily="18" charset="0"/>
+                <a:cs typeface="Times New Roman" panose="02020603050405020304" pitchFamily="18" charset="0"/>
+              </a:rPr>
+              <a:t> - a calibration problem and a constrained-allocation problem, evaluated with four ablations on public benchmarks.</a:t>
+            </a:r>
+          </a:p>
+          <a:p>
+            <a:pPr marL="171450" lvl="1" indent="-171450" algn="l">
+              <a:buFont typeface="Arial" panose="020B0604020202020204" pitchFamily="34" charset="0"/>
+              <a:buChar char="•"/>
+            </a:pPr>
+            <a:r>
+              <a:rPr lang="en-US" sz="1000" b="1" dirty="0">
+                <a:latin typeface="Times New Roman" panose="02020603050405020304" pitchFamily="18" charset="0"/>
+                <a:cs typeface="Times New Roman" panose="02020603050405020304" pitchFamily="18" charset="0"/>
+              </a:rPr>
+              <a:t>You pay for four AI assistants. None of them know you, and none of them will tell each other. PERCH is the one that's yours.</a:t>
+            </a:r>
+          </a:p>
+        </p:txBody>
+      </p:sp>
+      <p:sp>
+        <p:nvSpPr>
+          <p:cNvPr id="8" name="Google Shape;85;p8">
+            <a:extLst>
+              <a:ext uri="{FF2B5EF4-FFF2-40B4-BE49-F238E27FC236}">
+                <a16:creationId xmlns:a16="http://schemas.microsoft.com/office/drawing/2014/main" id="{B445AC1F-8D42-9224-714E-741A4A81DCCA}"/>
+              </a:ext>
+            </a:extLst>
+          </p:cNvPr>
+          <p:cNvSpPr txBox="1"/>
+          <p:nvPr/>
+        </p:nvSpPr>
+        <p:spPr>
+          <a:xfrm>
+            <a:off x="1773059" y="3331250"/>
+            <a:ext cx="1211100" cy="101295"/>
+          </a:xfrm>
+          <a:prstGeom prst="rect">
+            <a:avLst/>
+          </a:prstGeom>
+          <a:noFill/>
+          <a:ln>
+            <a:noFill/>
+          </a:ln>
+        </p:spPr>
+        <p:txBody>
+          <a:bodyPr spcFirstLastPara="1" wrap="square" lIns="0" tIns="8875" rIns="0" bIns="0" anchor="t" anchorCtr="0">
+            <a:spAutoFit/>
+          </a:bodyPr>
+          <a:lstStyle/>
+          <a:p>
+            <a:pPr marL="12700" lvl="0"/>
+            <a:endParaRPr lang="en-US" sz="600" dirty="0">
+              <a:latin typeface="Times New Roman" panose="02020603050405020304" pitchFamily="18" charset="0"/>
+              <a:cs typeface="Times New Roman" panose="02020603050405020304" pitchFamily="18" charset="0"/>
+            </a:endParaRPr>
+            <a:r>
+              <a:rPr lang="en-US" sz="600" dirty="0" b="0">
+                <a:solidFill>
+                  <a:srgbClr val="FFFFFF"/>
+                </a:solidFill>
+                <a:latin typeface="Times New Roman" panose="02020603050405020304" pitchFamily="18" charset="0"/>
+                <a:cs typeface="Times New Roman" panose="02020603050405020304" pitchFamily="18" charset="0"/>
+              </a:rPr>
+              <a:t>PERCH</a:t>
+            </a:r>
+          </a:p>
+        </p:txBody>
+      </p:sp>
+      <p:sp>
+        <p:nvSpPr>
+          <p:cNvPr id="9" name="Google Shape;72;p7">
+            <a:extLst>
+              <a:ext uri="{FF2B5EF4-FFF2-40B4-BE49-F238E27FC236}">
+                <a16:creationId xmlns:a16="http://schemas.microsoft.com/office/drawing/2014/main" id="{AD0AEF20-4852-6A69-5088-EB2B0F643C44}"/>
+              </a:ext>
+            </a:extLst>
+          </p:cNvPr>
+          <p:cNvSpPr txBox="1">
+            <a:spLocks noGrp="1"/>
+          </p:cNvSpPr>
+          <p:nvPr>
+            <p:ph type="dt" idx="10"/>
+          </p:nvPr>
+        </p:nvSpPr>
+        <p:spPr>
+          <a:xfrm>
+            <a:off x="3442063" y="3331251"/>
+            <a:ext cx="746093" cy="101295"/>
+          </a:xfrm>
+          <a:prstGeom prst="rect">
+            <a:avLst/>
+          </a:prstGeom>
+          <a:noFill/>
+          <a:ln>
+            <a:noFill/>
+          </a:ln>
+        </p:spPr>
+        <p:txBody>
+          <a:bodyPr spcFirstLastPara="1" wrap="square" lIns="0" tIns="8875" rIns="0" bIns="0" anchor="t" anchorCtr="0">
+            <a:spAutoFit/>
+          </a:bodyPr>
+          <a:lstStyle/>
+          <a:p>
+            <a:pPr marL="12700" lvl="0" indent="0" algn="l" rtl="0">
+              <a:lnSpc>
+                <a:spcPct val="100000"/>
+              </a:lnSpc>
+              <a:spcBef>
+                <a:spcPts val="0"/>
+              </a:spcBef>
+              <a:spcAft>
+                <a:spcPts val="0"/>
+              </a:spcAft>
+              <a:buNone/>
+            </a:pPr>
+            <a:r>
+              <a:rPr lang="en-US" dirty="0">
+                <a:latin typeface="Times New Roman" panose="02020603050405020304" pitchFamily="18" charset="0"/>
+                <a:cs typeface="Times New Roman" panose="02020603050405020304" pitchFamily="18" charset="0"/>
+              </a:rPr>
+              <a:t>August-2026</a:t>
+            </a:r>
+            <a:endParaRPr dirty="0">
+              <a:latin typeface="Times New Roman" panose="02020603050405020304" pitchFamily="18" charset="0"/>
+              <a:cs typeface="Times New Roman" panose="02020603050405020304" pitchFamily="18" charset="0"/>
+            </a:endParaRPr>
+          </a:p>
+        </p:txBody>
+      </p:sp>
+    </p:spTree>
+  </p:cSld>
+  <p:clrMapOvr>
+    <a:masterClrMapping/>
+  </p:clrMapOvr>
+</p:sld>
+</file>
+
+<file path=ppt/slides/slide33.xml><?xml version="1.0" encoding="utf-8"?>
+<p:sld xmlns:a="http://schemas.openxmlformats.org/drawingml/2006/main" xmlns:p="http://schemas.openxmlformats.org/presentationml/2006/main" xmlns:r="http://schemas.openxmlformats.org/officeDocument/2006/relationships">
+  <p:cSld>
+    <p:spTree>
+      <p:nvGrpSpPr>
+        <p:cNvPr id="1" name=""/>
+        <p:cNvGrpSpPr/>
+        <p:nvPr/>
+      </p:nvGrpSpPr>
+      <p:grpSpPr/>
+      <p:sp>
+        <p:nvSpPr>
+          <p:cNvPr id="93" name="Google Shape;93;p9"/>
+          <p:cNvSpPr/>
+          <p:nvPr/>
+        </p:nvSpPr>
+        <p:spPr>
+          <a:xfrm>
+            <a:off x="1905" y="0"/>
+            <a:ext cx="4608195" cy="321945"/>
+          </a:xfrm>
+          <a:custGeom>
+            <a:avLst/>
+            <a:gdLst/>
+            <a:ahLst/>
+            <a:cxnLst/>
+            <a:rect l="l" t="t" r="r" b="b"/>
+            <a:pathLst>
+              <a:path w="4608195" h="321945" extrusionOk="0">
+                <a:moveTo>
+                  <a:pt x="4608004" y="0"/>
+                </a:moveTo>
+                <a:lnTo>
+                  <a:pt x="0" y="0"/>
+                </a:lnTo>
+                <a:lnTo>
+                  <a:pt x="0" y="321500"/>
+                </a:lnTo>
+                <a:lnTo>
+                  <a:pt x="4608004" y="321500"/>
+                </a:lnTo>
+                <a:lnTo>
+                  <a:pt x="4608004" y="0"/>
+                </a:lnTo>
+                <a:close/>
+              </a:path>
+            </a:pathLst>
+          </a:custGeom>
+          <a:solidFill>
+            <a:srgbClr val="3333B2"/>
+          </a:solidFill>
+          <a:ln>
+            <a:noFill/>
+          </a:ln>
+        </p:spPr>
+        <p:txBody>
+          <a:bodyPr spcFirstLastPara="1" wrap="square" lIns="0" tIns="0" rIns="0" bIns="0" anchor="t" anchorCtr="0">
+            <a:noAutofit/>
+          </a:bodyPr>
+          <a:lstStyle/>
+          <a:p>
+            <a:pPr marL="0" lvl="0" indent="0" algn="l" rtl="0">
+              <a:spcBef>
+                <a:spcPts val="0"/>
+              </a:spcBef>
+              <a:spcAft>
+                <a:spcPts val="0"/>
+              </a:spcAft>
+              <a:buNone/>
+            </a:pPr>
+            <a:endParaRPr sz="1800"/>
+          </a:p>
+        </p:txBody>
+      </p:sp>
+      <p:sp>
+        <p:nvSpPr>
+          <p:cNvPr id="94" name="Google Shape;94;p9"/>
+          <p:cNvSpPr txBox="1"/>
+          <p:nvPr/>
+        </p:nvSpPr>
+        <p:spPr>
+          <a:xfrm>
+            <a:off x="95300" y="45565"/>
+            <a:ext cx="4297680" cy="232736"/>
+          </a:xfrm>
+          <a:prstGeom prst="rect">
+            <a:avLst/>
+          </a:prstGeom>
+          <a:noFill/>
+          <a:ln>
+            <a:noFill/>
+          </a:ln>
+        </p:spPr>
+        <p:txBody>
+          <a:bodyPr spcFirstLastPara="1" wrap="square" lIns="0" tIns="17125" rIns="0" bIns="0" anchor="t" anchorCtr="0">
+            <a:spAutoFit/>
+          </a:bodyPr>
+          <a:lstStyle/>
+          <a:p>
+            <a:pPr marL="12700" lvl="0" indent="0" algn="l" rtl="0">
+              <a:lnSpc>
+                <a:spcPct val="100000"/>
+              </a:lnSpc>
+              <a:spcBef>
+                <a:spcPts val="0"/>
+              </a:spcBef>
+              <a:spcAft>
+                <a:spcPts val="0"/>
+              </a:spcAft>
+              <a:buNone/>
+            </a:pPr>
+            <a:endParaRPr sz="1400" dirty="0">
+              <a:latin typeface="Times New Roman" panose="02020603050405020304" pitchFamily="18" charset="0"/>
+              <a:cs typeface="Times New Roman" panose="02020603050405020304" pitchFamily="18" charset="0"/>
+              <a:sym typeface="Arial"/>
+            </a:endParaRPr>
+            <a:r>
+              <a:rPr lang="en-US" sz="1400" dirty="0" b="0">
+                <a:solidFill>
+                  <a:srgbClr val="FFFFFF"/>
+                </a:solidFill>
+                <a:latin typeface="Times New Roman" panose="02020603050405020304" pitchFamily="18" charset="0"/>
+                <a:cs typeface="Times New Roman" panose="02020603050405020304" pitchFamily="18" charset="0"/>
+                <a:sym typeface="Arial"/>
+              </a:rPr>
+              <a:t>References</a:t>
+            </a:r>
+          </a:p>
+        </p:txBody>
+      </p:sp>
+      <p:grpSp>
+        <p:nvGrpSpPr>
+          <p:cNvPr id="95" name="Google Shape;95;p9"/>
+          <p:cNvGrpSpPr/>
+          <p:nvPr/>
+        </p:nvGrpSpPr>
+        <p:grpSpPr>
+          <a:xfrm>
+            <a:off x="0" y="3326968"/>
+            <a:ext cx="4608017" cy="129539"/>
+            <a:chOff x="0" y="3326968"/>
+            <a:chExt cx="4608017" cy="129539"/>
+          </a:xfrm>
+        </p:grpSpPr>
+        <p:sp>
+          <p:nvSpPr>
+            <p:cNvPr id="96" name="Google Shape;96;p9"/>
+            <p:cNvSpPr/>
+            <p:nvPr/>
+          </p:nvSpPr>
+          <p:spPr>
+            <a:xfrm>
+              <a:off x="0" y="3326968"/>
+              <a:ext cx="1536065" cy="129539"/>
+            </a:xfrm>
+            <a:custGeom>
+              <a:avLst/>
+              <a:gdLst/>
+              <a:ahLst/>
+              <a:cxnLst/>
+              <a:rect l="l" t="t" r="r" b="b"/>
+              <a:pathLst>
+                <a:path w="1536065" h="129539" extrusionOk="0">
+                  <a:moveTo>
+                    <a:pt x="1535976" y="0"/>
+                  </a:moveTo>
+                  <a:lnTo>
+                    <a:pt x="0" y="0"/>
+                  </a:lnTo>
+                  <a:lnTo>
+                    <a:pt x="0" y="129032"/>
+                  </a:lnTo>
+                  <a:lnTo>
+                    <a:pt x="1535976" y="129032"/>
+                  </a:lnTo>
+                  <a:lnTo>
+                    <a:pt x="1535976" y="0"/>
+                  </a:lnTo>
+                  <a:close/>
+                </a:path>
+              </a:pathLst>
+            </a:custGeom>
+            <a:solidFill>
+              <a:srgbClr val="191959"/>
+            </a:solidFill>
+            <a:ln>
+              <a:noFill/>
+            </a:ln>
+          </p:spPr>
+          <p:txBody>
+            <a:bodyPr spcFirstLastPara="1" wrap="square" lIns="0" tIns="0" rIns="0" bIns="0" anchor="t" anchorCtr="0">
+              <a:noAutofit/>
+            </a:bodyPr>
+            <a:lstStyle/>
+            <a:p>
+              <a:pPr marL="0" lvl="0" indent="0" algn="l" rtl="0">
+                <a:spcBef>
+                  <a:spcPts val="0"/>
+                </a:spcBef>
+                <a:spcAft>
+                  <a:spcPts val="0"/>
+                </a:spcAft>
+                <a:buNone/>
+              </a:pPr>
+              <a:endParaRPr sz="1800"/>
+            </a:p>
+          </p:txBody>
+        </p:sp>
+        <p:sp>
+          <p:nvSpPr>
+            <p:cNvPr id="97" name="Google Shape;97;p9"/>
+            <p:cNvSpPr/>
+            <p:nvPr/>
+          </p:nvSpPr>
+          <p:spPr>
+            <a:xfrm>
+              <a:off x="1535976" y="3326968"/>
+              <a:ext cx="1536065" cy="129539"/>
+            </a:xfrm>
+            <a:custGeom>
+              <a:avLst/>
+              <a:gdLst/>
+              <a:ahLst/>
+              <a:cxnLst/>
+              <a:rect l="l" t="t" r="r" b="b"/>
+              <a:pathLst>
+                <a:path w="1536064" h="129539" extrusionOk="0">
+                  <a:moveTo>
+                    <a:pt x="1535976" y="0"/>
+                  </a:moveTo>
+                  <a:lnTo>
+                    <a:pt x="0" y="0"/>
+                  </a:lnTo>
+                  <a:lnTo>
+                    <a:pt x="0" y="129032"/>
+                  </a:lnTo>
+                  <a:lnTo>
+                    <a:pt x="1535976" y="129032"/>
+                  </a:lnTo>
+                  <a:lnTo>
+                    <a:pt x="1535976" y="0"/>
+                  </a:lnTo>
+                  <a:close/>
+                </a:path>
+              </a:pathLst>
+            </a:custGeom>
+            <a:solidFill>
+              <a:srgbClr val="262685"/>
+            </a:solidFill>
+            <a:ln>
+              <a:noFill/>
+            </a:ln>
+          </p:spPr>
+          <p:txBody>
+            <a:bodyPr spcFirstLastPara="1" wrap="square" lIns="0" tIns="0" rIns="0" bIns="0" anchor="t" anchorCtr="0">
+              <a:noAutofit/>
+            </a:bodyPr>
+            <a:lstStyle/>
+            <a:p>
+              <a:pPr marL="0" lvl="0" indent="0" algn="l" rtl="0">
+                <a:spcBef>
+                  <a:spcPts val="0"/>
+                </a:spcBef>
+                <a:spcAft>
+                  <a:spcPts val="0"/>
+                </a:spcAft>
+                <a:buNone/>
+              </a:pPr>
+              <a:endParaRPr sz="1800"/>
+            </a:p>
+          </p:txBody>
+        </p:sp>
+        <p:sp>
+          <p:nvSpPr>
+            <p:cNvPr id="98" name="Google Shape;98;p9"/>
+            <p:cNvSpPr/>
+            <p:nvPr/>
+          </p:nvSpPr>
+          <p:spPr>
+            <a:xfrm>
+              <a:off x="3071952" y="3326968"/>
+              <a:ext cx="1536065" cy="129539"/>
+            </a:xfrm>
+            <a:custGeom>
+              <a:avLst/>
+              <a:gdLst/>
+              <a:ahLst/>
+              <a:cxnLst/>
+              <a:rect l="l" t="t" r="r" b="b"/>
+              <a:pathLst>
+                <a:path w="1536064" h="129539" extrusionOk="0">
+                  <a:moveTo>
+                    <a:pt x="1535976" y="0"/>
+                  </a:moveTo>
+                  <a:lnTo>
+                    <a:pt x="0" y="0"/>
+                  </a:lnTo>
+                  <a:lnTo>
+                    <a:pt x="0" y="129032"/>
+                  </a:lnTo>
+                  <a:lnTo>
+                    <a:pt x="1535976" y="129032"/>
+                  </a:lnTo>
+                  <a:lnTo>
+                    <a:pt x="1535976" y="0"/>
+                  </a:lnTo>
+                  <a:close/>
+                </a:path>
+              </a:pathLst>
+            </a:custGeom>
+            <a:solidFill>
+              <a:srgbClr val="3333B2"/>
+            </a:solidFill>
+            <a:ln>
+              <a:noFill/>
+            </a:ln>
+          </p:spPr>
+          <p:txBody>
+            <a:bodyPr spcFirstLastPara="1" wrap="square" lIns="0" tIns="0" rIns="0" bIns="0" anchor="t" anchorCtr="0">
+              <a:noAutofit/>
+            </a:bodyPr>
+            <a:lstStyle/>
+            <a:p>
+              <a:pPr marL="0" lvl="0" indent="0" algn="l" rtl="0">
+                <a:spcBef>
+                  <a:spcPts val="0"/>
+                </a:spcBef>
+                <a:spcAft>
+                  <a:spcPts val="0"/>
+                </a:spcAft>
+                <a:buNone/>
+              </a:pPr>
+              <a:endParaRPr sz="1800"/>
+            </a:p>
+          </p:txBody>
+        </p:sp>
+      </p:grpSp>
+      <p:sp>
+        <p:nvSpPr>
+          <p:cNvPr id="99" name="Google Shape;99;p9"/>
+          <p:cNvSpPr txBox="1">
+            <a:spLocks noGrp="1"/>
+          </p:cNvSpPr>
+          <p:nvPr>
+            <p:ph type="ftr" idx="11"/>
+          </p:nvPr>
+        </p:nvSpPr>
+        <p:spPr>
+          <a:xfrm>
+            <a:off x="421944" y="3331252"/>
+            <a:ext cx="692150" cy="285961"/>
+          </a:xfrm>
+          <a:prstGeom prst="rect">
+            <a:avLst/>
+          </a:prstGeom>
+          <a:noFill/>
+          <a:ln>
+            <a:noFill/>
+          </a:ln>
+        </p:spPr>
+        <p:txBody>
+          <a:bodyPr spcFirstLastPara="1" wrap="square" lIns="0" tIns="8875" rIns="0" bIns="0" anchor="t" anchorCtr="0">
+            <a:spAutoFit/>
+          </a:bodyPr>
+          <a:lstStyle/>
+          <a:p>
+            <a:pPr marL="12700"/>
+            <a:r>
+              <a:rPr lang="en-US" dirty="0">
+                <a:latin typeface="Times New Roman" panose="02020603050405020304" pitchFamily="18" charset="0"/>
+                <a:cs typeface="Times New Roman" panose="02020603050405020304" pitchFamily="18" charset="0"/>
+              </a:rPr>
+              <a:t>Dept of Comp </a:t>
+            </a:r>
+            <a:r>
+              <a:rPr lang="en-US" dirty="0" err="1">
+                <a:latin typeface="Times New Roman" panose="02020603050405020304" pitchFamily="18" charset="0"/>
+                <a:cs typeface="Times New Roman" panose="02020603050405020304" pitchFamily="18" charset="0"/>
+              </a:rPr>
+              <a:t>Engg</a:t>
+            </a:r>
+            <a:endParaRPr lang="en-US" dirty="0">
+              <a:latin typeface="Times New Roman" panose="02020603050405020304" pitchFamily="18" charset="0"/>
+              <a:cs typeface="Times New Roman" panose="02020603050405020304" pitchFamily="18" charset="0"/>
+            </a:endParaRPr>
+          </a:p>
+          <a:p>
+            <a:pPr marL="12700" lvl="0"/>
+            <a:endParaRPr lang="en-US" dirty="0"/>
+          </a:p>
+          <a:p>
+            <a:pPr marL="12700" lvl="0" indent="0" algn="l" rtl="0">
+              <a:lnSpc>
+                <a:spcPct val="100000"/>
+              </a:lnSpc>
+              <a:spcBef>
+                <a:spcPts val="0"/>
+              </a:spcBef>
+              <a:spcAft>
+                <a:spcPts val="0"/>
+              </a:spcAft>
+              <a:buNone/>
+            </a:pPr>
+            <a:endParaRPr dirty="0"/>
+          </a:p>
+        </p:txBody>
+      </p:sp>
+      <p:sp>
+        <p:nvSpPr>
+          <p:cNvPr id="102" name="Google Shape;102;p9"/>
+          <p:cNvSpPr txBox="1">
+            <a:spLocks noGrp="1"/>
+          </p:cNvSpPr>
+          <p:nvPr>
+            <p:ph type="sldNum" idx="12"/>
+          </p:nvPr>
+        </p:nvSpPr>
+        <p:spPr>
+          <a:xfrm>
+            <a:off x="4275161" y="3331252"/>
+            <a:ext cx="266700" cy="101295"/>
+          </a:xfrm>
+          <a:prstGeom prst="rect">
+            <a:avLst/>
+          </a:prstGeom>
+          <a:noFill/>
+          <a:ln>
+            <a:noFill/>
+          </a:ln>
+        </p:spPr>
+        <p:txBody>
+          <a:bodyPr spcFirstLastPara="1" wrap="square" lIns="0" tIns="8875" rIns="0" bIns="0" anchor="t" anchorCtr="0">
+            <a:spAutoFit/>
+          </a:bodyPr>
+          <a:lstStyle/>
+          <a:p>
+            <a:pPr marL="38100" lvl="0" indent="0" algn="l" rtl="0">
+              <a:lnSpc>
+                <a:spcPct val="100000"/>
+              </a:lnSpc>
+              <a:spcBef>
+                <a:spcPts val="0"/>
+              </a:spcBef>
+              <a:spcAft>
+                <a:spcPts val="0"/>
+              </a:spcAft>
+              <a:buNone/>
+            </a:pPr>
+            <a:fld id="{00000000-1234-1234-1234-123412341234}" type="slidenum">
+              <a:rPr lang="en-US">
+                <a:latin typeface="Times New Roman" panose="02020603050405020304" pitchFamily="18" charset="0"/>
+                <a:cs typeface="Times New Roman" panose="02020603050405020304" pitchFamily="18" charset="0"/>
+              </a:rPr>
+              <a:t>33</a:t>
+            </a:fld>
+            <a:r>
+              <a:rPr lang="en-US" dirty="0">
+                <a:latin typeface="Times New Roman" panose="02020603050405020304" pitchFamily="18" charset="0"/>
+                <a:cs typeface="Times New Roman" panose="02020603050405020304" pitchFamily="18" charset="0"/>
+              </a:rPr>
+              <a:t> / 33</a:t>
+            </a:r>
+            <a:endParaRPr dirty="0">
+              <a:latin typeface="Times New Roman" panose="02020603050405020304" pitchFamily="18" charset="0"/>
+              <a:cs typeface="Times New Roman" panose="02020603050405020304" pitchFamily="18" charset="0"/>
+            </a:endParaRPr>
+          </a:p>
+        </p:txBody>
+      </p:sp>
+      <p:sp>
+        <p:nvSpPr>
+          <p:cNvPr id="103" name="Google Shape;103;p9"/>
+          <p:cNvSpPr txBox="1"/>
+          <p:nvPr/>
+        </p:nvSpPr>
+        <p:spPr>
+          <a:xfrm>
+            <a:off x="91440" y="246888"/>
+            <a:ext cx="4425696" cy="3017520"/>
+          </a:xfrm>
+          <a:prstGeom prst="rect">
+            <a:avLst/>
+          </a:prstGeom>
+          <a:noFill/>
+          <a:ln>
+            <a:noFill/>
+          </a:ln>
+        </p:spPr>
+        <p:txBody>
+          <a:bodyPr spcFirstLastPara="1" wrap="square" lIns="91425" tIns="91425" rIns="91425" bIns="91425" anchor="t" anchorCtr="0">
+            <a:noAutofit/>
+          </a:bodyPr>
+          <a:lstStyle/>
+          <a:p>
+            <a:pPr marL="171450" lvl="1" indent="-171450" algn="l">
+              <a:buFont typeface="Arial" panose="020B0604020202020204" pitchFamily="34" charset="0"/>
+              <a:buChar char="•"/>
+            </a:pPr>
+            <a:r>
+              <a:rPr lang="en-US" sz="850" b="1" dirty="0">
+                <a:latin typeface="Times New Roman" panose="02020603050405020304" pitchFamily="18" charset="0"/>
+                <a:cs typeface="Times New Roman" panose="02020603050405020304" pitchFamily="18" charset="0"/>
+              </a:rPr>
+              <a:t>[1] PAUSE: A User-Centric Benchmark for Personal AI Assistants in Unified Service Environments.</a:t>
+            </a:r>
+            <a:r>
+              <a:rPr lang="en-US" sz="850" b="0" dirty="0">
+                <a:latin typeface="Times New Roman" panose="02020603050405020304" pitchFamily="18" charset="0"/>
+                <a:cs typeface="Times New Roman" panose="02020603050405020304" pitchFamily="18" charset="0"/>
+              </a:rPr>
+              <a:t> ACM SIGKDD 2026. arXiv:2607.27354 - BASE PAPER</a:t>
+            </a:r>
+          </a:p>
+          <a:p>
+            <a:pPr marL="171450" lvl="1" indent="-171450" algn="l">
+              <a:buFont typeface="Arial" panose="020B0604020202020204" pitchFamily="34" charset="0"/>
+              <a:buChar char="•"/>
+            </a:pPr>
+            <a:r>
+              <a:rPr lang="en-US" sz="850" b="1" dirty="0">
+                <a:latin typeface="Times New Roman" panose="02020603050405020304" pitchFamily="18" charset="0"/>
+                <a:cs typeface="Times New Roman" panose="02020603050405020304" pitchFamily="18" charset="0"/>
+              </a:rPr>
+              <a:t>[2] Beyond Similarity: Trustworthy Memory Search for Personal AI Agents (MemGate).</a:t>
+            </a:r>
+            <a:r>
+              <a:rPr lang="en-US" sz="850" b="0" dirty="0">
+                <a:latin typeface="Times New Roman" panose="02020603050405020304" pitchFamily="18" charset="0"/>
+                <a:cs typeface="Times New Roman" panose="02020603050405020304" pitchFamily="18" charset="0"/>
+              </a:rPr>
+              <a:t> arXiv:2606.06054</a:t>
+            </a:r>
+          </a:p>
+          <a:p>
+            <a:pPr marL="171450" lvl="1" indent="-171450" algn="l">
+              <a:buFont typeface="Arial" panose="020B0604020202020204" pitchFamily="34" charset="0"/>
+              <a:buChar char="•"/>
+            </a:pPr>
+            <a:r>
+              <a:rPr lang="en-US" sz="850" b="1" dirty="0">
+                <a:latin typeface="Times New Roman" panose="02020603050405020304" pitchFamily="18" charset="0"/>
+                <a:cs typeface="Times New Roman" panose="02020603050405020304" pitchFamily="18" charset="0"/>
+              </a:rPr>
+              <a:t>[3] OP-Bench: Benchmarking Over-Personalization for Memory-Augmented Personalized Conversational Agents.</a:t>
+            </a:r>
+            <a:r>
+              <a:rPr lang="en-US" sz="850" b="0" dirty="0">
+                <a:latin typeface="Times New Roman" panose="02020603050405020304" pitchFamily="18" charset="0"/>
+                <a:cs typeface="Times New Roman" panose="02020603050405020304" pitchFamily="18" charset="0"/>
+              </a:rPr>
+              <a:t> arXiv:2601.13722</a:t>
+            </a:r>
+          </a:p>
+          <a:p>
+            <a:pPr marL="171450" lvl="1" indent="-171450" algn="l">
+              <a:buFont typeface="Arial" panose="020B0604020202020204" pitchFamily="34" charset="0"/>
+              <a:buChar char="•"/>
+            </a:pPr>
+            <a:r>
+              <a:rPr lang="en-US" sz="850" b="1" dirty="0">
+                <a:latin typeface="Times New Roman" panose="02020603050405020304" pitchFamily="18" charset="0"/>
+                <a:cs typeface="Times New Roman" panose="02020603050405020304" pitchFamily="18" charset="0"/>
+              </a:rPr>
+              <a:t>[4] Personalize-then-Store: Benchmarking and Learning Personalized Memory for Long-horizon Agents.</a:t>
+            </a:r>
+            <a:r>
+              <a:rPr lang="en-US" sz="850" b="0" dirty="0">
+                <a:latin typeface="Times New Roman" panose="02020603050405020304" pitchFamily="18" charset="0"/>
+                <a:cs typeface="Times New Roman" panose="02020603050405020304" pitchFamily="18" charset="0"/>
+              </a:rPr>
+              <a:t> KAIST. arXiv:2605.25535</a:t>
+            </a:r>
+          </a:p>
+          <a:p>
+            <a:pPr marL="171450" lvl="1" indent="-171450" algn="l">
+              <a:buFont typeface="Arial" panose="020B0604020202020204" pitchFamily="34" charset="0"/>
+              <a:buChar char="•"/>
+            </a:pPr>
+            <a:r>
+              <a:rPr lang="en-US" sz="850" b="1" dirty="0">
+                <a:latin typeface="Times New Roman" panose="02020603050405020304" pitchFamily="18" charset="0"/>
+                <a:cs typeface="Times New Roman" panose="02020603050405020304" pitchFamily="18" charset="0"/>
+              </a:rPr>
+              <a:t>[5] Externalization in LLM Agents: A Unified Review of Memory, Skills, Protocols and Harness Engineering.</a:t>
+            </a:r>
+            <a:r>
+              <a:rPr lang="en-US" sz="850" b="0" dirty="0">
+                <a:latin typeface="Times New Roman" panose="02020603050405020304" pitchFamily="18" charset="0"/>
+                <a:cs typeface="Times New Roman" panose="02020603050405020304" pitchFamily="18" charset="0"/>
+              </a:rPr>
+              <a:t> arXiv:2604.08224</a:t>
+            </a:r>
+          </a:p>
+          <a:p>
+            <a:pPr marL="171450" lvl="1" indent="-171450" algn="l">
+              <a:buFont typeface="Arial" panose="020B0604020202020204" pitchFamily="34" charset="0"/>
+              <a:buChar char="•"/>
+            </a:pPr>
+            <a:r>
+              <a:rPr lang="en-US" sz="850" b="1" dirty="0">
+                <a:latin typeface="Times New Roman" panose="02020603050405020304" pitchFamily="18" charset="0"/>
+                <a:cs typeface="Times New Roman" panose="02020603050405020304" pitchFamily="18" charset="0"/>
+              </a:rPr>
+              <a:t>[6] Li et al.</a:t>
+            </a:r>
+            <a:r>
+              <a:rPr lang="en-US" sz="850" b="0" dirty="0">
+                <a:latin typeface="Times New Roman" panose="02020603050405020304" pitchFamily="18" charset="0"/>
+                <a:cs typeface="Times New Roman" panose="02020603050405020304" pitchFamily="18" charset="0"/>
+              </a:rPr>
+              <a:t> Personal LLM Agents: Insights and Survey. Tsinghua AIR. arXiv:2401.05459</a:t>
+            </a:r>
+          </a:p>
+          <a:p>
+            <a:pPr marL="171450" lvl="1" indent="-171450" algn="l">
+              <a:buFont typeface="Arial" panose="020B0604020202020204" pitchFamily="34" charset="0"/>
+              <a:buChar char="•"/>
+            </a:pPr>
+            <a:r>
+              <a:rPr lang="en-US" sz="850" b="1" dirty="0">
+                <a:latin typeface="Times New Roman" panose="02020603050405020304" pitchFamily="18" charset="0"/>
+                <a:cs typeface="Times New Roman" panose="02020603050405020304" pitchFamily="18" charset="0"/>
+              </a:rPr>
+              <a:t>[7] A Survey on the Memory Mechanism of LLM-based Agents.</a:t>
+            </a:r>
+            <a:r>
+              <a:rPr lang="en-US" sz="850" b="0" dirty="0">
+                <a:latin typeface="Times New Roman" panose="02020603050405020304" pitchFamily="18" charset="0"/>
+                <a:cs typeface="Times New Roman" panose="02020603050405020304" pitchFamily="18" charset="0"/>
+              </a:rPr>
+              <a:t> ACM TOIS 43(6), 2025. DOI 10.1145/3748302</a:t>
+            </a:r>
+          </a:p>
+          <a:p>
+            <a:pPr marL="171450" lvl="1" indent="-171450" algn="l">
+              <a:buFont typeface="Arial" panose="020B0604020202020204" pitchFamily="34" charset="0"/>
+              <a:buChar char="•"/>
+            </a:pPr>
+            <a:r>
+              <a:rPr lang="en-US" sz="850" b="1" dirty="0">
+                <a:latin typeface="Times New Roman" panose="02020603050405020304" pitchFamily="18" charset="0"/>
+                <a:cs typeface="Times New Roman" panose="02020603050405020304" pitchFamily="18" charset="0"/>
+              </a:rPr>
+              <a:t>[8] Mem0: Building Production-Ready AI Agents with Scalable Long-Term Memory.</a:t>
+            </a:r>
+            <a:r>
+              <a:rPr lang="en-US" sz="850" b="0" dirty="0">
+                <a:latin typeface="Times New Roman" panose="02020603050405020304" pitchFamily="18" charset="0"/>
+                <a:cs typeface="Times New Roman" panose="02020603050405020304" pitchFamily="18" charset="0"/>
+              </a:rPr>
+              <a:t> ECAI 2025. arXiv:2504.19413</a:t>
+            </a:r>
+          </a:p>
+          <a:p>
+            <a:pPr marL="171450" lvl="1" indent="-171450" algn="l">
+              <a:buFont typeface="Arial" panose="020B0604020202020204" pitchFamily="34" charset="0"/>
+              <a:buChar char="•"/>
+            </a:pPr>
+            <a:r>
+              <a:rPr lang="en-US" sz="850" b="1" dirty="0">
+                <a:latin typeface="Times New Roman" panose="02020603050405020304" pitchFamily="18" charset="0"/>
+                <a:cs typeface="Times New Roman" panose="02020603050405020304" pitchFamily="18" charset="0"/>
+              </a:rPr>
+              <a:t>[9] Corrective Retrieval Augmented Generation (CRAG)</a:t>
+            </a:r>
+            <a:r>
+              <a:rPr lang="en-US" sz="850" b="0" dirty="0">
+                <a:latin typeface="Times New Roman" panose="02020603050405020304" pitchFamily="18" charset="0"/>
+                <a:cs typeface="Times New Roman" panose="02020603050405020304" pitchFamily="18" charset="0"/>
+              </a:rPr>
+              <a:t> and Self-RAG - thresholded and self-reflective retrieval.</a:t>
+            </a:r>
+          </a:p>
+          <a:p>
+            <a:pPr marL="171450" lvl="1" indent="-171450" algn="l">
+              <a:buFont typeface="Arial" panose="020B0604020202020204" pitchFamily="34" charset="0"/>
+              <a:buChar char="•"/>
+            </a:pPr>
+            <a:r>
+              <a:rPr lang="en-US" sz="850" b="1" dirty="0">
+                <a:latin typeface="Times New Roman" panose="02020603050405020304" pitchFamily="18" charset="0"/>
+                <a:cs typeface="Times New Roman" panose="02020603050405020304" pitchFamily="18" charset="0"/>
+              </a:rPr>
+              <a:t>[10] Microsoft.</a:t>
+            </a:r>
+            <a:r>
+              <a:rPr lang="en-US" sz="850" b="0" dirty="0">
+                <a:latin typeface="Times New Roman" panose="02020603050405020304" pitchFamily="18" charset="0"/>
+                <a:cs typeface="Times New Roman" panose="02020603050405020304" pitchFamily="18" charset="0"/>
+              </a:rPr>
+              <a:t> UI Automation Overview, Win32 Accessibility documentation; Tauri v2 documentation; Windows AI Platform, Build 2026.</a:t>
             </a:r>
           </a:p>
         </p:txBody>
@@ -26849,7 +30096,7 @@
                 <a:latin typeface="Times New Roman" panose="02020603050405020304" pitchFamily="18" charset="0"/>
                 <a:cs typeface="Times New Roman" panose="02020603050405020304" pitchFamily="18" charset="0"/>
               </a:rPr>
-              <a:t> / 29</a:t>
+              <a:t> / 33</a:t>
             </a:r>
             <a:endParaRPr dirty="0">
               <a:latin typeface="Times New Roman" panose="02020603050405020304" pitchFamily="18" charset="0"/>
@@ -26952,7 +30199,7 @@
                 <a:latin typeface="Times New Roman" panose="02020603050405020304" pitchFamily="18" charset="0"/>
                 <a:cs typeface="Times New Roman" panose="02020603050405020304" pitchFamily="18" charset="0"/>
               </a:rPr>
-              <a:t> It was simply locked inside a session, in a product that will never share it. That is the problem PERCH exists to remove.</a:t>
+              <a:t> It was locked inside a session, in a product that will never share it. That is what PERCH exists to remove.</a:t>
             </a:r>
           </a:p>
         </p:txBody>
@@ -27535,7 +30782,7 @@
                 <a:latin typeface="Times New Roman" panose="02020603050405020304" pitchFamily="18" charset="0"/>
                 <a:cs typeface="Times New Roman" panose="02020603050405020304" pitchFamily="18" charset="0"/>
               </a:rPr>
-              <a:t> / 29</a:t>
+              <a:t> / 33</a:t>
             </a:r>
             <a:endParaRPr dirty="0">
               <a:latin typeface="Times New Roman" panose="02020603050405020304" pitchFamily="18" charset="0"/>
@@ -27578,7 +30825,7 @@
                 <a:latin typeface="Times New Roman" panose="02020603050405020304" pitchFamily="18" charset="0"/>
                 <a:cs typeface="Times New Roman" panose="02020603050405020304" pitchFamily="18" charset="0"/>
               </a:rPr>
-              <a:t>The vulnerability, in one sentence:</a:t>
+              <a:t>In one sentence:</a:t>
             </a:r>
             <a:r>
               <a:rPr lang="en-US" sz="1050" b="0" dirty="0">
@@ -27598,14 +30845,14 @@
                 <a:latin typeface="Times New Roman" panose="02020603050405020304" pitchFamily="18" charset="0"/>
                 <a:cs typeface="Times New Roman" panose="02020603050405020304" pitchFamily="18" charset="0"/>
               </a:rPr>
-              <a:t>This is measurable, not rhetorical.</a:t>
+              <a:t>This is measured, not asserted.</a:t>
             </a:r>
             <a:r>
               <a:rPr lang="en-US" sz="1050" b="0" dirty="0">
                 <a:latin typeface="Times New Roman" panose="02020603050405020304" pitchFamily="18" charset="0"/>
                 <a:cs typeface="Times New Roman" panose="02020603050405020304" pitchFamily="18" charset="0"/>
               </a:rPr>
-              <a:t> PAUSE (ACM SIGKDD 2026) found that state-of-the-art proprietary models fail to reach 70% task completion on scenarios requiring stateful reasoning and configuration awareness.</a:t>
+              <a:t> PAUSE (ACM SIGKDD 2026) found state-of-the-art proprietary models fail to reach 70% task completion on scenarios requiring stateful reasoning and configuration awareness.</a:t>
             </a:r>
           </a:p>
           <a:p>
@@ -27625,7 +30872,7 @@
                 <a:latin typeface="Times New Roman" panose="02020603050405020304" pitchFamily="18" charset="0"/>
                 <a:cs typeface="Times New Roman" panose="02020603050405020304" pitchFamily="18" charset="0"/>
               </a:rPr>
-              <a:t> the failure is not the model's reasoning. The failure is the state around the model - persistent knowledge of who the user is, what they are working on, and what constraints they operate under.</a:t>
+              <a:t> the failure is not the model's reasoning. It is the state around the model - persistent knowledge of who the user is and what they are working on.</a:t>
             </a:r>
           </a:p>
           <a:p>
@@ -27638,7 +30885,7 @@
                 <a:latin typeface="Times New Roman" panose="02020603050405020304" pitchFamily="18" charset="0"/>
                 <a:cs typeface="Times New Roman" panose="02020603050405020304" pitchFamily="18" charset="0"/>
               </a:rPr>
-              <a:t>The second half of the problem is location.</a:t>
+              <a:t>The second half is location.</a:t>
             </a:r>
             <a:r>
               <a:rPr lang="en-US" sz="1050" b="0" dirty="0">
@@ -27658,7 +30905,7 @@
                 <a:latin typeface="Times New Roman" panose="02020603050405020304" pitchFamily="18" charset="0"/>
                 <a:cs typeface="Times New Roman" panose="02020603050405020304" pitchFamily="18" charset="0"/>
               </a:rPr>
-              <a:t>So the problem statement is two-part:</a:t>
+              <a:t>So the problem is two-part:</a:t>
             </a:r>
             <a:r>
               <a:rPr lang="en-US" sz="1050" b="0" dirty="0">
@@ -28248,7 +31495,7 @@
                 <a:latin typeface="Times New Roman" panose="02020603050405020304" pitchFamily="18" charset="0"/>
                 <a:cs typeface="Times New Roman" panose="02020603050405020304" pitchFamily="18" charset="0"/>
               </a:rPr>
-              <a:t> / 29</a:t>
+              <a:t> / 33</a:t>
             </a:r>
             <a:endParaRPr dirty="0">
               <a:latin typeface="Times New Roman" panose="02020603050405020304" pitchFamily="18" charset="0"/>
@@ -28287,18 +31534,18 @@
               <a:buChar char="•"/>
             </a:pPr>
             <a:r>
-              <a:rPr lang="en-US" sz="1150" b="1" dirty="0">
+              <a:rPr lang="en-US" sz="1050" b="1" dirty="0">
                 <a:latin typeface="Times New Roman" panose="02020603050405020304" pitchFamily="18" charset="0"/>
                 <a:cs typeface="Times New Roman" panose="02020603050405020304" pitchFamily="18" charset="0"/>
               </a:rPr>
               <a:t>ACM measurement.</a:t>
             </a:r>
             <a:r>
-              <a:rPr lang="en-US" sz="1150" b="0" dirty="0">
-                <a:latin typeface="Times New Roman" panose="02020603050405020304" pitchFamily="18" charset="0"/>
-                <a:cs typeface="Times New Roman" panose="02020603050405020304" pitchFamily="18" charset="0"/>
-              </a:rPr>
-              <a:t> PAUSE, KDD 2026: frontier models below 70% task completion when the task requires reasoning over persistent user state. An ACM 2026 number, not a blog claim.</a:t>
+              <a:rPr lang="en-US" sz="1050" b="0" dirty="0">
+                <a:latin typeface="Times New Roman" panose="02020603050405020304" pitchFamily="18" charset="0"/>
+                <a:cs typeface="Times New Roman" panose="02020603050405020304" pitchFamily="18" charset="0"/>
+              </a:rPr>
+              <a:t> PAUSE, KDD 2026: frontier models below 70% task completion when the task requires reasoning over persistent user state.</a:t>
             </a:r>
           </a:p>
           <a:p>
@@ -28307,18 +31554,18 @@
               <a:buChar char="•"/>
             </a:pPr>
             <a:r>
-              <a:rPr lang="en-US" sz="1150" b="1" dirty="0">
-                <a:latin typeface="Times New Roman" panose="02020603050405020304" pitchFamily="18" charset="0"/>
-                <a:cs typeface="Times New Roman" panose="02020603050405020304" pitchFamily="18" charset="0"/>
-              </a:rPr>
-              <a:t>Established research category.</a:t>
-            </a:r>
-            <a:r>
-              <a:rPr lang="en-US" sz="1150" b="0" dirty="0">
-                <a:latin typeface="Times New Roman" panose="02020603050405020304" pitchFamily="18" charset="0"/>
-                <a:cs typeface="Times New Roman" panose="02020603050405020304" pitchFamily="18" charset="0"/>
-              </a:rPr>
-              <a:t> Personal LLM Agents (Tsinghua AIR) defines agents deeply integrated with personal data and personal devices, and names context sensing and memorization as fundamental unsolved capabilities.</a:t>
+              <a:rPr lang="en-US" sz="1050" b="1" dirty="0">
+                <a:latin typeface="Times New Roman" panose="02020603050405020304" pitchFamily="18" charset="0"/>
+                <a:cs typeface="Times New Roman" panose="02020603050405020304" pitchFamily="18" charset="0"/>
+              </a:rPr>
+              <a:t>An established research category.</a:t>
+            </a:r>
+            <a:r>
+              <a:rPr lang="en-US" sz="1050" b="0" dirty="0">
+                <a:latin typeface="Times New Roman" panose="02020603050405020304" pitchFamily="18" charset="0"/>
+                <a:cs typeface="Times New Roman" panose="02020603050405020304" pitchFamily="18" charset="0"/>
+              </a:rPr>
+              <a:t> Personal LLM Agents (Tsinghua AIR) defines agents deeply integrated with personal data and devices, naming context sensing and memorization as fundamental unsolved capabilities.</a:t>
             </a:r>
           </a:p>
           <a:p>
@@ -28327,18 +31574,18 @@
               <a:buChar char="•"/>
             </a:pPr>
             <a:r>
-              <a:rPr lang="en-US" sz="1150" b="1" dirty="0">
-                <a:latin typeface="Times New Roman" panose="02020603050405020304" pitchFamily="18" charset="0"/>
-                <a:cs typeface="Times New Roman" panose="02020603050405020304" pitchFamily="18" charset="0"/>
-              </a:rPr>
-              <a:t>Market behaviour.</a:t>
-            </a:r>
-            <a:r>
-              <a:rPr lang="en-US" sz="1150" b="0" dirty="0">
-                <a:latin typeface="Times New Roman" panose="02020603050405020304" pitchFamily="18" charset="0"/>
-                <a:cs typeface="Times New Roman" panose="02020603050405020304" pitchFamily="18" charset="0"/>
-              </a:rPr>
-              <a:t> $70-110/month across four assistants; 15-30 minutes lost per switch; market share moving 15 points in a year.</a:t>
+              <a:rPr lang="en-US" sz="1050" b="1" dirty="0">
+                <a:latin typeface="Times New Roman" panose="02020603050405020304" pitchFamily="18" charset="0"/>
+                <a:cs typeface="Times New Roman" panose="02020603050405020304" pitchFamily="18" charset="0"/>
+              </a:rPr>
+              <a:t>And a warning we take seriously.</a:t>
+            </a:r>
+            <a:r>
+              <a:rPr lang="en-US" sz="1050" b="0" dirty="0">
+                <a:latin typeface="Times New Roman" panose="02020603050405020304" pitchFamily="18" charset="0"/>
+                <a:cs typeface="Times New Roman" panose="02020603050405020304" pitchFamily="18" charset="0"/>
+              </a:rPr>
+              <a:t> OP-Bench (2026) measures over-personalisation and finds memory-augmented assistants score 26.2% to 61.1% WORSE than memory-free baselines. Naive memory injection makes an assistant worse than having no memory at all.</a:t>
             </a:r>
           </a:p>
           <a:p>
@@ -28347,18 +31594,18 @@
               <a:buChar char="•"/>
             </a:pPr>
             <a:r>
-              <a:rPr lang="en-US" sz="1150" b="1" dirty="0">
-                <a:latin typeface="Times New Roman" panose="02020603050405020304" pitchFamily="18" charset="0"/>
-                <a:cs typeface="Times New Roman" panose="02020603050405020304" pitchFamily="18" charset="0"/>
-              </a:rPr>
-              <a:t>Incumbent behaviour.</a:t>
-            </a:r>
-            <a:r>
-              <a:rPr lang="en-US" sz="1150" b="0" dirty="0">
-                <a:latin typeface="Times New Roman" panose="02020603050405020304" pitchFamily="18" charset="0"/>
-                <a:cs typeface="Times New Roman" panose="02020603050405020304" pitchFamily="18" charset="0"/>
-              </a:rPr>
-              <a:t> Highlight AI raised $50M for exactly this position and pivoted to enterprise team tooling in March 2026. The individual user is no longer their product.</a:t>
+              <a:rPr lang="en-US" sz="1050" b="1" dirty="0">
+                <a:latin typeface="Times New Roman" panose="02020603050405020304" pitchFamily="18" charset="0"/>
+                <a:cs typeface="Times New Roman" panose="02020603050405020304" pitchFamily="18" charset="0"/>
+              </a:rPr>
+              <a:t>Market behaviour.</a:t>
+            </a:r>
+            <a:r>
+              <a:rPr lang="en-US" sz="1050" b="0" dirty="0">
+                <a:latin typeface="Times New Roman" panose="02020603050405020304" pitchFamily="18" charset="0"/>
+                <a:cs typeface="Times New Roman" panose="02020603050405020304" pitchFamily="18" charset="0"/>
+              </a:rPr>
+              <a:t> $70-110/month across four assistants; 15-30 minutes lost per switch; market share moving 15 points in a year.</a:t>
             </a:r>
           </a:p>
           <a:p>
@@ -28367,18 +31614,18 @@
               <a:buChar char="•"/>
             </a:pPr>
             <a:r>
-              <a:rPr lang="en-US" sz="1150" b="1" dirty="0">
-                <a:latin typeface="Times New Roman" panose="02020603050405020304" pitchFamily="18" charset="0"/>
-                <a:cs typeface="Times New Roman" panose="02020603050405020304" pitchFamily="18" charset="0"/>
-              </a:rPr>
-              <a:t>Capability now exists that did not in 2024.</a:t>
-            </a:r>
-            <a:r>
-              <a:rPr lang="en-US" sz="1150" b="0" dirty="0">
-                <a:latin typeface="Times New Roman" panose="02020603050405020304" pitchFamily="18" charset="0"/>
-                <a:cs typeface="Times New Roman" panose="02020603050405020304" pitchFamily="18" charset="0"/>
-              </a:rPr>
-              <a:t> Qwen3 4B runs in ~3 GB and Qwen3 8B in ~5-6 GB quantised. A genuinely useful local model now fits on an ordinary student laptop.</a:t>
+              <a:rPr lang="en-US" sz="1050" b="1" dirty="0">
+                <a:latin typeface="Times New Roman" panose="02020603050405020304" pitchFamily="18" charset="0"/>
+                <a:cs typeface="Times New Roman" panose="02020603050405020304" pitchFamily="18" charset="0"/>
+              </a:rPr>
+              <a:t>Capability that did not exist in 2024.</a:t>
+            </a:r>
+            <a:r>
+              <a:rPr lang="en-US" sz="1050" b="0" dirty="0">
+                <a:latin typeface="Times New Roman" panose="02020603050405020304" pitchFamily="18" charset="0"/>
+                <a:cs typeface="Times New Roman" panose="02020603050405020304" pitchFamily="18" charset="0"/>
+              </a:rPr>
+              <a:t> Qwen3 4B runs in ~3 GB and Qwen3 8B in ~5-6 GB quantised, so a genuinely useful local model now fits on an ordinary student laptop.</a:t>
             </a:r>
           </a:p>
         </p:txBody>
@@ -28626,7 +31873,7 @@
                 <a:cs typeface="Times New Roman" panose="02020603050405020304" pitchFamily="18" charset="0"/>
                 <a:sym typeface="Arial"/>
               </a:rPr>
-              <a:t>Why This Position Is Open - and Stays Open</a:t>
+              <a:t>Can We Use the Subscriptions You Already Pay For?</a:t>
             </a:r>
           </a:p>
         </p:txBody>
@@ -28961,7 +32208,7 @@
                 <a:latin typeface="Times New Roman" panose="02020603050405020304" pitchFamily="18" charset="0"/>
                 <a:cs typeface="Times New Roman" panose="02020603050405020304" pitchFamily="18" charset="0"/>
               </a:rPr>
-              <a:t> / 29</a:t>
+              <a:t> / 33</a:t>
             </a:r>
             <a:endParaRPr dirty="0">
               <a:latin typeface="Times New Roman" panose="02020603050405020304" pitchFamily="18" charset="0"/>
@@ -29000,18 +32247,18 @@
               <a:buChar char="•"/>
             </a:pPr>
             <a:r>
-              <a:rPr lang="en-US" sz="1050" b="1" dirty="0">
-                <a:latin typeface="Times New Roman" panose="02020603050405020304" pitchFamily="18" charset="0"/>
-                <a:cs typeface="Times New Roman" panose="02020603050405020304" pitchFamily="18" charset="0"/>
-              </a:rPr>
-              <a:t>A neutral context layer is against every incumbent's business model.</a:t>
-            </a:r>
-            <a:r>
-              <a:rPr lang="en-US" sz="1050" b="0" dirty="0">
-                <a:latin typeface="Times New Roman" panose="02020603050405020304" pitchFamily="18" charset="0"/>
-                <a:cs typeface="Times New Roman" panose="02020603050405020304" pitchFamily="18" charset="0"/>
-              </a:rPr>
-              <a:t> OpenAI wants you inside ChatGPT. Google wants you inside Gemini. Microsoft wants you inside Copilot. Apple wants you on a Mac.</a:t>
+              <a:rPr lang="en-US" sz="950" b="1" dirty="0">
+                <a:latin typeface="Times New Roman" panose="02020603050405020304" pitchFamily="18" charset="0"/>
+                <a:cs typeface="Times New Roman" panose="02020603050405020304" pitchFamily="18" charset="0"/>
+              </a:rPr>
+              <a:t>The ideal design is impossible.</a:t>
+            </a:r>
+            <a:r>
+              <a:rPr lang="en-US" sz="950" b="0" dirty="0">
+                <a:latin typeface="Times New Roman" panose="02020603050405020304" pitchFamily="18" charset="0"/>
+                <a:cs typeface="Times New Roman" panose="02020603050405020304" pitchFamily="18" charset="0"/>
+              </a:rPr>
+              <a:t> There is no cross-vendor memory API and there will not be one. Memory is the switching cost, so a vendor exposing it would be funding its own churn. There is no standard, and no company exports health or employment content to a third party.</a:t>
             </a:r>
           </a:p>
           <a:p>
@@ -29020,18 +32267,18 @@
               <a:buChar char="•"/>
             </a:pPr>
             <a:r>
-              <a:rPr lang="en-US" sz="1050" b="1" dirty="0">
-                <a:latin typeface="Times New Roman" panose="02020603050405020304" pitchFamily="18" charset="0"/>
-                <a:cs typeface="Times New Roman" panose="02020603050405020304" pitchFamily="18" charset="0"/>
-              </a:rPr>
-              <a:t>A layer whose entire value is making all of your AIs know you can only be built by someone with no model to sell.</a:t>
-            </a:r>
-            <a:r>
-              <a:rPr lang="en-US" sz="1050" b="0" dirty="0">
-                <a:latin typeface="Times New Roman" panose="02020603050405020304" pitchFamily="18" charset="0"/>
-                <a:cs typeface="Times New Roman" panose="02020603050405020304" pitchFamily="18" charset="0"/>
-              </a:rPr>
-              <a:t> That is the structural reason the position is empty.</a:t>
+              <a:rPr lang="en-US" sz="950" b="1" dirty="0">
+                <a:latin typeface="Times New Roman" panose="02020603050405020304" pitchFamily="18" charset="0"/>
+                <a:cs typeface="Times New Roman" panose="02020603050405020304" pitchFamily="18" charset="0"/>
+              </a:rPr>
+              <a:t>Routing our model calls through your ChatGPT Plus or Claude Pro subscription: NO.</a:t>
+            </a:r>
+            <a:r>
+              <a:rPr lang="en-US" sz="950" b="0" dirty="0">
+                <a:latin typeface="Times New Roman" panose="02020603050405020304" pitchFamily="18" charset="0"/>
+                <a:cs typeface="Times New Roman" panose="02020603050405020304" pitchFamily="18" charset="0"/>
+              </a:rPr>
+              <a:t> Subscriptions cover the vendor's own client. API access is separately billed with a separate key. There is no supported path, and unsupported ones violate the terms.</a:t>
             </a:r>
           </a:p>
           <a:p>
@@ -29040,18 +32287,11 @@
               <a:buChar char="•"/>
             </a:pPr>
             <a:r>
-              <a:rPr lang="en-US" sz="1050" b="1" dirty="0">
-                <a:latin typeface="Times New Roman" panose="02020603050405020304" pitchFamily="18" charset="0"/>
-                <a:cs typeface="Times New Roman" panose="02020603050405020304" pitchFamily="18" charset="0"/>
-              </a:rPr>
-              <a:t>The one company that tried it left.</a:t>
-            </a:r>
-            <a:r>
-              <a:rPr lang="en-US" sz="1050" b="0" dirty="0">
-                <a:latin typeface="Times New Roman" panose="02020603050405020304" pitchFamily="18" charset="0"/>
-                <a:cs typeface="Times New Roman" panose="02020603050405020304" pitchFamily="18" charset="0"/>
-              </a:rPr>
-              <a:t> Highlight AI, $50M and 500,000+ users, repositioned in March 2026 as a shared intelligence layer for teams - meeting preparation, attendee insights, decision summaries.</a:t>
+              <a:rPr lang="en-US" sz="950" b="1" dirty="0">
+                <a:latin typeface="Times New Roman" panose="02020603050405020304" pitchFamily="18" charset="0"/>
+                <a:cs typeface="Times New Roman" panose="02020603050405020304" pitchFamily="18" charset="0"/>
+              </a:rPr>
+              <a:t>Pulling your conversation history out of them: YES, officially, on every major platform.</a:t>
             </a:r>
           </a:p>
           <a:p>
@@ -29060,18 +32300,18 @@
               <a:buChar char="•"/>
             </a:pPr>
             <a:r>
-              <a:rPr lang="en-US" sz="1050" b="1" dirty="0">
-                <a:latin typeface="Times New Roman" panose="02020603050405020304" pitchFamily="18" charset="0"/>
-                <a:cs typeface="Times New Roman" panose="02020603050405020304" pitchFamily="18" charset="0"/>
-              </a:rPr>
-              <a:t>Microsoft is building the same primitive but gating it.</a:t>
-            </a:r>
-            <a:r>
-              <a:rPr lang="en-US" sz="1050" b="0" dirty="0">
-                <a:latin typeface="Times New Roman" panose="02020603050405020304" pitchFamily="18" charset="0"/>
-                <a:cs typeface="Times New Roman" panose="02020603050405020304" pitchFamily="18" charset="0"/>
-              </a:rPr>
-              <a:t> Windows 11 Click to Do performs AI actions on selected screen content, but requires a Copilot+ PC with a dedicated NPU. Most laptops in India do not have one.</a:t>
+              <a:rPr lang="en-US" sz="950" b="1" dirty="0">
+                <a:latin typeface="Times New Roman" panose="02020603050405020304" pitchFamily="18" charset="0"/>
+                <a:cs typeface="Times New Roman" panose="02020603050405020304" pitchFamily="18" charset="0"/>
+              </a:rPr>
+              <a:t>ChatGPT</a:t>
+            </a:r>
+            <a:r>
+              <a:rPr lang="en-US" sz="950" b="0" dirty="0">
+                <a:latin typeface="Times New Roman" panose="02020603050405020304" pitchFamily="18" charset="0"/>
+                <a:cs typeface="Times New Roman" panose="02020603050405020304" pitchFamily="18" charset="0"/>
+              </a:rPr>
+              <a:t> - Settings, Data Controls, Export data. Emails a ZIP containing conversations.json.</a:t>
             </a:r>
           </a:p>
           <a:p>
@@ -29080,18 +32320,58 @@
               <a:buChar char="•"/>
             </a:pPr>
             <a:r>
-              <a:rPr lang="en-US" sz="1050" b="1" dirty="0">
-                <a:latin typeface="Times New Roman" panose="02020603050405020304" pitchFamily="18" charset="0"/>
-                <a:cs typeface="Times New Roman" panose="02020603050405020304" pitchFamily="18" charset="0"/>
-              </a:rPr>
-              <a:t>We are not claiming nobody thought of this.</a:t>
-            </a:r>
-            <a:r>
-              <a:rPr lang="en-US" sz="1050" b="0" dirty="0">
-                <a:latin typeface="Times New Roman" panose="02020603050405020304" pitchFamily="18" charset="0"/>
-                <a:cs typeface="Times New Roman" panose="02020603050405020304" pitchFamily="18" charset="0"/>
-              </a:rPr>
-              <a:t> We are claiming nobody with a model to sell can afford to build it, and the one neutral player walked away from individual users.</a:t>
+              <a:rPr lang="en-US" sz="950" b="1" dirty="0">
+                <a:latin typeface="Times New Roman" panose="02020603050405020304" pitchFamily="18" charset="0"/>
+                <a:cs typeface="Times New Roman" panose="02020603050405020304" pitchFamily="18" charset="0"/>
+              </a:rPr>
+              <a:t>Claude</a:t>
+            </a:r>
+            <a:r>
+              <a:rPr lang="en-US" sz="950" b="0" dirty="0">
+                <a:latin typeface="Times New Roman" panose="02020603050405020304" pitchFamily="18" charset="0"/>
+                <a:cs typeface="Times New Roman" panose="02020603050405020304" pitchFamily="18" charset="0"/>
+              </a:rPr>
+              <a:t> - Settings, Privacy, request data export. Emails a JSON archive.</a:t>
+            </a:r>
+          </a:p>
+          <a:p>
+            <a:pPr marL="171450" lvl="1" indent="-171450" algn="l">
+              <a:buFont typeface="Arial" panose="020B0604020202020204" pitchFamily="34" charset="0"/>
+              <a:buChar char="•"/>
+            </a:pPr>
+            <a:r>
+              <a:rPr lang="en-US" sz="950" b="1" dirty="0">
+                <a:latin typeface="Times New Roman" panose="02020603050405020304" pitchFamily="18" charset="0"/>
+                <a:cs typeface="Times New Roman" panose="02020603050405020304" pitchFamily="18" charset="0"/>
+              </a:rPr>
+              <a:t>Gemini</a:t>
+            </a:r>
+            <a:r>
+              <a:rPr lang="en-US" sz="950" b="0" dirty="0">
+                <a:latin typeface="Times New Roman" panose="02020603050405020304" pitchFamily="18" charset="0"/>
+                <a:cs typeface="Times New Roman" panose="02020603050405020304" pitchFamily="18" charset="0"/>
+              </a:rPr>
+              <a:t> - Google Takeout, select Gemini only. Emails JSON within hours.</a:t>
+            </a:r>
+          </a:p>
+          <a:p>
+            <a:pPr marL="171450" lvl="1" indent="-171450" algn="l">
+              <a:buFont typeface="Arial" panose="020B0604020202020204" pitchFamily="34" charset="0"/>
+              <a:buChar char="•"/>
+            </a:pPr>
+            <a:r>
+              <a:rPr lang="en-US" sz="950" b="1" dirty="0">
+                <a:latin typeface="Times New Roman" panose="02020603050405020304" pitchFamily="18" charset="0"/>
+                <a:cs typeface="Times New Roman" panose="02020603050405020304" pitchFamily="18" charset="0"/>
+              </a:rPr>
+              <a:t>That export button is the bridge.</a:t>
+            </a:r>
+            <a:r>
+              <a:rPr lang="en-US" sz="950" b="0" dirty="0">
+                <a:latin typeface="Times New Roman" panose="02020603050405020304" pitchFamily="18" charset="0"/>
+                <a:cs typeface="Times New Roman" panose="02020603050405020304" pitchFamily="18" charset="0"/>
+              </a:rPr>
+              <a:t> It is a feature of the subscription you already pay for, it is required by regulators, and it is the only ToS-legitimate way to move a vendor's memory of you into something you own. PERCH parses those archives locally.</a:t>
             </a:r>
           </a:p>
         </p:txBody>
@@ -29339,7 +32619,7 @@
                 <a:cs typeface="Times New Roman" panose="02020603050405020304" pitchFamily="18" charset="0"/>
                 <a:sym typeface="Arial"/>
               </a:rPr>
-              <a:t>What the Expensive Failures Taught Us</a:t>
+              <a:t>Why This Position Is Open - and the Microsoft Objection</a:t>
             </a:r>
           </a:p>
         </p:txBody>
@@ -29674,7 +32954,7 @@
                 <a:latin typeface="Times New Roman" panose="02020603050405020304" pitchFamily="18" charset="0"/>
                 <a:cs typeface="Times New Roman" panose="02020603050405020304" pitchFamily="18" charset="0"/>
               </a:rPr>
-              <a:t> / 29</a:t>
+              <a:t> / 33</a:t>
             </a:r>
             <a:endParaRPr dirty="0">
               <a:latin typeface="Times New Roman" panose="02020603050405020304" pitchFamily="18" charset="0"/>
@@ -29713,18 +32993,18 @@
               <a:buChar char="•"/>
             </a:pPr>
             <a:r>
-              <a:rPr lang="en-US" sz="1150" b="1" dirty="0">
-                <a:latin typeface="Times New Roman" panose="02020603050405020304" pitchFamily="18" charset="0"/>
-                <a:cs typeface="Times New Roman" panose="02020603050405020304" pitchFamily="18" charset="0"/>
-              </a:rPr>
-              <a:t>Humane AI Pin:</a:t>
-            </a:r>
-            <a:r>
-              <a:rPr lang="en-US" sz="1150" b="0" dirty="0">
-                <a:latin typeface="Times New Roman" panose="02020603050405020304" pitchFamily="18" charset="0"/>
-                <a:cs typeface="Times New Roman" panose="02020603050405020304" pitchFamily="18" charset="0"/>
-              </a:rPr>
-              <a:t> raised $230M, shipped fewer than 10,000 units, sold to HP for $116M.</a:t>
+              <a:rPr lang="en-US" sz="1000" b="1" dirty="0">
+                <a:latin typeface="Times New Roman" panose="02020603050405020304" pitchFamily="18" charset="0"/>
+                <a:cs typeface="Times New Roman" panose="02020603050405020304" pitchFamily="18" charset="0"/>
+              </a:rPr>
+              <a:t>A neutral context layer is against every model vendor's business model.</a:t>
+            </a:r>
+            <a:r>
+              <a:rPr lang="en-US" sz="1000" b="0" dirty="0">
+                <a:latin typeface="Times New Roman" panose="02020603050405020304" pitchFamily="18" charset="0"/>
+                <a:cs typeface="Times New Roman" panose="02020603050405020304" pitchFamily="18" charset="0"/>
+              </a:rPr>
+              <a:t> OpenAI wants you in ChatGPT, Google in Gemini, Microsoft in Copilot, Apple on a Mac.</a:t>
             </a:r>
           </a:p>
           <a:p>
@@ -29733,18 +33013,18 @@
               <a:buChar char="•"/>
             </a:pPr>
             <a:r>
-              <a:rPr lang="en-US" sz="1150" b="1" dirty="0">
-                <a:latin typeface="Times New Roman" panose="02020603050405020304" pitchFamily="18" charset="0"/>
-                <a:cs typeface="Times New Roman" panose="02020603050405020304" pitchFamily="18" charset="0"/>
-              </a:rPr>
-              <a:t>Rabbit R1:</a:t>
-            </a:r>
-            <a:r>
-              <a:rPr lang="en-US" sz="1150" b="0" dirty="0">
-                <a:latin typeface="Times New Roman" panose="02020603050405020304" pitchFamily="18" charset="0"/>
-                <a:cs typeface="Times New Roman" panose="02020603050405020304" pitchFamily="18" charset="0"/>
-              </a:rPr>
-              <a:t> sold 100,000 units, then took mass returns.</a:t>
+              <a:rPr lang="en-US" sz="1000" b="1" dirty="0">
+                <a:latin typeface="Times New Roman" panose="02020603050405020304" pitchFamily="18" charset="0"/>
+                <a:cs typeface="Times New Roman" panose="02020603050405020304" pitchFamily="18" charset="0"/>
+              </a:rPr>
+              <a:t>The real objection, stated first and honestly.</a:t>
+            </a:r>
+            <a:r>
+              <a:rPr lang="en-US" sz="1000" b="0" dirty="0">
+                <a:latin typeface="Times New Roman" panose="02020603050405020304" pitchFamily="18" charset="0"/>
+                <a:cs typeface="Times New Roman" panose="02020603050405020304" pitchFamily="18" charset="0"/>
+              </a:rPr>
+              <a:t> At Build 2026 Microsoft announced the Windows AI Platform: a Copilot Runtime, an AI Orchestrator, and a Windows Semantic Index - a personal semantic index enabling persistent agent memory and context. That is our Layer 3, being built into the operating system.</a:t>
             </a:r>
           </a:p>
           <a:p>
@@ -29753,18 +33033,18 @@
               <a:buChar char="•"/>
             </a:pPr>
             <a:r>
-              <a:rPr lang="en-US" sz="1150" b="1" dirty="0">
-                <a:latin typeface="Times New Roman" panose="02020603050405020304" pitchFamily="18" charset="0"/>
-                <a:cs typeface="Times New Roman" panose="02020603050405020304" pitchFamily="18" charset="0"/>
-              </a:rPr>
-              <a:t>Rewind AI:</a:t>
-            </a:r>
-            <a:r>
-              <a:rPr lang="en-US" sz="1150" b="0" dirty="0">
-                <a:latin typeface="Times New Roman" panose="02020603050405020304" pitchFamily="18" charset="0"/>
-                <a:cs typeface="Times New Roman" panose="02020603050405020304" pitchFamily="18" charset="0"/>
-              </a:rPr>
-              <a:t> acquired by Meta as Limitless; the Mac app shut down 19 December 2025 and EU/UK access was cut immediately.</a:t>
+              <a:rPr lang="en-US" sz="1000" b="1" dirty="0">
+                <a:latin typeface="Times New Roman" panose="02020603050405020304" pitchFamily="18" charset="0"/>
+                <a:cs typeface="Times New Roman" panose="02020603050405020304" pitchFamily="18" charset="0"/>
+              </a:rPr>
+              <a:t>Four verifiable answers.</a:t>
+            </a:r>
+            <a:r>
+              <a:rPr lang="en-US" sz="1000" b="0" dirty="0">
+                <a:latin typeface="Times New Roman" panose="02020603050405020304" pitchFamily="18" charset="0"/>
+                <a:cs typeface="Times New Roman" panose="02020603050405020304" pitchFamily="18" charset="0"/>
+              </a:rPr>
+              <a:t> It is unshipped - Copilot Runtime targets Windows 11 26H2. It is edition-gated - initial rollout targets 24H2 Enterprise and Pro with VBS and SLAT, not Home. It documents no third-party access, so you cannot point your own model at it. And Microsoft killed Copilot features and merged the Copilot apps in August 2026.</a:t>
             </a:r>
           </a:p>
           <a:p>
@@ -29773,18 +33053,18 @@
               <a:buChar char="•"/>
             </a:pPr>
             <a:r>
-              <a:rPr lang="en-US" sz="1150" b="1" dirty="0">
-                <a:latin typeface="Times New Roman" panose="02020603050405020304" pitchFamily="18" charset="0"/>
-                <a:cs typeface="Times New Roman" panose="02020603050405020304" pitchFamily="18" charset="0"/>
-              </a:rPr>
-              <a:t>Microsoft Recall:</a:t>
-            </a:r>
-            <a:r>
-              <a:rPr lang="en-US" sz="1150" b="0" dirty="0">
-                <a:latin typeface="Times New Roman" panose="02020603050405020304" pitchFamily="18" charset="0"/>
-                <a:cs typeface="Times New Roman" panose="02020603050405020304" pitchFamily="18" charset="0"/>
-              </a:rPr>
-              <a:t> audits found an admin-rights attacker could exfiltrate the database; Microsoft began cutting back Copilot across Windows after user backlash in early 2026.</a:t>
+              <a:rPr lang="en-US" sz="1000" b="1" dirty="0">
+                <a:latin typeface="Times New Roman" panose="02020603050405020304" pitchFamily="18" charset="0"/>
+                <a:cs typeface="Times New Roman" panose="02020603050405020304" pitchFamily="18" charset="0"/>
+              </a:rPr>
+              <a:t>So: Microsoft validates the architecture and closes it.</a:t>
+            </a:r>
+            <a:r>
+              <a:rPr lang="en-US" sz="1000" b="0" dirty="0">
+                <a:latin typeface="Times New Roman" panose="02020603050405020304" pitchFamily="18" charset="0"/>
+                <a:cs typeface="Times New Roman" panose="02020603050405020304" pitchFamily="18" charset="0"/>
+              </a:rPr>
+              <a:t> We run on Home edition, today, on any model including one that never leaves the machine.</a:t>
             </a:r>
           </a:p>
           <a:p>
@@ -29793,38 +33073,18 @@
               <a:buChar char="•"/>
             </a:pPr>
             <a:r>
-              <a:rPr lang="en-US" sz="1150" b="1" dirty="0">
-                <a:latin typeface="Times New Roman" panose="02020603050405020304" pitchFamily="18" charset="0"/>
-                <a:cs typeface="Times New Roman" panose="02020603050405020304" pitchFamily="18" charset="0"/>
-              </a:rPr>
-              <a:t>The published lesson, verbatim:</a:t>
-            </a:r>
-            <a:r>
-              <a:rPr lang="en-US" sz="1150" b="0" dirty="0">
-                <a:latin typeface="Times New Roman" panose="02020603050405020304" pitchFamily="18" charset="0"/>
-                <a:cs typeface="Times New Roman" panose="02020603050405020304" pitchFamily="18" charset="0"/>
-              </a:rPr>
-              <a:t> "AI doesn't need a new gadget - it needs to improve the tools you already use."</a:t>
-            </a:r>
-          </a:p>
-          <a:p>
-            <a:pPr marL="171450" lvl="1" indent="-171450" algn="l">
-              <a:buFont typeface="Arial" panose="020B0604020202020204" pitchFamily="34" charset="0"/>
-              <a:buChar char="•"/>
-            </a:pPr>
-            <a:r>
-              <a:rPr lang="en-US" sz="1150" b="1" dirty="0">
-                <a:latin typeface="Times New Roman" panose="02020603050405020304" pitchFamily="18" charset="0"/>
-                <a:cs typeface="Times New Roman" panose="02020603050405020304" pitchFamily="18" charset="0"/>
-              </a:rPr>
-              <a:t>Every stated cause maps to a design decision.</a:t>
-            </a:r>
-            <a:r>
-              <a:rPr lang="en-US" sz="1150" b="0" dirty="0">
-                <a:latin typeface="Times New Roman" panose="02020603050405020304" pitchFamily="18" charset="0"/>
-                <a:cs typeface="Times New Roman" panose="02020603050405020304" pitchFamily="18" charset="0"/>
-              </a:rPr>
-              <a:t> No hardware. One primitive, not four. No destination - it appears where you are. Summoned only, never always-on capture. Opt-in by definition, because it is a shortcut you press.</a:t>
+              <a:rPr lang="en-US" sz="1000" b="1" dirty="0">
+                <a:latin typeface="Times New Roman" panose="02020603050405020304" pitchFamily="18" charset="0"/>
+                <a:cs typeface="Times New Roman" panose="02020603050405020304" pitchFamily="18" charset="0"/>
+              </a:rPr>
+              <a:t>The other near-competitor left.</a:t>
+            </a:r>
+            <a:r>
+              <a:rPr lang="en-US" sz="1000" b="0" dirty="0">
+                <a:latin typeface="Times New Roman" panose="02020603050405020304" pitchFamily="18" charset="0"/>
+                <a:cs typeface="Times New Roman" panose="02020603050405020304" pitchFamily="18" charset="0"/>
+              </a:rPr>
+              <a:t> Highlight AI raised $40M Series A in March 2026 and repositioned as a shared intelligence layer for teams and enterprise.</a:t>
             </a:r>
           </a:p>
         </p:txBody>
@@ -30072,7 +33332,7 @@
                 <a:cs typeface="Times New Roman" panose="02020603050405020304" pitchFamily="18" charset="0"/>
                 <a:sym typeface="Arial"/>
               </a:rPr>
-              <a:t>Scope &amp; Objectives</a:t>
+              <a:t>What the Expensive Failures Taught Us</a:t>
             </a:r>
           </a:p>
         </p:txBody>
@@ -30407,7 +33667,7 @@
                 <a:latin typeface="Times New Roman" panose="02020603050405020304" pitchFamily="18" charset="0"/>
                 <a:cs typeface="Times New Roman" panose="02020603050405020304" pitchFamily="18" charset="0"/>
               </a:rPr>
-              <a:t> / 29</a:t>
+              <a:t> / 33</a:t>
             </a:r>
             <a:endParaRPr dirty="0">
               <a:latin typeface="Times New Roman" panose="02020603050405020304" pitchFamily="18" charset="0"/>
@@ -30446,18 +33706,18 @@
               <a:buChar char="•"/>
             </a:pPr>
             <a:r>
-              <a:rPr lang="en-US" sz="1050" b="1" dirty="0">
-                <a:latin typeface="Times New Roman" panose="02020603050405020304" pitchFamily="18" charset="0"/>
-                <a:cs typeface="Times New Roman" panose="02020603050405020304" pitchFamily="18" charset="0"/>
-              </a:rPr>
-              <a:t>Scope:</a:t>
-            </a:r>
-            <a:r>
-              <a:rPr lang="en-US" sz="1050" b="0" dirty="0">
-                <a:latin typeface="Times New Roman" panose="02020603050405020304" pitchFamily="18" charset="0"/>
-                <a:cs typeface="Times New Roman" panose="02020603050405020304" pitchFamily="18" charset="0"/>
-              </a:rPr>
-              <a:t> PERCH is a desktop-resident personal AI agent for Windows. It is dormant in the background, summoned by a selection, a screenshot or a shortcut in any application, answers in a slim panel beside your work, and writes the answer back into the document you were in.</a:t>
+              <a:rPr lang="en-US" sz="1150" b="1" dirty="0">
+                <a:latin typeface="Times New Roman" panose="02020603050405020304" pitchFamily="18" charset="0"/>
+                <a:cs typeface="Times New Roman" panose="02020603050405020304" pitchFamily="18" charset="0"/>
+              </a:rPr>
+              <a:t>Humane AI Pin:</a:t>
+            </a:r>
+            <a:r>
+              <a:rPr lang="en-US" sz="1150" b="0" dirty="0">
+                <a:latin typeface="Times New Roman" panose="02020603050405020304" pitchFamily="18" charset="0"/>
+                <a:cs typeface="Times New Roman" panose="02020603050405020304" pitchFamily="18" charset="0"/>
+              </a:rPr>
+              <a:t> raised $230M, shipped fewer than 10,000 units, sold to HP for $116M.</a:t>
             </a:r>
           </a:p>
           <a:p>
@@ -30466,18 +33726,18 @@
               <a:buChar char="•"/>
             </a:pPr>
             <a:r>
-              <a:rPr lang="en-US" sz="1050" b="1" dirty="0">
-                <a:latin typeface="Times New Roman" panose="02020603050405020304" pitchFamily="18" charset="0"/>
-                <a:cs typeface="Times New Roman" panose="02020603050405020304" pitchFamily="18" charset="0"/>
-              </a:rPr>
-              <a:t>O1 - Surface.</a:t>
-            </a:r>
-            <a:r>
-              <a:rPr lang="en-US" sz="1050" b="0" dirty="0">
-                <a:latin typeface="Times New Roman" panose="02020603050405020304" pitchFamily="18" charset="0"/>
-                <a:cs typeface="Times New Roman" panose="02020603050405020304" pitchFamily="18" charset="0"/>
-              </a:rPr>
-              <a:t> Three triggers, panel placement beside the host window without stealing focus, and edit-in-place with no per-application plugin.</a:t>
+              <a:rPr lang="en-US" sz="1150" b="1" dirty="0">
+                <a:latin typeface="Times New Roman" panose="02020603050405020304" pitchFamily="18" charset="0"/>
+                <a:cs typeface="Times New Roman" panose="02020603050405020304" pitchFamily="18" charset="0"/>
+              </a:rPr>
+              <a:t>Rabbit R1:</a:t>
+            </a:r>
+            <a:r>
+              <a:rPr lang="en-US" sz="1150" b="0" dirty="0">
+                <a:latin typeface="Times New Roman" panose="02020603050405020304" pitchFamily="18" charset="0"/>
+                <a:cs typeface="Times New Roman" panose="02020603050405020304" pitchFamily="18" charset="0"/>
+              </a:rPr>
+              <a:t> sold 100,000 units, then took mass returns.</a:t>
             </a:r>
           </a:p>
           <a:p>
@@ -30486,18 +33746,18 @@
               <a:buChar char="•"/>
             </a:pPr>
             <a:r>
-              <a:rPr lang="en-US" sz="1050" b="1" dirty="0">
-                <a:latin typeface="Times New Roman" panose="02020603050405020304" pitchFamily="18" charset="0"/>
-                <a:cs typeface="Times New Roman" panose="02020603050405020304" pitchFamily="18" charset="0"/>
-              </a:rPr>
-              <a:t>O2 - Context assembly.</a:t>
-            </a:r>
-            <a:r>
-              <a:rPr lang="en-US" sz="1050" b="0" dirty="0">
-                <a:latin typeface="Times New Roman" panose="02020603050405020304" pitchFamily="18" charset="0"/>
-                <a:cs typeface="Times New Roman" panose="02020603050405020304" pitchFamily="18" charset="0"/>
-              </a:rPr>
-              <a:t> Decide what enters the prompt under a hard ceiling set by whichever model is selected, from a 4B local model to a frontier API.</a:t>
+              <a:rPr lang="en-US" sz="1150" b="1" dirty="0">
+                <a:latin typeface="Times New Roman" panose="02020603050405020304" pitchFamily="18" charset="0"/>
+                <a:cs typeface="Times New Roman" panose="02020603050405020304" pitchFamily="18" charset="0"/>
+              </a:rPr>
+              <a:t>Rewind AI:</a:t>
+            </a:r>
+            <a:r>
+              <a:rPr lang="en-US" sz="1150" b="0" dirty="0">
+                <a:latin typeface="Times New Roman" panose="02020603050405020304" pitchFamily="18" charset="0"/>
+                <a:cs typeface="Times New Roman" panose="02020603050405020304" pitchFamily="18" charset="0"/>
+              </a:rPr>
+              <a:t> acquired by Meta as Limitless; the Mac app shut down 19 December 2025.</a:t>
             </a:r>
           </a:p>
           <a:p>
@@ -30506,18 +33766,18 @@
               <a:buChar char="•"/>
             </a:pPr>
             <a:r>
-              <a:rPr lang="en-US" sz="1050" b="1" dirty="0">
-                <a:latin typeface="Times New Roman" panose="02020603050405020304" pitchFamily="18" charset="0"/>
-                <a:cs typeface="Times New Roman" panose="02020603050405020304" pitchFamily="18" charset="0"/>
-              </a:rPr>
-              <a:t>O3 - Memory.</a:t>
-            </a:r>
-            <a:r>
-              <a:rPr lang="en-US" sz="1050" b="0" dirty="0">
-                <a:latin typeface="Times New Roman" panose="02020603050405020304" pitchFamily="18" charset="0"/>
-                <a:cs typeface="Times New Roman" panose="02020603050405020304" pitchFamily="18" charset="0"/>
-              </a:rPr>
-              <a:t> User-authored, structured, portable personal context - stored as files the user can open, edit, export or delete.</a:t>
+              <a:rPr lang="en-US" sz="1150" b="1" dirty="0">
+                <a:latin typeface="Times New Roman" panose="02020603050405020304" pitchFamily="18" charset="0"/>
+                <a:cs typeface="Times New Roman" panose="02020603050405020304" pitchFamily="18" charset="0"/>
+              </a:rPr>
+              <a:t>Microsoft Recall:</a:t>
+            </a:r>
+            <a:r>
+              <a:rPr lang="en-US" sz="1150" b="0" dirty="0">
+                <a:latin typeface="Times New Roman" panose="02020603050405020304" pitchFamily="18" charset="0"/>
+                <a:cs typeface="Times New Roman" panose="02020603050405020304" pitchFamily="18" charset="0"/>
+              </a:rPr>
+              <a:t> audits found an admin-rights attacker could exfiltrate the database.</a:t>
             </a:r>
           </a:p>
           <a:p>
@@ -30526,18 +33786,18 @@
               <a:buChar char="•"/>
             </a:pPr>
             <a:r>
-              <a:rPr lang="en-US" sz="1050" b="1" dirty="0">
-                <a:latin typeface="Times New Roman" panose="02020603050405020304" pitchFamily="18" charset="0"/>
-                <a:cs typeface="Times New Roman" panose="02020603050405020304" pitchFamily="18" charset="0"/>
-              </a:rPr>
-              <a:t>O4 - Execution.</a:t>
-            </a:r>
-            <a:r>
-              <a:rPr lang="en-US" sz="1050" b="0" dirty="0">
-                <a:latin typeface="Times New Roman" panose="02020603050405020304" pitchFamily="18" charset="0"/>
-                <a:cs typeface="Times New Roman" panose="02020603050405020304" pitchFamily="18" charset="0"/>
-              </a:rPr>
-              <a:t> Model-agnostic routing across local Ollama, free cloud tiers and the user's own key, with a private mode that provably sends nothing.</a:t>
+              <a:rPr lang="en-US" sz="1150" b="1" dirty="0">
+                <a:latin typeface="Times New Roman" panose="02020603050405020304" pitchFamily="18" charset="0"/>
+                <a:cs typeface="Times New Roman" panose="02020603050405020304" pitchFamily="18" charset="0"/>
+              </a:rPr>
+              <a:t>The published lesson, verbatim:</a:t>
+            </a:r>
+            <a:r>
+              <a:rPr lang="en-US" sz="1150" b="0" dirty="0">
+                <a:latin typeface="Times New Roman" panose="02020603050405020304" pitchFamily="18" charset="0"/>
+                <a:cs typeface="Times New Roman" panose="02020603050405020304" pitchFamily="18" charset="0"/>
+              </a:rPr>
+              <a:t> "AI doesn't need a new gadget - it needs to improve the tools you already use."</a:t>
             </a:r>
           </a:p>
           <a:p>
@@ -30546,18 +33806,18 @@
               <a:buChar char="•"/>
             </a:pPr>
             <a:r>
-              <a:rPr lang="en-US" sz="1050" b="1" dirty="0">
-                <a:latin typeface="Times New Roman" panose="02020603050405020304" pitchFamily="18" charset="0"/>
-                <a:cs typeface="Times New Roman" panose="02020603050405020304" pitchFamily="18" charset="0"/>
-              </a:rPr>
-              <a:t>Out of scope, and named as such:</a:t>
-            </a:r>
-            <a:r>
-              <a:rPr lang="en-US" sz="1050" b="0" dirty="0">
-                <a:latin typeface="Times New Roman" panose="02020603050405020304" pitchFamily="18" charset="0"/>
-                <a:cs typeface="Times New Roman" panose="02020603050405020304" pitchFamily="18" charset="0"/>
-              </a:rPr>
-              <a:t> adaptive automatic model routing, multi-device sync, and app automation are all v2.</a:t>
+              <a:rPr lang="en-US" sz="1150" b="1" dirty="0">
+                <a:latin typeface="Times New Roman" panose="02020603050405020304" pitchFamily="18" charset="0"/>
+                <a:cs typeface="Times New Roman" panose="02020603050405020304" pitchFamily="18" charset="0"/>
+              </a:rPr>
+              <a:t>Every stated cause maps to a design decision.</a:t>
+            </a:r>
+            <a:r>
+              <a:rPr lang="en-US" sz="1150" b="0" dirty="0">
+                <a:latin typeface="Times New Roman" panose="02020603050405020304" pitchFamily="18" charset="0"/>
+                <a:cs typeface="Times New Roman" panose="02020603050405020304" pitchFamily="18" charset="0"/>
+              </a:rPr>
+              <a:t> No hardware. One primitive, not four. No destination - it appears where you are. Summoned only, never always-on capture. Opt-in by definition, because it is a shortcut you press.</a:t>
             </a:r>
           </a:p>
         </p:txBody>

--- a/docs/PERCH_Project_Review.pptx
+++ b/docs/PERCH_Project_Review.pptx
@@ -41,6 +41,7 @@
     <p:sldId id="286" r:id="rId37"/>
     <p:sldId id="287" r:id="rId38"/>
     <p:sldId id="288" r:id="rId39"/>
+    <p:sldId id="289" r:id="rId40"/>
   </p:sldIdLst>
   <p:sldSz cx="4610100" cy="3460750"/>
   <p:notesSz cx="4610100" cy="3460750"/>
@@ -8123,7 +8124,7 @@
                 <a:latin typeface="Times New Roman" panose="02020603050405020304" pitchFamily="18" charset="0"/>
                 <a:cs typeface="Times New Roman" panose="02020603050405020304" pitchFamily="18" charset="0"/>
               </a:rPr>
-              <a:t> / 33</a:t>
+              <a:t> / 34</a:t>
             </a:r>
             <a:endParaRPr dirty="0">
               <a:latin typeface="Times New Roman" panose="02020603050405020304" pitchFamily="18" charset="0"/>
@@ -8722,7 +8723,7 @@
                 <a:latin typeface="Times New Roman" panose="02020603050405020304" pitchFamily="18" charset="0"/>
                 <a:cs typeface="Times New Roman" panose="02020603050405020304" pitchFamily="18" charset="0"/>
               </a:rPr>
-              <a:t> / 33</a:t>
+              <a:t> / 34</a:t>
             </a:r>
             <a:endParaRPr dirty="0">
               <a:latin typeface="Times New Roman" panose="02020603050405020304" pitchFamily="18" charset="0"/>
@@ -9455,7 +9456,7 @@
                 <a:latin typeface="Times New Roman" panose="02020603050405020304" pitchFamily="18" charset="0"/>
                 <a:cs typeface="Times New Roman" panose="02020603050405020304" pitchFamily="18" charset="0"/>
               </a:rPr>
-              <a:t> / 33</a:t>
+              <a:t> / 34</a:t>
             </a:r>
             <a:endParaRPr dirty="0">
               <a:latin typeface="Times New Roman" panose="02020603050405020304" pitchFamily="18" charset="0"/>
@@ -10168,7 +10169,7 @@
                 <a:latin typeface="Times New Roman" panose="02020603050405020304" pitchFamily="18" charset="0"/>
                 <a:cs typeface="Times New Roman" panose="02020603050405020304" pitchFamily="18" charset="0"/>
               </a:rPr>
-              <a:t> / 33</a:t>
+              <a:t> / 34</a:t>
             </a:r>
             <a:endParaRPr dirty="0">
               <a:latin typeface="Times New Roman" panose="02020603050405020304" pitchFamily="18" charset="0"/>
@@ -12026,7 +12027,7 @@
                 <a:latin typeface="Times New Roman" panose="02020603050405020304" pitchFamily="18" charset="0"/>
                 <a:cs typeface="Times New Roman" panose="02020603050405020304" pitchFamily="18" charset="0"/>
               </a:rPr>
-              <a:t> / 33</a:t>
+              <a:t> / 34</a:t>
             </a:r>
             <a:endParaRPr dirty="0">
               <a:latin typeface="Times New Roman" panose="02020603050405020304" pitchFamily="18" charset="0"/>
@@ -13643,7 +13644,7 @@
                 <a:latin typeface="Times New Roman" panose="02020603050405020304" pitchFamily="18" charset="0"/>
                 <a:cs typeface="Times New Roman" panose="02020603050405020304" pitchFamily="18" charset="0"/>
               </a:rPr>
-              <a:t> / 33</a:t>
+              <a:t> / 34</a:t>
             </a:r>
             <a:endParaRPr dirty="0">
               <a:latin typeface="Times New Roman" panose="02020603050405020304" pitchFamily="18" charset="0"/>
@@ -14369,7 +14370,7 @@
                 <a:latin typeface="Times New Roman" panose="02020603050405020304" pitchFamily="18" charset="0"/>
                 <a:cs typeface="Times New Roman" panose="02020603050405020304" pitchFamily="18" charset="0"/>
               </a:rPr>
-              <a:t> / 33</a:t>
+              <a:t> / 34</a:t>
             </a:r>
             <a:endParaRPr dirty="0">
               <a:latin typeface="Times New Roman" panose="02020603050405020304" pitchFamily="18" charset="0"/>
@@ -15082,7 +15083,7 @@
                 <a:latin typeface="Times New Roman" panose="02020603050405020304" pitchFamily="18" charset="0"/>
                 <a:cs typeface="Times New Roman" panose="02020603050405020304" pitchFamily="18" charset="0"/>
               </a:rPr>
-              <a:t> / 33</a:t>
+              <a:t> / 34</a:t>
             </a:r>
             <a:endParaRPr dirty="0">
               <a:latin typeface="Times New Roman" panose="02020603050405020304" pitchFamily="18" charset="0"/>
@@ -15788,7 +15789,7 @@
                 <a:latin typeface="Times New Roman" panose="02020603050405020304" pitchFamily="18" charset="0"/>
                 <a:cs typeface="Times New Roman" panose="02020603050405020304" pitchFamily="18" charset="0"/>
               </a:rPr>
-              <a:t> / 33</a:t>
+              <a:t> / 34</a:t>
             </a:r>
             <a:endParaRPr dirty="0">
               <a:latin typeface="Times New Roman" panose="02020603050405020304" pitchFamily="18" charset="0"/>
@@ -16541,7 +16542,7 @@
                 <a:latin typeface="Times New Roman" panose="02020603050405020304" pitchFamily="18" charset="0"/>
                 <a:cs typeface="Times New Roman" panose="02020603050405020304" pitchFamily="18" charset="0"/>
               </a:rPr>
-              <a:t> / 33</a:t>
+              <a:t> / 34</a:t>
             </a:r>
             <a:endParaRPr dirty="0">
               <a:latin typeface="Times New Roman" panose="02020603050405020304" pitchFamily="18" charset="0"/>
@@ -17287,7 +17288,7 @@
                 <a:latin typeface="Times New Roman" panose="02020603050405020304" pitchFamily="18" charset="0"/>
                 <a:cs typeface="Times New Roman" panose="02020603050405020304" pitchFamily="18" charset="0"/>
               </a:rPr>
-              <a:t> / 33</a:t>
+              <a:t> / 34</a:t>
             </a:r>
             <a:endParaRPr dirty="0">
               <a:latin typeface="Times New Roman" panose="02020603050405020304" pitchFamily="18" charset="0"/>
@@ -18020,7 +18021,7 @@
                 <a:latin typeface="Times New Roman" panose="02020603050405020304" pitchFamily="18" charset="0"/>
                 <a:cs typeface="Times New Roman" panose="02020603050405020304" pitchFamily="18" charset="0"/>
               </a:rPr>
-              <a:t> / 33</a:t>
+              <a:t> / 34</a:t>
             </a:r>
             <a:endParaRPr dirty="0">
               <a:latin typeface="Times New Roman" panose="02020603050405020304" pitchFamily="18" charset="0"/>
@@ -18858,7 +18859,7 @@
                 <a:latin typeface="Times New Roman" panose="02020603050405020304" pitchFamily="18" charset="0"/>
                 <a:cs typeface="Times New Roman" panose="02020603050405020304" pitchFamily="18" charset="0"/>
               </a:rPr>
-              <a:t> / 33</a:t>
+              <a:t> / 34</a:t>
             </a:r>
             <a:endParaRPr dirty="0">
               <a:latin typeface="Times New Roman" panose="02020603050405020304" pitchFamily="18" charset="0"/>
@@ -19571,7 +19572,7 @@
                 <a:latin typeface="Times New Roman" panose="02020603050405020304" pitchFamily="18" charset="0"/>
                 <a:cs typeface="Times New Roman" panose="02020603050405020304" pitchFamily="18" charset="0"/>
               </a:rPr>
-              <a:t> / 33</a:t>
+              <a:t> / 34</a:t>
             </a:r>
             <a:endParaRPr dirty="0">
               <a:latin typeface="Times New Roman" panose="02020603050405020304" pitchFamily="18" charset="0"/>
@@ -20297,7 +20298,7 @@
                 <a:latin typeface="Times New Roman" panose="02020603050405020304" pitchFamily="18" charset="0"/>
                 <a:cs typeface="Times New Roman" panose="02020603050405020304" pitchFamily="18" charset="0"/>
               </a:rPr>
-              <a:t> / 33</a:t>
+              <a:t> / 34</a:t>
             </a:r>
             <a:endParaRPr dirty="0">
               <a:latin typeface="Times New Roman" panose="02020603050405020304" pitchFamily="18" charset="0"/>
@@ -21274,7 +21275,7 @@
                 <a:latin typeface="Times New Roman" panose="02020603050405020304" pitchFamily="18" charset="0"/>
                 <a:cs typeface="Times New Roman" panose="02020603050405020304" pitchFamily="18" charset="0"/>
               </a:rPr>
-              <a:t> / 33</a:t>
+              <a:t> / 34</a:t>
             </a:r>
             <a:endParaRPr dirty="0">
               <a:latin typeface="Times New Roman" panose="02020603050405020304" pitchFamily="18" charset="0"/>
@@ -21987,7 +21988,7 @@
                 <a:latin typeface="Times New Roman" panose="02020603050405020304" pitchFamily="18" charset="0"/>
                 <a:cs typeface="Times New Roman" panose="02020603050405020304" pitchFamily="18" charset="0"/>
               </a:rPr>
-              <a:t> / 33</a:t>
+              <a:t> / 34</a:t>
             </a:r>
             <a:endParaRPr dirty="0">
               <a:latin typeface="Times New Roman" panose="02020603050405020304" pitchFamily="18" charset="0"/>
@@ -22740,7 +22741,7 @@
                 <a:latin typeface="Times New Roman" panose="02020603050405020304" pitchFamily="18" charset="0"/>
                 <a:cs typeface="Times New Roman" panose="02020603050405020304" pitchFamily="18" charset="0"/>
               </a:rPr>
-              <a:t> / 33</a:t>
+              <a:t> / 34</a:t>
             </a:r>
             <a:endParaRPr dirty="0">
               <a:latin typeface="Times New Roman" panose="02020603050405020304" pitchFamily="18" charset="0"/>
@@ -23453,7 +23454,7 @@
                 <a:latin typeface="Times New Roman" panose="02020603050405020304" pitchFamily="18" charset="0"/>
                 <a:cs typeface="Times New Roman" panose="02020603050405020304" pitchFamily="18" charset="0"/>
               </a:rPr>
-              <a:t> / 33</a:t>
+              <a:t> / 34</a:t>
             </a:r>
             <a:endParaRPr dirty="0">
               <a:latin typeface="Times New Roman" panose="02020603050405020304" pitchFamily="18" charset="0"/>
@@ -24179,7 +24180,7 @@
                 <a:latin typeface="Times New Roman" panose="02020603050405020304" pitchFamily="18" charset="0"/>
                 <a:cs typeface="Times New Roman" panose="02020603050405020304" pitchFamily="18" charset="0"/>
               </a:rPr>
-              <a:t> / 33</a:t>
+              <a:t> / 34</a:t>
             </a:r>
             <a:endParaRPr dirty="0">
               <a:latin typeface="Times New Roman" panose="02020603050405020304" pitchFamily="18" charset="0"/>
@@ -24892,7 +24893,7 @@
                 <a:latin typeface="Times New Roman" panose="02020603050405020304" pitchFamily="18" charset="0"/>
                 <a:cs typeface="Times New Roman" panose="02020603050405020304" pitchFamily="18" charset="0"/>
               </a:rPr>
-              <a:t> / 33</a:t>
+              <a:t> / 34</a:t>
             </a:r>
             <a:endParaRPr dirty="0">
               <a:latin typeface="Times New Roman" panose="02020603050405020304" pitchFamily="18" charset="0"/>
@@ -25645,7 +25646,7 @@
                 <a:latin typeface="Times New Roman" panose="02020603050405020304" pitchFamily="18" charset="0"/>
                 <a:cs typeface="Times New Roman" panose="02020603050405020304" pitchFamily="18" charset="0"/>
               </a:rPr>
-              <a:t> / 33</a:t>
+              <a:t> / 34</a:t>
             </a:r>
             <a:endParaRPr dirty="0">
               <a:latin typeface="Times New Roman" panose="02020603050405020304" pitchFamily="18" charset="0"/>
@@ -26358,7 +26359,7 @@
                 <a:latin typeface="Times New Roman" panose="02020603050405020304" pitchFamily="18" charset="0"/>
                 <a:cs typeface="Times New Roman" panose="02020603050405020304" pitchFamily="18" charset="0"/>
               </a:rPr>
-              <a:t> / 33</a:t>
+              <a:t> / 34</a:t>
             </a:r>
             <a:endParaRPr dirty="0">
               <a:latin typeface="Times New Roman" panose="02020603050405020304" pitchFamily="18" charset="0"/>
@@ -27071,7 +27072,7 @@
                 <a:latin typeface="Times New Roman" panose="02020603050405020304" pitchFamily="18" charset="0"/>
                 <a:cs typeface="Times New Roman" panose="02020603050405020304" pitchFamily="18" charset="0"/>
               </a:rPr>
-              <a:t> / 33</a:t>
+              <a:t> / 34</a:t>
             </a:r>
             <a:endParaRPr dirty="0">
               <a:latin typeface="Times New Roman" panose="02020603050405020304" pitchFamily="18" charset="0"/>
@@ -27844,7 +27845,7 @@
                 <a:latin typeface="Times New Roman" panose="02020603050405020304" pitchFamily="18" charset="0"/>
                 <a:cs typeface="Times New Roman" panose="02020603050405020304" pitchFamily="18" charset="0"/>
               </a:rPr>
-              <a:t> / 33</a:t>
+              <a:t> / 34</a:t>
             </a:r>
             <a:endParaRPr dirty="0">
               <a:latin typeface="Times New Roman" panose="02020603050405020304" pitchFamily="18" charset="0"/>
@@ -28557,7 +28558,7 @@
                 <a:latin typeface="Times New Roman" panose="02020603050405020304" pitchFamily="18" charset="0"/>
                 <a:cs typeface="Times New Roman" panose="02020603050405020304" pitchFamily="18" charset="0"/>
               </a:rPr>
-              <a:t> / 33</a:t>
+              <a:t> / 34</a:t>
             </a:r>
             <a:endParaRPr dirty="0">
               <a:latin typeface="Times New Roman" panose="02020603050405020304" pitchFamily="18" charset="0"/>
@@ -28948,7 +28949,7 @@
                 <a:cs typeface="Times New Roman" panose="02020603050405020304" pitchFamily="18" charset="0"/>
                 <a:sym typeface="Arial"/>
               </a:rPr>
-              <a:t>References</a:t>
+              <a:t>References - Peer-Reviewed Spine</a:t>
             </a:r>
           </a:p>
         </p:txBody>
@@ -29283,7 +29284,7 @@
                 <a:latin typeface="Times New Roman" panose="02020603050405020304" pitchFamily="18" charset="0"/>
                 <a:cs typeface="Times New Roman" panose="02020603050405020304" pitchFamily="18" charset="0"/>
               </a:rPr>
-              <a:t> / 33</a:t>
+              <a:t> / 34</a:t>
             </a:r>
             <a:endParaRPr dirty="0">
               <a:latin typeface="Times New Roman" panose="02020603050405020304" pitchFamily="18" charset="0"/>
@@ -29333,7 +29334,7 @@
                 <a:latin typeface="Times New Roman" panose="02020603050405020304" pitchFamily="18" charset="0"/>
                 <a:cs typeface="Times New Roman" panose="02020603050405020304" pitchFamily="18" charset="0"/>
               </a:rPr>
-              <a:t> ACM SIGKDD 2026. arXiv:2607.27354 - BASE PAPER</a:t>
+              <a:t> Chen, Shi, Wang, Chen, Niu. ACM SIGKDD 2026, Jeju Island. - BASE PAPER</a:t>
             </a:r>
           </a:p>
           <a:p>
@@ -29346,14 +29347,14 @@
                 <a:latin typeface="Times New Roman" panose="02020603050405020304" pitchFamily="18" charset="0"/>
                 <a:cs typeface="Times New Roman" panose="02020603050405020304" pitchFamily="18" charset="0"/>
               </a:rPr>
-              <a:t>[2] Beyond Similarity: Trustworthy Memory Search for Personal AI Agents (MemGate).</a:t>
+              <a:t>[2] A Survey on the Memory Mechanism of LLM-based Agents.</a:t>
             </a:r>
             <a:r>
               <a:rPr lang="en-US" sz="850" b="0" dirty="0">
                 <a:latin typeface="Times New Roman" panose="02020603050405020304" pitchFamily="18" charset="0"/>
                 <a:cs typeface="Times New Roman" panose="02020603050405020304" pitchFamily="18" charset="0"/>
               </a:rPr>
-              <a:t> arXiv:2606.06054</a:t>
+              <a:t> ACM Transactions on Information Systems 43(6), 2025. DOI 10.1145/3748302</a:t>
             </a:r>
           </a:p>
           <a:p>
@@ -29366,14 +29367,14 @@
                 <a:latin typeface="Times New Roman" panose="02020603050405020304" pitchFamily="18" charset="0"/>
                 <a:cs typeface="Times New Roman" panose="02020603050405020304" pitchFamily="18" charset="0"/>
               </a:rPr>
-              <a:t>[3] OP-Bench: Benchmarking Over-Personalization for Memory-Augmented Personalized Conversational Agents.</a:t>
+              <a:t>[3] Evaluating Very Long-Term Conversational Memory of LLM Agents (LoCoMo).</a:t>
             </a:r>
             <a:r>
               <a:rPr lang="en-US" sz="850" b="0" dirty="0">
                 <a:latin typeface="Times New Roman" panose="02020603050405020304" pitchFamily="18" charset="0"/>
                 <a:cs typeface="Times New Roman" panose="02020603050405020304" pitchFamily="18" charset="0"/>
               </a:rPr>
-              <a:t> arXiv:2601.13722</a:t>
+              <a:t> ACL 2024, Long Papers. - evaluation benchmark</a:t>
             </a:r>
           </a:p>
           <a:p>
@@ -29386,14 +29387,14 @@
                 <a:latin typeface="Times New Roman" panose="02020603050405020304" pitchFamily="18" charset="0"/>
                 <a:cs typeface="Times New Roman" panose="02020603050405020304" pitchFamily="18" charset="0"/>
               </a:rPr>
-              <a:t>[4] Personalize-then-Store: Benchmarking and Learning Personalized Memory for Long-horizon Agents.</a:t>
+              <a:t>[4] LongMemEval: Benchmarking Chat Assistants on Long-Term Interactive Memory.</a:t>
             </a:r>
             <a:r>
               <a:rPr lang="en-US" sz="850" b="0" dirty="0">
                 <a:latin typeface="Times New Roman" panose="02020603050405020304" pitchFamily="18" charset="0"/>
                 <a:cs typeface="Times New Roman" panose="02020603050405020304" pitchFamily="18" charset="0"/>
               </a:rPr>
-              <a:t> KAIST. arXiv:2605.25535</a:t>
+              <a:t> ICLR 2025. - evaluation benchmark, includes abstention</a:t>
             </a:r>
           </a:p>
           <a:p>
@@ -29406,14 +29407,14 @@
                 <a:latin typeface="Times New Roman" panose="02020603050405020304" pitchFamily="18" charset="0"/>
                 <a:cs typeface="Times New Roman" panose="02020603050405020304" pitchFamily="18" charset="0"/>
               </a:rPr>
-              <a:t>[5] Externalization in LLM Agents: A Unified Review of Memory, Skills, Protocols and Harness Engineering.</a:t>
+              <a:t>[5] Self-RAG: Learning to Retrieve, Generate and Critique through Self-Reflection.</a:t>
             </a:r>
             <a:r>
               <a:rPr lang="en-US" sz="850" b="0" dirty="0">
                 <a:latin typeface="Times New Roman" panose="02020603050405020304" pitchFamily="18" charset="0"/>
                 <a:cs typeface="Times New Roman" panose="02020603050405020304" pitchFamily="18" charset="0"/>
               </a:rPr>
-              <a:t> arXiv:2604.08224</a:t>
+              <a:t> Asai, Wu, Wang, Sil, Hajishirzi. ICLR 2024. - prior art for retrieve-or-not</a:t>
             </a:r>
           </a:p>
           <a:p>
@@ -29426,14 +29427,14 @@
                 <a:latin typeface="Times New Roman" panose="02020603050405020304" pitchFamily="18" charset="0"/>
                 <a:cs typeface="Times New Roman" panose="02020603050405020304" pitchFamily="18" charset="0"/>
               </a:rPr>
-              <a:t>[6] Li et al.</a:t>
+              <a:t>[6] Mem0: Building Production-Ready AI Agents with Scalable Long-Term Memory.</a:t>
             </a:r>
             <a:r>
               <a:rPr lang="en-US" sz="850" b="0" dirty="0">
                 <a:latin typeface="Times New Roman" panose="02020603050405020304" pitchFamily="18" charset="0"/>
                 <a:cs typeface="Times New Roman" panose="02020603050405020304" pitchFamily="18" charset="0"/>
               </a:rPr>
-              <a:t> Personal LLM Agents: Insights and Survey. Tsinghua AIR. arXiv:2401.05459</a:t>
+              <a:t> ECAI 2025.</a:t>
             </a:r>
           </a:p>
           <a:p>
@@ -29446,14 +29447,14 @@
                 <a:latin typeface="Times New Roman" panose="02020603050405020304" pitchFamily="18" charset="0"/>
                 <a:cs typeface="Times New Roman" panose="02020603050405020304" pitchFamily="18" charset="0"/>
               </a:rPr>
-              <a:t>[7] A Survey on the Memory Mechanism of LLM-based Agents.</a:t>
+              <a:t>[7] From Storage to Experience: The Evolution of LLM Agent Memory Mechanisms.</a:t>
             </a:r>
             <a:r>
               <a:rPr lang="en-US" sz="850" b="0" dirty="0">
                 <a:latin typeface="Times New Roman" panose="02020603050405020304" pitchFamily="18" charset="0"/>
                 <a:cs typeface="Times New Roman" panose="02020603050405020304" pitchFamily="18" charset="0"/>
               </a:rPr>
-              <a:t> ACM TOIS 43(6), 2025. DOI 10.1145/3748302</a:t>
+              <a:t> Findings of ACL 2026.</a:t>
             </a:r>
           </a:p>
           <a:p>
@@ -29466,14 +29467,14 @@
                 <a:latin typeface="Times New Roman" panose="02020603050405020304" pitchFamily="18" charset="0"/>
                 <a:cs typeface="Times New Roman" panose="02020603050405020304" pitchFamily="18" charset="0"/>
               </a:rPr>
-              <a:t>[8] Mem0: Building Production-Ready AI Agents with Scalable Long-Term Memory.</a:t>
+              <a:t>[8] Bridging Intuitive Associations and Deliberate Recall.</a:t>
             </a:r>
             <a:r>
               <a:rPr lang="en-US" sz="850" b="0" dirty="0">
                 <a:latin typeface="Times New Roman" panose="02020603050405020304" pitchFamily="18" charset="0"/>
                 <a:cs typeface="Times New Roman" panose="02020603050405020304" pitchFamily="18" charset="0"/>
               </a:rPr>
-              <a:t> ECAI 2025. arXiv:2504.19413</a:t>
+              <a:t> Findings of ACL 2025.</a:t>
             </a:r>
           </a:p>
           <a:p>
@@ -29486,14 +29487,14 @@
                 <a:latin typeface="Times New Roman" panose="02020603050405020304" pitchFamily="18" charset="0"/>
                 <a:cs typeface="Times New Roman" panose="02020603050405020304" pitchFamily="18" charset="0"/>
               </a:rPr>
-              <a:t>[9] Corrective Retrieval Augmented Generation (CRAG)</a:t>
+              <a:t>[9] Memory in the LLM Era: Modular Architectures and Strategies.</a:t>
             </a:r>
             <a:r>
               <a:rPr lang="en-US" sz="850" b="0" dirty="0">
                 <a:latin typeface="Times New Roman" panose="02020603050405020304" pitchFamily="18" charset="0"/>
                 <a:cs typeface="Times New Roman" panose="02020603050405020304" pitchFamily="18" charset="0"/>
               </a:rPr>
-              <a:t> and Self-RAG - thresholded and self-reflective retrieval.</a:t>
+              <a:t> VLDB 2026.</a:t>
             </a:r>
           </a:p>
           <a:p>
@@ -29513,7 +29514,740 @@
                 <a:latin typeface="Times New Roman" panose="02020603050405020304" pitchFamily="18" charset="0"/>
                 <a:cs typeface="Times New Roman" panose="02020603050405020304" pitchFamily="18" charset="0"/>
               </a:rPr>
-              <a:t> UI Automation Overview, Win32 Accessibility documentation; Tauri v2 documentation; Windows AI Platform, Build 2026.</a:t>
+              <a:t> UI Automation Overview and Win32 Accessibility documentation; Tauri v2 documentation; Windows AI Platform, Build 2026.</a:t>
+            </a:r>
+          </a:p>
+        </p:txBody>
+      </p:sp>
+      <p:sp>
+        <p:nvSpPr>
+          <p:cNvPr id="8" name="Google Shape;85;p8">
+            <a:extLst>
+              <a:ext uri="{FF2B5EF4-FFF2-40B4-BE49-F238E27FC236}">
+                <a16:creationId xmlns:a16="http://schemas.microsoft.com/office/drawing/2014/main" id="{B445AC1F-8D42-9224-714E-741A4A81DCCA}"/>
+              </a:ext>
+            </a:extLst>
+          </p:cNvPr>
+          <p:cNvSpPr txBox="1"/>
+          <p:nvPr/>
+        </p:nvSpPr>
+        <p:spPr>
+          <a:xfrm>
+            <a:off x="1773059" y="3331250"/>
+            <a:ext cx="1211100" cy="101295"/>
+          </a:xfrm>
+          <a:prstGeom prst="rect">
+            <a:avLst/>
+          </a:prstGeom>
+          <a:noFill/>
+          <a:ln>
+            <a:noFill/>
+          </a:ln>
+        </p:spPr>
+        <p:txBody>
+          <a:bodyPr spcFirstLastPara="1" wrap="square" lIns="0" tIns="8875" rIns="0" bIns="0" anchor="t" anchorCtr="0">
+            <a:spAutoFit/>
+          </a:bodyPr>
+          <a:lstStyle/>
+          <a:p>
+            <a:pPr marL="12700" lvl="0"/>
+            <a:endParaRPr lang="en-US" sz="600" dirty="0">
+              <a:latin typeface="Times New Roman" panose="02020603050405020304" pitchFamily="18" charset="0"/>
+              <a:cs typeface="Times New Roman" panose="02020603050405020304" pitchFamily="18" charset="0"/>
+            </a:endParaRPr>
+            <a:r>
+              <a:rPr lang="en-US" sz="600" dirty="0" b="0">
+                <a:solidFill>
+                  <a:srgbClr val="FFFFFF"/>
+                </a:solidFill>
+                <a:latin typeface="Times New Roman" panose="02020603050405020304" pitchFamily="18" charset="0"/>
+                <a:cs typeface="Times New Roman" panose="02020603050405020304" pitchFamily="18" charset="0"/>
+              </a:rPr>
+              <a:t>PERCH</a:t>
+            </a:r>
+          </a:p>
+        </p:txBody>
+      </p:sp>
+      <p:sp>
+        <p:nvSpPr>
+          <p:cNvPr id="9" name="Google Shape;72;p7">
+            <a:extLst>
+              <a:ext uri="{FF2B5EF4-FFF2-40B4-BE49-F238E27FC236}">
+                <a16:creationId xmlns:a16="http://schemas.microsoft.com/office/drawing/2014/main" id="{AD0AEF20-4852-6A69-5088-EB2B0F643C44}"/>
+              </a:ext>
+            </a:extLst>
+          </p:cNvPr>
+          <p:cNvSpPr txBox="1">
+            <a:spLocks noGrp="1"/>
+          </p:cNvSpPr>
+          <p:nvPr>
+            <p:ph type="dt" idx="10"/>
+          </p:nvPr>
+        </p:nvSpPr>
+        <p:spPr>
+          <a:xfrm>
+            <a:off x="3442063" y="3331251"/>
+            <a:ext cx="746093" cy="101295"/>
+          </a:xfrm>
+          <a:prstGeom prst="rect">
+            <a:avLst/>
+          </a:prstGeom>
+          <a:noFill/>
+          <a:ln>
+            <a:noFill/>
+          </a:ln>
+        </p:spPr>
+        <p:txBody>
+          <a:bodyPr spcFirstLastPara="1" wrap="square" lIns="0" tIns="8875" rIns="0" bIns="0" anchor="t" anchorCtr="0">
+            <a:spAutoFit/>
+          </a:bodyPr>
+          <a:lstStyle/>
+          <a:p>
+            <a:pPr marL="12700" lvl="0" indent="0" algn="l" rtl="0">
+              <a:lnSpc>
+                <a:spcPct val="100000"/>
+              </a:lnSpc>
+              <a:spcBef>
+                <a:spcPts val="0"/>
+              </a:spcBef>
+              <a:spcAft>
+                <a:spcPts val="0"/>
+              </a:spcAft>
+              <a:buNone/>
+            </a:pPr>
+            <a:r>
+              <a:rPr lang="en-US" dirty="0">
+                <a:latin typeface="Times New Roman" panose="02020603050405020304" pitchFamily="18" charset="0"/>
+                <a:cs typeface="Times New Roman" panose="02020603050405020304" pitchFamily="18" charset="0"/>
+              </a:rPr>
+              <a:t>August-2026</a:t>
+            </a:r>
+            <a:endParaRPr dirty="0">
+              <a:latin typeface="Times New Roman" panose="02020603050405020304" pitchFamily="18" charset="0"/>
+              <a:cs typeface="Times New Roman" panose="02020603050405020304" pitchFamily="18" charset="0"/>
+            </a:endParaRPr>
+          </a:p>
+        </p:txBody>
+      </p:sp>
+    </p:spTree>
+  </p:cSld>
+  <p:clrMapOvr>
+    <a:masterClrMapping/>
+  </p:clrMapOvr>
+</p:sld>
+</file>
+
+<file path=ppt/slides/slide34.xml><?xml version="1.0" encoding="utf-8"?>
+<p:sld xmlns:a="http://schemas.openxmlformats.org/drawingml/2006/main" xmlns:p="http://schemas.openxmlformats.org/presentationml/2006/main" xmlns:r="http://schemas.openxmlformats.org/officeDocument/2006/relationships">
+  <p:cSld>
+    <p:spTree>
+      <p:nvGrpSpPr>
+        <p:cNvPr id="1" name=""/>
+        <p:cNvGrpSpPr/>
+        <p:nvPr/>
+      </p:nvGrpSpPr>
+      <p:grpSpPr/>
+      <p:sp>
+        <p:nvSpPr>
+          <p:cNvPr id="93" name="Google Shape;93;p9"/>
+          <p:cNvSpPr/>
+          <p:nvPr/>
+        </p:nvSpPr>
+        <p:spPr>
+          <a:xfrm>
+            <a:off x="1905" y="0"/>
+            <a:ext cx="4608195" cy="321945"/>
+          </a:xfrm>
+          <a:custGeom>
+            <a:avLst/>
+            <a:gdLst/>
+            <a:ahLst/>
+            <a:cxnLst/>
+            <a:rect l="l" t="t" r="r" b="b"/>
+            <a:pathLst>
+              <a:path w="4608195" h="321945" extrusionOk="0">
+                <a:moveTo>
+                  <a:pt x="4608004" y="0"/>
+                </a:moveTo>
+                <a:lnTo>
+                  <a:pt x="0" y="0"/>
+                </a:lnTo>
+                <a:lnTo>
+                  <a:pt x="0" y="321500"/>
+                </a:lnTo>
+                <a:lnTo>
+                  <a:pt x="4608004" y="321500"/>
+                </a:lnTo>
+                <a:lnTo>
+                  <a:pt x="4608004" y="0"/>
+                </a:lnTo>
+                <a:close/>
+              </a:path>
+            </a:pathLst>
+          </a:custGeom>
+          <a:solidFill>
+            <a:srgbClr val="3333B2"/>
+          </a:solidFill>
+          <a:ln>
+            <a:noFill/>
+          </a:ln>
+        </p:spPr>
+        <p:txBody>
+          <a:bodyPr spcFirstLastPara="1" wrap="square" lIns="0" tIns="0" rIns="0" bIns="0" anchor="t" anchorCtr="0">
+            <a:noAutofit/>
+          </a:bodyPr>
+          <a:lstStyle/>
+          <a:p>
+            <a:pPr marL="0" lvl="0" indent="0" algn="l" rtl="0">
+              <a:spcBef>
+                <a:spcPts val="0"/>
+              </a:spcBef>
+              <a:spcAft>
+                <a:spcPts val="0"/>
+              </a:spcAft>
+              <a:buNone/>
+            </a:pPr>
+            <a:endParaRPr sz="1800"/>
+          </a:p>
+        </p:txBody>
+      </p:sp>
+      <p:sp>
+        <p:nvSpPr>
+          <p:cNvPr id="94" name="Google Shape;94;p9"/>
+          <p:cNvSpPr txBox="1"/>
+          <p:nvPr/>
+        </p:nvSpPr>
+        <p:spPr>
+          <a:xfrm>
+            <a:off x="95300" y="45565"/>
+            <a:ext cx="4297680" cy="232736"/>
+          </a:xfrm>
+          <a:prstGeom prst="rect">
+            <a:avLst/>
+          </a:prstGeom>
+          <a:noFill/>
+          <a:ln>
+            <a:noFill/>
+          </a:ln>
+        </p:spPr>
+        <p:txBody>
+          <a:bodyPr spcFirstLastPara="1" wrap="square" lIns="0" tIns="17125" rIns="0" bIns="0" anchor="t" anchorCtr="0">
+            <a:spAutoFit/>
+          </a:bodyPr>
+          <a:lstStyle/>
+          <a:p>
+            <a:pPr marL="12700" lvl="0" indent="0" algn="l" rtl="0">
+              <a:lnSpc>
+                <a:spcPct val="100000"/>
+              </a:lnSpc>
+              <a:spcBef>
+                <a:spcPts val="0"/>
+              </a:spcBef>
+              <a:spcAft>
+                <a:spcPts val="0"/>
+              </a:spcAft>
+              <a:buNone/>
+            </a:pPr>
+            <a:endParaRPr sz="1400" dirty="0">
+              <a:latin typeface="Times New Roman" panose="02020603050405020304" pitchFamily="18" charset="0"/>
+              <a:cs typeface="Times New Roman" panose="02020603050405020304" pitchFamily="18" charset="0"/>
+              <a:sym typeface="Arial"/>
+            </a:endParaRPr>
+            <a:r>
+              <a:rPr lang="en-US" sz="1400" dirty="0" b="0">
+                <a:solidFill>
+                  <a:srgbClr val="FFFFFF"/>
+                </a:solidFill>
+                <a:latin typeface="Times New Roman" panose="02020603050405020304" pitchFamily="18" charset="0"/>
+                <a:cs typeface="Times New Roman" panose="02020603050405020304" pitchFamily="18" charset="0"/>
+                <a:sym typeface="Arial"/>
+              </a:rPr>
+              <a:t>References - Current Preprints (2026)</a:t>
+            </a:r>
+          </a:p>
+        </p:txBody>
+      </p:sp>
+      <p:grpSp>
+        <p:nvGrpSpPr>
+          <p:cNvPr id="95" name="Google Shape;95;p9"/>
+          <p:cNvGrpSpPr/>
+          <p:nvPr/>
+        </p:nvGrpSpPr>
+        <p:grpSpPr>
+          <a:xfrm>
+            <a:off x="0" y="3326968"/>
+            <a:ext cx="4608017" cy="129539"/>
+            <a:chOff x="0" y="3326968"/>
+            <a:chExt cx="4608017" cy="129539"/>
+          </a:xfrm>
+        </p:grpSpPr>
+        <p:sp>
+          <p:nvSpPr>
+            <p:cNvPr id="96" name="Google Shape;96;p9"/>
+            <p:cNvSpPr/>
+            <p:nvPr/>
+          </p:nvSpPr>
+          <p:spPr>
+            <a:xfrm>
+              <a:off x="0" y="3326968"/>
+              <a:ext cx="1536065" cy="129539"/>
+            </a:xfrm>
+            <a:custGeom>
+              <a:avLst/>
+              <a:gdLst/>
+              <a:ahLst/>
+              <a:cxnLst/>
+              <a:rect l="l" t="t" r="r" b="b"/>
+              <a:pathLst>
+                <a:path w="1536065" h="129539" extrusionOk="0">
+                  <a:moveTo>
+                    <a:pt x="1535976" y="0"/>
+                  </a:moveTo>
+                  <a:lnTo>
+                    <a:pt x="0" y="0"/>
+                  </a:lnTo>
+                  <a:lnTo>
+                    <a:pt x="0" y="129032"/>
+                  </a:lnTo>
+                  <a:lnTo>
+                    <a:pt x="1535976" y="129032"/>
+                  </a:lnTo>
+                  <a:lnTo>
+                    <a:pt x="1535976" y="0"/>
+                  </a:lnTo>
+                  <a:close/>
+                </a:path>
+              </a:pathLst>
+            </a:custGeom>
+            <a:solidFill>
+              <a:srgbClr val="191959"/>
+            </a:solidFill>
+            <a:ln>
+              <a:noFill/>
+            </a:ln>
+          </p:spPr>
+          <p:txBody>
+            <a:bodyPr spcFirstLastPara="1" wrap="square" lIns="0" tIns="0" rIns="0" bIns="0" anchor="t" anchorCtr="0">
+              <a:noAutofit/>
+            </a:bodyPr>
+            <a:lstStyle/>
+            <a:p>
+              <a:pPr marL="0" lvl="0" indent="0" algn="l" rtl="0">
+                <a:spcBef>
+                  <a:spcPts val="0"/>
+                </a:spcBef>
+                <a:spcAft>
+                  <a:spcPts val="0"/>
+                </a:spcAft>
+                <a:buNone/>
+              </a:pPr>
+              <a:endParaRPr sz="1800"/>
+            </a:p>
+          </p:txBody>
+        </p:sp>
+        <p:sp>
+          <p:nvSpPr>
+            <p:cNvPr id="97" name="Google Shape;97;p9"/>
+            <p:cNvSpPr/>
+            <p:nvPr/>
+          </p:nvSpPr>
+          <p:spPr>
+            <a:xfrm>
+              <a:off x="1535976" y="3326968"/>
+              <a:ext cx="1536065" cy="129539"/>
+            </a:xfrm>
+            <a:custGeom>
+              <a:avLst/>
+              <a:gdLst/>
+              <a:ahLst/>
+              <a:cxnLst/>
+              <a:rect l="l" t="t" r="r" b="b"/>
+              <a:pathLst>
+                <a:path w="1536064" h="129539" extrusionOk="0">
+                  <a:moveTo>
+                    <a:pt x="1535976" y="0"/>
+                  </a:moveTo>
+                  <a:lnTo>
+                    <a:pt x="0" y="0"/>
+                  </a:lnTo>
+                  <a:lnTo>
+                    <a:pt x="0" y="129032"/>
+                  </a:lnTo>
+                  <a:lnTo>
+                    <a:pt x="1535976" y="129032"/>
+                  </a:lnTo>
+                  <a:lnTo>
+                    <a:pt x="1535976" y="0"/>
+                  </a:lnTo>
+                  <a:close/>
+                </a:path>
+              </a:pathLst>
+            </a:custGeom>
+            <a:solidFill>
+              <a:srgbClr val="262685"/>
+            </a:solidFill>
+            <a:ln>
+              <a:noFill/>
+            </a:ln>
+          </p:spPr>
+          <p:txBody>
+            <a:bodyPr spcFirstLastPara="1" wrap="square" lIns="0" tIns="0" rIns="0" bIns="0" anchor="t" anchorCtr="0">
+              <a:noAutofit/>
+            </a:bodyPr>
+            <a:lstStyle/>
+            <a:p>
+              <a:pPr marL="0" lvl="0" indent="0" algn="l" rtl="0">
+                <a:spcBef>
+                  <a:spcPts val="0"/>
+                </a:spcBef>
+                <a:spcAft>
+                  <a:spcPts val="0"/>
+                </a:spcAft>
+                <a:buNone/>
+              </a:pPr>
+              <a:endParaRPr sz="1800"/>
+            </a:p>
+          </p:txBody>
+        </p:sp>
+        <p:sp>
+          <p:nvSpPr>
+            <p:cNvPr id="98" name="Google Shape;98;p9"/>
+            <p:cNvSpPr/>
+            <p:nvPr/>
+          </p:nvSpPr>
+          <p:spPr>
+            <a:xfrm>
+              <a:off x="3071952" y="3326968"/>
+              <a:ext cx="1536065" cy="129539"/>
+            </a:xfrm>
+            <a:custGeom>
+              <a:avLst/>
+              <a:gdLst/>
+              <a:ahLst/>
+              <a:cxnLst/>
+              <a:rect l="l" t="t" r="r" b="b"/>
+              <a:pathLst>
+                <a:path w="1536064" h="129539" extrusionOk="0">
+                  <a:moveTo>
+                    <a:pt x="1535976" y="0"/>
+                  </a:moveTo>
+                  <a:lnTo>
+                    <a:pt x="0" y="0"/>
+                  </a:lnTo>
+                  <a:lnTo>
+                    <a:pt x="0" y="129032"/>
+                  </a:lnTo>
+                  <a:lnTo>
+                    <a:pt x="1535976" y="129032"/>
+                  </a:lnTo>
+                  <a:lnTo>
+                    <a:pt x="1535976" y="0"/>
+                  </a:lnTo>
+                  <a:close/>
+                </a:path>
+              </a:pathLst>
+            </a:custGeom>
+            <a:solidFill>
+              <a:srgbClr val="3333B2"/>
+            </a:solidFill>
+            <a:ln>
+              <a:noFill/>
+            </a:ln>
+          </p:spPr>
+          <p:txBody>
+            <a:bodyPr spcFirstLastPara="1" wrap="square" lIns="0" tIns="0" rIns="0" bIns="0" anchor="t" anchorCtr="0">
+              <a:noAutofit/>
+            </a:bodyPr>
+            <a:lstStyle/>
+            <a:p>
+              <a:pPr marL="0" lvl="0" indent="0" algn="l" rtl="0">
+                <a:spcBef>
+                  <a:spcPts val="0"/>
+                </a:spcBef>
+                <a:spcAft>
+                  <a:spcPts val="0"/>
+                </a:spcAft>
+                <a:buNone/>
+              </a:pPr>
+              <a:endParaRPr sz="1800"/>
+            </a:p>
+          </p:txBody>
+        </p:sp>
+      </p:grpSp>
+      <p:sp>
+        <p:nvSpPr>
+          <p:cNvPr id="99" name="Google Shape;99;p9"/>
+          <p:cNvSpPr txBox="1">
+            <a:spLocks noGrp="1"/>
+          </p:cNvSpPr>
+          <p:nvPr>
+            <p:ph type="ftr" idx="11"/>
+          </p:nvPr>
+        </p:nvSpPr>
+        <p:spPr>
+          <a:xfrm>
+            <a:off x="421944" y="3331252"/>
+            <a:ext cx="692150" cy="285961"/>
+          </a:xfrm>
+          <a:prstGeom prst="rect">
+            <a:avLst/>
+          </a:prstGeom>
+          <a:noFill/>
+          <a:ln>
+            <a:noFill/>
+          </a:ln>
+        </p:spPr>
+        <p:txBody>
+          <a:bodyPr spcFirstLastPara="1" wrap="square" lIns="0" tIns="8875" rIns="0" bIns="0" anchor="t" anchorCtr="0">
+            <a:spAutoFit/>
+          </a:bodyPr>
+          <a:lstStyle/>
+          <a:p>
+            <a:pPr marL="12700"/>
+            <a:r>
+              <a:rPr lang="en-US" dirty="0">
+                <a:latin typeface="Times New Roman" panose="02020603050405020304" pitchFamily="18" charset="0"/>
+                <a:cs typeface="Times New Roman" panose="02020603050405020304" pitchFamily="18" charset="0"/>
+              </a:rPr>
+              <a:t>Dept of Comp </a:t>
+            </a:r>
+            <a:r>
+              <a:rPr lang="en-US" dirty="0" err="1">
+                <a:latin typeface="Times New Roman" panose="02020603050405020304" pitchFamily="18" charset="0"/>
+                <a:cs typeface="Times New Roman" panose="02020603050405020304" pitchFamily="18" charset="0"/>
+              </a:rPr>
+              <a:t>Engg</a:t>
+            </a:r>
+            <a:endParaRPr lang="en-US" dirty="0">
+              <a:latin typeface="Times New Roman" panose="02020603050405020304" pitchFamily="18" charset="0"/>
+              <a:cs typeface="Times New Roman" panose="02020603050405020304" pitchFamily="18" charset="0"/>
+            </a:endParaRPr>
+          </a:p>
+          <a:p>
+            <a:pPr marL="12700" lvl="0"/>
+            <a:endParaRPr lang="en-US" dirty="0"/>
+          </a:p>
+          <a:p>
+            <a:pPr marL="12700" lvl="0" indent="0" algn="l" rtl="0">
+              <a:lnSpc>
+                <a:spcPct val="100000"/>
+              </a:lnSpc>
+              <a:spcBef>
+                <a:spcPts val="0"/>
+              </a:spcBef>
+              <a:spcAft>
+                <a:spcPts val="0"/>
+              </a:spcAft>
+              <a:buNone/>
+            </a:pPr>
+            <a:endParaRPr dirty="0"/>
+          </a:p>
+        </p:txBody>
+      </p:sp>
+      <p:sp>
+        <p:nvSpPr>
+          <p:cNvPr id="102" name="Google Shape;102;p9"/>
+          <p:cNvSpPr txBox="1">
+            <a:spLocks noGrp="1"/>
+          </p:cNvSpPr>
+          <p:nvPr>
+            <p:ph type="sldNum" idx="12"/>
+          </p:nvPr>
+        </p:nvSpPr>
+        <p:spPr>
+          <a:xfrm>
+            <a:off x="4275161" y="3331252"/>
+            <a:ext cx="266700" cy="101295"/>
+          </a:xfrm>
+          <a:prstGeom prst="rect">
+            <a:avLst/>
+          </a:prstGeom>
+          <a:noFill/>
+          <a:ln>
+            <a:noFill/>
+          </a:ln>
+        </p:spPr>
+        <p:txBody>
+          <a:bodyPr spcFirstLastPara="1" wrap="square" lIns="0" tIns="8875" rIns="0" bIns="0" anchor="t" anchorCtr="0">
+            <a:spAutoFit/>
+          </a:bodyPr>
+          <a:lstStyle/>
+          <a:p>
+            <a:pPr marL="38100" lvl="0" indent="0" algn="l" rtl="0">
+              <a:lnSpc>
+                <a:spcPct val="100000"/>
+              </a:lnSpc>
+              <a:spcBef>
+                <a:spcPts val="0"/>
+              </a:spcBef>
+              <a:spcAft>
+                <a:spcPts val="0"/>
+              </a:spcAft>
+              <a:buNone/>
+            </a:pPr>
+            <a:fld id="{00000000-1234-1234-1234-123412341234}" type="slidenum">
+              <a:rPr lang="en-US">
+                <a:latin typeface="Times New Roman" panose="02020603050405020304" pitchFamily="18" charset="0"/>
+                <a:cs typeface="Times New Roman" panose="02020603050405020304" pitchFamily="18" charset="0"/>
+              </a:rPr>
+              <a:t>34</a:t>
+            </a:fld>
+            <a:r>
+              <a:rPr lang="en-US" dirty="0">
+                <a:latin typeface="Times New Roman" panose="02020603050405020304" pitchFamily="18" charset="0"/>
+                <a:cs typeface="Times New Roman" panose="02020603050405020304" pitchFamily="18" charset="0"/>
+              </a:rPr>
+              <a:t> / 34</a:t>
+            </a:r>
+            <a:endParaRPr dirty="0">
+              <a:latin typeface="Times New Roman" panose="02020603050405020304" pitchFamily="18" charset="0"/>
+              <a:cs typeface="Times New Roman" panose="02020603050405020304" pitchFamily="18" charset="0"/>
+            </a:endParaRPr>
+          </a:p>
+        </p:txBody>
+      </p:sp>
+      <p:sp>
+        <p:nvSpPr>
+          <p:cNvPr id="103" name="Google Shape;103;p9"/>
+          <p:cNvSpPr txBox="1"/>
+          <p:nvPr/>
+        </p:nvSpPr>
+        <p:spPr>
+          <a:xfrm>
+            <a:off x="91440" y="246888"/>
+            <a:ext cx="4425696" cy="3017520"/>
+          </a:xfrm>
+          <a:prstGeom prst="rect">
+            <a:avLst/>
+          </a:prstGeom>
+          <a:noFill/>
+          <a:ln>
+            <a:noFill/>
+          </a:ln>
+        </p:spPr>
+        <p:txBody>
+          <a:bodyPr spcFirstLastPara="1" wrap="square" lIns="91425" tIns="91425" rIns="91425" bIns="91425" anchor="t" anchorCtr="0">
+            <a:noAutofit/>
+          </a:bodyPr>
+          <a:lstStyle/>
+          <a:p>
+            <a:pPr marL="171450" lvl="1" indent="-171450" algn="l">
+              <a:buFont typeface="Arial" panose="020B0604020202020204" pitchFamily="34" charset="0"/>
+              <a:buChar char="•"/>
+            </a:pPr>
+            <a:r>
+              <a:rPr lang="en-US" sz="900" b="1" dirty="0">
+                <a:latin typeface="Times New Roman" panose="02020603050405020304" pitchFamily="18" charset="0"/>
+                <a:cs typeface="Times New Roman" panose="02020603050405020304" pitchFamily="18" charset="0"/>
+              </a:rPr>
+              <a:t>Cited as current state of the art, not as settled results.</a:t>
+            </a:r>
+            <a:r>
+              <a:rPr lang="en-US" sz="900" b="0" dirty="0">
+                <a:latin typeface="Times New Roman" panose="02020603050405020304" pitchFamily="18" charset="0"/>
+                <a:cs typeface="Times New Roman" panose="02020603050405020304" pitchFamily="18" charset="0"/>
+              </a:rPr>
+              <a:t> Each is two to seven months old, so nothing at that age has cleared peer review in any venue. None of them carries a claim on its own, and none is load-bearing for the base paper or the evaluation plan.</a:t>
+            </a:r>
+          </a:p>
+          <a:p>
+            <a:pPr marL="171450" lvl="1" indent="-171450" algn="l">
+              <a:buFont typeface="Arial" panose="020B0604020202020204" pitchFamily="34" charset="0"/>
+              <a:buChar char="•"/>
+            </a:pPr>
+            <a:r>
+              <a:rPr lang="en-US" sz="900" b="1" dirty="0">
+                <a:latin typeface="Times New Roman" panose="02020603050405020304" pitchFamily="18" charset="0"/>
+                <a:cs typeface="Times New Roman" panose="02020603050405020304" pitchFamily="18" charset="0"/>
+              </a:rPr>
+              <a:t>[11] Beyond Similarity: Trustworthy Memory Search for Personal AI Agents (MemGate).</a:t>
+            </a:r>
+            <a:r>
+              <a:rPr lang="en-US" sz="900" b="0" dirty="0">
+                <a:latin typeface="Times New Roman" panose="02020603050405020304" pitchFamily="18" charset="0"/>
+                <a:cs typeface="Times New Roman" panose="02020603050405020304" pitchFamily="18" charset="0"/>
+              </a:rPr>
+              <a:t> arXiv:2606.06054, June 2026. - closest prior art to Contribution 2</a:t>
+            </a:r>
+          </a:p>
+          <a:p>
+            <a:pPr marL="171450" lvl="1" indent="-171450" algn="l">
+              <a:buFont typeface="Arial" panose="020B0604020202020204" pitchFamily="34" charset="0"/>
+              <a:buChar char="•"/>
+            </a:pPr>
+            <a:r>
+              <a:rPr lang="en-US" sz="900" b="1" dirty="0">
+                <a:latin typeface="Times New Roman" panose="02020603050405020304" pitchFamily="18" charset="0"/>
+                <a:cs typeface="Times New Roman" panose="02020603050405020304" pitchFamily="18" charset="0"/>
+              </a:rPr>
+              <a:t>[12] OP-Bench: Benchmarking Over-Personalization for Memory-Augmented Personalized Conversational Agents.</a:t>
+            </a:r>
+            <a:r>
+              <a:rPr lang="en-US" sz="900" b="0" dirty="0">
+                <a:latin typeface="Times New Roman" panose="02020603050405020304" pitchFamily="18" charset="0"/>
+                <a:cs typeface="Times New Roman" panose="02020603050405020304" pitchFamily="18" charset="0"/>
+              </a:rPr>
+              <a:t> arXiv:2601.13722, January 2026. - our primary evaluation target</a:t>
+            </a:r>
+          </a:p>
+          <a:p>
+            <a:pPr marL="171450" lvl="1" indent="-171450" algn="l">
+              <a:buFont typeface="Arial" panose="020B0604020202020204" pitchFamily="34" charset="0"/>
+              <a:buChar char="•"/>
+            </a:pPr>
+            <a:r>
+              <a:rPr lang="en-US" sz="900" b="1" dirty="0">
+                <a:latin typeface="Times New Roman" panose="02020603050405020304" pitchFamily="18" charset="0"/>
+                <a:cs typeface="Times New Roman" panose="02020603050405020304" pitchFamily="18" charset="0"/>
+              </a:rPr>
+              <a:t>[13] Personalize-then-Store: Benchmarking and Learning Personalized Memory for Long-horizon Agents.</a:t>
+            </a:r>
+            <a:r>
+              <a:rPr lang="en-US" sz="900" b="0" dirty="0">
+                <a:latin typeface="Times New Roman" panose="02020603050405020304" pitchFamily="18" charset="0"/>
+                <a:cs typeface="Times New Roman" panose="02020603050405020304" pitchFamily="18" charset="0"/>
+              </a:rPr>
+              <a:t> KAIST. arXiv:2605.25535, May 2026. - write-side gating</a:t>
+            </a:r>
+          </a:p>
+          <a:p>
+            <a:pPr marL="171450" lvl="1" indent="-171450" algn="l">
+              <a:buFont typeface="Arial" panose="020B0604020202020204" pitchFamily="34" charset="0"/>
+              <a:buChar char="•"/>
+            </a:pPr>
+            <a:r>
+              <a:rPr lang="en-US" sz="900" b="1" dirty="0">
+                <a:latin typeface="Times New Roman" panose="02020603050405020304" pitchFamily="18" charset="0"/>
+                <a:cs typeface="Times New Roman" panose="02020603050405020304" pitchFamily="18" charset="0"/>
+              </a:rPr>
+              <a:t>[14] Externalization in LLM Agents: A Unified Review of Memory, Skills, Protocols and Harness Engineering.</a:t>
+            </a:r>
+            <a:r>
+              <a:rPr lang="en-US" sz="900" b="0" dirty="0">
+                <a:latin typeface="Times New Roman" panose="02020603050405020304" pitchFamily="18" charset="0"/>
+                <a:cs typeface="Times New Roman" panose="02020603050405020304" pitchFamily="18" charset="0"/>
+              </a:rPr>
+              <a:t> arXiv:2604.08224, April 2026. - names our Contribution 1 as an open problem</a:t>
+            </a:r>
+          </a:p>
+          <a:p>
+            <a:pPr marL="171450" lvl="1" indent="-171450" algn="l">
+              <a:buFont typeface="Arial" panose="020B0604020202020204" pitchFamily="34" charset="0"/>
+              <a:buChar char="•"/>
+            </a:pPr>
+            <a:r>
+              <a:rPr lang="en-US" sz="900" b="1" dirty="0">
+                <a:latin typeface="Times New Roman" panose="02020603050405020304" pitchFamily="18" charset="0"/>
+                <a:cs typeface="Times New Roman" panose="02020603050405020304" pitchFamily="18" charset="0"/>
+              </a:rPr>
+              <a:t>Two we flag ourselves, because age does not explain them.</a:t>
+            </a:r>
+            <a:r>
+              <a:rPr lang="en-US" sz="900" b="0" dirty="0">
+                <a:latin typeface="Times New Roman" panose="02020603050405020304" pitchFamily="18" charset="0"/>
+                <a:cs typeface="Times New Roman" panose="02020603050405020304" pitchFamily="18" charset="0"/>
+              </a:rPr>
+              <a:t> Personal LLM Agents (Tsinghua AIR, arXiv:2401.05459) has been a preprint since January 2024 with no venue - we use its vocabulary only, never as an authority. And CRAG (arXiv:2401.15884) was submitted to ICLR 2025 and withdrawn, so it is cited as an approach, not as a published result.</a:t>
             </a:r>
           </a:p>
         </p:txBody>
@@ -30096,7 +30830,7 @@
                 <a:latin typeface="Times New Roman" panose="02020603050405020304" pitchFamily="18" charset="0"/>
                 <a:cs typeface="Times New Roman" panose="02020603050405020304" pitchFamily="18" charset="0"/>
               </a:rPr>
-              <a:t> / 33</a:t>
+              <a:t> / 34</a:t>
             </a:r>
             <a:endParaRPr dirty="0">
               <a:latin typeface="Times New Roman" panose="02020603050405020304" pitchFamily="18" charset="0"/>
@@ -30782,7 +31516,7 @@
                 <a:latin typeface="Times New Roman" panose="02020603050405020304" pitchFamily="18" charset="0"/>
                 <a:cs typeface="Times New Roman" panose="02020603050405020304" pitchFamily="18" charset="0"/>
               </a:rPr>
-              <a:t> / 33</a:t>
+              <a:t> / 34</a:t>
             </a:r>
             <a:endParaRPr dirty="0">
               <a:latin typeface="Times New Roman" panose="02020603050405020304" pitchFamily="18" charset="0"/>
@@ -31495,7 +32229,7 @@
                 <a:latin typeface="Times New Roman" panose="02020603050405020304" pitchFamily="18" charset="0"/>
                 <a:cs typeface="Times New Roman" panose="02020603050405020304" pitchFamily="18" charset="0"/>
               </a:rPr>
-              <a:t> / 33</a:t>
+              <a:t> / 34</a:t>
             </a:r>
             <a:endParaRPr dirty="0">
               <a:latin typeface="Times New Roman" panose="02020603050405020304" pitchFamily="18" charset="0"/>
@@ -31534,14 +32268,14 @@
               <a:buChar char="•"/>
             </a:pPr>
             <a:r>
-              <a:rPr lang="en-US" sz="1050" b="1" dirty="0">
+              <a:rPr lang="en-US" sz="950" b="1" dirty="0">
                 <a:latin typeface="Times New Roman" panose="02020603050405020304" pitchFamily="18" charset="0"/>
                 <a:cs typeface="Times New Roman" panose="02020603050405020304" pitchFamily="18" charset="0"/>
               </a:rPr>
               <a:t>ACM measurement.</a:t>
             </a:r>
             <a:r>
-              <a:rPr lang="en-US" sz="1050" b="0" dirty="0">
+              <a:rPr lang="en-US" sz="950" b="0" dirty="0">
                 <a:latin typeface="Times New Roman" panose="02020603050405020304" pitchFamily="18" charset="0"/>
                 <a:cs typeface="Times New Roman" panose="02020603050405020304" pitchFamily="18" charset="0"/>
               </a:rPr>
@@ -31554,18 +32288,18 @@
               <a:buChar char="•"/>
             </a:pPr>
             <a:r>
-              <a:rPr lang="en-US" sz="1050" b="1" dirty="0">
+              <a:rPr lang="en-US" sz="950" b="1" dirty="0">
                 <a:latin typeface="Times New Roman" panose="02020603050405020304" pitchFamily="18" charset="0"/>
                 <a:cs typeface="Times New Roman" panose="02020603050405020304" pitchFamily="18" charset="0"/>
               </a:rPr>
               <a:t>An established research category.</a:t>
             </a:r>
             <a:r>
-              <a:rPr lang="en-US" sz="1050" b="0" dirty="0">
-                <a:latin typeface="Times New Roman" panose="02020603050405020304" pitchFamily="18" charset="0"/>
-                <a:cs typeface="Times New Roman" panose="02020603050405020304" pitchFamily="18" charset="0"/>
-              </a:rPr>
-              <a:t> Personal LLM Agents (Tsinghua AIR) defines agents deeply integrated with personal data and devices, naming context sensing and memorization as fundamental unsolved capabilities.</a:t>
+              <a:rPr lang="en-US" sz="950" b="0" dirty="0">
+                <a:latin typeface="Times New Roman" panose="02020603050405020304" pitchFamily="18" charset="0"/>
+                <a:cs typeface="Times New Roman" panose="02020603050405020304" pitchFamily="18" charset="0"/>
+              </a:rPr>
+              <a:t> The Tsinghua AIR survey defines agents deeply integrated with personal data and devices, naming context sensing and memorization as fundamental unsolved capabilities. We flag it ourselves as a preprint - it carries vocabulary here, not authority.</a:t>
             </a:r>
           </a:p>
           <a:p>
@@ -31574,18 +32308,18 @@
               <a:buChar char="•"/>
             </a:pPr>
             <a:r>
-              <a:rPr lang="en-US" sz="1050" b="1" dirty="0">
-                <a:latin typeface="Times New Roman" panose="02020603050405020304" pitchFamily="18" charset="0"/>
-                <a:cs typeface="Times New Roman" panose="02020603050405020304" pitchFamily="18" charset="0"/>
-              </a:rPr>
-              <a:t>And a warning we take seriously.</a:t>
-            </a:r>
-            <a:r>
-              <a:rPr lang="en-US" sz="1050" b="0" dirty="0">
-                <a:latin typeface="Times New Roman" panose="02020603050405020304" pitchFamily="18" charset="0"/>
-                <a:cs typeface="Times New Roman" panose="02020603050405020304" pitchFamily="18" charset="0"/>
-              </a:rPr>
-              <a:t> OP-Bench (2026) measures over-personalisation and finds memory-augmented assistants score 26.2% to 61.1% WORSE than memory-free baselines. Naive memory injection makes an assistant worse than having no memory at all.</a:t>
+              <a:rPr lang="en-US" sz="950" b="1" dirty="0">
+                <a:latin typeface="Times New Roman" panose="02020603050405020304" pitchFamily="18" charset="0"/>
+                <a:cs typeface="Times New Roman" panose="02020603050405020304" pitchFamily="18" charset="0"/>
+              </a:rPr>
+              <a:t>An IEEE forecast, for scale.</a:t>
+            </a:r>
+            <a:r>
+              <a:rPr lang="en-US" sz="950" b="0" dirty="0">
+                <a:latin typeface="Times New Roman" panose="02020603050405020304" pitchFamily="18" charset="0"/>
+                <a:cs typeface="Times New Roman" panose="02020603050405020304" pitchFamily="18" charset="0"/>
+              </a:rPr>
+              <a:t> The IEEE Global Study of 400 technology leaders puts personal assistant and calendar management as the top expected mass-adoption use of agentic AI in 2026, at 52%.</a:t>
             </a:r>
           </a:p>
           <a:p>
@@ -31594,18 +32328,18 @@
               <a:buChar char="•"/>
             </a:pPr>
             <a:r>
-              <a:rPr lang="en-US" sz="1050" b="1" dirty="0">
-                <a:latin typeface="Times New Roman" panose="02020603050405020304" pitchFamily="18" charset="0"/>
-                <a:cs typeface="Times New Roman" panose="02020603050405020304" pitchFamily="18" charset="0"/>
-              </a:rPr>
-              <a:t>Market behaviour.</a:t>
-            </a:r>
-            <a:r>
-              <a:rPr lang="en-US" sz="1050" b="0" dirty="0">
-                <a:latin typeface="Times New Roman" panose="02020603050405020304" pitchFamily="18" charset="0"/>
-                <a:cs typeface="Times New Roman" panose="02020603050405020304" pitchFamily="18" charset="0"/>
-              </a:rPr>
-              <a:t> $70-110/month across four assistants; 15-30 minutes lost per switch; market share moving 15 points in a year.</a:t>
+              <a:rPr lang="en-US" sz="950" b="1" dirty="0">
+                <a:latin typeface="Times New Roman" panose="02020603050405020304" pitchFamily="18" charset="0"/>
+                <a:cs typeface="Times New Roman" panose="02020603050405020304" pitchFamily="18" charset="0"/>
+              </a:rPr>
+              <a:t>And a warning we take seriously.</a:t>
+            </a:r>
+            <a:r>
+              <a:rPr lang="en-US" sz="950" b="0" dirty="0">
+                <a:latin typeface="Times New Roman" panose="02020603050405020304" pitchFamily="18" charset="0"/>
+                <a:cs typeface="Times New Roman" panose="02020603050405020304" pitchFamily="18" charset="0"/>
+              </a:rPr>
+              <a:t> OP-Bench (2026) measures over-personalisation and finds memory-augmented assistants score 26.2% to 61.1% WORSE than memory-free baselines. Naive memory injection makes an assistant worse than having no memory at all.</a:t>
             </a:r>
           </a:p>
           <a:p>
@@ -31614,14 +32348,34 @@
               <a:buChar char="•"/>
             </a:pPr>
             <a:r>
-              <a:rPr lang="en-US" sz="1050" b="1" dirty="0">
+              <a:rPr lang="en-US" sz="950" b="1" dirty="0">
+                <a:latin typeface="Times New Roman" panose="02020603050405020304" pitchFamily="18" charset="0"/>
+                <a:cs typeface="Times New Roman" panose="02020603050405020304" pitchFamily="18" charset="0"/>
+              </a:rPr>
+              <a:t>Market behaviour.</a:t>
+            </a:r>
+            <a:r>
+              <a:rPr lang="en-US" sz="950" b="0" dirty="0">
+                <a:latin typeface="Times New Roman" panose="02020603050405020304" pitchFamily="18" charset="0"/>
+                <a:cs typeface="Times New Roman" panose="02020603050405020304" pitchFamily="18" charset="0"/>
+              </a:rPr>
+              <a:t> $70-110/month across four assistants; 15-30 minutes lost per switch; market share moving 15 points in a year.</a:t>
+            </a:r>
+          </a:p>
+          <a:p>
+            <a:pPr marL="171450" lvl="1" indent="-171450" algn="l">
+              <a:buFont typeface="Arial" panose="020B0604020202020204" pitchFamily="34" charset="0"/>
+              <a:buChar char="•"/>
+            </a:pPr>
+            <a:r>
+              <a:rPr lang="en-US" sz="950" b="1" dirty="0">
                 <a:latin typeface="Times New Roman" panose="02020603050405020304" pitchFamily="18" charset="0"/>
                 <a:cs typeface="Times New Roman" panose="02020603050405020304" pitchFamily="18" charset="0"/>
               </a:rPr>
               <a:t>Capability that did not exist in 2024.</a:t>
             </a:r>
             <a:r>
-              <a:rPr lang="en-US" sz="1050" b="0" dirty="0">
+              <a:rPr lang="en-US" sz="950" b="0" dirty="0">
                 <a:latin typeface="Times New Roman" panose="02020603050405020304" pitchFamily="18" charset="0"/>
                 <a:cs typeface="Times New Roman" panose="02020603050405020304" pitchFamily="18" charset="0"/>
               </a:rPr>
@@ -32208,7 +32962,7 @@
                 <a:latin typeface="Times New Roman" panose="02020603050405020304" pitchFamily="18" charset="0"/>
                 <a:cs typeface="Times New Roman" panose="02020603050405020304" pitchFamily="18" charset="0"/>
               </a:rPr>
-              <a:t> / 33</a:t>
+              <a:t> / 34</a:t>
             </a:r>
             <a:endParaRPr dirty="0">
               <a:latin typeface="Times New Roman" panose="02020603050405020304" pitchFamily="18" charset="0"/>
@@ -32954,7 +33708,7 @@
                 <a:latin typeface="Times New Roman" panose="02020603050405020304" pitchFamily="18" charset="0"/>
                 <a:cs typeface="Times New Roman" panose="02020603050405020304" pitchFamily="18" charset="0"/>
               </a:rPr>
-              <a:t> / 33</a:t>
+              <a:t> / 34</a:t>
             </a:r>
             <a:endParaRPr dirty="0">
               <a:latin typeface="Times New Roman" panose="02020603050405020304" pitchFamily="18" charset="0"/>
@@ -33667,7 +34421,7 @@
                 <a:latin typeface="Times New Roman" panose="02020603050405020304" pitchFamily="18" charset="0"/>
                 <a:cs typeface="Times New Roman" panose="02020603050405020304" pitchFamily="18" charset="0"/>
               </a:rPr>
-              <a:t> / 33</a:t>
+              <a:t> / 34</a:t>
             </a:r>
             <a:endParaRPr dirty="0">
               <a:latin typeface="Times New Roman" panose="02020603050405020304" pitchFamily="18" charset="0"/>

--- a/docs/PERCH_Project_Review.pptx
+++ b/docs/PERCH_Project_Review.pptx
@@ -42,6 +42,7 @@
     <p:sldId id="287" r:id="rId38"/>
     <p:sldId id="288" r:id="rId39"/>
     <p:sldId id="289" r:id="rId40"/>
+    <p:sldId id="290" r:id="rId41"/>
   </p:sldIdLst>
   <p:sldSz cx="4610100" cy="3460750"/>
   <p:notesSz cx="4610100" cy="3460750"/>
@@ -8124,7 +8125,7 @@
                 <a:latin typeface="Times New Roman" panose="02020603050405020304" pitchFamily="18" charset="0"/>
                 <a:cs typeface="Times New Roman" panose="02020603050405020304" pitchFamily="18" charset="0"/>
               </a:rPr>
-              <a:t> / 34</a:t>
+              <a:t> / 35</a:t>
             </a:r>
             <a:endParaRPr dirty="0">
               <a:latin typeface="Times New Roman" panose="02020603050405020304" pitchFamily="18" charset="0"/>
@@ -8723,7 +8724,7 @@
                 <a:latin typeface="Times New Roman" panose="02020603050405020304" pitchFamily="18" charset="0"/>
                 <a:cs typeface="Times New Roman" panose="02020603050405020304" pitchFamily="18" charset="0"/>
               </a:rPr>
-              <a:t> / 34</a:t>
+              <a:t> / 35</a:t>
             </a:r>
             <a:endParaRPr dirty="0">
               <a:latin typeface="Times New Roman" panose="02020603050405020304" pitchFamily="18" charset="0"/>
@@ -9456,7 +9457,7 @@
                 <a:latin typeface="Times New Roman" panose="02020603050405020304" pitchFamily="18" charset="0"/>
                 <a:cs typeface="Times New Roman" panose="02020603050405020304" pitchFamily="18" charset="0"/>
               </a:rPr>
-              <a:t> / 34</a:t>
+              <a:t> / 35</a:t>
             </a:r>
             <a:endParaRPr dirty="0">
               <a:latin typeface="Times New Roman" panose="02020603050405020304" pitchFamily="18" charset="0"/>
@@ -10169,7 +10170,7 @@
                 <a:latin typeface="Times New Roman" panose="02020603050405020304" pitchFamily="18" charset="0"/>
                 <a:cs typeface="Times New Roman" panose="02020603050405020304" pitchFamily="18" charset="0"/>
               </a:rPr>
-              <a:t> / 34</a:t>
+              <a:t> / 35</a:t>
             </a:r>
             <a:endParaRPr dirty="0">
               <a:latin typeface="Times New Roman" panose="02020603050405020304" pitchFamily="18" charset="0"/>
@@ -12027,7 +12028,7 @@
                 <a:latin typeface="Times New Roman" panose="02020603050405020304" pitchFamily="18" charset="0"/>
                 <a:cs typeface="Times New Roman" panose="02020603050405020304" pitchFamily="18" charset="0"/>
               </a:rPr>
-              <a:t> / 34</a:t>
+              <a:t> / 35</a:t>
             </a:r>
             <a:endParaRPr dirty="0">
               <a:latin typeface="Times New Roman" panose="02020603050405020304" pitchFamily="18" charset="0"/>
@@ -13644,7 +13645,7 @@
                 <a:latin typeface="Times New Roman" panose="02020603050405020304" pitchFamily="18" charset="0"/>
                 <a:cs typeface="Times New Roman" panose="02020603050405020304" pitchFamily="18" charset="0"/>
               </a:rPr>
-              <a:t> / 34</a:t>
+              <a:t> / 35</a:t>
             </a:r>
             <a:endParaRPr dirty="0">
               <a:latin typeface="Times New Roman" panose="02020603050405020304" pitchFamily="18" charset="0"/>
@@ -14370,7 +14371,7 @@
                 <a:latin typeface="Times New Roman" panose="02020603050405020304" pitchFamily="18" charset="0"/>
                 <a:cs typeface="Times New Roman" panose="02020603050405020304" pitchFamily="18" charset="0"/>
               </a:rPr>
-              <a:t> / 34</a:t>
+              <a:t> / 35</a:t>
             </a:r>
             <a:endParaRPr dirty="0">
               <a:latin typeface="Times New Roman" panose="02020603050405020304" pitchFamily="18" charset="0"/>
@@ -15083,7 +15084,7 @@
                 <a:latin typeface="Times New Roman" panose="02020603050405020304" pitchFamily="18" charset="0"/>
                 <a:cs typeface="Times New Roman" panose="02020603050405020304" pitchFamily="18" charset="0"/>
               </a:rPr>
-              <a:t> / 34</a:t>
+              <a:t> / 35</a:t>
             </a:r>
             <a:endParaRPr dirty="0">
               <a:latin typeface="Times New Roman" panose="02020603050405020304" pitchFamily="18" charset="0"/>
@@ -15789,7 +15790,7 @@
                 <a:latin typeface="Times New Roman" panose="02020603050405020304" pitchFamily="18" charset="0"/>
                 <a:cs typeface="Times New Roman" panose="02020603050405020304" pitchFamily="18" charset="0"/>
               </a:rPr>
-              <a:t> / 34</a:t>
+              <a:t> / 35</a:t>
             </a:r>
             <a:endParaRPr dirty="0">
               <a:latin typeface="Times New Roman" panose="02020603050405020304" pitchFamily="18" charset="0"/>
@@ -16542,7 +16543,7 @@
                 <a:latin typeface="Times New Roman" panose="02020603050405020304" pitchFamily="18" charset="0"/>
                 <a:cs typeface="Times New Roman" panose="02020603050405020304" pitchFamily="18" charset="0"/>
               </a:rPr>
-              <a:t> / 34</a:t>
+              <a:t> / 35</a:t>
             </a:r>
             <a:endParaRPr dirty="0">
               <a:latin typeface="Times New Roman" panose="02020603050405020304" pitchFamily="18" charset="0"/>
@@ -17288,7 +17289,7 @@
                 <a:latin typeface="Times New Roman" panose="02020603050405020304" pitchFamily="18" charset="0"/>
                 <a:cs typeface="Times New Roman" panose="02020603050405020304" pitchFamily="18" charset="0"/>
               </a:rPr>
-              <a:t> / 34</a:t>
+              <a:t> / 35</a:t>
             </a:r>
             <a:endParaRPr dirty="0">
               <a:latin typeface="Times New Roman" panose="02020603050405020304" pitchFamily="18" charset="0"/>
@@ -18021,7 +18022,7 @@
                 <a:latin typeface="Times New Roman" panose="02020603050405020304" pitchFamily="18" charset="0"/>
                 <a:cs typeface="Times New Roman" panose="02020603050405020304" pitchFamily="18" charset="0"/>
               </a:rPr>
-              <a:t> / 34</a:t>
+              <a:t> / 35</a:t>
             </a:r>
             <a:endParaRPr dirty="0">
               <a:latin typeface="Times New Roman" panose="02020603050405020304" pitchFamily="18" charset="0"/>
@@ -18859,7 +18860,7 @@
                 <a:latin typeface="Times New Roman" panose="02020603050405020304" pitchFamily="18" charset="0"/>
                 <a:cs typeface="Times New Roman" panose="02020603050405020304" pitchFamily="18" charset="0"/>
               </a:rPr>
-              <a:t> / 34</a:t>
+              <a:t> / 35</a:t>
             </a:r>
             <a:endParaRPr dirty="0">
               <a:latin typeface="Times New Roman" panose="02020603050405020304" pitchFamily="18" charset="0"/>
@@ -19572,7 +19573,7 @@
                 <a:latin typeface="Times New Roman" panose="02020603050405020304" pitchFamily="18" charset="0"/>
                 <a:cs typeface="Times New Roman" panose="02020603050405020304" pitchFamily="18" charset="0"/>
               </a:rPr>
-              <a:t> / 34</a:t>
+              <a:t> / 35</a:t>
             </a:r>
             <a:endParaRPr dirty="0">
               <a:latin typeface="Times New Roman" panose="02020603050405020304" pitchFamily="18" charset="0"/>
@@ -20298,7 +20299,7 @@
                 <a:latin typeface="Times New Roman" panose="02020603050405020304" pitchFamily="18" charset="0"/>
                 <a:cs typeface="Times New Roman" panose="02020603050405020304" pitchFamily="18" charset="0"/>
               </a:rPr>
-              <a:t> / 34</a:t>
+              <a:t> / 35</a:t>
             </a:r>
             <a:endParaRPr dirty="0">
               <a:latin typeface="Times New Roman" panose="02020603050405020304" pitchFamily="18" charset="0"/>
@@ -21275,7 +21276,7 @@
                 <a:latin typeface="Times New Roman" panose="02020603050405020304" pitchFamily="18" charset="0"/>
                 <a:cs typeface="Times New Roman" panose="02020603050405020304" pitchFamily="18" charset="0"/>
               </a:rPr>
-              <a:t> / 34</a:t>
+              <a:t> / 35</a:t>
             </a:r>
             <a:endParaRPr dirty="0">
               <a:latin typeface="Times New Roman" panose="02020603050405020304" pitchFamily="18" charset="0"/>
@@ -21988,7 +21989,7 @@
                 <a:latin typeface="Times New Roman" panose="02020603050405020304" pitchFamily="18" charset="0"/>
                 <a:cs typeface="Times New Roman" panose="02020603050405020304" pitchFamily="18" charset="0"/>
               </a:rPr>
-              <a:t> / 34</a:t>
+              <a:t> / 35</a:t>
             </a:r>
             <a:endParaRPr dirty="0">
               <a:latin typeface="Times New Roman" panose="02020603050405020304" pitchFamily="18" charset="0"/>
@@ -22741,7 +22742,7 @@
                 <a:latin typeface="Times New Roman" panose="02020603050405020304" pitchFamily="18" charset="0"/>
                 <a:cs typeface="Times New Roman" panose="02020603050405020304" pitchFamily="18" charset="0"/>
               </a:rPr>
-              <a:t> / 34</a:t>
+              <a:t> / 35</a:t>
             </a:r>
             <a:endParaRPr dirty="0">
               <a:latin typeface="Times New Roman" panose="02020603050405020304" pitchFamily="18" charset="0"/>
@@ -23454,7 +23455,7 @@
                 <a:latin typeface="Times New Roman" panose="02020603050405020304" pitchFamily="18" charset="0"/>
                 <a:cs typeface="Times New Roman" panose="02020603050405020304" pitchFamily="18" charset="0"/>
               </a:rPr>
-              <a:t> / 34</a:t>
+              <a:t> / 35</a:t>
             </a:r>
             <a:endParaRPr dirty="0">
               <a:latin typeface="Times New Roman" panose="02020603050405020304" pitchFamily="18" charset="0"/>
@@ -24180,7 +24181,7 @@
                 <a:latin typeface="Times New Roman" panose="02020603050405020304" pitchFamily="18" charset="0"/>
                 <a:cs typeface="Times New Roman" panose="02020603050405020304" pitchFamily="18" charset="0"/>
               </a:rPr>
-              <a:t> / 34</a:t>
+              <a:t> / 35</a:t>
             </a:r>
             <a:endParaRPr dirty="0">
               <a:latin typeface="Times New Roman" panose="02020603050405020304" pitchFamily="18" charset="0"/>
@@ -24893,7 +24894,7 @@
                 <a:latin typeface="Times New Roman" panose="02020603050405020304" pitchFamily="18" charset="0"/>
                 <a:cs typeface="Times New Roman" panose="02020603050405020304" pitchFamily="18" charset="0"/>
               </a:rPr>
-              <a:t> / 34</a:t>
+              <a:t> / 35</a:t>
             </a:r>
             <a:endParaRPr dirty="0">
               <a:latin typeface="Times New Roman" panose="02020603050405020304" pitchFamily="18" charset="0"/>
@@ -25646,7 +25647,7 @@
                 <a:latin typeface="Times New Roman" panose="02020603050405020304" pitchFamily="18" charset="0"/>
                 <a:cs typeface="Times New Roman" panose="02020603050405020304" pitchFamily="18" charset="0"/>
               </a:rPr>
-              <a:t> / 34</a:t>
+              <a:t> / 35</a:t>
             </a:r>
             <a:endParaRPr dirty="0">
               <a:latin typeface="Times New Roman" panose="02020603050405020304" pitchFamily="18" charset="0"/>
@@ -26359,7 +26360,7 @@
                 <a:latin typeface="Times New Roman" panose="02020603050405020304" pitchFamily="18" charset="0"/>
                 <a:cs typeface="Times New Roman" panose="02020603050405020304" pitchFamily="18" charset="0"/>
               </a:rPr>
-              <a:t> / 34</a:t>
+              <a:t> / 35</a:t>
             </a:r>
             <a:endParaRPr dirty="0">
               <a:latin typeface="Times New Roman" panose="02020603050405020304" pitchFamily="18" charset="0"/>
@@ -26737,7 +26738,7 @@
                 <a:cs typeface="Times New Roman" panose="02020603050405020304" pitchFamily="18" charset="0"/>
                 <a:sym typeface="Arial"/>
               </a:rPr>
-              <a:t>The Gap - What We Claim and What We Do Not</a:t>
+              <a:t>Personal AI Is a Recognised Category, Not a Framing We Chose</a:t>
             </a:r>
           </a:p>
         </p:txBody>
@@ -27072,7 +27073,7 @@
                 <a:latin typeface="Times New Roman" panose="02020603050405020304" pitchFamily="18" charset="0"/>
                 <a:cs typeface="Times New Roman" panose="02020603050405020304" pitchFamily="18" charset="0"/>
               </a:rPr>
-              <a:t> / 34</a:t>
+              <a:t> / 35</a:t>
             </a:r>
             <a:endParaRPr dirty="0">
               <a:latin typeface="Times New Roman" panose="02020603050405020304" pitchFamily="18" charset="0"/>
@@ -27111,18 +27112,18 @@
               <a:buChar char="•"/>
             </a:pPr>
             <a:r>
-              <a:rPr lang="en-US" sz="950" b="1" dirty="0">
-                <a:latin typeface="Times New Roman" panose="02020603050405020304" pitchFamily="18" charset="0"/>
-                <a:cs typeface="Times New Roman" panose="02020603050405020304" pitchFamily="18" charset="0"/>
-              </a:rPr>
-              <a:t>We do NOT claim inventing selection-triggered AI</a:t>
-            </a:r>
-            <a:r>
-              <a:rPr lang="en-US" sz="950" b="0" dirty="0">
-                <a:latin typeface="Times New Roman" panose="02020603050405020304" pitchFamily="18" charset="0"/>
-                <a:cs typeface="Times New Roman" panose="02020603050405020304" pitchFamily="18" charset="0"/>
-              </a:rPr>
-              <a:t> - Highlight and Click to Do exist.</a:t>
+              <a:rPr lang="en-US" sz="1000" b="1" dirty="0">
+                <a:latin typeface="Times New Roman" panose="02020603050405020304" pitchFamily="18" charset="0"/>
+                <a:cs typeface="Times New Roman" panose="02020603050405020304" pitchFamily="18" charset="0"/>
+              </a:rPr>
+              <a:t>The concern this slide answers:</a:t>
+            </a:r>
+            <a:r>
+              <a:rPr lang="en-US" sz="1000" b="0" dirty="0">
+                <a:latin typeface="Times New Roman" panose="02020603050405020304" pitchFamily="18" charset="0"/>
+                <a:cs typeface="Times New Roman" panose="02020603050405020304" pitchFamily="18" charset="0"/>
+              </a:rPr>
+              <a:t> if we do not explicitly separate ourselves, a reviewer maps any memory-carrying agent onto the nearest known project and stops looking further.</a:t>
             </a:r>
           </a:p>
           <a:p>
@@ -27131,18 +27132,18 @@
               <a:buChar char="•"/>
             </a:pPr>
             <a:r>
-              <a:rPr lang="en-US" sz="950" b="1" dirty="0">
-                <a:latin typeface="Times New Roman" panose="02020603050405020304" pitchFamily="18" charset="0"/>
-                <a:cs typeface="Times New Roman" panose="02020603050405020304" pitchFamily="18" charset="0"/>
-              </a:rPr>
-              <a:t>We do NOT claim inventing agent memory</a:t>
-            </a:r>
-            <a:r>
-              <a:rPr lang="en-US" sz="950" b="0" dirty="0">
-                <a:latin typeface="Times New Roman" panose="02020603050405020304" pitchFamily="18" charset="0"/>
-                <a:cs typeface="Times New Roman" panose="02020603050405020304" pitchFamily="18" charset="0"/>
-              </a:rPr>
-              <a:t> - Mem0, Zep and Letta are mature.</a:t>
+              <a:rPr lang="en-US" sz="1000" b="1" dirty="0">
+                <a:latin typeface="Times New Roman" panose="02020603050405020304" pitchFamily="18" charset="0"/>
+                <a:cs typeface="Times New Roman" panose="02020603050405020304" pitchFamily="18" charset="0"/>
+              </a:rPr>
+              <a:t>SIGKDD 2026 itself runs a dedicated workshop on this.</a:t>
+            </a:r>
+            <a:r>
+              <a:rPr lang="en-US" sz="1000" b="0" dirty="0">
+                <a:latin typeface="Times New Roman" panose="02020603050405020304" pitchFamily="18" charset="0"/>
+                <a:cs typeface="Times New Roman" panose="02020603050405020304" pitchFamily="18" charset="0"/>
+              </a:rPr>
+              <a:t> PILA 2026 - Personal Intelligence in the Agentic AI Era, co-located with SIGKDD, 10 August 2026. Its scope: personalized agents, user modeling, memory and retrieval, adaptive planning, privacy and deployment. The top venue in this space has already drawn this exact line.</a:t>
             </a:r>
           </a:p>
           <a:p>
@@ -27151,18 +27152,18 @@
               <a:buChar char="•"/>
             </a:pPr>
             <a:r>
-              <a:rPr lang="en-US" sz="950" b="1" dirty="0">
-                <a:latin typeface="Times New Roman" panose="02020603050405020304" pitchFamily="18" charset="0"/>
-                <a:cs typeface="Times New Roman" panose="02020603050405020304" pitchFamily="18" charset="0"/>
-              </a:rPr>
-              <a:t>We do NOT claim inventing memory gating</a:t>
-            </a:r>
-            <a:r>
-              <a:rPr lang="en-US" sz="950" b="0" dirty="0">
-                <a:latin typeface="Times New Roman" panose="02020603050405020304" pitchFamily="18" charset="0"/>
-                <a:cs typeface="Times New Roman" panose="02020603050405020304" pitchFamily="18" charset="0"/>
-              </a:rPr>
-              <a:t> - MemGate does exactly this, with a learned gate.</a:t>
+              <a:rPr lang="en-US" sz="1000" b="1" dirty="0">
+                <a:latin typeface="Times New Roman" panose="02020603050405020304" pitchFamily="18" charset="0"/>
+                <a:cs typeface="Times New Roman" panose="02020603050405020304" pitchFamily="18" charset="0"/>
+              </a:rPr>
+              <a:t>And it is not just a workshop.</a:t>
+            </a:r>
+            <a:r>
+              <a:rPr lang="en-US" sz="1000" b="0" dirty="0">
+                <a:latin typeface="Times New Roman" panose="02020603050405020304" pitchFamily="18" charset="0"/>
+                <a:cs typeface="Times New Roman" panose="02020603050405020304" pitchFamily="18" charset="0"/>
+              </a:rPr>
+              <a:t> A Scrutable Assistant for Time Management is a full peer- reviewed paper at ACM UMAP 2026 - a 34-year-old conference series dedicated to user modeling and personalization. It studies a personal assistant users can scrutinise, down to the model behind its suggestions - independently arrived at, published, and close enough to our own admission gate that the field already has a name for it: scrutability.</a:t>
             </a:r>
           </a:p>
           <a:p>
@@ -27171,98 +27172,18 @@
               <a:buChar char="•"/>
             </a:pPr>
             <a:r>
-              <a:rPr lang="en-US" sz="950" b="1" dirty="0">
-                <a:latin typeface="Times New Roman" panose="02020603050405020304" pitchFamily="18" charset="0"/>
-                <a:cs typeface="Times New Roman" panose="02020603050405020304" pitchFamily="18" charset="0"/>
-              </a:rPr>
-              <a:t>We do NOT claim inventing an OS-level personal index</a:t>
-            </a:r>
-            <a:r>
-              <a:rPr lang="en-US" sz="950" b="0" dirty="0">
-                <a:latin typeface="Times New Roman" panose="02020603050405020304" pitchFamily="18" charset="0"/>
-                <a:cs typeface="Times New Roman" panose="02020603050405020304" pitchFamily="18" charset="0"/>
-              </a:rPr>
-              <a:t> - Microsoft's Windows Semantic Index.</a:t>
-            </a:r>
-          </a:p>
-          <a:p>
-            <a:pPr marL="171450" lvl="1" indent="-171450" algn="l">
-              <a:buFont typeface="Arial" panose="020B0604020202020204" pitchFamily="34" charset="0"/>
-              <a:buChar char="•"/>
-            </a:pPr>
-            <a:r>
-              <a:rPr lang="en-US" sz="950" b="1" dirty="0">
-                <a:latin typeface="Times New Roman" panose="02020603050405020304" pitchFamily="18" charset="0"/>
-                <a:cs typeface="Times New Roman" panose="02020603050405020304" pitchFamily="18" charset="0"/>
-              </a:rPr>
-              <a:t>C1 - budget-aware assembly across heterogeneous models.</a:t>
-            </a:r>
-            <a:r>
-              <a:rPr lang="en-US" sz="950" b="0" dirty="0">
-                <a:latin typeface="Times New Roman" panose="02020603050405020304" pitchFamily="18" charset="0"/>
-                <a:cs typeface="Times New Roman" panose="02020603050405020304" pitchFamily="18" charset="0"/>
-              </a:rPr>
-              <a:t> One memory layer serving a 4B local model and a frontier API, with an ablation at three model sizes. Named as an open coordination problem by the 2026 externalization survey.</a:t>
-            </a:r>
-          </a:p>
-          <a:p>
-            <a:pPr marL="171450" lvl="1" indent="-171450" algn="l">
-              <a:buFont typeface="Arial" panose="020B0604020202020204" pitchFamily="34" charset="0"/>
-              <a:buChar char="•"/>
-            </a:pPr>
-            <a:r>
-              <a:rPr lang="en-US" sz="950" b="1" dirty="0">
-                <a:latin typeface="Times New Roman" panose="02020603050405020304" pitchFamily="18" charset="0"/>
-                <a:cs typeface="Times New Roman" panose="02020603050405020304" pitchFamily="18" charset="0"/>
-              </a:rPr>
-              <a:t>C2 - declarative, auditable admission on a user-owned type system</a:t>
-            </a:r>
-            <a:r>
-              <a:rPr lang="en-US" sz="950" b="0" dirty="0">
-                <a:latin typeface="Times New Roman" panose="02020603050405020304" pitchFamily="18" charset="0"/>
-                <a:cs typeface="Times New Roman" panose="02020603050405020304" pitchFamily="18" charset="0"/>
-              </a:rPr>
-              <a:t> that also drives privacy routing. One primitive doing two jobs.</a:t>
-            </a:r>
-          </a:p>
-          <a:p>
-            <a:pPr marL="171450" lvl="1" indent="-171450" algn="l">
-              <a:buFont typeface="Arial" panose="020B0604020202020204" pitchFamily="34" charset="0"/>
-              <a:buChar char="•"/>
-            </a:pPr>
-            <a:r>
-              <a:rPr lang="en-US" sz="950" b="1" dirty="0">
-                <a:latin typeface="Times New Roman" panose="02020603050405020304" pitchFamily="18" charset="0"/>
-                <a:cs typeface="Times New Roman" panose="02020603050405020304" pitchFamily="18" charset="0"/>
-              </a:rPr>
-              <a:t>C3 - import from official platform exports</a:t>
-            </a:r>
-            <a:r>
-              <a:rPr lang="en-US" sz="950" b="0" dirty="0">
-                <a:latin typeface="Times New Roman" panose="02020603050405020304" pitchFamily="18" charset="0"/>
-                <a:cs typeface="Times New Roman" panose="02020603050405020304" pitchFamily="18" charset="0"/>
-              </a:rPr>
-              <a:t> - the only ToS-legitimate cross-vendor bridge.</a:t>
-            </a:r>
-          </a:p>
-          <a:p>
-            <a:pPr marL="171450" lvl="1" indent="-171450" algn="l">
-              <a:buFont typeface="Arial" panose="020B0604020202020204" pitchFamily="34" charset="0"/>
-              <a:buChar char="•"/>
-            </a:pPr>
-            <a:r>
-              <a:rPr lang="en-US" sz="950" b="1" dirty="0">
-                <a:latin typeface="Times New Roman" panose="02020603050405020304" pitchFamily="18" charset="0"/>
-                <a:cs typeface="Times New Roman" panose="02020603050405020304" pitchFamily="18" charset="0"/>
-              </a:rPr>
-              <a:t>C4 - the first open-source, model-agnostic, OS-integrated personal assistant</a:t>
-            </a:r>
-            <a:r>
-              <a:rPr lang="en-US" sz="950" b="0" dirty="0">
-                <a:latin typeface="Times New Roman" panose="02020603050405020304" pitchFamily="18" charset="0"/>
-                <a:cs typeface="Times New Roman" panose="02020603050405020304" pitchFamily="18" charset="0"/>
-              </a:rPr>
-              <a:t> that runs fully local on ordinary Windows Home hardware.</a:t>
+              <a:rPr lang="en-US" sz="1000" b="1" dirty="0">
+                <a:latin typeface="Times New Roman" panose="02020603050405020304" pitchFamily="18" charset="0"/>
+                <a:cs typeface="Times New Roman" panose="02020603050405020304" pitchFamily="18" charset="0"/>
+              </a:rPr>
+              <a:t>So the line is not ours to defend alone.</a:t>
+            </a:r>
+            <a:r>
+              <a:rPr lang="en-US" sz="1000" b="0" dirty="0">
+                <a:latin typeface="Times New Roman" panose="02020603050405020304" pitchFamily="18" charset="0"/>
+                <a:cs typeface="Times New Roman" panose="02020603050405020304" pitchFamily="18" charset="0"/>
+              </a:rPr>
+              <a:t> Personal AI assistants are a distinct, actively reviewed category at ACM's own venues in 2026, separate from memory-architecture research. We are answering a question the field already treats as its own.</a:t>
             </a:r>
           </a:p>
         </p:txBody>
@@ -27510,7 +27431,7 @@
                 <a:cs typeface="Times New Roman" panose="02020603050405020304" pitchFamily="18" charset="0"/>
                 <a:sym typeface="Arial"/>
               </a:rPr>
-              <a:t>Expected Results and Honest Limitations</a:t>
+              <a:t>The Gap - What We Claim and What We Do Not</a:t>
             </a:r>
           </a:p>
         </p:txBody>
@@ -27845,7 +27766,7 @@
                 <a:latin typeface="Times New Roman" panose="02020603050405020304" pitchFamily="18" charset="0"/>
                 <a:cs typeface="Times New Roman" panose="02020603050405020304" pitchFamily="18" charset="0"/>
               </a:rPr>
-              <a:t> / 34</a:t>
+              <a:t> / 35</a:t>
             </a:r>
             <a:endParaRPr dirty="0">
               <a:latin typeface="Times New Roman" panose="02020603050405020304" pitchFamily="18" charset="0"/>
@@ -27888,14 +27809,14 @@
                 <a:latin typeface="Times New Roman" panose="02020603050405020304" pitchFamily="18" charset="0"/>
                 <a:cs typeface="Times New Roman" panose="02020603050405020304" pitchFamily="18" charset="0"/>
               </a:rPr>
-              <a:t>What we expect to show.</a:t>
+              <a:t>We do NOT claim inventing selection-triggered AI</a:t>
             </a:r>
             <a:r>
               <a:rPr lang="en-US" sz="950" b="0" dirty="0">
                 <a:latin typeface="Times New Roman" panose="02020603050405020304" pitchFamily="18" charset="0"/>
                 <a:cs typeface="Times New Roman" panose="02020603050405020304" pitchFamily="18" charset="0"/>
               </a:rPr>
-              <a:t> Budget-aware assembly beating both naive conditions at every model size, with the largest margin on the smallest model. Zero leakage on OP-Bench irrelevance without losing identity context. Sub-second trigger-to-first-token locally. Zero bytes in private mode.</a:t>
+              <a:t> - Highlight and Click to Do exist.</a:t>
             </a:r>
           </a:p>
           <a:p>
@@ -27908,14 +27829,14 @@
                 <a:latin typeface="Times New Roman" panose="02020603050405020304" pitchFamily="18" charset="0"/>
                 <a:cs typeface="Times New Roman" panose="02020603050405020304" pitchFamily="18" charset="0"/>
               </a:rPr>
-              <a:t>Known limitation - six classes is a design choice, not a derivation.</a:t>
+              <a:t>We do NOT claim inventing agent memory</a:t>
             </a:r>
             <a:r>
               <a:rPr lang="en-US" sz="950" b="0" dirty="0">
                 <a:latin typeface="Times New Roman" panose="02020603050405020304" pitchFamily="18" charset="0"/>
                 <a:cs typeface="Times New Roman" panose="02020603050405020304" pitchFamily="18" charset="0"/>
               </a:rPr>
-              <a:t> The defence is that classes are a routing device and each one is a new failure mode, so the burden is on adding a seventh. And it is testable: E1 measures whether routing helps or hurts.</a:t>
+              <a:t> - Mem0, Zep and Letta are mature.</a:t>
             </a:r>
           </a:p>
           <a:p>
@@ -27928,14 +27849,14 @@
                 <a:latin typeface="Times New Roman" panose="02020603050405020304" pitchFamily="18" charset="0"/>
                 <a:cs typeface="Times New Roman" panose="02020603050405020304" pitchFamily="18" charset="0"/>
               </a:rPr>
-              <a:t>Known limitation - import depends on export formats we do not control.</a:t>
+              <a:t>We do NOT claim inventing memory gating</a:t>
             </a:r>
             <a:r>
               <a:rPr lang="en-US" sz="950" b="0" dirty="0">
                 <a:latin typeface="Times New Roman" panose="02020603050405020304" pitchFamily="18" charset="0"/>
                 <a:cs typeface="Times New Roman" panose="02020603050405020304" pitchFamily="18" charset="0"/>
               </a:rPr>
-              <a:t> They are undocumented JSON that can change without notice. Parsers are isolated per platform and fail loudly, the extraction-prompt path works with no export at all, and the review screen means a broken parser produces nothing rather than garbage.</a:t>
+              <a:t> - MemGate does exactly this, with a learned gate.</a:t>
             </a:r>
           </a:p>
           <a:p>
@@ -27948,14 +27869,14 @@
                 <a:latin typeface="Times New Roman" panose="02020603050405020304" pitchFamily="18" charset="0"/>
                 <a:cs typeface="Times New Roman" panose="02020603050405020304" pitchFamily="18" charset="0"/>
               </a:rPr>
-              <a:t>Known limitation - UI Automation coverage varies by application.</a:t>
+              <a:t>We do NOT claim inventing an OS-level personal index</a:t>
             </a:r>
             <a:r>
               <a:rPr lang="en-US" sz="950" b="0" dirty="0">
                 <a:latin typeface="Times New Roman" panose="02020603050405020304" pitchFamily="18" charset="0"/>
                 <a:cs typeface="Times New Roman" panose="02020603050405020304" pitchFamily="18" charset="0"/>
               </a:rPr>
-              <a:t> That is why the clipboard fallback exists and why the coverage table is a documented deliverable.</a:t>
+              <a:t> - Microsoft's Windows Semantic Index.</a:t>
             </a:r>
           </a:p>
           <a:p>
@@ -27968,14 +27889,74 @@
                 <a:latin typeface="Times New Roman" panose="02020603050405020304" pitchFamily="18" charset="0"/>
                 <a:cs typeface="Times New Roman" panose="02020603050405020304" pitchFamily="18" charset="0"/>
               </a:rPr>
-              <a:t>Practical risk:</a:t>
+              <a:t>C1 - budget-aware assembly across heterogeneous models.</a:t>
             </a:r>
             <a:r>
               <a:rPr lang="en-US" sz="950" b="0" dirty="0">
                 <a:latin typeface="Times New Roman" panose="02020603050405020304" pitchFamily="18" charset="0"/>
                 <a:cs typeface="Times New Roman" panose="02020603050405020304" pitchFamily="18" charset="0"/>
               </a:rPr>
-              <a:t> screen-reading behaviour can trip antivirus heuristics, so the installer must be signed and all capture must stay user-initiated.</a:t>
+              <a:t> One memory layer serving a 4B local model and a frontier API, with an ablation at three model sizes. Named as an open coordination problem by the 2026 externalization survey.</a:t>
+            </a:r>
+          </a:p>
+          <a:p>
+            <a:pPr marL="171450" lvl="1" indent="-171450" algn="l">
+              <a:buFont typeface="Arial" panose="020B0604020202020204" pitchFamily="34" charset="0"/>
+              <a:buChar char="•"/>
+            </a:pPr>
+            <a:r>
+              <a:rPr lang="en-US" sz="950" b="1" dirty="0">
+                <a:latin typeface="Times New Roman" panose="02020603050405020304" pitchFamily="18" charset="0"/>
+                <a:cs typeface="Times New Roman" panose="02020603050405020304" pitchFamily="18" charset="0"/>
+              </a:rPr>
+              <a:t>C2 - declarative, auditable admission on a user-owned type system</a:t>
+            </a:r>
+            <a:r>
+              <a:rPr lang="en-US" sz="950" b="0" dirty="0">
+                <a:latin typeface="Times New Roman" panose="02020603050405020304" pitchFamily="18" charset="0"/>
+                <a:cs typeface="Times New Roman" panose="02020603050405020304" pitchFamily="18" charset="0"/>
+              </a:rPr>
+              <a:t> that also drives privacy routing. One primitive doing two jobs.</a:t>
+            </a:r>
+          </a:p>
+          <a:p>
+            <a:pPr marL="171450" lvl="1" indent="-171450" algn="l">
+              <a:buFont typeface="Arial" panose="020B0604020202020204" pitchFamily="34" charset="0"/>
+              <a:buChar char="•"/>
+            </a:pPr>
+            <a:r>
+              <a:rPr lang="en-US" sz="950" b="1" dirty="0">
+                <a:latin typeface="Times New Roman" panose="02020603050405020304" pitchFamily="18" charset="0"/>
+                <a:cs typeface="Times New Roman" panose="02020603050405020304" pitchFamily="18" charset="0"/>
+              </a:rPr>
+              <a:t>C3 - import from official platform exports</a:t>
+            </a:r>
+            <a:r>
+              <a:rPr lang="en-US" sz="950" b="0" dirty="0">
+                <a:latin typeface="Times New Roman" panose="02020603050405020304" pitchFamily="18" charset="0"/>
+                <a:cs typeface="Times New Roman" panose="02020603050405020304" pitchFamily="18" charset="0"/>
+              </a:rPr>
+              <a:t> - the only ToS-legitimate cross-vendor bridge.</a:t>
+            </a:r>
+          </a:p>
+          <a:p>
+            <a:pPr marL="171450" lvl="1" indent="-171450" algn="l">
+              <a:buFont typeface="Arial" panose="020B0604020202020204" pitchFamily="34" charset="0"/>
+              <a:buChar char="•"/>
+            </a:pPr>
+            <a:r>
+              <a:rPr lang="en-US" sz="950" b="1" dirty="0">
+                <a:latin typeface="Times New Roman" panose="02020603050405020304" pitchFamily="18" charset="0"/>
+                <a:cs typeface="Times New Roman" panose="02020603050405020304" pitchFamily="18" charset="0"/>
+              </a:rPr>
+              <a:t>C4 - the first open-source, model-agnostic, OS-integrated personal assistant</a:t>
+            </a:r>
+            <a:r>
+              <a:rPr lang="en-US" sz="950" b="0" dirty="0">
+                <a:latin typeface="Times New Roman" panose="02020603050405020304" pitchFamily="18" charset="0"/>
+                <a:cs typeface="Times New Roman" panose="02020603050405020304" pitchFamily="18" charset="0"/>
+              </a:rPr>
+              <a:t> that runs fully local on ordinary Windows Home hardware.</a:t>
             </a:r>
           </a:p>
         </p:txBody>
@@ -28223,7 +28204,7 @@
                 <a:cs typeface="Times New Roman" panose="02020603050405020304" pitchFamily="18" charset="0"/>
                 <a:sym typeface="Arial"/>
               </a:rPr>
-              <a:t>Conclusion</a:t>
+              <a:t>Expected Results and Honest Limitations</a:t>
             </a:r>
           </a:p>
         </p:txBody>
@@ -28558,7 +28539,7 @@
                 <a:latin typeface="Times New Roman" panose="02020603050405020304" pitchFamily="18" charset="0"/>
                 <a:cs typeface="Times New Roman" panose="02020603050405020304" pitchFamily="18" charset="0"/>
               </a:rPr>
-              <a:t> / 34</a:t>
+              <a:t> / 35</a:t>
             </a:r>
             <a:endParaRPr dirty="0">
               <a:latin typeface="Times New Roman" panose="02020603050405020304" pitchFamily="18" charset="0"/>
@@ -28597,18 +28578,18 @@
               <a:buChar char="•"/>
             </a:pPr>
             <a:r>
-              <a:rPr lang="en-US" sz="1000" b="1" dirty="0">
-                <a:latin typeface="Times New Roman" panose="02020603050405020304" pitchFamily="18" charset="0"/>
-                <a:cs typeface="Times New Roman" panose="02020603050405020304" pitchFamily="18" charset="0"/>
-              </a:rPr>
-              <a:t>The problem is not which AI you use.</a:t>
-            </a:r>
-            <a:r>
-              <a:rPr lang="en-US" sz="1000" b="0" dirty="0">
-                <a:latin typeface="Times New Roman" panose="02020603050405020304" pitchFamily="18" charset="0"/>
-                <a:cs typeface="Times New Roman" panose="02020603050405020304" pitchFamily="18" charset="0"/>
-              </a:rPr>
-              <a:t> It is that your context is trapped inside whichever one you typed it into, and the assistant that would use it is trapped inside an application window.</a:t>
+              <a:rPr lang="en-US" sz="950" b="1" dirty="0">
+                <a:latin typeface="Times New Roman" panose="02020603050405020304" pitchFamily="18" charset="0"/>
+                <a:cs typeface="Times New Roman" panose="02020603050405020304" pitchFamily="18" charset="0"/>
+              </a:rPr>
+              <a:t>What we expect to show.</a:t>
+            </a:r>
+            <a:r>
+              <a:rPr lang="en-US" sz="950" b="0" dirty="0">
+                <a:latin typeface="Times New Roman" panose="02020603050405020304" pitchFamily="18" charset="0"/>
+                <a:cs typeface="Times New Roman" panose="02020603050405020304" pitchFamily="18" charset="0"/>
+              </a:rPr>
+              <a:t> Budget-aware assembly beating both naive conditions at every model size, with the largest margin on the smallest model. Zero leakage on OP-Bench irrelevance without losing identity context. Sub-second trigger-to-first-token locally. Zero bytes in private mode.</a:t>
             </a:r>
           </a:p>
           <a:p>
@@ -28617,18 +28598,18 @@
               <a:buChar char="•"/>
             </a:pPr>
             <a:r>
-              <a:rPr lang="en-US" sz="1000" b="1" dirty="0">
-                <a:latin typeface="Times New Roman" panose="02020603050405020304" pitchFamily="18" charset="0"/>
-                <a:cs typeface="Times New Roman" panose="02020603050405020304" pitchFamily="18" charset="0"/>
-              </a:rPr>
-              <a:t>The measurement backs it.</a:t>
-            </a:r>
-            <a:r>
-              <a:rPr lang="en-US" sz="1000" b="0" dirty="0">
-                <a:latin typeface="Times New Roman" panose="02020603050405020304" pitchFamily="18" charset="0"/>
-                <a:cs typeface="Times New Roman" panose="02020603050405020304" pitchFamily="18" charset="0"/>
-              </a:rPr>
-              <a:t> ACM SIGKDD 2026 found frontier models below 70% when a task needs persistent knowledge of the user. OP-Bench found that adding memory naively makes things worse.</a:t>
+              <a:rPr lang="en-US" sz="950" b="1" dirty="0">
+                <a:latin typeface="Times New Roman" panose="02020603050405020304" pitchFamily="18" charset="0"/>
+                <a:cs typeface="Times New Roman" panose="02020603050405020304" pitchFamily="18" charset="0"/>
+              </a:rPr>
+              <a:t>Known limitation - six classes is a design choice, not a derivation.</a:t>
+            </a:r>
+            <a:r>
+              <a:rPr lang="en-US" sz="950" b="0" dirty="0">
+                <a:latin typeface="Times New Roman" panose="02020603050405020304" pitchFamily="18" charset="0"/>
+                <a:cs typeface="Times New Roman" panose="02020603050405020304" pitchFamily="18" charset="0"/>
+              </a:rPr>
+              <a:t> The defence is that classes are a routing device and each one is a new failure mode, so the burden is on adding a seventh. And it is testable: E1 measures whether routing helps or hurts.</a:t>
             </a:r>
           </a:p>
           <a:p>
@@ -28637,18 +28618,18 @@
               <a:buChar char="•"/>
             </a:pPr>
             <a:r>
-              <a:rPr lang="en-US" sz="1000" b="1" dirty="0">
-                <a:latin typeface="Times New Roman" panose="02020603050405020304" pitchFamily="18" charset="0"/>
-                <a:cs typeface="Times New Roman" panose="02020603050405020304" pitchFamily="18" charset="0"/>
-              </a:rPr>
-              <a:t>PERCH is the layer above the applications.</a:t>
-            </a:r>
-            <a:r>
-              <a:rPr lang="en-US" sz="1000" b="0" dirty="0">
-                <a:latin typeface="Times New Roman" panose="02020603050405020304" pitchFamily="18" charset="0"/>
-                <a:cs typeface="Times New Roman" panose="02020603050405020304" pitchFamily="18" charset="0"/>
-              </a:rPr>
-              <a:t> Summoned anywhere in Windows, answering beside your work, writing back into the document you were in, remembering what you told it once, and running on whichever model you choose - including one that never leaves your machine.</a:t>
+              <a:rPr lang="en-US" sz="950" b="1" dirty="0">
+                <a:latin typeface="Times New Roman" panose="02020603050405020304" pitchFamily="18" charset="0"/>
+                <a:cs typeface="Times New Roman" panose="02020603050405020304" pitchFamily="18" charset="0"/>
+              </a:rPr>
+              <a:t>Known limitation - import depends on export formats we do not control.</a:t>
+            </a:r>
+            <a:r>
+              <a:rPr lang="en-US" sz="950" b="0" dirty="0">
+                <a:latin typeface="Times New Roman" panose="02020603050405020304" pitchFamily="18" charset="0"/>
+                <a:cs typeface="Times New Roman" panose="02020603050405020304" pitchFamily="18" charset="0"/>
+              </a:rPr>
+              <a:t> They are undocumented JSON that can change without notice. Parsers are isolated per platform and fail loudly, the extraction-prompt path works with no export at all, and the review screen means a broken parser produces nothing rather than garbage.</a:t>
             </a:r>
           </a:p>
           <a:p>
@@ -28657,18 +28638,18 @@
               <a:buChar char="•"/>
             </a:pPr>
             <a:r>
-              <a:rPr lang="en-US" sz="1000" b="1" dirty="0">
-                <a:latin typeface="Times New Roman" panose="02020603050405020304" pitchFamily="18" charset="0"/>
-                <a:cs typeface="Times New Roman" panose="02020603050405020304" pitchFamily="18" charset="0"/>
-              </a:rPr>
-              <a:t>The risky part is already built.</a:t>
-            </a:r>
-            <a:r>
-              <a:rPr lang="en-US" sz="1000" b="0" dirty="0">
-                <a:latin typeface="Times New Roman" panose="02020603050405020304" pitchFamily="18" charset="0"/>
-                <a:cs typeface="Times New Roman" panose="02020603050405020304" pitchFamily="18" charset="0"/>
-              </a:rPr>
-              <a:t> The OS layer runs. So does the pipeline: routing, ranking, admission, packing, tools, and 21 passing tests.</a:t>
+              <a:rPr lang="en-US" sz="950" b="1" dirty="0">
+                <a:latin typeface="Times New Roman" panose="02020603050405020304" pitchFamily="18" charset="0"/>
+                <a:cs typeface="Times New Roman" panose="02020603050405020304" pitchFamily="18" charset="0"/>
+              </a:rPr>
+              <a:t>Known limitation - UI Automation coverage varies by application.</a:t>
+            </a:r>
+            <a:r>
+              <a:rPr lang="en-US" sz="950" b="0" dirty="0">
+                <a:latin typeface="Times New Roman" panose="02020603050405020304" pitchFamily="18" charset="0"/>
+                <a:cs typeface="Times New Roman" panose="02020603050405020304" pitchFamily="18" charset="0"/>
+              </a:rPr>
+              <a:t> That is why the clipboard fallback exists and why the coverage table is a documented deliverable.</a:t>
             </a:r>
           </a:p>
           <a:p>
@@ -28677,31 +28658,18 @@
               <a:buChar char="•"/>
             </a:pPr>
             <a:r>
-              <a:rPr lang="en-US" sz="1000" b="1" dirty="0">
-                <a:latin typeface="Times New Roman" panose="02020603050405020304" pitchFamily="18" charset="0"/>
-                <a:cs typeface="Times New Roman" panose="02020603050405020304" pitchFamily="18" charset="0"/>
-              </a:rPr>
-              <a:t>The technical core is the retrieval gate and the budget packer</a:t>
-            </a:r>
-            <a:r>
-              <a:rPr lang="en-US" sz="1000" b="0" dirty="0">
-                <a:latin typeface="Times New Roman" panose="02020603050405020304" pitchFamily="18" charset="0"/>
-                <a:cs typeface="Times New Roman" panose="02020603050405020304" pitchFamily="18" charset="0"/>
-              </a:rPr>
-              <a:t> - a calibration problem and a constrained-allocation problem, evaluated with four ablations on public benchmarks.</a:t>
-            </a:r>
-          </a:p>
-          <a:p>
-            <a:pPr marL="171450" lvl="1" indent="-171450" algn="l">
-              <a:buFont typeface="Arial" panose="020B0604020202020204" pitchFamily="34" charset="0"/>
-              <a:buChar char="•"/>
-            </a:pPr>
-            <a:r>
-              <a:rPr lang="en-US" sz="1000" b="1" dirty="0">
-                <a:latin typeface="Times New Roman" panose="02020603050405020304" pitchFamily="18" charset="0"/>
-                <a:cs typeface="Times New Roman" panose="02020603050405020304" pitchFamily="18" charset="0"/>
-              </a:rPr>
-              <a:t>You pay for four AI assistants. None of them know you, and none of them will tell each other. PERCH is the one that's yours.</a:t>
+              <a:rPr lang="en-US" sz="950" b="1" dirty="0">
+                <a:latin typeface="Times New Roman" panose="02020603050405020304" pitchFamily="18" charset="0"/>
+                <a:cs typeface="Times New Roman" panose="02020603050405020304" pitchFamily="18" charset="0"/>
+              </a:rPr>
+              <a:t>Practical risk:</a:t>
+            </a:r>
+            <a:r>
+              <a:rPr lang="en-US" sz="950" b="0" dirty="0">
+                <a:latin typeface="Times New Roman" panose="02020603050405020304" pitchFamily="18" charset="0"/>
+                <a:cs typeface="Times New Roman" panose="02020603050405020304" pitchFamily="18" charset="0"/>
+              </a:rPr>
+              <a:t> screen-reading behaviour can trip antivirus heuristics, so the installer must be signed and all capture must stay user-initiated.</a:t>
             </a:r>
           </a:p>
         </p:txBody>
@@ -28949,7 +28917,7 @@
                 <a:cs typeface="Times New Roman" panose="02020603050405020304" pitchFamily="18" charset="0"/>
                 <a:sym typeface="Arial"/>
               </a:rPr>
-              <a:t>References - Peer-Reviewed Spine</a:t>
+              <a:t>Conclusion</a:t>
             </a:r>
           </a:p>
         </p:txBody>
@@ -29284,7 +29252,7 @@
                 <a:latin typeface="Times New Roman" panose="02020603050405020304" pitchFamily="18" charset="0"/>
                 <a:cs typeface="Times New Roman" panose="02020603050405020304" pitchFamily="18" charset="0"/>
               </a:rPr>
-              <a:t> / 34</a:t>
+              <a:t> / 35</a:t>
             </a:r>
             <a:endParaRPr dirty="0">
               <a:latin typeface="Times New Roman" panose="02020603050405020304" pitchFamily="18" charset="0"/>
@@ -29323,18 +29291,18 @@
               <a:buChar char="•"/>
             </a:pPr>
             <a:r>
-              <a:rPr lang="en-US" sz="850" b="1" dirty="0">
-                <a:latin typeface="Times New Roman" panose="02020603050405020304" pitchFamily="18" charset="0"/>
-                <a:cs typeface="Times New Roman" panose="02020603050405020304" pitchFamily="18" charset="0"/>
-              </a:rPr>
-              <a:t>[1] PAUSE: A User-Centric Benchmark for Personal AI Assistants in Unified Service Environments.</a:t>
-            </a:r>
-            <a:r>
-              <a:rPr lang="en-US" sz="850" b="0" dirty="0">
-                <a:latin typeface="Times New Roman" panose="02020603050405020304" pitchFamily="18" charset="0"/>
-                <a:cs typeface="Times New Roman" panose="02020603050405020304" pitchFamily="18" charset="0"/>
-              </a:rPr>
-              <a:t> Chen, Shi, Wang, Chen, Niu. ACM SIGKDD 2026, Jeju Island. - BASE PAPER</a:t>
+              <a:rPr lang="en-US" sz="1000" b="1" dirty="0">
+                <a:latin typeface="Times New Roman" panose="02020603050405020304" pitchFamily="18" charset="0"/>
+                <a:cs typeface="Times New Roman" panose="02020603050405020304" pitchFamily="18" charset="0"/>
+              </a:rPr>
+              <a:t>The problem is not which AI you use.</a:t>
+            </a:r>
+            <a:r>
+              <a:rPr lang="en-US" sz="1000" b="0" dirty="0">
+                <a:latin typeface="Times New Roman" panose="02020603050405020304" pitchFamily="18" charset="0"/>
+                <a:cs typeface="Times New Roman" panose="02020603050405020304" pitchFamily="18" charset="0"/>
+              </a:rPr>
+              <a:t> It is that your context is trapped inside whichever one you typed it into, and the assistant that would use it is trapped inside an application window.</a:t>
             </a:r>
           </a:p>
           <a:p>
@@ -29343,18 +29311,18 @@
               <a:buChar char="•"/>
             </a:pPr>
             <a:r>
-              <a:rPr lang="en-US" sz="850" b="1" dirty="0">
-                <a:latin typeface="Times New Roman" panose="02020603050405020304" pitchFamily="18" charset="0"/>
-                <a:cs typeface="Times New Roman" panose="02020603050405020304" pitchFamily="18" charset="0"/>
-              </a:rPr>
-              <a:t>[2] A Survey on the Memory Mechanism of LLM-based Agents.</a:t>
-            </a:r>
-            <a:r>
-              <a:rPr lang="en-US" sz="850" b="0" dirty="0">
-                <a:latin typeface="Times New Roman" panose="02020603050405020304" pitchFamily="18" charset="0"/>
-                <a:cs typeface="Times New Roman" panose="02020603050405020304" pitchFamily="18" charset="0"/>
-              </a:rPr>
-              <a:t> ACM Transactions on Information Systems 43(6), 2025. DOI 10.1145/3748302</a:t>
+              <a:rPr lang="en-US" sz="1000" b="1" dirty="0">
+                <a:latin typeface="Times New Roman" panose="02020603050405020304" pitchFamily="18" charset="0"/>
+                <a:cs typeface="Times New Roman" panose="02020603050405020304" pitchFamily="18" charset="0"/>
+              </a:rPr>
+              <a:t>The measurement backs it.</a:t>
+            </a:r>
+            <a:r>
+              <a:rPr lang="en-US" sz="1000" b="0" dirty="0">
+                <a:latin typeface="Times New Roman" panose="02020603050405020304" pitchFamily="18" charset="0"/>
+                <a:cs typeface="Times New Roman" panose="02020603050405020304" pitchFamily="18" charset="0"/>
+              </a:rPr>
+              <a:t> ACM SIGKDD 2026 found frontier models below 70% when a task needs persistent knowledge of the user. OP-Bench found that adding memory naively makes things worse.</a:t>
             </a:r>
           </a:p>
           <a:p>
@@ -29363,18 +29331,18 @@
               <a:buChar char="•"/>
             </a:pPr>
             <a:r>
-              <a:rPr lang="en-US" sz="850" b="1" dirty="0">
-                <a:latin typeface="Times New Roman" panose="02020603050405020304" pitchFamily="18" charset="0"/>
-                <a:cs typeface="Times New Roman" panose="02020603050405020304" pitchFamily="18" charset="0"/>
-              </a:rPr>
-              <a:t>[3] Evaluating Very Long-Term Conversational Memory of LLM Agents (LoCoMo).</a:t>
-            </a:r>
-            <a:r>
-              <a:rPr lang="en-US" sz="850" b="0" dirty="0">
-                <a:latin typeface="Times New Roman" panose="02020603050405020304" pitchFamily="18" charset="0"/>
-                <a:cs typeface="Times New Roman" panose="02020603050405020304" pitchFamily="18" charset="0"/>
-              </a:rPr>
-              <a:t> ACL 2024, Long Papers. - evaluation benchmark</a:t>
+              <a:rPr lang="en-US" sz="1000" b="1" dirty="0">
+                <a:latin typeface="Times New Roman" panose="02020603050405020304" pitchFamily="18" charset="0"/>
+                <a:cs typeface="Times New Roman" panose="02020603050405020304" pitchFamily="18" charset="0"/>
+              </a:rPr>
+              <a:t>PERCH is the layer above the applications.</a:t>
+            </a:r>
+            <a:r>
+              <a:rPr lang="en-US" sz="1000" b="0" dirty="0">
+                <a:latin typeface="Times New Roman" panose="02020603050405020304" pitchFamily="18" charset="0"/>
+                <a:cs typeface="Times New Roman" panose="02020603050405020304" pitchFamily="18" charset="0"/>
+              </a:rPr>
+              <a:t> Summoned anywhere in Windows, answering beside your work, writing back into the document you were in, remembering what you told it once, and running on whichever model you choose - including one that never leaves your machine.</a:t>
             </a:r>
           </a:p>
           <a:p>
@@ -29383,18 +29351,18 @@
               <a:buChar char="•"/>
             </a:pPr>
             <a:r>
-              <a:rPr lang="en-US" sz="850" b="1" dirty="0">
-                <a:latin typeface="Times New Roman" panose="02020603050405020304" pitchFamily="18" charset="0"/>
-                <a:cs typeface="Times New Roman" panose="02020603050405020304" pitchFamily="18" charset="0"/>
-              </a:rPr>
-              <a:t>[4] LongMemEval: Benchmarking Chat Assistants on Long-Term Interactive Memory.</a:t>
-            </a:r>
-            <a:r>
-              <a:rPr lang="en-US" sz="850" b="0" dirty="0">
-                <a:latin typeface="Times New Roman" panose="02020603050405020304" pitchFamily="18" charset="0"/>
-                <a:cs typeface="Times New Roman" panose="02020603050405020304" pitchFamily="18" charset="0"/>
-              </a:rPr>
-              <a:t> ICLR 2025. - evaluation benchmark, includes abstention</a:t>
+              <a:rPr lang="en-US" sz="1000" b="1" dirty="0">
+                <a:latin typeface="Times New Roman" panose="02020603050405020304" pitchFamily="18" charset="0"/>
+                <a:cs typeface="Times New Roman" panose="02020603050405020304" pitchFamily="18" charset="0"/>
+              </a:rPr>
+              <a:t>The risky part is already built.</a:t>
+            </a:r>
+            <a:r>
+              <a:rPr lang="en-US" sz="1000" b="0" dirty="0">
+                <a:latin typeface="Times New Roman" panose="02020603050405020304" pitchFamily="18" charset="0"/>
+                <a:cs typeface="Times New Roman" panose="02020603050405020304" pitchFamily="18" charset="0"/>
+              </a:rPr>
+              <a:t> The OS layer runs. So does the pipeline: routing, ranking, admission, packing, tools, and 21 passing tests.</a:t>
             </a:r>
           </a:p>
           <a:p>
@@ -29403,18 +29371,18 @@
               <a:buChar char="•"/>
             </a:pPr>
             <a:r>
-              <a:rPr lang="en-US" sz="850" b="1" dirty="0">
-                <a:latin typeface="Times New Roman" panose="02020603050405020304" pitchFamily="18" charset="0"/>
-                <a:cs typeface="Times New Roman" panose="02020603050405020304" pitchFamily="18" charset="0"/>
-              </a:rPr>
-              <a:t>[5] Self-RAG: Learning to Retrieve, Generate and Critique through Self-Reflection.</a:t>
-            </a:r>
-            <a:r>
-              <a:rPr lang="en-US" sz="850" b="0" dirty="0">
-                <a:latin typeface="Times New Roman" panose="02020603050405020304" pitchFamily="18" charset="0"/>
-                <a:cs typeface="Times New Roman" panose="02020603050405020304" pitchFamily="18" charset="0"/>
-              </a:rPr>
-              <a:t> Asai, Wu, Wang, Sil, Hajishirzi. ICLR 2024. - prior art for retrieve-or-not</a:t>
+              <a:rPr lang="en-US" sz="1000" b="1" dirty="0">
+                <a:latin typeface="Times New Roman" panose="02020603050405020304" pitchFamily="18" charset="0"/>
+                <a:cs typeface="Times New Roman" panose="02020603050405020304" pitchFamily="18" charset="0"/>
+              </a:rPr>
+              <a:t>The technical core is the retrieval gate and the budget packer</a:t>
+            </a:r>
+            <a:r>
+              <a:rPr lang="en-US" sz="1000" b="0" dirty="0">
+                <a:latin typeface="Times New Roman" panose="02020603050405020304" pitchFamily="18" charset="0"/>
+                <a:cs typeface="Times New Roman" panose="02020603050405020304" pitchFamily="18" charset="0"/>
+              </a:rPr>
+              <a:t> - a calibration problem and a constrained-allocation problem, evaluated with four ablations on public benchmarks.</a:t>
             </a:r>
           </a:p>
           <a:p>
@@ -29423,98 +29391,11 @@
               <a:buChar char="•"/>
             </a:pPr>
             <a:r>
-              <a:rPr lang="en-US" sz="850" b="1" dirty="0">
-                <a:latin typeface="Times New Roman" panose="02020603050405020304" pitchFamily="18" charset="0"/>
-                <a:cs typeface="Times New Roman" panose="02020603050405020304" pitchFamily="18" charset="0"/>
-              </a:rPr>
-              <a:t>[6] Mem0: Building Production-Ready AI Agents with Scalable Long-Term Memory.</a:t>
-            </a:r>
-            <a:r>
-              <a:rPr lang="en-US" sz="850" b="0" dirty="0">
-                <a:latin typeface="Times New Roman" panose="02020603050405020304" pitchFamily="18" charset="0"/>
-                <a:cs typeface="Times New Roman" panose="02020603050405020304" pitchFamily="18" charset="0"/>
-              </a:rPr>
-              <a:t> ECAI 2025.</a:t>
-            </a:r>
-          </a:p>
-          <a:p>
-            <a:pPr marL="171450" lvl="1" indent="-171450" algn="l">
-              <a:buFont typeface="Arial" panose="020B0604020202020204" pitchFamily="34" charset="0"/>
-              <a:buChar char="•"/>
-            </a:pPr>
-            <a:r>
-              <a:rPr lang="en-US" sz="850" b="1" dirty="0">
-                <a:latin typeface="Times New Roman" panose="02020603050405020304" pitchFamily="18" charset="0"/>
-                <a:cs typeface="Times New Roman" panose="02020603050405020304" pitchFamily="18" charset="0"/>
-              </a:rPr>
-              <a:t>[7] From Storage to Experience: The Evolution of LLM Agent Memory Mechanisms.</a:t>
-            </a:r>
-            <a:r>
-              <a:rPr lang="en-US" sz="850" b="0" dirty="0">
-                <a:latin typeface="Times New Roman" panose="02020603050405020304" pitchFamily="18" charset="0"/>
-                <a:cs typeface="Times New Roman" panose="02020603050405020304" pitchFamily="18" charset="0"/>
-              </a:rPr>
-              <a:t> Findings of ACL 2026.</a:t>
-            </a:r>
-          </a:p>
-          <a:p>
-            <a:pPr marL="171450" lvl="1" indent="-171450" algn="l">
-              <a:buFont typeface="Arial" panose="020B0604020202020204" pitchFamily="34" charset="0"/>
-              <a:buChar char="•"/>
-            </a:pPr>
-            <a:r>
-              <a:rPr lang="en-US" sz="850" b="1" dirty="0">
-                <a:latin typeface="Times New Roman" panose="02020603050405020304" pitchFamily="18" charset="0"/>
-                <a:cs typeface="Times New Roman" panose="02020603050405020304" pitchFamily="18" charset="0"/>
-              </a:rPr>
-              <a:t>[8] Bridging Intuitive Associations and Deliberate Recall.</a:t>
-            </a:r>
-            <a:r>
-              <a:rPr lang="en-US" sz="850" b="0" dirty="0">
-                <a:latin typeface="Times New Roman" panose="02020603050405020304" pitchFamily="18" charset="0"/>
-                <a:cs typeface="Times New Roman" panose="02020603050405020304" pitchFamily="18" charset="0"/>
-              </a:rPr>
-              <a:t> Findings of ACL 2025.</a:t>
-            </a:r>
-          </a:p>
-          <a:p>
-            <a:pPr marL="171450" lvl="1" indent="-171450" algn="l">
-              <a:buFont typeface="Arial" panose="020B0604020202020204" pitchFamily="34" charset="0"/>
-              <a:buChar char="•"/>
-            </a:pPr>
-            <a:r>
-              <a:rPr lang="en-US" sz="850" b="1" dirty="0">
-                <a:latin typeface="Times New Roman" panose="02020603050405020304" pitchFamily="18" charset="0"/>
-                <a:cs typeface="Times New Roman" panose="02020603050405020304" pitchFamily="18" charset="0"/>
-              </a:rPr>
-              <a:t>[9] Memory in the LLM Era: Modular Architectures and Strategies.</a:t>
-            </a:r>
-            <a:r>
-              <a:rPr lang="en-US" sz="850" b="0" dirty="0">
-                <a:latin typeface="Times New Roman" panose="02020603050405020304" pitchFamily="18" charset="0"/>
-                <a:cs typeface="Times New Roman" panose="02020603050405020304" pitchFamily="18" charset="0"/>
-              </a:rPr>
-              <a:t> VLDB 2026.</a:t>
-            </a:r>
-          </a:p>
-          <a:p>
-            <a:pPr marL="171450" lvl="1" indent="-171450" algn="l">
-              <a:buFont typeface="Arial" panose="020B0604020202020204" pitchFamily="34" charset="0"/>
-              <a:buChar char="•"/>
-            </a:pPr>
-            <a:r>
-              <a:rPr lang="en-US" sz="850" b="1" dirty="0">
-                <a:latin typeface="Times New Roman" panose="02020603050405020304" pitchFamily="18" charset="0"/>
-                <a:cs typeface="Times New Roman" panose="02020603050405020304" pitchFamily="18" charset="0"/>
-              </a:rPr>
-              <a:t>[10] Microsoft.</a:t>
-            </a:r>
-            <a:r>
-              <a:rPr lang="en-US" sz="850" b="0" dirty="0">
-                <a:latin typeface="Times New Roman" panose="02020603050405020304" pitchFamily="18" charset="0"/>
-                <a:cs typeface="Times New Roman" panose="02020603050405020304" pitchFamily="18" charset="0"/>
-              </a:rPr>
-              <a:t> UI Automation Overview and Win32 Accessibility documentation; Tauri v2 documentation; Windows AI Platform, Build 2026.</a:t>
+              <a:rPr lang="en-US" sz="1000" b="1" dirty="0">
+                <a:latin typeface="Times New Roman" panose="02020603050405020304" pitchFamily="18" charset="0"/>
+                <a:cs typeface="Times New Roman" panose="02020603050405020304" pitchFamily="18" charset="0"/>
+              </a:rPr>
+              <a:t>You pay for four AI assistants. None of them know you, and none of them will tell each other. PERCH is the one that's yours.</a:t>
             </a:r>
           </a:p>
         </p:txBody>
@@ -29762,7 +29643,7 @@
                 <a:cs typeface="Times New Roman" panose="02020603050405020304" pitchFamily="18" charset="0"/>
                 <a:sym typeface="Arial"/>
               </a:rPr>
-              <a:t>References - Current Preprints (2026)</a:t>
+              <a:t>References - Peer-Reviewed Spine</a:t>
             </a:r>
           </a:p>
         </p:txBody>
@@ -30097,7 +29978,840 @@
                 <a:latin typeface="Times New Roman" panose="02020603050405020304" pitchFamily="18" charset="0"/>
                 <a:cs typeface="Times New Roman" panose="02020603050405020304" pitchFamily="18" charset="0"/>
               </a:rPr>
-              <a:t> / 34</a:t>
+              <a:t> / 35</a:t>
+            </a:r>
+            <a:endParaRPr dirty="0">
+              <a:latin typeface="Times New Roman" panose="02020603050405020304" pitchFamily="18" charset="0"/>
+              <a:cs typeface="Times New Roman" panose="02020603050405020304" pitchFamily="18" charset="0"/>
+            </a:endParaRPr>
+          </a:p>
+        </p:txBody>
+      </p:sp>
+      <p:sp>
+        <p:nvSpPr>
+          <p:cNvPr id="103" name="Google Shape;103;p9"/>
+          <p:cNvSpPr txBox="1"/>
+          <p:nvPr/>
+        </p:nvSpPr>
+        <p:spPr>
+          <a:xfrm>
+            <a:off x="91440" y="246888"/>
+            <a:ext cx="4425696" cy="3017520"/>
+          </a:xfrm>
+          <a:prstGeom prst="rect">
+            <a:avLst/>
+          </a:prstGeom>
+          <a:noFill/>
+          <a:ln>
+            <a:noFill/>
+          </a:ln>
+        </p:spPr>
+        <p:txBody>
+          <a:bodyPr spcFirstLastPara="1" wrap="square" lIns="91425" tIns="91425" rIns="91425" bIns="91425" anchor="t" anchorCtr="0">
+            <a:noAutofit/>
+          </a:bodyPr>
+          <a:lstStyle/>
+          <a:p>
+            <a:pPr marL="171450" lvl="1" indent="-171450" algn="l">
+              <a:buFont typeface="Arial" panose="020B0604020202020204" pitchFamily="34" charset="0"/>
+              <a:buChar char="•"/>
+            </a:pPr>
+            <a:r>
+              <a:rPr lang="en-US" sz="850" b="1" dirty="0">
+                <a:latin typeface="Times New Roman" panose="02020603050405020304" pitchFamily="18" charset="0"/>
+                <a:cs typeface="Times New Roman" panose="02020603050405020304" pitchFamily="18" charset="0"/>
+              </a:rPr>
+              <a:t>[1] PAUSE: A User-Centric Benchmark for Personal AI Assistants in Unified Service Environments.</a:t>
+            </a:r>
+            <a:r>
+              <a:rPr lang="en-US" sz="850" b="0" dirty="0">
+                <a:latin typeface="Times New Roman" panose="02020603050405020304" pitchFamily="18" charset="0"/>
+                <a:cs typeface="Times New Roman" panose="02020603050405020304" pitchFamily="18" charset="0"/>
+              </a:rPr>
+              <a:t> Chen, Shi, Wang, Chen, Niu. ACM SIGKDD 2026, Jeju Island. - BASE PAPER</a:t>
+            </a:r>
+          </a:p>
+          <a:p>
+            <a:pPr marL="171450" lvl="1" indent="-171450" algn="l">
+              <a:buFont typeface="Arial" panose="020B0604020202020204" pitchFamily="34" charset="0"/>
+              <a:buChar char="•"/>
+            </a:pPr>
+            <a:r>
+              <a:rPr lang="en-US" sz="850" b="1" dirty="0">
+                <a:latin typeface="Times New Roman" panose="02020603050405020304" pitchFamily="18" charset="0"/>
+                <a:cs typeface="Times New Roman" panose="02020603050405020304" pitchFamily="18" charset="0"/>
+              </a:rPr>
+              <a:t>[1b] "...Exploring User Perspectives on a Scrutable Assistant for Time Management."</a:t>
+            </a:r>
+            <a:r>
+              <a:rPr lang="en-US" sz="850" b="0" dirty="0">
+                <a:latin typeface="Times New Roman" panose="02020603050405020304" pitchFamily="18" charset="0"/>
+                <a:cs typeface="Times New Roman" panose="02020603050405020304" pitchFamily="18" charset="0"/>
+              </a:rPr>
+              <a:t> Landerberg, Flatmo, Said. ACM UMAP 2026, Full Paper. - second personal-AI anchor, non-benchmark</a:t>
+            </a:r>
+          </a:p>
+          <a:p>
+            <a:pPr marL="171450" lvl="1" indent="-171450" algn="l">
+              <a:buFont typeface="Arial" panose="020B0604020202020204" pitchFamily="34" charset="0"/>
+              <a:buChar char="•"/>
+            </a:pPr>
+            <a:r>
+              <a:rPr lang="en-US" sz="850" b="1" dirty="0">
+                <a:latin typeface="Times New Roman" panose="02020603050405020304" pitchFamily="18" charset="0"/>
+                <a:cs typeface="Times New Roman" panose="02020603050405020304" pitchFamily="18" charset="0"/>
+              </a:rPr>
+              <a:t>[2] A Survey on the Memory Mechanism of LLM-based Agents.</a:t>
+            </a:r>
+            <a:r>
+              <a:rPr lang="en-US" sz="850" b="0" dirty="0">
+                <a:latin typeface="Times New Roman" panose="02020603050405020304" pitchFamily="18" charset="0"/>
+                <a:cs typeface="Times New Roman" panose="02020603050405020304" pitchFamily="18" charset="0"/>
+              </a:rPr>
+              <a:t> ACM Transactions on Information Systems 43(6), 2025. DOI 10.1145/3748302</a:t>
+            </a:r>
+          </a:p>
+          <a:p>
+            <a:pPr marL="171450" lvl="1" indent="-171450" algn="l">
+              <a:buFont typeface="Arial" panose="020B0604020202020204" pitchFamily="34" charset="0"/>
+              <a:buChar char="•"/>
+            </a:pPr>
+            <a:r>
+              <a:rPr lang="en-US" sz="850" b="1" dirty="0">
+                <a:latin typeface="Times New Roman" panose="02020603050405020304" pitchFamily="18" charset="0"/>
+                <a:cs typeface="Times New Roman" panose="02020603050405020304" pitchFamily="18" charset="0"/>
+              </a:rPr>
+              <a:t>[3] Evaluating Very Long-Term Conversational Memory of LLM Agents (LoCoMo).</a:t>
+            </a:r>
+            <a:r>
+              <a:rPr lang="en-US" sz="850" b="0" dirty="0">
+                <a:latin typeface="Times New Roman" panose="02020603050405020304" pitchFamily="18" charset="0"/>
+                <a:cs typeface="Times New Roman" panose="02020603050405020304" pitchFamily="18" charset="0"/>
+              </a:rPr>
+              <a:t> ACL 2024, Long Papers. - evaluation benchmark</a:t>
+            </a:r>
+          </a:p>
+          <a:p>
+            <a:pPr marL="171450" lvl="1" indent="-171450" algn="l">
+              <a:buFont typeface="Arial" panose="020B0604020202020204" pitchFamily="34" charset="0"/>
+              <a:buChar char="•"/>
+            </a:pPr>
+            <a:r>
+              <a:rPr lang="en-US" sz="850" b="1" dirty="0">
+                <a:latin typeface="Times New Roman" panose="02020603050405020304" pitchFamily="18" charset="0"/>
+                <a:cs typeface="Times New Roman" panose="02020603050405020304" pitchFamily="18" charset="0"/>
+              </a:rPr>
+              <a:t>[4] LongMemEval: Benchmarking Chat Assistants on Long-Term Interactive Memory.</a:t>
+            </a:r>
+            <a:r>
+              <a:rPr lang="en-US" sz="850" b="0" dirty="0">
+                <a:latin typeface="Times New Roman" panose="02020603050405020304" pitchFamily="18" charset="0"/>
+                <a:cs typeface="Times New Roman" panose="02020603050405020304" pitchFamily="18" charset="0"/>
+              </a:rPr>
+              <a:t> ICLR 2025. - evaluation benchmark, includes abstention</a:t>
+            </a:r>
+          </a:p>
+          <a:p>
+            <a:pPr marL="171450" lvl="1" indent="-171450" algn="l">
+              <a:buFont typeface="Arial" panose="020B0604020202020204" pitchFamily="34" charset="0"/>
+              <a:buChar char="•"/>
+            </a:pPr>
+            <a:r>
+              <a:rPr lang="en-US" sz="850" b="1" dirty="0">
+                <a:latin typeface="Times New Roman" panose="02020603050405020304" pitchFamily="18" charset="0"/>
+                <a:cs typeface="Times New Roman" panose="02020603050405020304" pitchFamily="18" charset="0"/>
+              </a:rPr>
+              <a:t>[5] Self-RAG: Learning to Retrieve, Generate and Critique through Self-Reflection.</a:t>
+            </a:r>
+            <a:r>
+              <a:rPr lang="en-US" sz="850" b="0" dirty="0">
+                <a:latin typeface="Times New Roman" panose="02020603050405020304" pitchFamily="18" charset="0"/>
+                <a:cs typeface="Times New Roman" panose="02020603050405020304" pitchFamily="18" charset="0"/>
+              </a:rPr>
+              <a:t> Asai, Wu, Wang, Sil, Hajishirzi. ICLR 2024. - prior art for retrieve-or-not</a:t>
+            </a:r>
+          </a:p>
+          <a:p>
+            <a:pPr marL="171450" lvl="1" indent="-171450" algn="l">
+              <a:buFont typeface="Arial" panose="020B0604020202020204" pitchFamily="34" charset="0"/>
+              <a:buChar char="•"/>
+            </a:pPr>
+            <a:r>
+              <a:rPr lang="en-US" sz="850" b="1" dirty="0">
+                <a:latin typeface="Times New Roman" panose="02020603050405020304" pitchFamily="18" charset="0"/>
+                <a:cs typeface="Times New Roman" panose="02020603050405020304" pitchFamily="18" charset="0"/>
+              </a:rPr>
+              <a:t>[6] Mem0: Building Production-Ready AI Agents with Scalable Long-Term Memory.</a:t>
+            </a:r>
+            <a:r>
+              <a:rPr lang="en-US" sz="850" b="0" dirty="0">
+                <a:latin typeface="Times New Roman" panose="02020603050405020304" pitchFamily="18" charset="0"/>
+                <a:cs typeface="Times New Roman" panose="02020603050405020304" pitchFamily="18" charset="0"/>
+              </a:rPr>
+              <a:t> ECAI 2025.</a:t>
+            </a:r>
+          </a:p>
+          <a:p>
+            <a:pPr marL="171450" lvl="1" indent="-171450" algn="l">
+              <a:buFont typeface="Arial" panose="020B0604020202020204" pitchFamily="34" charset="0"/>
+              <a:buChar char="•"/>
+            </a:pPr>
+            <a:r>
+              <a:rPr lang="en-US" sz="850" b="1" dirty="0">
+                <a:latin typeface="Times New Roman" panose="02020603050405020304" pitchFamily="18" charset="0"/>
+                <a:cs typeface="Times New Roman" panose="02020603050405020304" pitchFamily="18" charset="0"/>
+              </a:rPr>
+              <a:t>[7] From Storage to Experience: The Evolution of LLM Agent Memory Mechanisms.</a:t>
+            </a:r>
+            <a:r>
+              <a:rPr lang="en-US" sz="850" b="0" dirty="0">
+                <a:latin typeface="Times New Roman" panose="02020603050405020304" pitchFamily="18" charset="0"/>
+                <a:cs typeface="Times New Roman" panose="02020603050405020304" pitchFamily="18" charset="0"/>
+              </a:rPr>
+              <a:t> Findings of ACL 2026.</a:t>
+            </a:r>
+          </a:p>
+          <a:p>
+            <a:pPr marL="171450" lvl="1" indent="-171450" algn="l">
+              <a:buFont typeface="Arial" panose="020B0604020202020204" pitchFamily="34" charset="0"/>
+              <a:buChar char="•"/>
+            </a:pPr>
+            <a:r>
+              <a:rPr lang="en-US" sz="850" b="1" dirty="0">
+                <a:latin typeface="Times New Roman" panose="02020603050405020304" pitchFamily="18" charset="0"/>
+                <a:cs typeface="Times New Roman" panose="02020603050405020304" pitchFamily="18" charset="0"/>
+              </a:rPr>
+              <a:t>[8] Bridging Intuitive Associations and Deliberate Recall.</a:t>
+            </a:r>
+            <a:r>
+              <a:rPr lang="en-US" sz="850" b="0" dirty="0">
+                <a:latin typeface="Times New Roman" panose="02020603050405020304" pitchFamily="18" charset="0"/>
+                <a:cs typeface="Times New Roman" panose="02020603050405020304" pitchFamily="18" charset="0"/>
+              </a:rPr>
+              <a:t> Findings of ACL 2025.</a:t>
+            </a:r>
+          </a:p>
+          <a:p>
+            <a:pPr marL="171450" lvl="1" indent="-171450" algn="l">
+              <a:buFont typeface="Arial" panose="020B0604020202020204" pitchFamily="34" charset="0"/>
+              <a:buChar char="•"/>
+            </a:pPr>
+            <a:r>
+              <a:rPr lang="en-US" sz="850" b="1" dirty="0">
+                <a:latin typeface="Times New Roman" panose="02020603050405020304" pitchFamily="18" charset="0"/>
+                <a:cs typeface="Times New Roman" panose="02020603050405020304" pitchFamily="18" charset="0"/>
+              </a:rPr>
+              <a:t>[9] Memory in the LLM Era: Modular Architectures and Strategies.</a:t>
+            </a:r>
+            <a:r>
+              <a:rPr lang="en-US" sz="850" b="0" dirty="0">
+                <a:latin typeface="Times New Roman" panose="02020603050405020304" pitchFamily="18" charset="0"/>
+                <a:cs typeface="Times New Roman" panose="02020603050405020304" pitchFamily="18" charset="0"/>
+              </a:rPr>
+              <a:t> VLDB 2026.</a:t>
+            </a:r>
+          </a:p>
+          <a:p>
+            <a:pPr marL="171450" lvl="1" indent="-171450" algn="l">
+              <a:buFont typeface="Arial" panose="020B0604020202020204" pitchFamily="34" charset="0"/>
+              <a:buChar char="•"/>
+            </a:pPr>
+            <a:r>
+              <a:rPr lang="en-US" sz="850" b="1" dirty="0">
+                <a:latin typeface="Times New Roman" panose="02020603050405020304" pitchFamily="18" charset="0"/>
+                <a:cs typeface="Times New Roman" panose="02020603050405020304" pitchFamily="18" charset="0"/>
+              </a:rPr>
+              <a:t>[10] Microsoft.</a:t>
+            </a:r>
+            <a:r>
+              <a:rPr lang="en-US" sz="850" b="0" dirty="0">
+                <a:latin typeface="Times New Roman" panose="02020603050405020304" pitchFamily="18" charset="0"/>
+                <a:cs typeface="Times New Roman" panose="02020603050405020304" pitchFamily="18" charset="0"/>
+              </a:rPr>
+              <a:t> UI Automation Overview and Win32 Accessibility documentation; Tauri v2 documentation; Windows AI Platform, Build 2026.</a:t>
+            </a:r>
+          </a:p>
+        </p:txBody>
+      </p:sp>
+      <p:sp>
+        <p:nvSpPr>
+          <p:cNvPr id="8" name="Google Shape;85;p8">
+            <a:extLst>
+              <a:ext uri="{FF2B5EF4-FFF2-40B4-BE49-F238E27FC236}">
+                <a16:creationId xmlns:a16="http://schemas.microsoft.com/office/drawing/2014/main" id="{B445AC1F-8D42-9224-714E-741A4A81DCCA}"/>
+              </a:ext>
+            </a:extLst>
+          </p:cNvPr>
+          <p:cNvSpPr txBox="1"/>
+          <p:nvPr/>
+        </p:nvSpPr>
+        <p:spPr>
+          <a:xfrm>
+            <a:off x="1773059" y="3331250"/>
+            <a:ext cx="1211100" cy="101295"/>
+          </a:xfrm>
+          <a:prstGeom prst="rect">
+            <a:avLst/>
+          </a:prstGeom>
+          <a:noFill/>
+          <a:ln>
+            <a:noFill/>
+          </a:ln>
+        </p:spPr>
+        <p:txBody>
+          <a:bodyPr spcFirstLastPara="1" wrap="square" lIns="0" tIns="8875" rIns="0" bIns="0" anchor="t" anchorCtr="0">
+            <a:spAutoFit/>
+          </a:bodyPr>
+          <a:lstStyle/>
+          <a:p>
+            <a:pPr marL="12700" lvl="0"/>
+            <a:endParaRPr lang="en-US" sz="600" dirty="0">
+              <a:latin typeface="Times New Roman" panose="02020603050405020304" pitchFamily="18" charset="0"/>
+              <a:cs typeface="Times New Roman" panose="02020603050405020304" pitchFamily="18" charset="0"/>
+            </a:endParaRPr>
+            <a:r>
+              <a:rPr lang="en-US" sz="600" dirty="0" b="0">
+                <a:solidFill>
+                  <a:srgbClr val="FFFFFF"/>
+                </a:solidFill>
+                <a:latin typeface="Times New Roman" panose="02020603050405020304" pitchFamily="18" charset="0"/>
+                <a:cs typeface="Times New Roman" panose="02020603050405020304" pitchFamily="18" charset="0"/>
+              </a:rPr>
+              <a:t>PERCH</a:t>
+            </a:r>
+          </a:p>
+        </p:txBody>
+      </p:sp>
+      <p:sp>
+        <p:nvSpPr>
+          <p:cNvPr id="9" name="Google Shape;72;p7">
+            <a:extLst>
+              <a:ext uri="{FF2B5EF4-FFF2-40B4-BE49-F238E27FC236}">
+                <a16:creationId xmlns:a16="http://schemas.microsoft.com/office/drawing/2014/main" id="{AD0AEF20-4852-6A69-5088-EB2B0F643C44}"/>
+              </a:ext>
+            </a:extLst>
+          </p:cNvPr>
+          <p:cNvSpPr txBox="1">
+            <a:spLocks noGrp="1"/>
+          </p:cNvSpPr>
+          <p:nvPr>
+            <p:ph type="dt" idx="10"/>
+          </p:nvPr>
+        </p:nvSpPr>
+        <p:spPr>
+          <a:xfrm>
+            <a:off x="3442063" y="3331251"/>
+            <a:ext cx="746093" cy="101295"/>
+          </a:xfrm>
+          <a:prstGeom prst="rect">
+            <a:avLst/>
+          </a:prstGeom>
+          <a:noFill/>
+          <a:ln>
+            <a:noFill/>
+          </a:ln>
+        </p:spPr>
+        <p:txBody>
+          <a:bodyPr spcFirstLastPara="1" wrap="square" lIns="0" tIns="8875" rIns="0" bIns="0" anchor="t" anchorCtr="0">
+            <a:spAutoFit/>
+          </a:bodyPr>
+          <a:lstStyle/>
+          <a:p>
+            <a:pPr marL="12700" lvl="0" indent="0" algn="l" rtl="0">
+              <a:lnSpc>
+                <a:spcPct val="100000"/>
+              </a:lnSpc>
+              <a:spcBef>
+                <a:spcPts val="0"/>
+              </a:spcBef>
+              <a:spcAft>
+                <a:spcPts val="0"/>
+              </a:spcAft>
+              <a:buNone/>
+            </a:pPr>
+            <a:r>
+              <a:rPr lang="en-US" dirty="0">
+                <a:latin typeface="Times New Roman" panose="02020603050405020304" pitchFamily="18" charset="0"/>
+                <a:cs typeface="Times New Roman" panose="02020603050405020304" pitchFamily="18" charset="0"/>
+              </a:rPr>
+              <a:t>August-2026</a:t>
+            </a:r>
+            <a:endParaRPr dirty="0">
+              <a:latin typeface="Times New Roman" panose="02020603050405020304" pitchFamily="18" charset="0"/>
+              <a:cs typeface="Times New Roman" panose="02020603050405020304" pitchFamily="18" charset="0"/>
+            </a:endParaRPr>
+          </a:p>
+        </p:txBody>
+      </p:sp>
+    </p:spTree>
+  </p:cSld>
+  <p:clrMapOvr>
+    <a:masterClrMapping/>
+  </p:clrMapOvr>
+</p:sld>
+</file>
+
+<file path=ppt/slides/slide35.xml><?xml version="1.0" encoding="utf-8"?>
+<p:sld xmlns:a="http://schemas.openxmlformats.org/drawingml/2006/main" xmlns:p="http://schemas.openxmlformats.org/presentationml/2006/main" xmlns:r="http://schemas.openxmlformats.org/officeDocument/2006/relationships">
+  <p:cSld>
+    <p:spTree>
+      <p:nvGrpSpPr>
+        <p:cNvPr id="1" name=""/>
+        <p:cNvGrpSpPr/>
+        <p:nvPr/>
+      </p:nvGrpSpPr>
+      <p:grpSpPr/>
+      <p:sp>
+        <p:nvSpPr>
+          <p:cNvPr id="93" name="Google Shape;93;p9"/>
+          <p:cNvSpPr/>
+          <p:nvPr/>
+        </p:nvSpPr>
+        <p:spPr>
+          <a:xfrm>
+            <a:off x="1905" y="0"/>
+            <a:ext cx="4608195" cy="321945"/>
+          </a:xfrm>
+          <a:custGeom>
+            <a:avLst/>
+            <a:gdLst/>
+            <a:ahLst/>
+            <a:cxnLst/>
+            <a:rect l="l" t="t" r="r" b="b"/>
+            <a:pathLst>
+              <a:path w="4608195" h="321945" extrusionOk="0">
+                <a:moveTo>
+                  <a:pt x="4608004" y="0"/>
+                </a:moveTo>
+                <a:lnTo>
+                  <a:pt x="0" y="0"/>
+                </a:lnTo>
+                <a:lnTo>
+                  <a:pt x="0" y="321500"/>
+                </a:lnTo>
+                <a:lnTo>
+                  <a:pt x="4608004" y="321500"/>
+                </a:lnTo>
+                <a:lnTo>
+                  <a:pt x="4608004" y="0"/>
+                </a:lnTo>
+                <a:close/>
+              </a:path>
+            </a:pathLst>
+          </a:custGeom>
+          <a:solidFill>
+            <a:srgbClr val="3333B2"/>
+          </a:solidFill>
+          <a:ln>
+            <a:noFill/>
+          </a:ln>
+        </p:spPr>
+        <p:txBody>
+          <a:bodyPr spcFirstLastPara="1" wrap="square" lIns="0" tIns="0" rIns="0" bIns="0" anchor="t" anchorCtr="0">
+            <a:noAutofit/>
+          </a:bodyPr>
+          <a:lstStyle/>
+          <a:p>
+            <a:pPr marL="0" lvl="0" indent="0" algn="l" rtl="0">
+              <a:spcBef>
+                <a:spcPts val="0"/>
+              </a:spcBef>
+              <a:spcAft>
+                <a:spcPts val="0"/>
+              </a:spcAft>
+              <a:buNone/>
+            </a:pPr>
+            <a:endParaRPr sz="1800"/>
+          </a:p>
+        </p:txBody>
+      </p:sp>
+      <p:sp>
+        <p:nvSpPr>
+          <p:cNvPr id="94" name="Google Shape;94;p9"/>
+          <p:cNvSpPr txBox="1"/>
+          <p:nvPr/>
+        </p:nvSpPr>
+        <p:spPr>
+          <a:xfrm>
+            <a:off x="95300" y="45565"/>
+            <a:ext cx="4297680" cy="232736"/>
+          </a:xfrm>
+          <a:prstGeom prst="rect">
+            <a:avLst/>
+          </a:prstGeom>
+          <a:noFill/>
+          <a:ln>
+            <a:noFill/>
+          </a:ln>
+        </p:spPr>
+        <p:txBody>
+          <a:bodyPr spcFirstLastPara="1" wrap="square" lIns="0" tIns="17125" rIns="0" bIns="0" anchor="t" anchorCtr="0">
+            <a:spAutoFit/>
+          </a:bodyPr>
+          <a:lstStyle/>
+          <a:p>
+            <a:pPr marL="12700" lvl="0" indent="0" algn="l" rtl="0">
+              <a:lnSpc>
+                <a:spcPct val="100000"/>
+              </a:lnSpc>
+              <a:spcBef>
+                <a:spcPts val="0"/>
+              </a:spcBef>
+              <a:spcAft>
+                <a:spcPts val="0"/>
+              </a:spcAft>
+              <a:buNone/>
+            </a:pPr>
+            <a:endParaRPr sz="1400" dirty="0">
+              <a:latin typeface="Times New Roman" panose="02020603050405020304" pitchFamily="18" charset="0"/>
+              <a:cs typeface="Times New Roman" panose="02020603050405020304" pitchFamily="18" charset="0"/>
+              <a:sym typeface="Arial"/>
+            </a:endParaRPr>
+            <a:r>
+              <a:rPr lang="en-US" sz="1400" dirty="0" b="0">
+                <a:solidFill>
+                  <a:srgbClr val="FFFFFF"/>
+                </a:solidFill>
+                <a:latin typeface="Times New Roman" panose="02020603050405020304" pitchFamily="18" charset="0"/>
+                <a:cs typeface="Times New Roman" panose="02020603050405020304" pitchFamily="18" charset="0"/>
+                <a:sym typeface="Arial"/>
+              </a:rPr>
+              <a:t>References - Current Preprints (2026)</a:t>
+            </a:r>
+          </a:p>
+        </p:txBody>
+      </p:sp>
+      <p:grpSp>
+        <p:nvGrpSpPr>
+          <p:cNvPr id="95" name="Google Shape;95;p9"/>
+          <p:cNvGrpSpPr/>
+          <p:nvPr/>
+        </p:nvGrpSpPr>
+        <p:grpSpPr>
+          <a:xfrm>
+            <a:off x="0" y="3326968"/>
+            <a:ext cx="4608017" cy="129539"/>
+            <a:chOff x="0" y="3326968"/>
+            <a:chExt cx="4608017" cy="129539"/>
+          </a:xfrm>
+        </p:grpSpPr>
+        <p:sp>
+          <p:nvSpPr>
+            <p:cNvPr id="96" name="Google Shape;96;p9"/>
+            <p:cNvSpPr/>
+            <p:nvPr/>
+          </p:nvSpPr>
+          <p:spPr>
+            <a:xfrm>
+              <a:off x="0" y="3326968"/>
+              <a:ext cx="1536065" cy="129539"/>
+            </a:xfrm>
+            <a:custGeom>
+              <a:avLst/>
+              <a:gdLst/>
+              <a:ahLst/>
+              <a:cxnLst/>
+              <a:rect l="l" t="t" r="r" b="b"/>
+              <a:pathLst>
+                <a:path w="1536065" h="129539" extrusionOk="0">
+                  <a:moveTo>
+                    <a:pt x="1535976" y="0"/>
+                  </a:moveTo>
+                  <a:lnTo>
+                    <a:pt x="0" y="0"/>
+                  </a:lnTo>
+                  <a:lnTo>
+                    <a:pt x="0" y="129032"/>
+                  </a:lnTo>
+                  <a:lnTo>
+                    <a:pt x="1535976" y="129032"/>
+                  </a:lnTo>
+                  <a:lnTo>
+                    <a:pt x="1535976" y="0"/>
+                  </a:lnTo>
+                  <a:close/>
+                </a:path>
+              </a:pathLst>
+            </a:custGeom>
+            <a:solidFill>
+              <a:srgbClr val="191959"/>
+            </a:solidFill>
+            <a:ln>
+              <a:noFill/>
+            </a:ln>
+          </p:spPr>
+          <p:txBody>
+            <a:bodyPr spcFirstLastPara="1" wrap="square" lIns="0" tIns="0" rIns="0" bIns="0" anchor="t" anchorCtr="0">
+              <a:noAutofit/>
+            </a:bodyPr>
+            <a:lstStyle/>
+            <a:p>
+              <a:pPr marL="0" lvl="0" indent="0" algn="l" rtl="0">
+                <a:spcBef>
+                  <a:spcPts val="0"/>
+                </a:spcBef>
+                <a:spcAft>
+                  <a:spcPts val="0"/>
+                </a:spcAft>
+                <a:buNone/>
+              </a:pPr>
+              <a:endParaRPr sz="1800"/>
+            </a:p>
+          </p:txBody>
+        </p:sp>
+        <p:sp>
+          <p:nvSpPr>
+            <p:cNvPr id="97" name="Google Shape;97;p9"/>
+            <p:cNvSpPr/>
+            <p:nvPr/>
+          </p:nvSpPr>
+          <p:spPr>
+            <a:xfrm>
+              <a:off x="1535976" y="3326968"/>
+              <a:ext cx="1536065" cy="129539"/>
+            </a:xfrm>
+            <a:custGeom>
+              <a:avLst/>
+              <a:gdLst/>
+              <a:ahLst/>
+              <a:cxnLst/>
+              <a:rect l="l" t="t" r="r" b="b"/>
+              <a:pathLst>
+                <a:path w="1536064" h="129539" extrusionOk="0">
+                  <a:moveTo>
+                    <a:pt x="1535976" y="0"/>
+                  </a:moveTo>
+                  <a:lnTo>
+                    <a:pt x="0" y="0"/>
+                  </a:lnTo>
+                  <a:lnTo>
+                    <a:pt x="0" y="129032"/>
+                  </a:lnTo>
+                  <a:lnTo>
+                    <a:pt x="1535976" y="129032"/>
+                  </a:lnTo>
+                  <a:lnTo>
+                    <a:pt x="1535976" y="0"/>
+                  </a:lnTo>
+                  <a:close/>
+                </a:path>
+              </a:pathLst>
+            </a:custGeom>
+            <a:solidFill>
+              <a:srgbClr val="262685"/>
+            </a:solidFill>
+            <a:ln>
+              <a:noFill/>
+            </a:ln>
+          </p:spPr>
+          <p:txBody>
+            <a:bodyPr spcFirstLastPara="1" wrap="square" lIns="0" tIns="0" rIns="0" bIns="0" anchor="t" anchorCtr="0">
+              <a:noAutofit/>
+            </a:bodyPr>
+            <a:lstStyle/>
+            <a:p>
+              <a:pPr marL="0" lvl="0" indent="0" algn="l" rtl="0">
+                <a:spcBef>
+                  <a:spcPts val="0"/>
+                </a:spcBef>
+                <a:spcAft>
+                  <a:spcPts val="0"/>
+                </a:spcAft>
+                <a:buNone/>
+              </a:pPr>
+              <a:endParaRPr sz="1800"/>
+            </a:p>
+          </p:txBody>
+        </p:sp>
+        <p:sp>
+          <p:nvSpPr>
+            <p:cNvPr id="98" name="Google Shape;98;p9"/>
+            <p:cNvSpPr/>
+            <p:nvPr/>
+          </p:nvSpPr>
+          <p:spPr>
+            <a:xfrm>
+              <a:off x="3071952" y="3326968"/>
+              <a:ext cx="1536065" cy="129539"/>
+            </a:xfrm>
+            <a:custGeom>
+              <a:avLst/>
+              <a:gdLst/>
+              <a:ahLst/>
+              <a:cxnLst/>
+              <a:rect l="l" t="t" r="r" b="b"/>
+              <a:pathLst>
+                <a:path w="1536064" h="129539" extrusionOk="0">
+                  <a:moveTo>
+                    <a:pt x="1535976" y="0"/>
+                  </a:moveTo>
+                  <a:lnTo>
+                    <a:pt x="0" y="0"/>
+                  </a:lnTo>
+                  <a:lnTo>
+                    <a:pt x="0" y="129032"/>
+                  </a:lnTo>
+                  <a:lnTo>
+                    <a:pt x="1535976" y="129032"/>
+                  </a:lnTo>
+                  <a:lnTo>
+                    <a:pt x="1535976" y="0"/>
+                  </a:lnTo>
+                  <a:close/>
+                </a:path>
+              </a:pathLst>
+            </a:custGeom>
+            <a:solidFill>
+              <a:srgbClr val="3333B2"/>
+            </a:solidFill>
+            <a:ln>
+              <a:noFill/>
+            </a:ln>
+          </p:spPr>
+          <p:txBody>
+            <a:bodyPr spcFirstLastPara="1" wrap="square" lIns="0" tIns="0" rIns="0" bIns="0" anchor="t" anchorCtr="0">
+              <a:noAutofit/>
+            </a:bodyPr>
+            <a:lstStyle/>
+            <a:p>
+              <a:pPr marL="0" lvl="0" indent="0" algn="l" rtl="0">
+                <a:spcBef>
+                  <a:spcPts val="0"/>
+                </a:spcBef>
+                <a:spcAft>
+                  <a:spcPts val="0"/>
+                </a:spcAft>
+                <a:buNone/>
+              </a:pPr>
+              <a:endParaRPr sz="1800"/>
+            </a:p>
+          </p:txBody>
+        </p:sp>
+      </p:grpSp>
+      <p:sp>
+        <p:nvSpPr>
+          <p:cNvPr id="99" name="Google Shape;99;p9"/>
+          <p:cNvSpPr txBox="1">
+            <a:spLocks noGrp="1"/>
+          </p:cNvSpPr>
+          <p:nvPr>
+            <p:ph type="ftr" idx="11"/>
+          </p:nvPr>
+        </p:nvSpPr>
+        <p:spPr>
+          <a:xfrm>
+            <a:off x="421944" y="3331252"/>
+            <a:ext cx="692150" cy="285961"/>
+          </a:xfrm>
+          <a:prstGeom prst="rect">
+            <a:avLst/>
+          </a:prstGeom>
+          <a:noFill/>
+          <a:ln>
+            <a:noFill/>
+          </a:ln>
+        </p:spPr>
+        <p:txBody>
+          <a:bodyPr spcFirstLastPara="1" wrap="square" lIns="0" tIns="8875" rIns="0" bIns="0" anchor="t" anchorCtr="0">
+            <a:spAutoFit/>
+          </a:bodyPr>
+          <a:lstStyle/>
+          <a:p>
+            <a:pPr marL="12700"/>
+            <a:r>
+              <a:rPr lang="en-US" dirty="0">
+                <a:latin typeface="Times New Roman" panose="02020603050405020304" pitchFamily="18" charset="0"/>
+                <a:cs typeface="Times New Roman" panose="02020603050405020304" pitchFamily="18" charset="0"/>
+              </a:rPr>
+              <a:t>Dept of Comp </a:t>
+            </a:r>
+            <a:r>
+              <a:rPr lang="en-US" dirty="0" err="1">
+                <a:latin typeface="Times New Roman" panose="02020603050405020304" pitchFamily="18" charset="0"/>
+                <a:cs typeface="Times New Roman" panose="02020603050405020304" pitchFamily="18" charset="0"/>
+              </a:rPr>
+              <a:t>Engg</a:t>
+            </a:r>
+            <a:endParaRPr lang="en-US" dirty="0">
+              <a:latin typeface="Times New Roman" panose="02020603050405020304" pitchFamily="18" charset="0"/>
+              <a:cs typeface="Times New Roman" panose="02020603050405020304" pitchFamily="18" charset="0"/>
+            </a:endParaRPr>
+          </a:p>
+          <a:p>
+            <a:pPr marL="12700" lvl="0"/>
+            <a:endParaRPr lang="en-US" dirty="0"/>
+          </a:p>
+          <a:p>
+            <a:pPr marL="12700" lvl="0" indent="0" algn="l" rtl="0">
+              <a:lnSpc>
+                <a:spcPct val="100000"/>
+              </a:lnSpc>
+              <a:spcBef>
+                <a:spcPts val="0"/>
+              </a:spcBef>
+              <a:spcAft>
+                <a:spcPts val="0"/>
+              </a:spcAft>
+              <a:buNone/>
+            </a:pPr>
+            <a:endParaRPr dirty="0"/>
+          </a:p>
+        </p:txBody>
+      </p:sp>
+      <p:sp>
+        <p:nvSpPr>
+          <p:cNvPr id="102" name="Google Shape;102;p9"/>
+          <p:cNvSpPr txBox="1">
+            <a:spLocks noGrp="1"/>
+          </p:cNvSpPr>
+          <p:nvPr>
+            <p:ph type="sldNum" idx="12"/>
+          </p:nvPr>
+        </p:nvSpPr>
+        <p:spPr>
+          <a:xfrm>
+            <a:off x="4275161" y="3331252"/>
+            <a:ext cx="266700" cy="101295"/>
+          </a:xfrm>
+          <a:prstGeom prst="rect">
+            <a:avLst/>
+          </a:prstGeom>
+          <a:noFill/>
+          <a:ln>
+            <a:noFill/>
+          </a:ln>
+        </p:spPr>
+        <p:txBody>
+          <a:bodyPr spcFirstLastPara="1" wrap="square" lIns="0" tIns="8875" rIns="0" bIns="0" anchor="t" anchorCtr="0">
+            <a:spAutoFit/>
+          </a:bodyPr>
+          <a:lstStyle/>
+          <a:p>
+            <a:pPr marL="38100" lvl="0" indent="0" algn="l" rtl="0">
+              <a:lnSpc>
+                <a:spcPct val="100000"/>
+              </a:lnSpc>
+              <a:spcBef>
+                <a:spcPts val="0"/>
+              </a:spcBef>
+              <a:spcAft>
+                <a:spcPts val="0"/>
+              </a:spcAft>
+              <a:buNone/>
+            </a:pPr>
+            <a:fld id="{00000000-1234-1234-1234-123412341234}" type="slidenum">
+              <a:rPr lang="en-US">
+                <a:latin typeface="Times New Roman" panose="02020603050405020304" pitchFamily="18" charset="0"/>
+                <a:cs typeface="Times New Roman" panose="02020603050405020304" pitchFamily="18" charset="0"/>
+              </a:rPr>
+              <a:t>35</a:t>
+            </a:fld>
+            <a:r>
+              <a:rPr lang="en-US" dirty="0">
+                <a:latin typeface="Times New Roman" panose="02020603050405020304" pitchFamily="18" charset="0"/>
+                <a:cs typeface="Times New Roman" panose="02020603050405020304" pitchFamily="18" charset="0"/>
+              </a:rPr>
+              <a:t> / 35</a:t>
             </a:r>
             <a:endParaRPr dirty="0">
               <a:latin typeface="Times New Roman" panose="02020603050405020304" pitchFamily="18" charset="0"/>
@@ -30830,7 +31544,7 @@
                 <a:latin typeface="Times New Roman" panose="02020603050405020304" pitchFamily="18" charset="0"/>
                 <a:cs typeface="Times New Roman" panose="02020603050405020304" pitchFamily="18" charset="0"/>
               </a:rPr>
-              <a:t> / 34</a:t>
+              <a:t> / 35</a:t>
             </a:r>
             <a:endParaRPr dirty="0">
               <a:latin typeface="Times New Roman" panose="02020603050405020304" pitchFamily="18" charset="0"/>
@@ -31516,7 +32230,7 @@
                 <a:latin typeface="Times New Roman" panose="02020603050405020304" pitchFamily="18" charset="0"/>
                 <a:cs typeface="Times New Roman" panose="02020603050405020304" pitchFamily="18" charset="0"/>
               </a:rPr>
-              <a:t> / 34</a:t>
+              <a:t> / 35</a:t>
             </a:r>
             <a:endParaRPr dirty="0">
               <a:latin typeface="Times New Roman" panose="02020603050405020304" pitchFamily="18" charset="0"/>
@@ -32229,7 +32943,7 @@
                 <a:latin typeface="Times New Roman" panose="02020603050405020304" pitchFamily="18" charset="0"/>
                 <a:cs typeface="Times New Roman" panose="02020603050405020304" pitchFamily="18" charset="0"/>
               </a:rPr>
-              <a:t> / 34</a:t>
+              <a:t> / 35</a:t>
             </a:r>
             <a:endParaRPr dirty="0">
               <a:latin typeface="Times New Roman" panose="02020603050405020304" pitchFamily="18" charset="0"/>
@@ -32962,7 +33676,7 @@
                 <a:latin typeface="Times New Roman" panose="02020603050405020304" pitchFamily="18" charset="0"/>
                 <a:cs typeface="Times New Roman" panose="02020603050405020304" pitchFamily="18" charset="0"/>
               </a:rPr>
-              <a:t> / 34</a:t>
+              <a:t> / 35</a:t>
             </a:r>
             <a:endParaRPr dirty="0">
               <a:latin typeface="Times New Roman" panose="02020603050405020304" pitchFamily="18" charset="0"/>
@@ -33708,7 +34422,7 @@
                 <a:latin typeface="Times New Roman" panose="02020603050405020304" pitchFamily="18" charset="0"/>
                 <a:cs typeface="Times New Roman" panose="02020603050405020304" pitchFamily="18" charset="0"/>
               </a:rPr>
-              <a:t> / 34</a:t>
+              <a:t> / 35</a:t>
             </a:r>
             <a:endParaRPr dirty="0">
               <a:latin typeface="Times New Roman" panose="02020603050405020304" pitchFamily="18" charset="0"/>
@@ -34421,7 +35135,7 @@
                 <a:latin typeface="Times New Roman" panose="02020603050405020304" pitchFamily="18" charset="0"/>
                 <a:cs typeface="Times New Roman" panose="02020603050405020304" pitchFamily="18" charset="0"/>
               </a:rPr>
-              <a:t> / 34</a:t>
+              <a:t> / 35</a:t>
             </a:r>
             <a:endParaRPr dirty="0">
               <a:latin typeface="Times New Roman" panose="02020603050405020304" pitchFamily="18" charset="0"/>

--- a/docs/PERCH_Project_Review.pptx
+++ b/docs/PERCH_Project_Review.pptx
@@ -15123,14 +15123,14 @@
               <a:buChar char="•"/>
             </a:pPr>
             <a:r>
-              <a:rPr lang="en-US" sz="1000" b="1" dirty="0">
+              <a:rPr lang="en-US" sz="950" b="1" dirty="0">
                 <a:latin typeface="Times New Roman" panose="02020603050405020304" pitchFamily="18" charset="0"/>
                 <a:cs typeface="Times New Roman" panose="02020603050405020304" pitchFamily="18" charset="0"/>
               </a:rPr>
               <a:t>We built the risky layer first, then the pipeline on top of it.</a:t>
             </a:r>
             <a:r>
-              <a:rPr lang="en-US" sz="1000" b="0" dirty="0">
+              <a:rPr lang="en-US" sz="950" b="0" dirty="0">
                 <a:latin typeface="Times New Roman" panose="02020603050405020304" pitchFamily="18" charset="0"/>
                 <a:cs typeface="Times New Roman" panose="02020603050405020304" pitchFamily="18" charset="0"/>
               </a:rPr>
@@ -15143,18 +15143,18 @@
               <a:buChar char="•"/>
             </a:pPr>
             <a:r>
-              <a:rPr lang="en-US" sz="1000" b="1" dirty="0">
+              <a:rPr lang="en-US" sz="950" b="1" dirty="0">
                 <a:latin typeface="Times New Roman" panose="02020603050405020304" pitchFamily="18" charset="0"/>
                 <a:cs typeface="Times New Roman" panose="02020603050405020304" pitchFamily="18" charset="0"/>
               </a:rPr>
               <a:t>OS layer, verified:</a:t>
             </a:r>
             <a:r>
-              <a:rPr lang="en-US" sz="1000" b="0" dirty="0">
-                <a:latin typeface="Times New Roman" panose="02020603050405020304" pitchFamily="18" charset="0"/>
-                <a:cs typeface="Times New Roman" panose="02020603050405020304" pitchFamily="18" charset="0"/>
-              </a:rPr>
-              <a:t> system-wide hotkey; selection read from other applications via UI Automation with clipboard fallback; region screenshot; panel docked beside the host window via GetForegroundWindow and GetWindowRect; focus restore and paste-back.</a:t>
+              <a:rPr lang="en-US" sz="950" b="0" dirty="0">
+                <a:latin typeface="Times New Roman" panose="02020603050405020304" pitchFamily="18" charset="0"/>
+                <a:cs typeface="Times New Roman" panose="02020603050405020304" pitchFamily="18" charset="0"/>
+              </a:rPr>
+              <a:t> system-wide hotkey; selection read from other applications via UI Automation with clipboard fallback; region screenshot; panel docked beside the host; focus restore and paste-back.</a:t>
             </a:r>
           </a:p>
           <a:p>
@@ -15163,18 +15163,18 @@
               <a:buChar char="•"/>
             </a:pPr>
             <a:r>
-              <a:rPr lang="en-US" sz="1000" b="1" dirty="0">
+              <a:rPr lang="en-US" sz="950" b="1" dirty="0">
                 <a:latin typeface="Times New Roman" panose="02020603050405020304" pitchFamily="18" charset="0"/>
                 <a:cs typeface="Times New Roman" panose="02020603050405020304" pitchFamily="18" charset="0"/>
               </a:rPr>
               <a:t>Agent layer, running:</a:t>
             </a:r>
             <a:r>
-              <a:rPr lang="en-US" sz="1000" b="0" dirty="0">
-                <a:latin typeface="Times New Roman" panose="02020603050405020304" pitchFamily="18" charset="0"/>
-                <a:cs typeface="Times New Roman" panose="02020603050405020304" pitchFamily="18" charset="0"/>
-              </a:rPr>
-              <a:t> six typed memory classes stored as Markdown with a SQLite index; intent and class routing; ranker; admission scorer; budget packer; model registry with local and cloud routes; and a tool surface covering web, files, documents, OCR and Python.</a:t>
+              <a:rPr lang="en-US" sz="950" b="0" dirty="0">
+                <a:latin typeface="Times New Roman" panose="02020603050405020304" pitchFamily="18" charset="0"/>
+                <a:cs typeface="Times New Roman" panose="02020603050405020304" pitchFamily="18" charset="0"/>
+              </a:rPr>
+              <a:t> six typed memory classes stored as Markdown with a SQLite index; intent and class routing; ranker; admission scorer; budget packer; model registry with local and cloud routes; and a tool surface covering web, files, documents, OCR and Python. The tool loop runs on the local model too, so the full agent works at zero cost.</a:t>
             </a:r>
           </a:p>
           <a:p>
@@ -15183,18 +15183,18 @@
               <a:buChar char="•"/>
             </a:pPr>
             <a:r>
-              <a:rPr lang="en-US" sz="1000" b="1" dirty="0">
-                <a:latin typeface="Times New Roman" panose="02020603050405020304" pitchFamily="18" charset="0"/>
-                <a:cs typeface="Times New Roman" panose="02020603050405020304" pitchFamily="18" charset="0"/>
-              </a:rPr>
-              <a:t>Verification:</a:t>
-            </a:r>
-            <a:r>
-              <a:rPr lang="en-US" sz="1000" b="0" dirty="0">
-                <a:latin typeface="Times New Roman" panose="02020603050405020304" pitchFamily="18" charset="0"/>
-                <a:cs typeface="Times New Roman" panose="02020603050405020304" pitchFamily="18" charset="0"/>
-              </a:rPr>
-              <a:t> 21 tests pass with no model, no GPU and no network. The ablation runs on a seeded memory set and prints every routing, ranking and admission decision.</a:t>
+              <a:rPr lang="en-US" sz="950" b="1" dirty="0">
+                <a:latin typeface="Times New Roman" panose="02020603050405020304" pitchFamily="18" charset="0"/>
+                <a:cs typeface="Times New Roman" panose="02020603050405020304" pitchFamily="18" charset="0"/>
+              </a:rPr>
+              <a:t>What the demo shows while it runs:</a:t>
+            </a:r>
+            <a:r>
+              <a:rPr lang="en-US" sz="950" b="0" dirty="0">
+                <a:latin typeface="Times New Roman" panose="02020603050405020304" pitchFamily="18" charset="0"/>
+                <a:cs typeface="Times New Roman" panose="02020603050405020304" pitchFamily="18" charset="0"/>
+              </a:rPr>
+              <a:t> answers stream token by token, and a live tracker lights up each pipeline stage in turn - route, rank, gate, pack, model - with the gate reporting what it admitted and dropped. It turns GREEN when it admits and RED when it abstains, because a deliberate refusal is the contribution working, not a failure.</a:t>
             </a:r>
           </a:p>
           <a:p>
@@ -15203,11 +15203,18 @@
               <a:buChar char="•"/>
             </a:pPr>
             <a:r>
-              <a:rPr lang="en-US" sz="1000" b="1" dirty="0">
-                <a:latin typeface="Times New Roman" panose="02020603050405020304" pitchFamily="18" charset="0"/>
-                <a:cs typeface="Times New Roman" panose="02020603050405020304" pitchFamily="18" charset="0"/>
-              </a:rPr>
-              <a:t>Nothing here needs a driver, a kernel hook, an OS modification or a special permission.</a:t>
+              <a:rPr lang="en-US" sz="950" b="1" dirty="0">
+                <a:latin typeface="Times New Roman" panose="02020603050405020304" pitchFamily="18" charset="0"/>
+                <a:cs typeface="Times New Roman" panose="02020603050405020304" pitchFamily="18" charset="0"/>
+              </a:rPr>
+              <a:t>Verification:</a:t>
+            </a:r>
+            <a:r>
+              <a:rPr lang="en-US" sz="950" b="0" dirty="0">
+                <a:latin typeface="Times New Roman" panose="02020603050405020304" pitchFamily="18" charset="0"/>
+                <a:cs typeface="Times New Roman" panose="02020603050405020304" pitchFamily="18" charset="0"/>
+              </a:rPr>
+              <a:t> 25 tests pass with no model, no GPU and no network. The ablation runs on a seeded memory set and prints every routing, ranking and admission decision.</a:t>
             </a:r>
           </a:p>
         </p:txBody>
@@ -28578,14 +28585,14 @@
               <a:buChar char="•"/>
             </a:pPr>
             <a:r>
-              <a:rPr lang="en-US" sz="950" b="1" dirty="0">
+              <a:rPr lang="en-US" sz="900" b="1" dirty="0">
                 <a:latin typeface="Times New Roman" panose="02020603050405020304" pitchFamily="18" charset="0"/>
                 <a:cs typeface="Times New Roman" panose="02020603050405020304" pitchFamily="18" charset="0"/>
               </a:rPr>
               <a:t>What we expect to show.</a:t>
             </a:r>
             <a:r>
-              <a:rPr lang="en-US" sz="950" b="0" dirty="0">
+              <a:rPr lang="en-US" sz="900" b="0" dirty="0">
                 <a:latin typeface="Times New Roman" panose="02020603050405020304" pitchFamily="18" charset="0"/>
                 <a:cs typeface="Times New Roman" panose="02020603050405020304" pitchFamily="18" charset="0"/>
               </a:rPr>
@@ -28598,18 +28605,18 @@
               <a:buChar char="•"/>
             </a:pPr>
             <a:r>
-              <a:rPr lang="en-US" sz="950" b="1" dirty="0">
-                <a:latin typeface="Times New Roman" panose="02020603050405020304" pitchFamily="18" charset="0"/>
-                <a:cs typeface="Times New Roman" panose="02020603050405020304" pitchFamily="18" charset="0"/>
-              </a:rPr>
-              <a:t>Known limitation - six classes is a design choice, not a derivation.</a:t>
-            </a:r>
-            <a:r>
-              <a:rPr lang="en-US" sz="950" b="0" dirty="0">
-                <a:latin typeface="Times New Roman" panose="02020603050405020304" pitchFamily="18" charset="0"/>
-                <a:cs typeface="Times New Roman" panose="02020603050405020304" pitchFamily="18" charset="0"/>
-              </a:rPr>
-              <a:t> The defence is that classes are a routing device and each one is a new failure mode, so the burden is on adding a seventh. And it is testable: E1 measures whether routing helps or hurts.</a:t>
+              <a:rPr lang="en-US" sz="900" b="1" dirty="0">
+                <a:latin typeface="Times New Roman" panose="02020603050405020304" pitchFamily="18" charset="0"/>
+                <a:cs typeface="Times New Roman" panose="02020603050405020304" pitchFamily="18" charset="0"/>
+              </a:rPr>
+              <a:t>Known limitation - the per-class floors are tuned, not fitted.</a:t>
+            </a:r>
+            <a:r>
+              <a:rPr lang="en-US" sz="900" b="0" dirty="0">
+                <a:latin typeface="Times New Roman" panose="02020603050405020304" pitchFamily="18" charset="0"/>
+                <a:cs typeface="Times New Roman" panose="02020603050405020304" pitchFamily="18" charset="0"/>
+              </a:rPr>
+              <a:t> Cosine means different things to different embedders - we measured unrelated text at 0.35-0.41 on a real model but near 0.10 on the fallback. Scores are rescaled against a measured per-backend baseline; the honest next step is fitting floors on held-out labelled data.</a:t>
             </a:r>
           </a:p>
           <a:p>
@@ -28618,18 +28625,18 @@
               <a:buChar char="•"/>
             </a:pPr>
             <a:r>
-              <a:rPr lang="en-US" sz="950" b="1" dirty="0">
-                <a:latin typeface="Times New Roman" panose="02020603050405020304" pitchFamily="18" charset="0"/>
-                <a:cs typeface="Times New Roman" panose="02020603050405020304" pitchFamily="18" charset="0"/>
-              </a:rPr>
-              <a:t>Known limitation - import depends on export formats we do not control.</a:t>
-            </a:r>
-            <a:r>
-              <a:rPr lang="en-US" sz="950" b="0" dirty="0">
-                <a:latin typeface="Times New Roman" panose="02020603050405020304" pitchFamily="18" charset="0"/>
-                <a:cs typeface="Times New Roman" panose="02020603050405020304" pitchFamily="18" charset="0"/>
-              </a:rPr>
-              <a:t> They are undocumented JSON that can change without notice. Parsers are isolated per platform and fail loudly, the extraction-prompt path works with no export at all, and the review screen means a broken parser produces nothing rather than garbage.</a:t>
+              <a:rPr lang="en-US" sz="900" b="1" dirty="0">
+                <a:latin typeface="Times New Roman" panose="02020603050405020304" pitchFamily="18" charset="0"/>
+                <a:cs typeface="Times New Roman" panose="02020603050405020304" pitchFamily="18" charset="0"/>
+              </a:rPr>
+              <a:t>Known limitation - six classes is a design choice, not a derivation.</a:t>
+            </a:r>
+            <a:r>
+              <a:rPr lang="en-US" sz="900" b="0" dirty="0">
+                <a:latin typeface="Times New Roman" panose="02020603050405020304" pitchFamily="18" charset="0"/>
+                <a:cs typeface="Times New Roman" panose="02020603050405020304" pitchFamily="18" charset="0"/>
+              </a:rPr>
+              <a:t> The defence is that classes are a routing device and each one is a new failure mode, so the burden is on adding a seventh. And it is testable: E1 measures whether routing helps or hurts.</a:t>
             </a:r>
           </a:p>
           <a:p>
@@ -28638,18 +28645,18 @@
               <a:buChar char="•"/>
             </a:pPr>
             <a:r>
-              <a:rPr lang="en-US" sz="950" b="1" dirty="0">
-                <a:latin typeface="Times New Roman" panose="02020603050405020304" pitchFamily="18" charset="0"/>
-                <a:cs typeface="Times New Roman" panose="02020603050405020304" pitchFamily="18" charset="0"/>
-              </a:rPr>
-              <a:t>Known limitation - UI Automation coverage varies by application.</a:t>
-            </a:r>
-            <a:r>
-              <a:rPr lang="en-US" sz="950" b="0" dirty="0">
-                <a:latin typeface="Times New Roman" panose="02020603050405020304" pitchFamily="18" charset="0"/>
-                <a:cs typeface="Times New Roman" panose="02020603050405020304" pitchFamily="18" charset="0"/>
-              </a:rPr>
-              <a:t> That is why the clipboard fallback exists and why the coverage table is a documented deliverable.</a:t>
+              <a:rPr lang="en-US" sz="900" b="1" dirty="0">
+                <a:latin typeface="Times New Roman" panose="02020603050405020304" pitchFamily="18" charset="0"/>
+                <a:cs typeface="Times New Roman" panose="02020603050405020304" pitchFamily="18" charset="0"/>
+              </a:rPr>
+              <a:t>Known limitation - import depends on export formats we do not control.</a:t>
+            </a:r>
+            <a:r>
+              <a:rPr lang="en-US" sz="900" b="0" dirty="0">
+                <a:latin typeface="Times New Roman" panose="02020603050405020304" pitchFamily="18" charset="0"/>
+                <a:cs typeface="Times New Roman" panose="02020603050405020304" pitchFamily="18" charset="0"/>
+              </a:rPr>
+              <a:t> They are undocumented JSON that can change without notice. Parsers are isolated per platform and fail loudly, the extraction-prompt path works with no export at all, and the review screen means a broken parser produces nothing rather than garbage.</a:t>
             </a:r>
           </a:p>
           <a:p>
@@ -28658,18 +28665,38 @@
               <a:buChar char="•"/>
             </a:pPr>
             <a:r>
-              <a:rPr lang="en-US" sz="950" b="1" dirty="0">
+              <a:rPr lang="en-US" sz="900" b="1" dirty="0">
+                <a:latin typeface="Times New Roman" panose="02020603050405020304" pitchFamily="18" charset="0"/>
+                <a:cs typeface="Times New Roman" panose="02020603050405020304" pitchFamily="18" charset="0"/>
+              </a:rPr>
+              <a:t>Known limitation - UI Automation coverage varies by application.</a:t>
+            </a:r>
+            <a:r>
+              <a:rPr lang="en-US" sz="900" b="0" dirty="0">
+                <a:latin typeface="Times New Roman" panose="02020603050405020304" pitchFamily="18" charset="0"/>
+                <a:cs typeface="Times New Roman" panose="02020603050405020304" pitchFamily="18" charset="0"/>
+              </a:rPr>
+              <a:t> Hence the clipboard fallback, and why the coverage table is a documented deliverable.</a:t>
+            </a:r>
+          </a:p>
+          <a:p>
+            <a:pPr marL="171450" lvl="1" indent="-171450" algn="l">
+              <a:buFont typeface="Arial" panose="020B0604020202020204" pitchFamily="34" charset="0"/>
+              <a:buChar char="•"/>
+            </a:pPr>
+            <a:r>
+              <a:rPr lang="en-US" sz="900" b="1" dirty="0">
                 <a:latin typeface="Times New Roman" panose="02020603050405020304" pitchFamily="18" charset="0"/>
                 <a:cs typeface="Times New Roman" panose="02020603050405020304" pitchFamily="18" charset="0"/>
               </a:rPr>
               <a:t>Practical risk:</a:t>
             </a:r>
             <a:r>
-              <a:rPr lang="en-US" sz="950" b="0" dirty="0">
-                <a:latin typeface="Times New Roman" panose="02020603050405020304" pitchFamily="18" charset="0"/>
-                <a:cs typeface="Times New Roman" panose="02020603050405020304" pitchFamily="18" charset="0"/>
-              </a:rPr>
-              <a:t> screen-reading behaviour can trip antivirus heuristics, so the installer must be signed and all capture must stay user-initiated.</a:t>
+              <a:rPr lang="en-US" sz="900" b="0" dirty="0">
+                <a:latin typeface="Times New Roman" panose="02020603050405020304" pitchFamily="18" charset="0"/>
+                <a:cs typeface="Times New Roman" panose="02020603050405020304" pitchFamily="18" charset="0"/>
+              </a:rPr>
+              <a:t> screen-reading behaviour can trip antivirus heuristics, so the installer must be signed and capture must stay user-initiated.</a:t>
             </a:r>
           </a:p>
         </p:txBody>
@@ -29362,7 +29389,7 @@
                 <a:latin typeface="Times New Roman" panose="02020603050405020304" pitchFamily="18" charset="0"/>
                 <a:cs typeface="Times New Roman" panose="02020603050405020304" pitchFamily="18" charset="0"/>
               </a:rPr>
-              <a:t> The OS layer runs. So does the pipeline: routing, ranking, admission, packing, tools, and 21 passing tests.</a:t>
+              <a:t> The OS layer runs. So does the pipeline: routing, ranking, admission, packing, tools, and 25 passing tests.</a:t>
             </a:r>
           </a:p>
           <a:p>
